--- a/pitch/routesignal-hackathon-pitch.pptx
+++ b/pitch/routesignal-hackathon-pitch.pptx
@@ -2,20 +2,20 @@
 <file path=ppt/presentation.xml><?xml version="1.0" encoding="utf-8"?>
 <p:presentation xmlns:p="http://schemas.openxmlformats.org/presentationml/2006/main">
   <p:sldMasterIdLst>
-    <p:sldMasterId xmlns:r="http://schemas.openxmlformats.org/officeDocument/2006/relationships" id="2147483648" r:id="R7d039925b3cb4970"/>
+    <p:sldMasterId xmlns:r="http://schemas.openxmlformats.org/officeDocument/2006/relationships" id="2147483648" r:id="R11c0ef667ef04f59"/>
   </p:sldMasterIdLst>
   <p:notesMasterIdLst>
-    <p:notesMasterId xmlns:r="http://schemas.openxmlformats.org/officeDocument/2006/relationships" r:id="R557fae539e554b15"/>
+    <p:notesMasterId xmlns:r="http://schemas.openxmlformats.org/officeDocument/2006/relationships" r:id="R8dd81e4fd9844cd1"/>
   </p:notesMasterIdLst>
   <p:sldIdLst>
-    <p:sldId xmlns:r="http://schemas.openxmlformats.org/officeDocument/2006/relationships" id="256" r:id="Rdfc9f50b00c348a9"/>
-    <p:sldId xmlns:r="http://schemas.openxmlformats.org/officeDocument/2006/relationships" id="257" r:id="R96db5870792b4480"/>
-    <p:sldId xmlns:r="http://schemas.openxmlformats.org/officeDocument/2006/relationships" id="258" r:id="R84239fcc54c24ebe"/>
-    <p:sldId xmlns:r="http://schemas.openxmlformats.org/officeDocument/2006/relationships" id="259" r:id="R8ce6ecce39444614"/>
-    <p:sldId xmlns:r="http://schemas.openxmlformats.org/officeDocument/2006/relationships" id="260" r:id="R28fc52f0dfdd4936"/>
-    <p:sldId xmlns:r="http://schemas.openxmlformats.org/officeDocument/2006/relationships" id="261" r:id="Rf82769f797484d02"/>
-    <p:sldId xmlns:r="http://schemas.openxmlformats.org/officeDocument/2006/relationships" id="262" r:id="Radae91d81a1843f2"/>
-    <p:sldId xmlns:r="http://schemas.openxmlformats.org/officeDocument/2006/relationships" id="263" r:id="R27256378f4b34941"/>
+    <p:sldId xmlns:r="http://schemas.openxmlformats.org/officeDocument/2006/relationships" id="256" r:id="Rcb894ee1e90d4e6c"/>
+    <p:sldId xmlns:r="http://schemas.openxmlformats.org/officeDocument/2006/relationships" id="257" r:id="R0b454a5993b245df"/>
+    <p:sldId xmlns:r="http://schemas.openxmlformats.org/officeDocument/2006/relationships" id="258" r:id="Re0778b2fcf314996"/>
+    <p:sldId xmlns:r="http://schemas.openxmlformats.org/officeDocument/2006/relationships" id="259" r:id="Re8c2160a96514d23"/>
+    <p:sldId xmlns:r="http://schemas.openxmlformats.org/officeDocument/2006/relationships" id="260" r:id="R6a94fdcb2fa24efb"/>
+    <p:sldId xmlns:r="http://schemas.openxmlformats.org/officeDocument/2006/relationships" id="261" r:id="R500dfd2d29754535"/>
+    <p:sldId xmlns:r="http://schemas.openxmlformats.org/officeDocument/2006/relationships" id="262" r:id="Rccb556179dda4e0c"/>
+    <p:sldId xmlns:r="http://schemas.openxmlformats.org/officeDocument/2006/relationships" id="263" r:id="R35f5a9d9717a494b"/>
   </p:sldIdLst>
   <p:sldSz cx="12192000" cy="6858000"/>
   <p:notesSz cx="6858000" cy="9144000"/>
@@ -1024,7 +1024,7 @@
   </p:cSld>
   <p:clrMap bg1="lt1" tx1="dk1" bg2="lt2" tx2="dk2" accent1="accent1" accent2="accent2" accent3="accent3" accent4="accent4" accent5="accent5" accent6="accent6" hlink="hlink" folHlink="folHlink"/>
   <p:sldLayoutIdLst>
-    <p:sldLayoutId xmlns:r="http://schemas.openxmlformats.org/officeDocument/2006/relationships" id="2147483649" r:id="R1bf35f229ed84f40"/>
+    <p:sldLayoutId xmlns:r="http://schemas.openxmlformats.org/officeDocument/2006/relationships" id="2147483649" r:id="Rd3a687b170af4c32"/>
   </p:sldLayoutIdLst>
   <p:txStyles>
     <p:titleStyle>
@@ -1334,7 +1334,7 @@
           <p:nvPr/>
         </p:nvPicPr>
         <p:blipFill>
-          <a:blip xmlns:r="http://schemas.openxmlformats.org/officeDocument/2006/relationships" xmlns:a="http://schemas.openxmlformats.org/drawingml/2006/main" r:embed="R707aa8ae8cb143b6"/>
+          <a:blip xmlns:r="http://schemas.openxmlformats.org/officeDocument/2006/relationships" xmlns:a="http://schemas.openxmlformats.org/drawingml/2006/main" r:embed="Rf593bb4497d142ca"/>
           <a:srcRect xmlns:a="http://schemas.openxmlformats.org/drawingml/2006/main" l="23814" t="0" r="23814" b="0"/>
           <a:stretch xmlns:a="http://schemas.openxmlformats.org/drawingml/2006/main">
             <a:fillRect l="0" t="0" r="0" b="0"/>
@@ -1355,7 +1355,7 @@
           <p:cNvPr id="2" name="">
             <a:extLst xmlns:a="http://schemas.openxmlformats.org/drawingml/2006/main">
               <a:ext uri="{FF2B5EF4-FFF2-40B4-BE49-F238E27FC236}">
-                <a16:creationId xmlns:a16="http://schemas.microsoft.com/office/drawing/2014/main" id="{8B326C4D-BAAA-44D7-AFA5-3183FAEBA265}"/>
+                <a16:creationId xmlns:a16="http://schemas.microsoft.com/office/drawing/2014/main" id="{955C4E98-0E2E-43B1-B7A1-4871B6829D7F}"/>
               </a:ext>
             </a:extLst>
           </p:cNvPr>
@@ -1391,7 +1391,7 @@
           <p:cNvPr id="3" name="">
             <a:extLst xmlns:a="http://schemas.openxmlformats.org/drawingml/2006/main">
               <a:ext uri="{FF2B5EF4-FFF2-40B4-BE49-F238E27FC236}">
-                <a16:creationId xmlns:a16="http://schemas.microsoft.com/office/drawing/2014/main" id="{C557E160-2446-442A-9B1F-28F6827F76D7}"/>
+                <a16:creationId xmlns:a16="http://schemas.microsoft.com/office/drawing/2014/main" id="{87715C3F-794C-4AE3-B9E0-CAC3135018EB}"/>
               </a:ext>
             </a:extLst>
           </p:cNvPr>
@@ -1423,7 +1423,7 @@
           <p:cNvPr id="4" name="">
             <a:extLst xmlns:a="http://schemas.openxmlformats.org/drawingml/2006/main">
               <a:ext uri="{FF2B5EF4-FFF2-40B4-BE49-F238E27FC236}">
-                <a16:creationId xmlns:a16="http://schemas.microsoft.com/office/drawing/2014/main" id="{53BB588F-6B04-488C-B9DE-B0EB03D35B6B}"/>
+                <a16:creationId xmlns:a16="http://schemas.microsoft.com/office/drawing/2014/main" id="{97BF86B7-AA53-4D59-A405-54BF52A2CA45}"/>
               </a:ext>
             </a:extLst>
           </p:cNvPr>
@@ -1486,7 +1486,7 @@
           <p:cNvPr id="5" name="">
             <a:extLst xmlns:a="http://schemas.openxmlformats.org/drawingml/2006/main">
               <a:ext uri="{FF2B5EF4-FFF2-40B4-BE49-F238E27FC236}">
-                <a16:creationId xmlns:a16="http://schemas.microsoft.com/office/drawing/2014/main" id="{27604184-5798-46CE-B538-BE72AB0A7A5B}"/>
+                <a16:creationId xmlns:a16="http://schemas.microsoft.com/office/drawing/2014/main" id="{68D7D5B7-AF99-4183-B135-B7DDB6FCEA3C}"/>
               </a:ext>
             </a:extLst>
           </p:cNvPr>
@@ -1553,7 +1553,7 @@
           <p:cNvPr id="6" name="">
             <a:extLst xmlns:a="http://schemas.openxmlformats.org/drawingml/2006/main">
               <a:ext uri="{FF2B5EF4-FFF2-40B4-BE49-F238E27FC236}">
-                <a16:creationId xmlns:a16="http://schemas.microsoft.com/office/drawing/2014/main" id="{0094A1A5-4917-4247-A0B8-E4AD5B4DA2C5}"/>
+                <a16:creationId xmlns:a16="http://schemas.microsoft.com/office/drawing/2014/main" id="{34C9ED30-4536-4306-8F6D-85631D2385B6}"/>
               </a:ext>
             </a:extLst>
           </p:cNvPr>
@@ -1620,7 +1620,7 @@
           <p:cNvPr id="7" name="">
             <a:extLst xmlns:a="http://schemas.openxmlformats.org/drawingml/2006/main">
               <a:ext uri="{FF2B5EF4-FFF2-40B4-BE49-F238E27FC236}">
-                <a16:creationId xmlns:a16="http://schemas.microsoft.com/office/drawing/2014/main" id="{6164A07E-10A8-4489-BCA2-27F3082D29A8}"/>
+                <a16:creationId xmlns:a16="http://schemas.microsoft.com/office/drawing/2014/main" id="{064A4A85-7075-482E-AC70-49C6CB6D6A05}"/>
               </a:ext>
             </a:extLst>
           </p:cNvPr>
@@ -1687,7 +1687,7 @@
           <p:cNvPr id="8" name="">
             <a:extLst xmlns:a="http://schemas.openxmlformats.org/drawingml/2006/main">
               <a:ext uri="{FF2B5EF4-FFF2-40B4-BE49-F238E27FC236}">
-                <a16:creationId xmlns:a16="http://schemas.microsoft.com/office/drawing/2014/main" id="{5D4C8126-DE17-40A3-8269-CA8F47B06829}"/>
+                <a16:creationId xmlns:a16="http://schemas.microsoft.com/office/drawing/2014/main" id="{926154C2-E80E-4E56-8497-1D5DC2A15608}"/>
               </a:ext>
             </a:extLst>
           </p:cNvPr>
@@ -1750,7 +1750,7 @@
           <p:cNvPr id="9" name="">
             <a:extLst xmlns:a="http://schemas.openxmlformats.org/drawingml/2006/main">
               <a:ext uri="{FF2B5EF4-FFF2-40B4-BE49-F238E27FC236}">
-                <a16:creationId xmlns:a16="http://schemas.microsoft.com/office/drawing/2014/main" id="{171E162B-0499-45DD-9CF8-333CFDE6B5E4}"/>
+                <a16:creationId xmlns:a16="http://schemas.microsoft.com/office/drawing/2014/main" id="{55F1720D-C129-4609-B99F-358572946F5F}"/>
               </a:ext>
             </a:extLst>
           </p:cNvPr>
@@ -1817,7 +1817,7 @@
           <p:cNvPr id="10" name="">
             <a:extLst xmlns:a="http://schemas.openxmlformats.org/drawingml/2006/main">
               <a:ext uri="{FF2B5EF4-FFF2-40B4-BE49-F238E27FC236}">
-                <a16:creationId xmlns:a16="http://schemas.microsoft.com/office/drawing/2014/main" id="{78F3BE71-D979-4253-8FC3-263579DDC51B}"/>
+                <a16:creationId xmlns:a16="http://schemas.microsoft.com/office/drawing/2014/main" id="{A89650A4-0019-4861-AE17-1D78D74055D8}"/>
               </a:ext>
             </a:extLst>
           </p:cNvPr>
@@ -1880,7 +1880,7 @@
           <p:cNvPr id="11" name="">
             <a:extLst xmlns:a="http://schemas.openxmlformats.org/drawingml/2006/main">
               <a:ext uri="{FF2B5EF4-FFF2-40B4-BE49-F238E27FC236}">
-                <a16:creationId xmlns:a16="http://schemas.microsoft.com/office/drawing/2014/main" id="{B9F08DFF-A315-4BD9-BFDA-C62EEF35FD51}"/>
+                <a16:creationId xmlns:a16="http://schemas.microsoft.com/office/drawing/2014/main" id="{42F8EC8F-12D6-4ECF-8696-9BF3B89F2455}"/>
               </a:ext>
             </a:extLst>
           </p:cNvPr>
@@ -1947,7 +1947,7 @@
           <p:cNvPr id="12" name="">
             <a:extLst xmlns:a="http://schemas.openxmlformats.org/drawingml/2006/main">
               <a:ext uri="{FF2B5EF4-FFF2-40B4-BE49-F238E27FC236}">
-                <a16:creationId xmlns:a16="http://schemas.microsoft.com/office/drawing/2014/main" id="{7726DB85-1E29-48F4-A062-EC4E1536F296}"/>
+                <a16:creationId xmlns:a16="http://schemas.microsoft.com/office/drawing/2014/main" id="{8CD6F7FC-2505-4E22-A6C9-96B21A1BC98E}"/>
               </a:ext>
             </a:extLst>
           </p:cNvPr>
@@ -2010,7 +2010,7 @@
           <p:cNvPr id="13" name="">
             <a:extLst xmlns:a="http://schemas.openxmlformats.org/drawingml/2006/main">
               <a:ext uri="{FF2B5EF4-FFF2-40B4-BE49-F238E27FC236}">
-                <a16:creationId xmlns:a16="http://schemas.microsoft.com/office/drawing/2014/main" id="{041EDA54-3EA4-45F3-878E-F1A981F719CA}"/>
+                <a16:creationId xmlns:a16="http://schemas.microsoft.com/office/drawing/2014/main" id="{0877BF8E-C379-431A-BD19-E1F3D8B40DB5}"/>
               </a:ext>
             </a:extLst>
           </p:cNvPr>
@@ -2077,7 +2077,7 @@
           <p:cNvPr id="14" name="">
             <a:extLst xmlns:a="http://schemas.openxmlformats.org/drawingml/2006/main">
               <a:ext uri="{FF2B5EF4-FFF2-40B4-BE49-F238E27FC236}">
-                <a16:creationId xmlns:a16="http://schemas.microsoft.com/office/drawing/2014/main" id="{5C0930A8-10B9-48C5-B373-2CF1CB0A9B5D}"/>
+                <a16:creationId xmlns:a16="http://schemas.microsoft.com/office/drawing/2014/main" id="{28B45F79-5FFC-46D7-B38B-5303DB271B40}"/>
               </a:ext>
             </a:extLst>
           </p:cNvPr>
@@ -2109,7 +2109,7 @@
           <p:cNvPr id="15" name="">
             <a:extLst xmlns:a="http://schemas.openxmlformats.org/drawingml/2006/main">
               <a:ext uri="{FF2B5EF4-FFF2-40B4-BE49-F238E27FC236}">
-                <a16:creationId xmlns:a16="http://schemas.microsoft.com/office/drawing/2014/main" id="{452068E9-E416-411A-B863-BCE150158B8F}"/>
+                <a16:creationId xmlns:a16="http://schemas.microsoft.com/office/drawing/2014/main" id="{DD530DCE-77AD-4D0C-8411-A2E4659B2136}"/>
               </a:ext>
             </a:extLst>
           </p:cNvPr>
@@ -2172,7 +2172,7 @@
           <p:cNvPr id="16" name="">
             <a:extLst xmlns:a="http://schemas.openxmlformats.org/drawingml/2006/main">
               <a:ext uri="{FF2B5EF4-FFF2-40B4-BE49-F238E27FC236}">
-                <a16:creationId xmlns:a16="http://schemas.microsoft.com/office/drawing/2014/main" id="{ABD89EFA-C50F-47B5-8251-543F2EE27E81}"/>
+                <a16:creationId xmlns:a16="http://schemas.microsoft.com/office/drawing/2014/main" id="{17341A16-C8F7-4BB5-98F9-0D57204A984F}"/>
               </a:ext>
             </a:extLst>
           </p:cNvPr>
@@ -2233,7 +2233,7 @@
     </p:spTree>
     <p:extLst>
       <p:ext uri="{BB962C8B-B14F-4D97-AF65-F5344CB8AC3E}">
-        <p14:creationId xmlns:p14="http://schemas.microsoft.com/office/powerpoint/2010/main" val="2135877381"/>
+        <p14:creationId xmlns:p14="http://schemas.microsoft.com/office/powerpoint/2010/main" val="1543227665"/>
       </p:ext>
     </p:extLst>
   </p:cSld>
@@ -2264,7 +2264,7 @@
           <p:cNvPr id="1" name="">
             <a:extLst xmlns:a="http://schemas.openxmlformats.org/drawingml/2006/main">
               <a:ext uri="{FF2B5EF4-FFF2-40B4-BE49-F238E27FC236}">
-                <a16:creationId xmlns:a16="http://schemas.microsoft.com/office/drawing/2014/main" id="{D90B87BA-A528-4C98-956C-D253A6EFA781}"/>
+                <a16:creationId xmlns:a16="http://schemas.microsoft.com/office/drawing/2014/main" id="{7E06280A-2C87-4922-BBA1-17395B82162C}"/>
               </a:ext>
             </a:extLst>
           </p:cNvPr>
@@ -2327,7 +2327,7 @@
           <p:cNvPr id="2" name="">
             <a:extLst xmlns:a="http://schemas.openxmlformats.org/drawingml/2006/main">
               <a:ext uri="{FF2B5EF4-FFF2-40B4-BE49-F238E27FC236}">
-                <a16:creationId xmlns:a16="http://schemas.microsoft.com/office/drawing/2014/main" id="{7E85E226-6EE8-4CD2-94D0-E9B8402074A1}"/>
+                <a16:creationId xmlns:a16="http://schemas.microsoft.com/office/drawing/2014/main" id="{D3EF07DE-CEF2-4C0B-A1C5-D11F67DB833A}"/>
               </a:ext>
             </a:extLst>
           </p:cNvPr>
@@ -2394,7 +2394,7 @@
           <p:cNvPr id="3" name="">
             <a:extLst xmlns:a="http://schemas.openxmlformats.org/drawingml/2006/main">
               <a:ext uri="{FF2B5EF4-FFF2-40B4-BE49-F238E27FC236}">
-                <a16:creationId xmlns:a16="http://schemas.microsoft.com/office/drawing/2014/main" id="{45A77D2C-F81C-409E-B98F-6BEE878029FA}"/>
+                <a16:creationId xmlns:a16="http://schemas.microsoft.com/office/drawing/2014/main" id="{B3C96CCF-B821-4BAC-91F6-B7FFF7769EF1}"/>
               </a:ext>
             </a:extLst>
           </p:cNvPr>
@@ -2461,7 +2461,7 @@
           <p:cNvPr id="4" name="">
             <a:extLst xmlns:a="http://schemas.openxmlformats.org/drawingml/2006/main">
               <a:ext uri="{FF2B5EF4-FFF2-40B4-BE49-F238E27FC236}">
-                <a16:creationId xmlns:a16="http://schemas.microsoft.com/office/drawing/2014/main" id="{2844F322-4E01-4D62-A47B-6CD71DA4334E}"/>
+                <a16:creationId xmlns:a16="http://schemas.microsoft.com/office/drawing/2014/main" id="{B9A4366A-7909-4DAD-BB47-4657A65DAA6C}"/>
               </a:ext>
             </a:extLst>
           </p:cNvPr>
@@ -2495,7 +2495,7 @@
           <p:cNvPr id="5" name="">
             <a:extLst xmlns:a="http://schemas.openxmlformats.org/drawingml/2006/main">
               <a:ext uri="{FF2B5EF4-FFF2-40B4-BE49-F238E27FC236}">
-                <a16:creationId xmlns:a16="http://schemas.microsoft.com/office/drawing/2014/main" id="{467B50AD-F034-444F-BF62-F19E7CF87270}"/>
+                <a16:creationId xmlns:a16="http://schemas.microsoft.com/office/drawing/2014/main" id="{D21240EF-1F82-46F2-AA5D-DF1E662709F1}"/>
               </a:ext>
             </a:extLst>
           </p:cNvPr>
@@ -2529,7 +2529,7 @@
           <p:cNvPr id="6" name="">
             <a:extLst xmlns:a="http://schemas.openxmlformats.org/drawingml/2006/main">
               <a:ext uri="{FF2B5EF4-FFF2-40B4-BE49-F238E27FC236}">
-                <a16:creationId xmlns:a16="http://schemas.microsoft.com/office/drawing/2014/main" id="{359F9712-020F-4F69-AF17-45911142454E}"/>
+                <a16:creationId xmlns:a16="http://schemas.microsoft.com/office/drawing/2014/main" id="{64B3B270-CE01-429E-A5C4-A792DE5B2E7F}"/>
               </a:ext>
             </a:extLst>
           </p:cNvPr>
@@ -2563,7 +2563,7 @@
           <p:cNvPr id="7" name="">
             <a:extLst xmlns:a="http://schemas.openxmlformats.org/drawingml/2006/main">
               <a:ext uri="{FF2B5EF4-FFF2-40B4-BE49-F238E27FC236}">
-                <a16:creationId xmlns:a16="http://schemas.microsoft.com/office/drawing/2014/main" id="{804FE434-AB8D-47B7-82C1-A60ACC13FE38}"/>
+                <a16:creationId xmlns:a16="http://schemas.microsoft.com/office/drawing/2014/main" id="{E0977D2B-1997-468F-AAF8-F65A1DFDB3AB}"/>
               </a:ext>
             </a:extLst>
           </p:cNvPr>
@@ -2597,7 +2597,7 @@
           <p:cNvPr id="8" name="">
             <a:extLst xmlns:a="http://schemas.openxmlformats.org/drawingml/2006/main">
               <a:ext uri="{FF2B5EF4-FFF2-40B4-BE49-F238E27FC236}">
-                <a16:creationId xmlns:a16="http://schemas.microsoft.com/office/drawing/2014/main" id="{AF3A91E0-1B00-4A52-A93D-AA2A90724750}"/>
+                <a16:creationId xmlns:a16="http://schemas.microsoft.com/office/drawing/2014/main" id="{E278BC12-1E23-465C-89FB-F0B4F5A4A046}"/>
               </a:ext>
             </a:extLst>
           </p:cNvPr>
@@ -2631,7 +2631,7 @@
           <p:cNvPr id="9" name="">
             <a:extLst xmlns:a="http://schemas.openxmlformats.org/drawingml/2006/main">
               <a:ext uri="{FF2B5EF4-FFF2-40B4-BE49-F238E27FC236}">
-                <a16:creationId xmlns:a16="http://schemas.microsoft.com/office/drawing/2014/main" id="{57E7613F-9FB4-4ABF-B309-A7987F56BE73}"/>
+                <a16:creationId xmlns:a16="http://schemas.microsoft.com/office/drawing/2014/main" id="{02325945-6097-4985-9526-5F349B3F5CA2}"/>
               </a:ext>
             </a:extLst>
           </p:cNvPr>
@@ -2665,7 +2665,7 @@
           <p:cNvPr id="10" name="">
             <a:extLst xmlns:a="http://schemas.openxmlformats.org/drawingml/2006/main">
               <a:ext uri="{FF2B5EF4-FFF2-40B4-BE49-F238E27FC236}">
-                <a16:creationId xmlns:a16="http://schemas.microsoft.com/office/drawing/2014/main" id="{F193F623-BE4F-48A4-989C-70FA8DA2571E}"/>
+                <a16:creationId xmlns:a16="http://schemas.microsoft.com/office/drawing/2014/main" id="{B3A4EBAE-C020-4213-946C-F506EC119EB9}"/>
               </a:ext>
             </a:extLst>
           </p:cNvPr>
@@ -2699,7 +2699,7 @@
           <p:cNvPr id="11" name="">
             <a:extLst xmlns:a="http://schemas.openxmlformats.org/drawingml/2006/main">
               <a:ext uri="{FF2B5EF4-FFF2-40B4-BE49-F238E27FC236}">
-                <a16:creationId xmlns:a16="http://schemas.microsoft.com/office/drawing/2014/main" id="{98BC5449-C0D5-4671-9178-67319FE28996}"/>
+                <a16:creationId xmlns:a16="http://schemas.microsoft.com/office/drawing/2014/main" id="{DD901E1C-DF42-44BB-8472-435C3E2187BA}"/>
               </a:ext>
             </a:extLst>
           </p:cNvPr>
@@ -2733,7 +2733,7 @@
           <p:cNvPr id="12" name="">
             <a:extLst xmlns:a="http://schemas.openxmlformats.org/drawingml/2006/main">
               <a:ext uri="{FF2B5EF4-FFF2-40B4-BE49-F238E27FC236}">
-                <a16:creationId xmlns:a16="http://schemas.microsoft.com/office/drawing/2014/main" id="{EE7A35F1-D6ED-4807-A677-FD47C9E4B1C2}"/>
+                <a16:creationId xmlns:a16="http://schemas.microsoft.com/office/drawing/2014/main" id="{D9572B43-EDA8-4E5C-9AD5-6B8BA5AB1953}"/>
               </a:ext>
             </a:extLst>
           </p:cNvPr>
@@ -2767,7 +2767,7 @@
           <p:cNvPr id="13" name="">
             <a:extLst xmlns:a="http://schemas.openxmlformats.org/drawingml/2006/main">
               <a:ext uri="{FF2B5EF4-FFF2-40B4-BE49-F238E27FC236}">
-                <a16:creationId xmlns:a16="http://schemas.microsoft.com/office/drawing/2014/main" id="{D586F213-D8EB-49D7-9AF6-8F9B4F0E396F}"/>
+                <a16:creationId xmlns:a16="http://schemas.microsoft.com/office/drawing/2014/main" id="{9BA190C8-4A3D-4F8A-8A7B-535605B4AA97}"/>
               </a:ext>
             </a:extLst>
           </p:cNvPr>
@@ -2801,7 +2801,7 @@
           <p:cNvPr id="14" name="">
             <a:extLst xmlns:a="http://schemas.openxmlformats.org/drawingml/2006/main">
               <a:ext uri="{FF2B5EF4-FFF2-40B4-BE49-F238E27FC236}">
-                <a16:creationId xmlns:a16="http://schemas.microsoft.com/office/drawing/2014/main" id="{0E403C63-189C-4EC7-ADF1-22B5D87AD170}"/>
+                <a16:creationId xmlns:a16="http://schemas.microsoft.com/office/drawing/2014/main" id="{3091E2DC-D8B0-4C5F-82A9-923732403204}"/>
               </a:ext>
             </a:extLst>
           </p:cNvPr>
@@ -2835,7 +2835,7 @@
           <p:cNvPr id="15" name="">
             <a:extLst xmlns:a="http://schemas.openxmlformats.org/drawingml/2006/main">
               <a:ext uri="{FF2B5EF4-FFF2-40B4-BE49-F238E27FC236}">
-                <a16:creationId xmlns:a16="http://schemas.microsoft.com/office/drawing/2014/main" id="{3D5C8622-18DD-4211-AFFF-A525E6AA06B4}"/>
+                <a16:creationId xmlns:a16="http://schemas.microsoft.com/office/drawing/2014/main" id="{7C67AED0-B7BA-4CF9-B5C1-1B111053FF86}"/>
               </a:ext>
             </a:extLst>
           </p:cNvPr>
@@ -2869,7 +2869,7 @@
           <p:cNvPr id="16" name="">
             <a:extLst xmlns:a="http://schemas.openxmlformats.org/drawingml/2006/main">
               <a:ext uri="{FF2B5EF4-FFF2-40B4-BE49-F238E27FC236}">
-                <a16:creationId xmlns:a16="http://schemas.microsoft.com/office/drawing/2014/main" id="{0C7B9F0B-E466-437A-9E6E-538652C9E63A}"/>
+                <a16:creationId xmlns:a16="http://schemas.microsoft.com/office/drawing/2014/main" id="{3E990B68-B8A9-418F-A424-88AD9A5AA310}"/>
               </a:ext>
             </a:extLst>
           </p:cNvPr>
@@ -2903,7 +2903,7 @@
           <p:cNvPr id="17" name="">
             <a:extLst xmlns:a="http://schemas.openxmlformats.org/drawingml/2006/main">
               <a:ext uri="{FF2B5EF4-FFF2-40B4-BE49-F238E27FC236}">
-                <a16:creationId xmlns:a16="http://schemas.microsoft.com/office/drawing/2014/main" id="{EA235E05-82C8-4650-A837-BEBED14B6EAB}"/>
+                <a16:creationId xmlns:a16="http://schemas.microsoft.com/office/drawing/2014/main" id="{5CD0BDBC-3F16-40D1-B060-AC504DC7EE78}"/>
               </a:ext>
             </a:extLst>
           </p:cNvPr>
@@ -2937,7 +2937,7 @@
           <p:cNvPr id="18" name="">
             <a:extLst xmlns:a="http://schemas.openxmlformats.org/drawingml/2006/main">
               <a:ext uri="{FF2B5EF4-FFF2-40B4-BE49-F238E27FC236}">
-                <a16:creationId xmlns:a16="http://schemas.microsoft.com/office/drawing/2014/main" id="{CD6EA462-8AE2-461D-A2A4-99196C71AC3B}"/>
+                <a16:creationId xmlns:a16="http://schemas.microsoft.com/office/drawing/2014/main" id="{5D6502B3-DBF1-41A6-B30F-7B566E0EACDF}"/>
               </a:ext>
             </a:extLst>
           </p:cNvPr>
@@ -2971,7 +2971,7 @@
           <p:cNvPr id="19" name="">
             <a:extLst xmlns:a="http://schemas.openxmlformats.org/drawingml/2006/main">
               <a:ext uri="{FF2B5EF4-FFF2-40B4-BE49-F238E27FC236}">
-                <a16:creationId xmlns:a16="http://schemas.microsoft.com/office/drawing/2014/main" id="{1C738044-6360-4752-8735-5E4FC7C1BB28}"/>
+                <a16:creationId xmlns:a16="http://schemas.microsoft.com/office/drawing/2014/main" id="{1190D16F-B28E-48EE-B7F2-4204A0645E13}"/>
               </a:ext>
             </a:extLst>
           </p:cNvPr>
@@ -3005,7 +3005,7 @@
           <p:cNvPr id="20" name="">
             <a:extLst xmlns:a="http://schemas.openxmlformats.org/drawingml/2006/main">
               <a:ext uri="{FF2B5EF4-FFF2-40B4-BE49-F238E27FC236}">
-                <a16:creationId xmlns:a16="http://schemas.microsoft.com/office/drawing/2014/main" id="{89AC5579-3A3A-4625-9D13-6DE99665B93D}"/>
+                <a16:creationId xmlns:a16="http://schemas.microsoft.com/office/drawing/2014/main" id="{E1C87DB9-1D12-46ED-B2F0-13F0120D90C3}"/>
               </a:ext>
             </a:extLst>
           </p:cNvPr>
@@ -3039,7 +3039,7 @@
           <p:cNvPr id="21" name="">
             <a:extLst xmlns:a="http://schemas.openxmlformats.org/drawingml/2006/main">
               <a:ext uri="{FF2B5EF4-FFF2-40B4-BE49-F238E27FC236}">
-                <a16:creationId xmlns:a16="http://schemas.microsoft.com/office/drawing/2014/main" id="{1E6F7FF2-70E1-4E25-BFA9-59D2369472DB}"/>
+                <a16:creationId xmlns:a16="http://schemas.microsoft.com/office/drawing/2014/main" id="{8370DD99-0214-4599-9F63-BEDBD848343F}"/>
               </a:ext>
             </a:extLst>
           </p:cNvPr>
@@ -3073,7 +3073,7 @@
           <p:cNvPr id="22" name="">
             <a:extLst xmlns:a="http://schemas.openxmlformats.org/drawingml/2006/main">
               <a:ext uri="{FF2B5EF4-FFF2-40B4-BE49-F238E27FC236}">
-                <a16:creationId xmlns:a16="http://schemas.microsoft.com/office/drawing/2014/main" id="{FD4FC91A-FE8A-4635-91C4-C99BE37FD9B4}"/>
+                <a16:creationId xmlns:a16="http://schemas.microsoft.com/office/drawing/2014/main" id="{42BC0F0D-2545-4EAC-8429-56F969356AEF}"/>
               </a:ext>
             </a:extLst>
           </p:cNvPr>
@@ -3107,7 +3107,7 @@
           <p:cNvPr id="23" name="">
             <a:extLst xmlns:a="http://schemas.openxmlformats.org/drawingml/2006/main">
               <a:ext uri="{FF2B5EF4-FFF2-40B4-BE49-F238E27FC236}">
-                <a16:creationId xmlns:a16="http://schemas.microsoft.com/office/drawing/2014/main" id="{746B48B0-0963-4A0A-8B51-83F8BA799C63}"/>
+                <a16:creationId xmlns:a16="http://schemas.microsoft.com/office/drawing/2014/main" id="{DBCAD59F-2EA1-4F07-B8EC-4E5C692FFB8D}"/>
               </a:ext>
             </a:extLst>
           </p:cNvPr>
@@ -3141,7 +3141,7 @@
           <p:cNvPr id="24" name="">
             <a:extLst xmlns:a="http://schemas.openxmlformats.org/drawingml/2006/main">
               <a:ext uri="{FF2B5EF4-FFF2-40B4-BE49-F238E27FC236}">
-                <a16:creationId xmlns:a16="http://schemas.microsoft.com/office/drawing/2014/main" id="{D88F7024-C209-478F-B882-AA092A6375E2}"/>
+                <a16:creationId xmlns:a16="http://schemas.microsoft.com/office/drawing/2014/main" id="{982FA721-515A-4E4F-ACE2-C8EF185AAB61}"/>
               </a:ext>
             </a:extLst>
           </p:cNvPr>
@@ -3175,7 +3175,7 @@
           <p:cNvPr id="25" name="">
             <a:extLst xmlns:a="http://schemas.openxmlformats.org/drawingml/2006/main">
               <a:ext uri="{FF2B5EF4-FFF2-40B4-BE49-F238E27FC236}">
-                <a16:creationId xmlns:a16="http://schemas.microsoft.com/office/drawing/2014/main" id="{5F441E6B-46EE-4B2F-BD4B-130008486B74}"/>
+                <a16:creationId xmlns:a16="http://schemas.microsoft.com/office/drawing/2014/main" id="{7AAC41C3-BE1D-4B90-B448-4461E7B1D1D1}"/>
               </a:ext>
             </a:extLst>
           </p:cNvPr>
@@ -3209,7 +3209,7 @@
           <p:cNvPr id="26" name="">
             <a:extLst xmlns:a="http://schemas.openxmlformats.org/drawingml/2006/main">
               <a:ext uri="{FF2B5EF4-FFF2-40B4-BE49-F238E27FC236}">
-                <a16:creationId xmlns:a16="http://schemas.microsoft.com/office/drawing/2014/main" id="{BA09374B-4000-4B51-92BD-630F623728CB}"/>
+                <a16:creationId xmlns:a16="http://schemas.microsoft.com/office/drawing/2014/main" id="{080C4B3D-6F43-409F-8946-785CD6AE5FCA}"/>
               </a:ext>
             </a:extLst>
           </p:cNvPr>
@@ -3243,7 +3243,7 @@
           <p:cNvPr id="27" name="">
             <a:extLst xmlns:a="http://schemas.openxmlformats.org/drawingml/2006/main">
               <a:ext uri="{FF2B5EF4-FFF2-40B4-BE49-F238E27FC236}">
-                <a16:creationId xmlns:a16="http://schemas.microsoft.com/office/drawing/2014/main" id="{331991E1-9A25-4FA9-BD06-E534A1A0D25D}"/>
+                <a16:creationId xmlns:a16="http://schemas.microsoft.com/office/drawing/2014/main" id="{4AD55E3A-90F4-4EB2-8F66-70B159CCFDFF}"/>
               </a:ext>
             </a:extLst>
           </p:cNvPr>
@@ -3277,7 +3277,7 @@
           <p:cNvPr id="28" name="">
             <a:extLst xmlns:a="http://schemas.openxmlformats.org/drawingml/2006/main">
               <a:ext uri="{FF2B5EF4-FFF2-40B4-BE49-F238E27FC236}">
-                <a16:creationId xmlns:a16="http://schemas.microsoft.com/office/drawing/2014/main" id="{198A1916-C0F5-42CF-A26D-57457CAA8C5E}"/>
+                <a16:creationId xmlns:a16="http://schemas.microsoft.com/office/drawing/2014/main" id="{1D37AC29-6E7E-4935-9C34-C4389F1076E1}"/>
               </a:ext>
             </a:extLst>
           </p:cNvPr>
@@ -3311,7 +3311,7 @@
           <p:cNvPr id="29" name="">
             <a:extLst xmlns:a="http://schemas.openxmlformats.org/drawingml/2006/main">
               <a:ext uri="{FF2B5EF4-FFF2-40B4-BE49-F238E27FC236}">
-                <a16:creationId xmlns:a16="http://schemas.microsoft.com/office/drawing/2014/main" id="{F583954A-AE28-45C7-B3D0-3F0CA817AD30}"/>
+                <a16:creationId xmlns:a16="http://schemas.microsoft.com/office/drawing/2014/main" id="{F66C3B70-338B-4354-8517-7AE451DFE5AE}"/>
               </a:ext>
             </a:extLst>
           </p:cNvPr>
@@ -3345,7 +3345,7 @@
           <p:cNvPr id="30" name="">
             <a:extLst xmlns:a="http://schemas.openxmlformats.org/drawingml/2006/main">
               <a:ext uri="{FF2B5EF4-FFF2-40B4-BE49-F238E27FC236}">
-                <a16:creationId xmlns:a16="http://schemas.microsoft.com/office/drawing/2014/main" id="{DCCD953C-C3FA-4E24-B18F-CE7C90B77AB9}"/>
+                <a16:creationId xmlns:a16="http://schemas.microsoft.com/office/drawing/2014/main" id="{F4AD8120-8CF4-471A-8F91-DD18C41478E6}"/>
               </a:ext>
             </a:extLst>
           </p:cNvPr>
@@ -3379,7 +3379,7 @@
           <p:cNvPr id="31" name="">
             <a:extLst xmlns:a="http://schemas.openxmlformats.org/drawingml/2006/main">
               <a:ext uri="{FF2B5EF4-FFF2-40B4-BE49-F238E27FC236}">
-                <a16:creationId xmlns:a16="http://schemas.microsoft.com/office/drawing/2014/main" id="{CC87CCBC-4383-48F0-B594-E86A9EE4CD3B}"/>
+                <a16:creationId xmlns:a16="http://schemas.microsoft.com/office/drawing/2014/main" id="{633BFAB1-196E-4C2E-9253-84C43D6B982E}"/>
               </a:ext>
             </a:extLst>
           </p:cNvPr>
@@ -3413,7 +3413,7 @@
           <p:cNvPr id="32" name="">
             <a:extLst xmlns:a="http://schemas.openxmlformats.org/drawingml/2006/main">
               <a:ext uri="{FF2B5EF4-FFF2-40B4-BE49-F238E27FC236}">
-                <a16:creationId xmlns:a16="http://schemas.microsoft.com/office/drawing/2014/main" id="{166462A7-A2F3-4949-8496-1E28F1DD3DAC}"/>
+                <a16:creationId xmlns:a16="http://schemas.microsoft.com/office/drawing/2014/main" id="{E834D057-9D85-42DD-A286-28B7817D26B9}"/>
               </a:ext>
             </a:extLst>
           </p:cNvPr>
@@ -3447,7 +3447,7 @@
           <p:cNvPr id="33" name="">
             <a:extLst xmlns:a="http://schemas.openxmlformats.org/drawingml/2006/main">
               <a:ext uri="{FF2B5EF4-FFF2-40B4-BE49-F238E27FC236}">
-                <a16:creationId xmlns:a16="http://schemas.microsoft.com/office/drawing/2014/main" id="{65D5DB6C-E3A9-4E3B-AEE0-8EAC2796CE05}"/>
+                <a16:creationId xmlns:a16="http://schemas.microsoft.com/office/drawing/2014/main" id="{0DEA1797-6743-4841-A8B3-4ABCBA210FCE}"/>
               </a:ext>
             </a:extLst>
           </p:cNvPr>
@@ -3481,7 +3481,7 @@
           <p:cNvPr id="34" name="">
             <a:extLst xmlns:a="http://schemas.openxmlformats.org/drawingml/2006/main">
               <a:ext uri="{FF2B5EF4-FFF2-40B4-BE49-F238E27FC236}">
-                <a16:creationId xmlns:a16="http://schemas.microsoft.com/office/drawing/2014/main" id="{1B5E4AF8-B6BB-412D-BDEF-5F45A60363AA}"/>
+                <a16:creationId xmlns:a16="http://schemas.microsoft.com/office/drawing/2014/main" id="{5732F7EA-AE59-4B35-94A2-B1A32658B701}"/>
               </a:ext>
             </a:extLst>
           </p:cNvPr>
@@ -3515,7 +3515,7 @@
           <p:cNvPr id="35" name="">
             <a:extLst xmlns:a="http://schemas.openxmlformats.org/drawingml/2006/main">
               <a:ext uri="{FF2B5EF4-FFF2-40B4-BE49-F238E27FC236}">
-                <a16:creationId xmlns:a16="http://schemas.microsoft.com/office/drawing/2014/main" id="{85542FB8-45BA-4B14-8230-773F21473DF4}"/>
+                <a16:creationId xmlns:a16="http://schemas.microsoft.com/office/drawing/2014/main" id="{0E7A29EB-E695-4EDC-AFD6-9C30B63CDC39}"/>
               </a:ext>
             </a:extLst>
           </p:cNvPr>
@@ -3549,7 +3549,7 @@
           <p:cNvPr id="36" name="">
             <a:extLst xmlns:a="http://schemas.openxmlformats.org/drawingml/2006/main">
               <a:ext uri="{FF2B5EF4-FFF2-40B4-BE49-F238E27FC236}">
-                <a16:creationId xmlns:a16="http://schemas.microsoft.com/office/drawing/2014/main" id="{645215AA-3A39-433E-A0F5-A723740621E4}"/>
+                <a16:creationId xmlns:a16="http://schemas.microsoft.com/office/drawing/2014/main" id="{290710D2-2717-46E1-9130-3FF1D9F25CD6}"/>
               </a:ext>
             </a:extLst>
           </p:cNvPr>
@@ -3583,7 +3583,7 @@
           <p:cNvPr id="37" name="">
             <a:extLst xmlns:a="http://schemas.openxmlformats.org/drawingml/2006/main">
               <a:ext uri="{FF2B5EF4-FFF2-40B4-BE49-F238E27FC236}">
-                <a16:creationId xmlns:a16="http://schemas.microsoft.com/office/drawing/2014/main" id="{5CA90B09-4063-4CAD-9FB3-7C490E075B2F}"/>
+                <a16:creationId xmlns:a16="http://schemas.microsoft.com/office/drawing/2014/main" id="{A7CE8725-D0AE-4A13-8B55-158ACDE80ABC}"/>
               </a:ext>
             </a:extLst>
           </p:cNvPr>
@@ -3617,7 +3617,7 @@
           <p:cNvPr id="38" name="">
             <a:extLst xmlns:a="http://schemas.openxmlformats.org/drawingml/2006/main">
               <a:ext uri="{FF2B5EF4-FFF2-40B4-BE49-F238E27FC236}">
-                <a16:creationId xmlns:a16="http://schemas.microsoft.com/office/drawing/2014/main" id="{3B80EFEC-C0FE-4E2C-BEE7-6374A427B9E5}"/>
+                <a16:creationId xmlns:a16="http://schemas.microsoft.com/office/drawing/2014/main" id="{444A1C59-6D3C-42AB-AC05-551157F8E08E}"/>
               </a:ext>
             </a:extLst>
           </p:cNvPr>
@@ -3651,7 +3651,7 @@
           <p:cNvPr id="39" name="">
             <a:extLst xmlns:a="http://schemas.openxmlformats.org/drawingml/2006/main">
               <a:ext uri="{FF2B5EF4-FFF2-40B4-BE49-F238E27FC236}">
-                <a16:creationId xmlns:a16="http://schemas.microsoft.com/office/drawing/2014/main" id="{D9658E04-2C8C-450A-B59D-C1DB3491DEE8}"/>
+                <a16:creationId xmlns:a16="http://schemas.microsoft.com/office/drawing/2014/main" id="{FB66F15F-0884-4DBD-83D8-93BC35342C09}"/>
               </a:ext>
             </a:extLst>
           </p:cNvPr>
@@ -3685,7 +3685,7 @@
           <p:cNvPr id="40" name="">
             <a:extLst xmlns:a="http://schemas.openxmlformats.org/drawingml/2006/main">
               <a:ext uri="{FF2B5EF4-FFF2-40B4-BE49-F238E27FC236}">
-                <a16:creationId xmlns:a16="http://schemas.microsoft.com/office/drawing/2014/main" id="{C76AA5A6-1720-478F-9CC4-69B0D8CBA1F1}"/>
+                <a16:creationId xmlns:a16="http://schemas.microsoft.com/office/drawing/2014/main" id="{1CF3EBE9-38A1-45F8-BC85-4A33F3A8B991}"/>
               </a:ext>
             </a:extLst>
           </p:cNvPr>
@@ -3719,7 +3719,7 @@
           <p:cNvPr id="41" name="">
             <a:extLst xmlns:a="http://schemas.openxmlformats.org/drawingml/2006/main">
               <a:ext uri="{FF2B5EF4-FFF2-40B4-BE49-F238E27FC236}">
-                <a16:creationId xmlns:a16="http://schemas.microsoft.com/office/drawing/2014/main" id="{2DE5481C-5730-4A1A-B04E-863F57A0EDD3}"/>
+                <a16:creationId xmlns:a16="http://schemas.microsoft.com/office/drawing/2014/main" id="{E372AD63-90E1-43D8-82D8-CB08A65A6CA2}"/>
               </a:ext>
             </a:extLst>
           </p:cNvPr>
@@ -3753,7 +3753,7 @@
           <p:cNvPr id="42" name="">
             <a:extLst xmlns:a="http://schemas.openxmlformats.org/drawingml/2006/main">
               <a:ext uri="{FF2B5EF4-FFF2-40B4-BE49-F238E27FC236}">
-                <a16:creationId xmlns:a16="http://schemas.microsoft.com/office/drawing/2014/main" id="{F37AA6BF-23C0-4355-A7BF-682EBEEC3C09}"/>
+                <a16:creationId xmlns:a16="http://schemas.microsoft.com/office/drawing/2014/main" id="{6D2E87F6-A3CC-466C-999D-56EAE848BE00}"/>
               </a:ext>
             </a:extLst>
           </p:cNvPr>
@@ -3787,7 +3787,7 @@
           <p:cNvPr id="43" name="">
             <a:extLst xmlns:a="http://schemas.openxmlformats.org/drawingml/2006/main">
               <a:ext uri="{FF2B5EF4-FFF2-40B4-BE49-F238E27FC236}">
-                <a16:creationId xmlns:a16="http://schemas.microsoft.com/office/drawing/2014/main" id="{15596EA9-6735-4096-B81C-634FCC635988}"/>
+                <a16:creationId xmlns:a16="http://schemas.microsoft.com/office/drawing/2014/main" id="{22D01BD6-3681-47BC-AB0B-362AAEE67587}"/>
               </a:ext>
             </a:extLst>
           </p:cNvPr>
@@ -3821,7 +3821,7 @@
           <p:cNvPr id="44" name="">
             <a:extLst xmlns:a="http://schemas.openxmlformats.org/drawingml/2006/main">
               <a:ext uri="{FF2B5EF4-FFF2-40B4-BE49-F238E27FC236}">
-                <a16:creationId xmlns:a16="http://schemas.microsoft.com/office/drawing/2014/main" id="{B4850C8B-733F-4F24-B877-24FABC34F08D}"/>
+                <a16:creationId xmlns:a16="http://schemas.microsoft.com/office/drawing/2014/main" id="{3E2BD45F-7385-4A5D-989F-64A982B19B2F}"/>
               </a:ext>
             </a:extLst>
           </p:cNvPr>
@@ -3855,7 +3855,7 @@
           <p:cNvPr id="45" name="">
             <a:extLst xmlns:a="http://schemas.openxmlformats.org/drawingml/2006/main">
               <a:ext uri="{FF2B5EF4-FFF2-40B4-BE49-F238E27FC236}">
-                <a16:creationId xmlns:a16="http://schemas.microsoft.com/office/drawing/2014/main" id="{CE7CC566-607C-46B0-A25D-F51D5356635A}"/>
+                <a16:creationId xmlns:a16="http://schemas.microsoft.com/office/drawing/2014/main" id="{4F27EAA4-A1B5-4252-8875-278296E7D4D1}"/>
               </a:ext>
             </a:extLst>
           </p:cNvPr>
@@ -3889,7 +3889,7 @@
           <p:cNvPr id="46" name="">
             <a:extLst xmlns:a="http://schemas.openxmlformats.org/drawingml/2006/main">
               <a:ext uri="{FF2B5EF4-FFF2-40B4-BE49-F238E27FC236}">
-                <a16:creationId xmlns:a16="http://schemas.microsoft.com/office/drawing/2014/main" id="{DF361BBC-7850-4218-B3C7-66D40D79B996}"/>
+                <a16:creationId xmlns:a16="http://schemas.microsoft.com/office/drawing/2014/main" id="{AAFCBE49-3F1F-46D2-9110-252DBDF1B189}"/>
               </a:ext>
             </a:extLst>
           </p:cNvPr>
@@ -3923,7 +3923,7 @@
           <p:cNvPr id="47" name="">
             <a:extLst xmlns:a="http://schemas.openxmlformats.org/drawingml/2006/main">
               <a:ext uri="{FF2B5EF4-FFF2-40B4-BE49-F238E27FC236}">
-                <a16:creationId xmlns:a16="http://schemas.microsoft.com/office/drawing/2014/main" id="{5D51A589-992D-4F7A-AC0F-3CDB0D936FF7}"/>
+                <a16:creationId xmlns:a16="http://schemas.microsoft.com/office/drawing/2014/main" id="{0CB510D3-115E-4433-BFA0-36D8F0C3E0CF}"/>
               </a:ext>
             </a:extLst>
           </p:cNvPr>
@@ -3957,7 +3957,7 @@
           <p:cNvPr id="48" name="">
             <a:extLst xmlns:a="http://schemas.openxmlformats.org/drawingml/2006/main">
               <a:ext uri="{FF2B5EF4-FFF2-40B4-BE49-F238E27FC236}">
-                <a16:creationId xmlns:a16="http://schemas.microsoft.com/office/drawing/2014/main" id="{BCB6D2C6-1B5F-4DB7-80B8-45709E5359B2}"/>
+                <a16:creationId xmlns:a16="http://schemas.microsoft.com/office/drawing/2014/main" id="{A9D23018-6D48-4725-93EA-773F1101D459}"/>
               </a:ext>
             </a:extLst>
           </p:cNvPr>
@@ -3991,7 +3991,7 @@
           <p:cNvPr id="49" name="">
             <a:extLst xmlns:a="http://schemas.openxmlformats.org/drawingml/2006/main">
               <a:ext uri="{FF2B5EF4-FFF2-40B4-BE49-F238E27FC236}">
-                <a16:creationId xmlns:a16="http://schemas.microsoft.com/office/drawing/2014/main" id="{80ED47F0-00F3-4D6A-B594-818CB0D2C4E9}"/>
+                <a16:creationId xmlns:a16="http://schemas.microsoft.com/office/drawing/2014/main" id="{5A470371-E85F-4199-8F1D-0F347EAD1B00}"/>
               </a:ext>
             </a:extLst>
           </p:cNvPr>
@@ -4025,7 +4025,7 @@
           <p:cNvPr id="50" name="">
             <a:extLst xmlns:a="http://schemas.openxmlformats.org/drawingml/2006/main">
               <a:ext uri="{FF2B5EF4-FFF2-40B4-BE49-F238E27FC236}">
-                <a16:creationId xmlns:a16="http://schemas.microsoft.com/office/drawing/2014/main" id="{4AA5CAA6-E5A6-4EE3-827D-557FADC13E96}"/>
+                <a16:creationId xmlns:a16="http://schemas.microsoft.com/office/drawing/2014/main" id="{F6468DB0-0C44-4D8B-9DF2-0933D197B5E7}"/>
               </a:ext>
             </a:extLst>
           </p:cNvPr>
@@ -4059,7 +4059,7 @@
           <p:cNvPr id="51" name="">
             <a:extLst xmlns:a="http://schemas.openxmlformats.org/drawingml/2006/main">
               <a:ext uri="{FF2B5EF4-FFF2-40B4-BE49-F238E27FC236}">
-                <a16:creationId xmlns:a16="http://schemas.microsoft.com/office/drawing/2014/main" id="{B301DAE6-6B8B-4C16-B5B2-B6B5960A9F77}"/>
+                <a16:creationId xmlns:a16="http://schemas.microsoft.com/office/drawing/2014/main" id="{565FB5C9-1306-4C1C-AFB5-E3D26925C4B6}"/>
               </a:ext>
             </a:extLst>
           </p:cNvPr>
@@ -4093,7 +4093,7 @@
           <p:cNvPr id="52" name="">
             <a:extLst xmlns:a="http://schemas.openxmlformats.org/drawingml/2006/main">
               <a:ext uri="{FF2B5EF4-FFF2-40B4-BE49-F238E27FC236}">
-                <a16:creationId xmlns:a16="http://schemas.microsoft.com/office/drawing/2014/main" id="{9FA1A8E3-D866-4FF8-83C7-CDFCD84C0787}"/>
+                <a16:creationId xmlns:a16="http://schemas.microsoft.com/office/drawing/2014/main" id="{6F45A012-673E-4CAD-B22A-7CFDBA0144FE}"/>
               </a:ext>
             </a:extLst>
           </p:cNvPr>
@@ -4127,7 +4127,7 @@
           <p:cNvPr id="53" name="">
             <a:extLst xmlns:a="http://schemas.openxmlformats.org/drawingml/2006/main">
               <a:ext uri="{FF2B5EF4-FFF2-40B4-BE49-F238E27FC236}">
-                <a16:creationId xmlns:a16="http://schemas.microsoft.com/office/drawing/2014/main" id="{68A28DE0-E4DA-4EA0-A40C-2CED59C54EEF}"/>
+                <a16:creationId xmlns:a16="http://schemas.microsoft.com/office/drawing/2014/main" id="{0688FBCB-2C92-41FA-9C53-49C15FA99889}"/>
               </a:ext>
             </a:extLst>
           </p:cNvPr>
@@ -4161,7 +4161,7 @@
           <p:cNvPr id="54" name="">
             <a:extLst xmlns:a="http://schemas.openxmlformats.org/drawingml/2006/main">
               <a:ext uri="{FF2B5EF4-FFF2-40B4-BE49-F238E27FC236}">
-                <a16:creationId xmlns:a16="http://schemas.microsoft.com/office/drawing/2014/main" id="{F7F73305-C5C9-4855-95BE-01A7A7499A44}"/>
+                <a16:creationId xmlns:a16="http://schemas.microsoft.com/office/drawing/2014/main" id="{6E7E27B7-7C0E-42CD-A787-6D136E15DB0E}"/>
               </a:ext>
             </a:extLst>
           </p:cNvPr>
@@ -4195,7 +4195,7 @@
           <p:cNvPr id="55" name="">
             <a:extLst xmlns:a="http://schemas.openxmlformats.org/drawingml/2006/main">
               <a:ext uri="{FF2B5EF4-FFF2-40B4-BE49-F238E27FC236}">
-                <a16:creationId xmlns:a16="http://schemas.microsoft.com/office/drawing/2014/main" id="{3EFFC005-AFE1-416B-940F-56B36E38DBD9}"/>
+                <a16:creationId xmlns:a16="http://schemas.microsoft.com/office/drawing/2014/main" id="{C6175563-C851-484A-B005-DA615E84F366}"/>
               </a:ext>
             </a:extLst>
           </p:cNvPr>
@@ -4229,7 +4229,7 @@
           <p:cNvPr id="56" name="">
             <a:extLst xmlns:a="http://schemas.openxmlformats.org/drawingml/2006/main">
               <a:ext uri="{FF2B5EF4-FFF2-40B4-BE49-F238E27FC236}">
-                <a16:creationId xmlns:a16="http://schemas.microsoft.com/office/drawing/2014/main" id="{7A0DF304-3AC7-4189-995C-1D11FA7292B2}"/>
+                <a16:creationId xmlns:a16="http://schemas.microsoft.com/office/drawing/2014/main" id="{570F51BF-7908-4AC3-8203-15395F335CE0}"/>
               </a:ext>
             </a:extLst>
           </p:cNvPr>
@@ -4263,7 +4263,7 @@
           <p:cNvPr id="57" name="">
             <a:extLst xmlns:a="http://schemas.openxmlformats.org/drawingml/2006/main">
               <a:ext uri="{FF2B5EF4-FFF2-40B4-BE49-F238E27FC236}">
-                <a16:creationId xmlns:a16="http://schemas.microsoft.com/office/drawing/2014/main" id="{726CB07A-D662-4E90-A578-C8C04AC2FA70}"/>
+                <a16:creationId xmlns:a16="http://schemas.microsoft.com/office/drawing/2014/main" id="{A0FDDBAF-89D6-4CFF-921E-295B3AD7F52C}"/>
               </a:ext>
             </a:extLst>
           </p:cNvPr>
@@ -4297,7 +4297,7 @@
           <p:cNvPr id="58" name="">
             <a:extLst xmlns:a="http://schemas.openxmlformats.org/drawingml/2006/main">
               <a:ext uri="{FF2B5EF4-FFF2-40B4-BE49-F238E27FC236}">
-                <a16:creationId xmlns:a16="http://schemas.microsoft.com/office/drawing/2014/main" id="{DE128EBF-AA7A-4790-8A80-CDF0308C58E4}"/>
+                <a16:creationId xmlns:a16="http://schemas.microsoft.com/office/drawing/2014/main" id="{31174D9C-5B31-4366-A90A-63DE8F7F4EB1}"/>
               </a:ext>
             </a:extLst>
           </p:cNvPr>
@@ -4331,7 +4331,7 @@
           <p:cNvPr id="59" name="">
             <a:extLst xmlns:a="http://schemas.openxmlformats.org/drawingml/2006/main">
               <a:ext uri="{FF2B5EF4-FFF2-40B4-BE49-F238E27FC236}">
-                <a16:creationId xmlns:a16="http://schemas.microsoft.com/office/drawing/2014/main" id="{23243FEF-3EA0-4829-92FF-2861BE2CAE0D}"/>
+                <a16:creationId xmlns:a16="http://schemas.microsoft.com/office/drawing/2014/main" id="{465671A5-0828-4A9D-8ACA-8DC455D4CA5E}"/>
               </a:ext>
             </a:extLst>
           </p:cNvPr>
@@ -4365,7 +4365,7 @@
           <p:cNvPr id="60" name="">
             <a:extLst xmlns:a="http://schemas.openxmlformats.org/drawingml/2006/main">
               <a:ext uri="{FF2B5EF4-FFF2-40B4-BE49-F238E27FC236}">
-                <a16:creationId xmlns:a16="http://schemas.microsoft.com/office/drawing/2014/main" id="{47A21EED-F4EA-4ED3-AF6E-CD570B3136DA}"/>
+                <a16:creationId xmlns:a16="http://schemas.microsoft.com/office/drawing/2014/main" id="{CB213283-18E5-4F92-9C87-D60B556F2086}"/>
               </a:ext>
             </a:extLst>
           </p:cNvPr>
@@ -4399,7 +4399,7 @@
           <p:cNvPr id="61" name="">
             <a:extLst xmlns:a="http://schemas.openxmlformats.org/drawingml/2006/main">
               <a:ext uri="{FF2B5EF4-FFF2-40B4-BE49-F238E27FC236}">
-                <a16:creationId xmlns:a16="http://schemas.microsoft.com/office/drawing/2014/main" id="{7593574D-2045-44FC-B639-3E5B751245FB}"/>
+                <a16:creationId xmlns:a16="http://schemas.microsoft.com/office/drawing/2014/main" id="{01B90540-CCE5-4B5C-A3E1-99845C444B70}"/>
               </a:ext>
             </a:extLst>
           </p:cNvPr>
@@ -4433,7 +4433,7 @@
           <p:cNvPr id="62" name="">
             <a:extLst xmlns:a="http://schemas.openxmlformats.org/drawingml/2006/main">
               <a:ext uri="{FF2B5EF4-FFF2-40B4-BE49-F238E27FC236}">
-                <a16:creationId xmlns:a16="http://schemas.microsoft.com/office/drawing/2014/main" id="{A809AE53-FB57-429B-BDBE-9E87BB226C42}"/>
+                <a16:creationId xmlns:a16="http://schemas.microsoft.com/office/drawing/2014/main" id="{D6973122-5E96-4D06-9F6B-011C591AD16C}"/>
               </a:ext>
             </a:extLst>
           </p:cNvPr>
@@ -4467,7 +4467,7 @@
           <p:cNvPr id="63" name="">
             <a:extLst xmlns:a="http://schemas.openxmlformats.org/drawingml/2006/main">
               <a:ext uri="{FF2B5EF4-FFF2-40B4-BE49-F238E27FC236}">
-                <a16:creationId xmlns:a16="http://schemas.microsoft.com/office/drawing/2014/main" id="{9C389874-88A9-4412-ACBC-2DC34D290083}"/>
+                <a16:creationId xmlns:a16="http://schemas.microsoft.com/office/drawing/2014/main" id="{F50405AF-9AA0-44CB-9E8C-2B29A6C2C302}"/>
               </a:ext>
             </a:extLst>
           </p:cNvPr>
@@ -4501,7 +4501,7 @@
           <p:cNvPr id="64" name="">
             <a:extLst xmlns:a="http://schemas.openxmlformats.org/drawingml/2006/main">
               <a:ext uri="{FF2B5EF4-FFF2-40B4-BE49-F238E27FC236}">
-                <a16:creationId xmlns:a16="http://schemas.microsoft.com/office/drawing/2014/main" id="{D8BF6C5A-50FE-42BD-AB0D-4ED55FC4AE95}"/>
+                <a16:creationId xmlns:a16="http://schemas.microsoft.com/office/drawing/2014/main" id="{810A1D8B-B3FE-46B3-A096-71B7D49BB4BC}"/>
               </a:ext>
             </a:extLst>
           </p:cNvPr>
@@ -4535,7 +4535,7 @@
           <p:cNvPr id="65" name="">
             <a:extLst xmlns:a="http://schemas.openxmlformats.org/drawingml/2006/main">
               <a:ext uri="{FF2B5EF4-FFF2-40B4-BE49-F238E27FC236}">
-                <a16:creationId xmlns:a16="http://schemas.microsoft.com/office/drawing/2014/main" id="{FDEBBFCA-C3C3-4FF3-95E5-1B26BA0FE69B}"/>
+                <a16:creationId xmlns:a16="http://schemas.microsoft.com/office/drawing/2014/main" id="{9BD0506C-C26B-4E4F-89C8-744EFB87D03B}"/>
               </a:ext>
             </a:extLst>
           </p:cNvPr>
@@ -4569,7 +4569,7 @@
           <p:cNvPr id="66" name="">
             <a:extLst xmlns:a="http://schemas.openxmlformats.org/drawingml/2006/main">
               <a:ext uri="{FF2B5EF4-FFF2-40B4-BE49-F238E27FC236}">
-                <a16:creationId xmlns:a16="http://schemas.microsoft.com/office/drawing/2014/main" id="{1F10388C-74C7-4F5B-BCE0-A532C8EF77D1}"/>
+                <a16:creationId xmlns:a16="http://schemas.microsoft.com/office/drawing/2014/main" id="{FEDAB8AD-73ED-417C-A109-ADF55314D92F}"/>
               </a:ext>
             </a:extLst>
           </p:cNvPr>
@@ -4603,7 +4603,7 @@
           <p:cNvPr id="67" name="">
             <a:extLst xmlns:a="http://schemas.openxmlformats.org/drawingml/2006/main">
               <a:ext uri="{FF2B5EF4-FFF2-40B4-BE49-F238E27FC236}">
-                <a16:creationId xmlns:a16="http://schemas.microsoft.com/office/drawing/2014/main" id="{CAB0B428-35B8-4241-8BB1-E9320ECD3780}"/>
+                <a16:creationId xmlns:a16="http://schemas.microsoft.com/office/drawing/2014/main" id="{775DBF11-2F58-4E10-B867-05A4D30BEF12}"/>
               </a:ext>
             </a:extLst>
           </p:cNvPr>
@@ -4637,7 +4637,7 @@
           <p:cNvPr id="68" name="">
             <a:extLst xmlns:a="http://schemas.openxmlformats.org/drawingml/2006/main">
               <a:ext uri="{FF2B5EF4-FFF2-40B4-BE49-F238E27FC236}">
-                <a16:creationId xmlns:a16="http://schemas.microsoft.com/office/drawing/2014/main" id="{A4EE9C0C-6B03-436B-9303-1AF71E588EA2}"/>
+                <a16:creationId xmlns:a16="http://schemas.microsoft.com/office/drawing/2014/main" id="{DCB47729-5652-4176-B3C9-EE41241A999F}"/>
               </a:ext>
             </a:extLst>
           </p:cNvPr>
@@ -4671,7 +4671,7 @@
           <p:cNvPr id="69" name="">
             <a:extLst xmlns:a="http://schemas.openxmlformats.org/drawingml/2006/main">
               <a:ext uri="{FF2B5EF4-FFF2-40B4-BE49-F238E27FC236}">
-                <a16:creationId xmlns:a16="http://schemas.microsoft.com/office/drawing/2014/main" id="{76F78367-C5D5-406A-B560-B932F2619758}"/>
+                <a16:creationId xmlns:a16="http://schemas.microsoft.com/office/drawing/2014/main" id="{67F53D6C-8F02-456C-A7D7-3EEAB7BB2908}"/>
               </a:ext>
             </a:extLst>
           </p:cNvPr>
@@ -4705,7 +4705,7 @@
           <p:cNvPr id="70" name="">
             <a:extLst xmlns:a="http://schemas.openxmlformats.org/drawingml/2006/main">
               <a:ext uri="{FF2B5EF4-FFF2-40B4-BE49-F238E27FC236}">
-                <a16:creationId xmlns:a16="http://schemas.microsoft.com/office/drawing/2014/main" id="{BB39E129-4A57-4C2E-A41A-D14187F0D87E}"/>
+                <a16:creationId xmlns:a16="http://schemas.microsoft.com/office/drawing/2014/main" id="{9CD45085-A338-41A6-A3A4-52211EA20AA7}"/>
               </a:ext>
             </a:extLst>
           </p:cNvPr>
@@ -4739,7 +4739,7 @@
           <p:cNvPr id="71" name="">
             <a:extLst xmlns:a="http://schemas.openxmlformats.org/drawingml/2006/main">
               <a:ext uri="{FF2B5EF4-FFF2-40B4-BE49-F238E27FC236}">
-                <a16:creationId xmlns:a16="http://schemas.microsoft.com/office/drawing/2014/main" id="{E3CB149B-87FC-4F2A-ADFD-3E6F2FD86A6A}"/>
+                <a16:creationId xmlns:a16="http://schemas.microsoft.com/office/drawing/2014/main" id="{BE62C9C0-3310-4237-888D-D99DA7E86808}"/>
               </a:ext>
             </a:extLst>
           </p:cNvPr>
@@ -4773,7 +4773,7 @@
           <p:cNvPr id="72" name="">
             <a:extLst xmlns:a="http://schemas.openxmlformats.org/drawingml/2006/main">
               <a:ext uri="{FF2B5EF4-FFF2-40B4-BE49-F238E27FC236}">
-                <a16:creationId xmlns:a16="http://schemas.microsoft.com/office/drawing/2014/main" id="{1DACEC01-671B-40B4-B3C0-0EE3D61FBFE7}"/>
+                <a16:creationId xmlns:a16="http://schemas.microsoft.com/office/drawing/2014/main" id="{EA88F51E-C671-4FC3-9B39-CFE0DDBD8E13}"/>
               </a:ext>
             </a:extLst>
           </p:cNvPr>
@@ -4807,7 +4807,7 @@
           <p:cNvPr id="73" name="">
             <a:extLst xmlns:a="http://schemas.openxmlformats.org/drawingml/2006/main">
               <a:ext uri="{FF2B5EF4-FFF2-40B4-BE49-F238E27FC236}">
-                <a16:creationId xmlns:a16="http://schemas.microsoft.com/office/drawing/2014/main" id="{A1F9F9E0-A21A-4269-89D9-75AAEA9D4753}"/>
+                <a16:creationId xmlns:a16="http://schemas.microsoft.com/office/drawing/2014/main" id="{2002BF9A-A5E7-46E2-B482-F60A20DF07C2}"/>
               </a:ext>
             </a:extLst>
           </p:cNvPr>
@@ -4841,7 +4841,7 @@
           <p:cNvPr id="74" name="">
             <a:extLst xmlns:a="http://schemas.openxmlformats.org/drawingml/2006/main">
               <a:ext uri="{FF2B5EF4-FFF2-40B4-BE49-F238E27FC236}">
-                <a16:creationId xmlns:a16="http://schemas.microsoft.com/office/drawing/2014/main" id="{69730B60-EF8A-4720-AD0D-73807292E5CB}"/>
+                <a16:creationId xmlns:a16="http://schemas.microsoft.com/office/drawing/2014/main" id="{76B599B1-7740-4F8D-9EA9-09604DDF0C45}"/>
               </a:ext>
             </a:extLst>
           </p:cNvPr>
@@ -4875,7 +4875,7 @@
           <p:cNvPr id="75" name="">
             <a:extLst xmlns:a="http://schemas.openxmlformats.org/drawingml/2006/main">
               <a:ext uri="{FF2B5EF4-FFF2-40B4-BE49-F238E27FC236}">
-                <a16:creationId xmlns:a16="http://schemas.microsoft.com/office/drawing/2014/main" id="{32B3AA4F-1327-4E2D-A509-3804A0845907}"/>
+                <a16:creationId xmlns:a16="http://schemas.microsoft.com/office/drawing/2014/main" id="{6B993998-3922-453A-8FC1-517D6003AFDE}"/>
               </a:ext>
             </a:extLst>
           </p:cNvPr>
@@ -4909,7 +4909,7 @@
           <p:cNvPr id="76" name="">
             <a:extLst xmlns:a="http://schemas.openxmlformats.org/drawingml/2006/main">
               <a:ext uri="{FF2B5EF4-FFF2-40B4-BE49-F238E27FC236}">
-                <a16:creationId xmlns:a16="http://schemas.microsoft.com/office/drawing/2014/main" id="{515AA9A3-20A6-4AFB-95F3-7D34EE1CF660}"/>
+                <a16:creationId xmlns:a16="http://schemas.microsoft.com/office/drawing/2014/main" id="{E1AACCE1-5230-4C45-86F9-029E76377175}"/>
               </a:ext>
             </a:extLst>
           </p:cNvPr>
@@ -4943,7 +4943,7 @@
           <p:cNvPr id="77" name="">
             <a:extLst xmlns:a="http://schemas.openxmlformats.org/drawingml/2006/main">
               <a:ext uri="{FF2B5EF4-FFF2-40B4-BE49-F238E27FC236}">
-                <a16:creationId xmlns:a16="http://schemas.microsoft.com/office/drawing/2014/main" id="{656EEADC-B4E4-4BCA-8962-86DD9AC707D4}"/>
+                <a16:creationId xmlns:a16="http://schemas.microsoft.com/office/drawing/2014/main" id="{17C6BA69-B5AB-4BC8-9232-0A40387DB229}"/>
               </a:ext>
             </a:extLst>
           </p:cNvPr>
@@ -4977,7 +4977,7 @@
           <p:cNvPr id="78" name="">
             <a:extLst xmlns:a="http://schemas.openxmlformats.org/drawingml/2006/main">
               <a:ext uri="{FF2B5EF4-FFF2-40B4-BE49-F238E27FC236}">
-                <a16:creationId xmlns:a16="http://schemas.microsoft.com/office/drawing/2014/main" id="{ACFC89C8-FFBA-4019-933B-E18B43ADC092}"/>
+                <a16:creationId xmlns:a16="http://schemas.microsoft.com/office/drawing/2014/main" id="{6823F967-0FBF-480F-96C9-E4AA909EE860}"/>
               </a:ext>
             </a:extLst>
           </p:cNvPr>
@@ -5011,7 +5011,7 @@
           <p:cNvPr id="79" name="">
             <a:extLst xmlns:a="http://schemas.openxmlformats.org/drawingml/2006/main">
               <a:ext uri="{FF2B5EF4-FFF2-40B4-BE49-F238E27FC236}">
-                <a16:creationId xmlns:a16="http://schemas.microsoft.com/office/drawing/2014/main" id="{DC4128F8-4454-4BCE-9E31-58D6293AE26A}"/>
+                <a16:creationId xmlns:a16="http://schemas.microsoft.com/office/drawing/2014/main" id="{FAF7F706-AC37-455D-AA56-A6109EFFE190}"/>
               </a:ext>
             </a:extLst>
           </p:cNvPr>
@@ -5045,7 +5045,7 @@
           <p:cNvPr id="80" name="">
             <a:extLst xmlns:a="http://schemas.openxmlformats.org/drawingml/2006/main">
               <a:ext uri="{FF2B5EF4-FFF2-40B4-BE49-F238E27FC236}">
-                <a16:creationId xmlns:a16="http://schemas.microsoft.com/office/drawing/2014/main" id="{8303B494-09D8-4A5D-926A-B43215E54981}"/>
+                <a16:creationId xmlns:a16="http://schemas.microsoft.com/office/drawing/2014/main" id="{C6416DF6-D545-45E8-A20A-24788BFCA547}"/>
               </a:ext>
             </a:extLst>
           </p:cNvPr>
@@ -5079,7 +5079,7 @@
           <p:cNvPr id="81" name="">
             <a:extLst xmlns:a="http://schemas.openxmlformats.org/drawingml/2006/main">
               <a:ext uri="{FF2B5EF4-FFF2-40B4-BE49-F238E27FC236}">
-                <a16:creationId xmlns:a16="http://schemas.microsoft.com/office/drawing/2014/main" id="{7FD582D6-68C9-4D6C-8186-40151DFD42D4}"/>
+                <a16:creationId xmlns:a16="http://schemas.microsoft.com/office/drawing/2014/main" id="{B36ACEC1-C819-4445-9CAD-CCBCF61CFA53}"/>
               </a:ext>
             </a:extLst>
           </p:cNvPr>
@@ -5113,7 +5113,7 @@
           <p:cNvPr id="82" name="">
             <a:extLst xmlns:a="http://schemas.openxmlformats.org/drawingml/2006/main">
               <a:ext uri="{FF2B5EF4-FFF2-40B4-BE49-F238E27FC236}">
-                <a16:creationId xmlns:a16="http://schemas.microsoft.com/office/drawing/2014/main" id="{412AA338-EE1D-41D7-93EA-E604E00BE5BB}"/>
+                <a16:creationId xmlns:a16="http://schemas.microsoft.com/office/drawing/2014/main" id="{686F336C-C54A-47F9-8481-42DF5B891393}"/>
               </a:ext>
             </a:extLst>
           </p:cNvPr>
@@ -5147,7 +5147,7 @@
           <p:cNvPr id="83" name="">
             <a:extLst xmlns:a="http://schemas.openxmlformats.org/drawingml/2006/main">
               <a:ext uri="{FF2B5EF4-FFF2-40B4-BE49-F238E27FC236}">
-                <a16:creationId xmlns:a16="http://schemas.microsoft.com/office/drawing/2014/main" id="{511683FB-EB05-4541-B338-B60FD1B13C02}"/>
+                <a16:creationId xmlns:a16="http://schemas.microsoft.com/office/drawing/2014/main" id="{E630886B-3C88-48D9-834B-7EA2091695A0}"/>
               </a:ext>
             </a:extLst>
           </p:cNvPr>
@@ -5181,7 +5181,7 @@
           <p:cNvPr id="84" name="">
             <a:extLst xmlns:a="http://schemas.openxmlformats.org/drawingml/2006/main">
               <a:ext uri="{FF2B5EF4-FFF2-40B4-BE49-F238E27FC236}">
-                <a16:creationId xmlns:a16="http://schemas.microsoft.com/office/drawing/2014/main" id="{A777310E-46B4-4ABA-9E69-9ABFA7ECA1B6}"/>
+                <a16:creationId xmlns:a16="http://schemas.microsoft.com/office/drawing/2014/main" id="{6B3E07DC-124A-4ACF-A67D-0ABBC0529125}"/>
               </a:ext>
             </a:extLst>
           </p:cNvPr>
@@ -5215,7 +5215,7 @@
           <p:cNvPr id="85" name="">
             <a:extLst xmlns:a="http://schemas.openxmlformats.org/drawingml/2006/main">
               <a:ext uri="{FF2B5EF4-FFF2-40B4-BE49-F238E27FC236}">
-                <a16:creationId xmlns:a16="http://schemas.microsoft.com/office/drawing/2014/main" id="{F55111F3-7A95-4866-BC6F-332F3943C77A}"/>
+                <a16:creationId xmlns:a16="http://schemas.microsoft.com/office/drawing/2014/main" id="{5947CF18-0A74-4158-AAE7-399149ADBF24}"/>
               </a:ext>
             </a:extLst>
           </p:cNvPr>
@@ -5249,7 +5249,7 @@
           <p:cNvPr id="86" name="">
             <a:extLst xmlns:a="http://schemas.openxmlformats.org/drawingml/2006/main">
               <a:ext uri="{FF2B5EF4-FFF2-40B4-BE49-F238E27FC236}">
-                <a16:creationId xmlns:a16="http://schemas.microsoft.com/office/drawing/2014/main" id="{3F8D18D9-B731-4A68-B67F-7D7D0BF1366F}"/>
+                <a16:creationId xmlns:a16="http://schemas.microsoft.com/office/drawing/2014/main" id="{B7B21D53-346D-447F-AD44-56CA0AFA3A48}"/>
               </a:ext>
             </a:extLst>
           </p:cNvPr>
@@ -5283,7 +5283,7 @@
           <p:cNvPr id="87" name="">
             <a:extLst xmlns:a="http://schemas.openxmlformats.org/drawingml/2006/main">
               <a:ext uri="{FF2B5EF4-FFF2-40B4-BE49-F238E27FC236}">
-                <a16:creationId xmlns:a16="http://schemas.microsoft.com/office/drawing/2014/main" id="{5D3C4328-12AE-423F-895A-07CAAA5E80B2}"/>
+                <a16:creationId xmlns:a16="http://schemas.microsoft.com/office/drawing/2014/main" id="{4D6F9D32-7A8A-4680-AC17-DC27746B2B7D}"/>
               </a:ext>
             </a:extLst>
           </p:cNvPr>
@@ -5317,7 +5317,7 @@
           <p:cNvPr id="88" name="">
             <a:extLst xmlns:a="http://schemas.openxmlformats.org/drawingml/2006/main">
               <a:ext uri="{FF2B5EF4-FFF2-40B4-BE49-F238E27FC236}">
-                <a16:creationId xmlns:a16="http://schemas.microsoft.com/office/drawing/2014/main" id="{11A3A927-D460-4267-AC24-1EB654142C89}"/>
+                <a16:creationId xmlns:a16="http://schemas.microsoft.com/office/drawing/2014/main" id="{D395AAA1-5E10-4CF2-835D-69A3F0C876CB}"/>
               </a:ext>
             </a:extLst>
           </p:cNvPr>
@@ -5351,7 +5351,7 @@
           <p:cNvPr id="89" name="">
             <a:extLst xmlns:a="http://schemas.openxmlformats.org/drawingml/2006/main">
               <a:ext uri="{FF2B5EF4-FFF2-40B4-BE49-F238E27FC236}">
-                <a16:creationId xmlns:a16="http://schemas.microsoft.com/office/drawing/2014/main" id="{E576BD91-BC29-4CB7-A038-6BCFA8FB87A5}"/>
+                <a16:creationId xmlns:a16="http://schemas.microsoft.com/office/drawing/2014/main" id="{23D5AB63-E68F-4D62-BEF1-D6628701F44C}"/>
               </a:ext>
             </a:extLst>
           </p:cNvPr>
@@ -5385,7 +5385,7 @@
           <p:cNvPr id="90" name="">
             <a:extLst xmlns:a="http://schemas.openxmlformats.org/drawingml/2006/main">
               <a:ext uri="{FF2B5EF4-FFF2-40B4-BE49-F238E27FC236}">
-                <a16:creationId xmlns:a16="http://schemas.microsoft.com/office/drawing/2014/main" id="{3E407A15-AD90-438B-B045-79A118F7A7A1}"/>
+                <a16:creationId xmlns:a16="http://schemas.microsoft.com/office/drawing/2014/main" id="{646E9301-886B-439A-938B-297D49636AC1}"/>
               </a:ext>
             </a:extLst>
           </p:cNvPr>
@@ -5419,7 +5419,7 @@
           <p:cNvPr id="91" name="">
             <a:extLst xmlns:a="http://schemas.openxmlformats.org/drawingml/2006/main">
               <a:ext uri="{FF2B5EF4-FFF2-40B4-BE49-F238E27FC236}">
-                <a16:creationId xmlns:a16="http://schemas.microsoft.com/office/drawing/2014/main" id="{9F56E727-EE96-4140-AF8C-856D747A5C51}"/>
+                <a16:creationId xmlns:a16="http://schemas.microsoft.com/office/drawing/2014/main" id="{6C441074-50E7-430F-ABEA-8DC458E7DE46}"/>
               </a:ext>
             </a:extLst>
           </p:cNvPr>
@@ -5453,7 +5453,7 @@
           <p:cNvPr id="92" name="">
             <a:extLst xmlns:a="http://schemas.openxmlformats.org/drawingml/2006/main">
               <a:ext uri="{FF2B5EF4-FFF2-40B4-BE49-F238E27FC236}">
-                <a16:creationId xmlns:a16="http://schemas.microsoft.com/office/drawing/2014/main" id="{269139EE-483E-4843-9148-C18E10F97875}"/>
+                <a16:creationId xmlns:a16="http://schemas.microsoft.com/office/drawing/2014/main" id="{1E24916B-1B38-4C91-AF2D-5E35C0D1F1DB}"/>
               </a:ext>
             </a:extLst>
           </p:cNvPr>
@@ -5487,7 +5487,7 @@
           <p:cNvPr id="93" name="">
             <a:extLst xmlns:a="http://schemas.openxmlformats.org/drawingml/2006/main">
               <a:ext uri="{FF2B5EF4-FFF2-40B4-BE49-F238E27FC236}">
-                <a16:creationId xmlns:a16="http://schemas.microsoft.com/office/drawing/2014/main" id="{32A7EF5F-E0F8-4457-A452-1E39C2791275}"/>
+                <a16:creationId xmlns:a16="http://schemas.microsoft.com/office/drawing/2014/main" id="{ADB3069E-7FC6-43FE-B97F-5E5A37CDFAA5}"/>
               </a:ext>
             </a:extLst>
           </p:cNvPr>
@@ -5521,7 +5521,7 @@
           <p:cNvPr id="94" name="">
             <a:extLst xmlns:a="http://schemas.openxmlformats.org/drawingml/2006/main">
               <a:ext uri="{FF2B5EF4-FFF2-40B4-BE49-F238E27FC236}">
-                <a16:creationId xmlns:a16="http://schemas.microsoft.com/office/drawing/2014/main" id="{C863FD6D-80BC-4C87-9714-56B7DA629359}"/>
+                <a16:creationId xmlns:a16="http://schemas.microsoft.com/office/drawing/2014/main" id="{DA4BE8A6-C458-4C4B-A86A-935F15C6CC55}"/>
               </a:ext>
             </a:extLst>
           </p:cNvPr>
@@ -5555,7 +5555,7 @@
           <p:cNvPr id="95" name="">
             <a:extLst xmlns:a="http://schemas.openxmlformats.org/drawingml/2006/main">
               <a:ext uri="{FF2B5EF4-FFF2-40B4-BE49-F238E27FC236}">
-                <a16:creationId xmlns:a16="http://schemas.microsoft.com/office/drawing/2014/main" id="{EEC1D288-A6AB-4957-83EB-6771B092D817}"/>
+                <a16:creationId xmlns:a16="http://schemas.microsoft.com/office/drawing/2014/main" id="{75E8520D-072F-45C4-B1C2-77FF6F2BF632}"/>
               </a:ext>
             </a:extLst>
           </p:cNvPr>
@@ -5589,7 +5589,7 @@
           <p:cNvPr id="96" name="">
             <a:extLst xmlns:a="http://schemas.openxmlformats.org/drawingml/2006/main">
               <a:ext uri="{FF2B5EF4-FFF2-40B4-BE49-F238E27FC236}">
-                <a16:creationId xmlns:a16="http://schemas.microsoft.com/office/drawing/2014/main" id="{A62DD1B6-8165-4F0B-A97D-6AD16079643A}"/>
+                <a16:creationId xmlns:a16="http://schemas.microsoft.com/office/drawing/2014/main" id="{F16EB392-5727-4882-B004-18CC6474781D}"/>
               </a:ext>
             </a:extLst>
           </p:cNvPr>
@@ -5623,7 +5623,7 @@
           <p:cNvPr id="97" name="">
             <a:extLst xmlns:a="http://schemas.openxmlformats.org/drawingml/2006/main">
               <a:ext uri="{FF2B5EF4-FFF2-40B4-BE49-F238E27FC236}">
-                <a16:creationId xmlns:a16="http://schemas.microsoft.com/office/drawing/2014/main" id="{3D0E3546-90D6-4390-B86C-71FDEE4391FC}"/>
+                <a16:creationId xmlns:a16="http://schemas.microsoft.com/office/drawing/2014/main" id="{8E375C43-BF55-43B3-A0E5-D9D7AD3F32BB}"/>
               </a:ext>
             </a:extLst>
           </p:cNvPr>
@@ -5657,7 +5657,7 @@
           <p:cNvPr id="98" name="">
             <a:extLst xmlns:a="http://schemas.openxmlformats.org/drawingml/2006/main">
               <a:ext uri="{FF2B5EF4-FFF2-40B4-BE49-F238E27FC236}">
-                <a16:creationId xmlns:a16="http://schemas.microsoft.com/office/drawing/2014/main" id="{3063DDA1-2AB3-4089-B207-327C582036F1}"/>
+                <a16:creationId xmlns:a16="http://schemas.microsoft.com/office/drawing/2014/main" id="{F8E72EF1-4086-4E8B-ABAA-3D27019498A9}"/>
               </a:ext>
             </a:extLst>
           </p:cNvPr>
@@ -5691,7 +5691,7 @@
           <p:cNvPr id="99" name="">
             <a:extLst xmlns:a="http://schemas.openxmlformats.org/drawingml/2006/main">
               <a:ext uri="{FF2B5EF4-FFF2-40B4-BE49-F238E27FC236}">
-                <a16:creationId xmlns:a16="http://schemas.microsoft.com/office/drawing/2014/main" id="{CC1EC05C-C1C3-40D6-AB07-71EB7EFBBD06}"/>
+                <a16:creationId xmlns:a16="http://schemas.microsoft.com/office/drawing/2014/main" id="{DDE52B24-0D02-4299-A531-6A912DF3A898}"/>
               </a:ext>
             </a:extLst>
           </p:cNvPr>
@@ -5725,7 +5725,7 @@
           <p:cNvPr id="100" name="">
             <a:extLst xmlns:a="http://schemas.openxmlformats.org/drawingml/2006/main">
               <a:ext uri="{FF2B5EF4-FFF2-40B4-BE49-F238E27FC236}">
-                <a16:creationId xmlns:a16="http://schemas.microsoft.com/office/drawing/2014/main" id="{77A42126-C543-4747-8545-7A596E530E0F}"/>
+                <a16:creationId xmlns:a16="http://schemas.microsoft.com/office/drawing/2014/main" id="{1024582D-91F9-448F-B642-B6A17D1A9AC6}"/>
               </a:ext>
             </a:extLst>
           </p:cNvPr>
@@ -5757,7 +5757,7 @@
           <p:cNvPr id="101" name="">
             <a:extLst xmlns:a="http://schemas.openxmlformats.org/drawingml/2006/main">
               <a:ext uri="{FF2B5EF4-FFF2-40B4-BE49-F238E27FC236}">
-                <a16:creationId xmlns:a16="http://schemas.microsoft.com/office/drawing/2014/main" id="{357294BA-BDFA-402B-BC8A-A1E820C98C96}"/>
+                <a16:creationId xmlns:a16="http://schemas.microsoft.com/office/drawing/2014/main" id="{74B33431-ADD5-4876-83CF-5BD97718D73E}"/>
               </a:ext>
             </a:extLst>
           </p:cNvPr>
@@ -5791,7 +5791,7 @@
           <p:cNvPr id="102" name="">
             <a:extLst xmlns:a="http://schemas.openxmlformats.org/drawingml/2006/main">
               <a:ext uri="{FF2B5EF4-FFF2-40B4-BE49-F238E27FC236}">
-                <a16:creationId xmlns:a16="http://schemas.microsoft.com/office/drawing/2014/main" id="{CB55B94E-8745-4F4A-B1E9-9B2880C600FD}"/>
+                <a16:creationId xmlns:a16="http://schemas.microsoft.com/office/drawing/2014/main" id="{8375F5BC-1D9D-4843-ABFC-AB4264A7A859}"/>
               </a:ext>
             </a:extLst>
           </p:cNvPr>
@@ -5825,7 +5825,7 @@
           <p:cNvPr id="103" name="">
             <a:extLst xmlns:a="http://schemas.openxmlformats.org/drawingml/2006/main">
               <a:ext uri="{FF2B5EF4-FFF2-40B4-BE49-F238E27FC236}">
-                <a16:creationId xmlns:a16="http://schemas.microsoft.com/office/drawing/2014/main" id="{63113BE9-A26A-41C8-98ED-21B4ACDCEE1E}"/>
+                <a16:creationId xmlns:a16="http://schemas.microsoft.com/office/drawing/2014/main" id="{2DCCE72C-8336-484D-B8D1-B53BCEA6188E}"/>
               </a:ext>
             </a:extLst>
           </p:cNvPr>
@@ -5859,7 +5859,7 @@
           <p:cNvPr id="104" name="">
             <a:extLst xmlns:a="http://schemas.openxmlformats.org/drawingml/2006/main">
               <a:ext uri="{FF2B5EF4-FFF2-40B4-BE49-F238E27FC236}">
-                <a16:creationId xmlns:a16="http://schemas.microsoft.com/office/drawing/2014/main" id="{2E5ACE8E-9353-469E-AEE9-8F0794BB1768}"/>
+                <a16:creationId xmlns:a16="http://schemas.microsoft.com/office/drawing/2014/main" id="{C8E86DCF-E9D4-4DB9-B289-1C7DF914B93E}"/>
               </a:ext>
             </a:extLst>
           </p:cNvPr>
@@ -5893,7 +5893,7 @@
           <p:cNvPr id="105" name="">
             <a:extLst xmlns:a="http://schemas.openxmlformats.org/drawingml/2006/main">
               <a:ext uri="{FF2B5EF4-FFF2-40B4-BE49-F238E27FC236}">
-                <a16:creationId xmlns:a16="http://schemas.microsoft.com/office/drawing/2014/main" id="{5B255429-9022-4F96-91C4-5518534DDE64}"/>
+                <a16:creationId xmlns:a16="http://schemas.microsoft.com/office/drawing/2014/main" id="{BFFC6BE3-9911-4C6C-952C-FC7FB5B1F4CB}"/>
               </a:ext>
             </a:extLst>
           </p:cNvPr>
@@ -5927,7 +5927,7 @@
           <p:cNvPr id="106" name="">
             <a:extLst xmlns:a="http://schemas.openxmlformats.org/drawingml/2006/main">
               <a:ext uri="{FF2B5EF4-FFF2-40B4-BE49-F238E27FC236}">
-                <a16:creationId xmlns:a16="http://schemas.microsoft.com/office/drawing/2014/main" id="{D3005DFB-6F52-4087-9B5D-52FE8E5C9672}"/>
+                <a16:creationId xmlns:a16="http://schemas.microsoft.com/office/drawing/2014/main" id="{1B3A242A-D4A0-4055-BE63-54267CF826F0}"/>
               </a:ext>
             </a:extLst>
           </p:cNvPr>
@@ -5961,7 +5961,7 @@
           <p:cNvPr id="107" name="">
             <a:extLst xmlns:a="http://schemas.openxmlformats.org/drawingml/2006/main">
               <a:ext uri="{FF2B5EF4-FFF2-40B4-BE49-F238E27FC236}">
-                <a16:creationId xmlns:a16="http://schemas.microsoft.com/office/drawing/2014/main" id="{FC273D54-AE22-42D3-B098-142E21673BF7}"/>
+                <a16:creationId xmlns:a16="http://schemas.microsoft.com/office/drawing/2014/main" id="{A06E75F0-7506-41CC-B1CF-F849DC5106C0}"/>
               </a:ext>
             </a:extLst>
           </p:cNvPr>
@@ -5995,7 +5995,7 @@
           <p:cNvPr id="108" name="">
             <a:extLst xmlns:a="http://schemas.openxmlformats.org/drawingml/2006/main">
               <a:ext uri="{FF2B5EF4-FFF2-40B4-BE49-F238E27FC236}">
-                <a16:creationId xmlns:a16="http://schemas.microsoft.com/office/drawing/2014/main" id="{AFBC4E29-5391-469B-A1B4-2C458038671C}"/>
+                <a16:creationId xmlns:a16="http://schemas.microsoft.com/office/drawing/2014/main" id="{5B92CDC7-9052-480A-ACDE-AF7912B6C3F5}"/>
               </a:ext>
             </a:extLst>
           </p:cNvPr>
@@ -6029,7 +6029,7 @@
           <p:cNvPr id="109" name="">
             <a:extLst xmlns:a="http://schemas.openxmlformats.org/drawingml/2006/main">
               <a:ext uri="{FF2B5EF4-FFF2-40B4-BE49-F238E27FC236}">
-                <a16:creationId xmlns:a16="http://schemas.microsoft.com/office/drawing/2014/main" id="{4DA436E7-D40A-4946-AAD9-BE0D57936078}"/>
+                <a16:creationId xmlns:a16="http://schemas.microsoft.com/office/drawing/2014/main" id="{A28B2001-39B2-41C0-9A27-348609D1AD6E}"/>
               </a:ext>
             </a:extLst>
           </p:cNvPr>
@@ -6063,7 +6063,7 @@
           <p:cNvPr id="110" name="">
             <a:extLst xmlns:a="http://schemas.openxmlformats.org/drawingml/2006/main">
               <a:ext uri="{FF2B5EF4-FFF2-40B4-BE49-F238E27FC236}">
-                <a16:creationId xmlns:a16="http://schemas.microsoft.com/office/drawing/2014/main" id="{F65953AE-32CD-4735-8CE7-8FA7B4EF4792}"/>
+                <a16:creationId xmlns:a16="http://schemas.microsoft.com/office/drawing/2014/main" id="{95C250A1-8397-4BAF-8C2F-65E6DA8B4906}"/>
               </a:ext>
             </a:extLst>
           </p:cNvPr>
@@ -6097,7 +6097,7 @@
           <p:cNvPr id="111" name="">
             <a:extLst xmlns:a="http://schemas.openxmlformats.org/drawingml/2006/main">
               <a:ext uri="{FF2B5EF4-FFF2-40B4-BE49-F238E27FC236}">
-                <a16:creationId xmlns:a16="http://schemas.microsoft.com/office/drawing/2014/main" id="{A750F0A7-2408-458E-93CD-48D075ABE61C}"/>
+                <a16:creationId xmlns:a16="http://schemas.microsoft.com/office/drawing/2014/main" id="{FF5A2BD9-4D92-448D-BD8D-0AF8806BF1EC}"/>
               </a:ext>
             </a:extLst>
           </p:cNvPr>
@@ -6131,7 +6131,7 @@
           <p:cNvPr id="112" name="">
             <a:extLst xmlns:a="http://schemas.openxmlformats.org/drawingml/2006/main">
               <a:ext uri="{FF2B5EF4-FFF2-40B4-BE49-F238E27FC236}">
-                <a16:creationId xmlns:a16="http://schemas.microsoft.com/office/drawing/2014/main" id="{E0A27A55-3739-439A-9DC9-6ABC25B605DB}"/>
+                <a16:creationId xmlns:a16="http://schemas.microsoft.com/office/drawing/2014/main" id="{2FD0ECD2-540B-4575-ACC9-3EA0AAB29BED}"/>
               </a:ext>
             </a:extLst>
           </p:cNvPr>
@@ -6165,7 +6165,7 @@
           <p:cNvPr id="113" name="">
             <a:extLst xmlns:a="http://schemas.openxmlformats.org/drawingml/2006/main">
               <a:ext uri="{FF2B5EF4-FFF2-40B4-BE49-F238E27FC236}">
-                <a16:creationId xmlns:a16="http://schemas.microsoft.com/office/drawing/2014/main" id="{897A895D-F365-4C4E-86B5-B0A5A8C624F7}"/>
+                <a16:creationId xmlns:a16="http://schemas.microsoft.com/office/drawing/2014/main" id="{5E957B8A-80E8-4EE5-8178-4D632D935B79}"/>
               </a:ext>
             </a:extLst>
           </p:cNvPr>
@@ -6199,7 +6199,7 @@
           <p:cNvPr id="114" name="">
             <a:extLst xmlns:a="http://schemas.openxmlformats.org/drawingml/2006/main">
               <a:ext uri="{FF2B5EF4-FFF2-40B4-BE49-F238E27FC236}">
-                <a16:creationId xmlns:a16="http://schemas.microsoft.com/office/drawing/2014/main" id="{B7D15151-A981-4A2D-AA23-8370758FFA90}"/>
+                <a16:creationId xmlns:a16="http://schemas.microsoft.com/office/drawing/2014/main" id="{37181BF4-6224-43B9-B1C0-FB80DCE79277}"/>
               </a:ext>
             </a:extLst>
           </p:cNvPr>
@@ -6262,7 +6262,7 @@
           <p:cNvPr id="115" name="">
             <a:extLst xmlns:a="http://schemas.openxmlformats.org/drawingml/2006/main">
               <a:ext uri="{FF2B5EF4-FFF2-40B4-BE49-F238E27FC236}">
-                <a16:creationId xmlns:a16="http://schemas.microsoft.com/office/drawing/2014/main" id="{DBC49F1A-7DE7-4256-9B9F-4EC35292C902}"/>
+                <a16:creationId xmlns:a16="http://schemas.microsoft.com/office/drawing/2014/main" id="{57854300-DEED-447E-9DAD-312505C3B17F}"/>
               </a:ext>
             </a:extLst>
           </p:cNvPr>
@@ -6294,7 +6294,7 @@
           <p:cNvPr id="116" name="">
             <a:extLst xmlns:a="http://schemas.openxmlformats.org/drawingml/2006/main">
               <a:ext uri="{FF2B5EF4-FFF2-40B4-BE49-F238E27FC236}">
-                <a16:creationId xmlns:a16="http://schemas.microsoft.com/office/drawing/2014/main" id="{91302C51-71DC-49B4-A7D1-9BBAC066C702}"/>
+                <a16:creationId xmlns:a16="http://schemas.microsoft.com/office/drawing/2014/main" id="{30A659E7-40EA-4CD3-BFFB-473E0DC0A30B}"/>
               </a:ext>
             </a:extLst>
           </p:cNvPr>
@@ -6326,7 +6326,7 @@
           <p:cNvPr id="117" name="">
             <a:extLst xmlns:a="http://schemas.openxmlformats.org/drawingml/2006/main">
               <a:ext uri="{FF2B5EF4-FFF2-40B4-BE49-F238E27FC236}">
-                <a16:creationId xmlns:a16="http://schemas.microsoft.com/office/drawing/2014/main" id="{76984B30-587E-44C1-831C-5ADFB0E2BC23}"/>
+                <a16:creationId xmlns:a16="http://schemas.microsoft.com/office/drawing/2014/main" id="{22BA769A-5D70-44B3-A509-CB847E8AF766}"/>
               </a:ext>
             </a:extLst>
           </p:cNvPr>
@@ -6389,7 +6389,7 @@
           <p:cNvPr id="118" name="">
             <a:extLst xmlns:a="http://schemas.openxmlformats.org/drawingml/2006/main">
               <a:ext uri="{FF2B5EF4-FFF2-40B4-BE49-F238E27FC236}">
-                <a16:creationId xmlns:a16="http://schemas.microsoft.com/office/drawing/2014/main" id="{DCB11B5C-6F4D-4D95-8FDE-879889EE732B}"/>
+                <a16:creationId xmlns:a16="http://schemas.microsoft.com/office/drawing/2014/main" id="{401AA6F7-4AC5-40F6-9E3F-4A839544E4E0}"/>
               </a:ext>
             </a:extLst>
           </p:cNvPr>
@@ -6421,7 +6421,7 @@
           <p:cNvPr id="119" name="">
             <a:extLst xmlns:a="http://schemas.openxmlformats.org/drawingml/2006/main">
               <a:ext uri="{FF2B5EF4-FFF2-40B4-BE49-F238E27FC236}">
-                <a16:creationId xmlns:a16="http://schemas.microsoft.com/office/drawing/2014/main" id="{AD5E849B-2B15-4239-8472-A41C5BF88DB9}"/>
+                <a16:creationId xmlns:a16="http://schemas.microsoft.com/office/drawing/2014/main" id="{17C9A6C5-0833-43F6-8D6F-0447AC9B3DE0}"/>
               </a:ext>
             </a:extLst>
           </p:cNvPr>
@@ -6453,7 +6453,7 @@
           <p:cNvPr id="120" name="">
             <a:extLst xmlns:a="http://schemas.openxmlformats.org/drawingml/2006/main">
               <a:ext uri="{FF2B5EF4-FFF2-40B4-BE49-F238E27FC236}">
-                <a16:creationId xmlns:a16="http://schemas.microsoft.com/office/drawing/2014/main" id="{1651E290-8C6D-4D49-9483-A0D01CF73FDC}"/>
+                <a16:creationId xmlns:a16="http://schemas.microsoft.com/office/drawing/2014/main" id="{A4F22F63-3B68-497E-BF4F-6AB36BEB521C}"/>
               </a:ext>
             </a:extLst>
           </p:cNvPr>
@@ -6516,7 +6516,7 @@
           <p:cNvPr id="121" name="">
             <a:extLst xmlns:a="http://schemas.openxmlformats.org/drawingml/2006/main">
               <a:ext uri="{FF2B5EF4-FFF2-40B4-BE49-F238E27FC236}">
-                <a16:creationId xmlns:a16="http://schemas.microsoft.com/office/drawing/2014/main" id="{E8547B03-77B0-4F6E-97A9-F8ED45D0F6BD}"/>
+                <a16:creationId xmlns:a16="http://schemas.microsoft.com/office/drawing/2014/main" id="{7E21BE7F-58FF-41F5-8B6E-B7B89EEE4685}"/>
               </a:ext>
             </a:extLst>
           </p:cNvPr>
@@ -6548,7 +6548,7 @@
           <p:cNvPr id="122" name="">
             <a:extLst xmlns:a="http://schemas.openxmlformats.org/drawingml/2006/main">
               <a:ext uri="{FF2B5EF4-FFF2-40B4-BE49-F238E27FC236}">
-                <a16:creationId xmlns:a16="http://schemas.microsoft.com/office/drawing/2014/main" id="{8577556A-9981-4042-9171-4DD3BB6AF467}"/>
+                <a16:creationId xmlns:a16="http://schemas.microsoft.com/office/drawing/2014/main" id="{E0CD0E48-C8F0-4B4F-BE8D-E3AEF0D8892A}"/>
               </a:ext>
             </a:extLst>
           </p:cNvPr>
@@ -6580,7 +6580,7 @@
           <p:cNvPr id="123" name="">
             <a:extLst xmlns:a="http://schemas.openxmlformats.org/drawingml/2006/main">
               <a:ext uri="{FF2B5EF4-FFF2-40B4-BE49-F238E27FC236}">
-                <a16:creationId xmlns:a16="http://schemas.microsoft.com/office/drawing/2014/main" id="{A0199B2F-0955-45B1-9843-E177F1BBA110}"/>
+                <a16:creationId xmlns:a16="http://schemas.microsoft.com/office/drawing/2014/main" id="{E0BC1AFC-A827-4136-BB5A-9E02923E0A0A}"/>
               </a:ext>
             </a:extLst>
           </p:cNvPr>
@@ -6643,19 +6643,19 @@
           <p:cNvPr id="124" name="">
             <a:extLst xmlns:a="http://schemas.openxmlformats.org/drawingml/2006/main">
               <a:ext uri="{FF2B5EF4-FFF2-40B4-BE49-F238E27FC236}">
-                <a16:creationId xmlns:a16="http://schemas.microsoft.com/office/drawing/2014/main" id="{C5675E6E-AFB4-4B31-94D3-43E83BBE0F0F}"/>
-              </a:ext>
-            </a:extLst>
-          </p:cNvPr>
-          <p:cNvSpPr>
-            <a:spLocks xmlns:a="http://schemas.openxmlformats.org/drawingml/2006/main" noGrp="1"/>
-          </p:cNvSpPr>
-          <p:nvPr/>
-        </p:nvSpPr>
-        <p:spPr>
-          <a:xfrm xmlns:a="http://schemas.openxmlformats.org/drawingml/2006/main">
-            <a:off x="7000875" y="5105400"/>
-            <a:ext cx="4095750" cy="685800"/>
+                <a16:creationId xmlns:a16="http://schemas.microsoft.com/office/drawing/2014/main" id="{EB724EB0-E899-4DB6-9D91-658CF9E6421F}"/>
+              </a:ext>
+            </a:extLst>
+          </p:cNvPr>
+          <p:cNvSpPr>
+            <a:spLocks xmlns:a="http://schemas.openxmlformats.org/drawingml/2006/main" noGrp="1"/>
+          </p:cNvSpPr>
+          <p:nvPr/>
+        </p:nvSpPr>
+        <p:spPr>
+          <a:xfrm xmlns:a="http://schemas.openxmlformats.org/drawingml/2006/main">
+            <a:off x="7000875" y="5010150"/>
+            <a:ext cx="4095750" cy="590550"/>
           </a:xfrm>
           <a:prstGeom xmlns:a="http://schemas.openxmlformats.org/drawingml/2006/main" prst="rect">
             <a:avLst/>
@@ -6675,19 +6675,19 @@
           <p:cNvPr id="125" name="">
             <a:extLst xmlns:a="http://schemas.openxmlformats.org/drawingml/2006/main">
               <a:ext uri="{FF2B5EF4-FFF2-40B4-BE49-F238E27FC236}">
-                <a16:creationId xmlns:a16="http://schemas.microsoft.com/office/drawing/2014/main" id="{08BFF380-21D8-4154-BC83-8D376D5903CB}"/>
-              </a:ext>
-            </a:extLst>
-          </p:cNvPr>
-          <p:cNvSpPr>
-            <a:spLocks xmlns:a="http://schemas.openxmlformats.org/drawingml/2006/main" noGrp="1"/>
-          </p:cNvSpPr>
-          <p:nvPr/>
-        </p:nvSpPr>
-        <p:spPr>
-          <a:xfrm xmlns:a="http://schemas.openxmlformats.org/drawingml/2006/main">
-            <a:off x="7000875" y="5105400"/>
-            <a:ext cx="47625" cy="685800"/>
+                <a16:creationId xmlns:a16="http://schemas.microsoft.com/office/drawing/2014/main" id="{F15C74D9-ACD1-49A3-9892-3A1F1773A7A9}"/>
+              </a:ext>
+            </a:extLst>
+          </p:cNvPr>
+          <p:cNvSpPr>
+            <a:spLocks xmlns:a="http://schemas.openxmlformats.org/drawingml/2006/main" noGrp="1"/>
+          </p:cNvSpPr>
+          <p:nvPr/>
+        </p:nvSpPr>
+        <p:spPr>
+          <a:xfrm xmlns:a="http://schemas.openxmlformats.org/drawingml/2006/main">
+            <a:off x="7000875" y="5010150"/>
+            <a:ext cx="47625" cy="590550"/>
           </a:xfrm>
           <a:prstGeom xmlns:a="http://schemas.openxmlformats.org/drawingml/2006/main" prst="rect">
             <a:avLst/>
@@ -6707,19 +6707,19 @@
           <p:cNvPr id="126" name="">
             <a:extLst xmlns:a="http://schemas.openxmlformats.org/drawingml/2006/main">
               <a:ext uri="{FF2B5EF4-FFF2-40B4-BE49-F238E27FC236}">
-                <a16:creationId xmlns:a16="http://schemas.microsoft.com/office/drawing/2014/main" id="{0A6F4B34-1D1B-4C97-95C0-3F7DB10670E9}"/>
-              </a:ext>
-            </a:extLst>
-          </p:cNvPr>
-          <p:cNvSpPr>
-            <a:spLocks xmlns:a="http://schemas.openxmlformats.org/drawingml/2006/main" noGrp="1"/>
-          </p:cNvSpPr>
-          <p:nvPr/>
-        </p:nvSpPr>
-        <p:spPr>
-          <a:xfrm xmlns:a="http://schemas.openxmlformats.org/drawingml/2006/main">
-            <a:off x="7267575" y="5314950"/>
-            <a:ext cx="3333750" cy="266700"/>
+                <a16:creationId xmlns:a16="http://schemas.microsoft.com/office/drawing/2014/main" id="{01538746-28F5-4CCB-845E-BC840216C582}"/>
+              </a:ext>
+            </a:extLst>
+          </p:cNvPr>
+          <p:cNvSpPr>
+            <a:spLocks xmlns:a="http://schemas.openxmlformats.org/drawingml/2006/main" noGrp="1"/>
+          </p:cNvSpPr>
+          <p:nvPr/>
+        </p:nvSpPr>
+        <p:spPr>
+          <a:xfrm xmlns:a="http://schemas.openxmlformats.org/drawingml/2006/main">
+            <a:off x="7267575" y="5191125"/>
+            <a:ext cx="3333750" cy="247650"/>
           </a:xfrm>
           <a:prstGeom xmlns:a="http://schemas.openxmlformats.org/drawingml/2006/main" prst="rect">
             <a:avLst/>
@@ -6742,7 +6742,7 @@
           <a:lstStyle xmlns:a="http://schemas.openxmlformats.org/drawingml/2006/main"/>
           <a:p xmlns:a="http://schemas.openxmlformats.org/drawingml/2006/main">
             <a:pPr algn="l">
-              <a:defRPr sz="1425" b="1">
+              <a:defRPr sz="1350" b="1">
                 <a:solidFill>
                   <a:srgbClr val="10202A"/>
                 </a:solidFill>
@@ -6752,7 +6752,7 @@
               </a:defRPr>
             </a:pPr>
             <a:r>
-              <a:rPr sz="1425" b="1">
+              <a:rPr sz="1350" b="1">
                 <a:solidFill>
                   <a:srgbClr val="10202A"/>
                 </a:solidFill>
@@ -6770,18 +6770,18 @@
           <p:cNvPr id="127" name="">
             <a:extLst xmlns:a="http://schemas.openxmlformats.org/drawingml/2006/main">
               <a:ext uri="{FF2B5EF4-FFF2-40B4-BE49-F238E27FC236}">
-                <a16:creationId xmlns:a16="http://schemas.microsoft.com/office/drawing/2014/main" id="{65EAE2A0-9577-445C-933F-BB5CC7657660}"/>
-              </a:ext>
-            </a:extLst>
-          </p:cNvPr>
-          <p:cNvSpPr>
-            <a:spLocks xmlns:a="http://schemas.openxmlformats.org/drawingml/2006/main" noGrp="1"/>
-          </p:cNvSpPr>
-          <p:nvPr/>
-        </p:nvSpPr>
-        <p:spPr>
-          <a:xfrm xmlns:a="http://schemas.openxmlformats.org/drawingml/2006/main">
-            <a:off x="876300" y="5657850"/>
+                <a16:creationId xmlns:a16="http://schemas.microsoft.com/office/drawing/2014/main" id="{EC808D9F-BD07-47E9-AC46-A8A11CEE2A32}"/>
+              </a:ext>
+            </a:extLst>
+          </p:cNvPr>
+          <p:cNvSpPr>
+            <a:spLocks xmlns:a="http://schemas.openxmlformats.org/drawingml/2006/main" noGrp="1"/>
+          </p:cNvSpPr>
+          <p:nvPr/>
+        </p:nvSpPr>
+        <p:spPr>
+          <a:xfrm xmlns:a="http://schemas.openxmlformats.org/drawingml/2006/main">
+            <a:off x="876300" y="5848350"/>
             <a:ext cx="1600200" cy="266700"/>
           </a:xfrm>
           <a:prstGeom xmlns:a="http://schemas.openxmlformats.org/drawingml/2006/main" prst="rect">
@@ -6802,18 +6802,18 @@
           <p:cNvPr id="128" name="">
             <a:extLst xmlns:a="http://schemas.openxmlformats.org/drawingml/2006/main">
               <a:ext uri="{FF2B5EF4-FFF2-40B4-BE49-F238E27FC236}">
-                <a16:creationId xmlns:a16="http://schemas.microsoft.com/office/drawing/2014/main" id="{79F9139E-384A-49B4-BEB3-8D6522E94BA2}"/>
-              </a:ext>
-            </a:extLst>
-          </p:cNvPr>
-          <p:cNvSpPr>
-            <a:spLocks xmlns:a="http://schemas.openxmlformats.org/drawingml/2006/main" noGrp="1"/>
-          </p:cNvSpPr>
-          <p:nvPr/>
-        </p:nvSpPr>
-        <p:spPr>
-          <a:xfrm xmlns:a="http://schemas.openxmlformats.org/drawingml/2006/main">
-            <a:off x="971550" y="5715000"/>
+                <a16:creationId xmlns:a16="http://schemas.microsoft.com/office/drawing/2014/main" id="{E828E894-7E9A-4B1D-BCD5-633B8C47406F}"/>
+              </a:ext>
+            </a:extLst>
+          </p:cNvPr>
+          <p:cNvSpPr>
+            <a:spLocks xmlns:a="http://schemas.openxmlformats.org/drawingml/2006/main" noGrp="1"/>
+          </p:cNvSpPr>
+          <p:nvPr/>
+        </p:nvSpPr>
+        <p:spPr>
+          <a:xfrm xmlns:a="http://schemas.openxmlformats.org/drawingml/2006/main">
+            <a:off x="971550" y="5905500"/>
             <a:ext cx="1409700" cy="171450"/>
           </a:xfrm>
           <a:prstGeom xmlns:a="http://schemas.openxmlformats.org/drawingml/2006/main" prst="rect">
@@ -6865,18 +6865,18 @@
           <p:cNvPr id="129" name="">
             <a:extLst xmlns:a="http://schemas.openxmlformats.org/drawingml/2006/main">
               <a:ext uri="{FF2B5EF4-FFF2-40B4-BE49-F238E27FC236}">
-                <a16:creationId xmlns:a16="http://schemas.microsoft.com/office/drawing/2014/main" id="{101C5966-53E1-4016-A59D-5D20AB3E0399}"/>
-              </a:ext>
-            </a:extLst>
-          </p:cNvPr>
-          <p:cNvSpPr>
-            <a:spLocks xmlns:a="http://schemas.openxmlformats.org/drawingml/2006/main" noGrp="1"/>
-          </p:cNvSpPr>
-          <p:nvPr/>
-        </p:nvSpPr>
-        <p:spPr>
-          <a:xfrm xmlns:a="http://schemas.openxmlformats.org/drawingml/2006/main">
-            <a:off x="8858250" y="5657850"/>
+                <a16:creationId xmlns:a16="http://schemas.microsoft.com/office/drawing/2014/main" id="{0D765698-8B21-47F4-901E-E5D797BE23FC}"/>
+              </a:ext>
+            </a:extLst>
+          </p:cNvPr>
+          <p:cNvSpPr>
+            <a:spLocks xmlns:a="http://schemas.openxmlformats.org/drawingml/2006/main" noGrp="1"/>
+          </p:cNvSpPr>
+          <p:nvPr/>
+        </p:nvSpPr>
+        <p:spPr>
+          <a:xfrm xmlns:a="http://schemas.openxmlformats.org/drawingml/2006/main">
+            <a:off x="8858250" y="5848350"/>
             <a:ext cx="2000250" cy="266700"/>
           </a:xfrm>
           <a:prstGeom xmlns:a="http://schemas.openxmlformats.org/drawingml/2006/main" prst="rect">
@@ -6897,18 +6897,18 @@
           <p:cNvPr id="130" name="">
             <a:extLst xmlns:a="http://schemas.openxmlformats.org/drawingml/2006/main">
               <a:ext uri="{FF2B5EF4-FFF2-40B4-BE49-F238E27FC236}">
-                <a16:creationId xmlns:a16="http://schemas.microsoft.com/office/drawing/2014/main" id="{B5434954-9787-4DE0-8382-9F5716E7609E}"/>
-              </a:ext>
-            </a:extLst>
-          </p:cNvPr>
-          <p:cNvSpPr>
-            <a:spLocks xmlns:a="http://schemas.openxmlformats.org/drawingml/2006/main" noGrp="1"/>
-          </p:cNvSpPr>
-          <p:nvPr/>
-        </p:nvSpPr>
-        <p:spPr>
-          <a:xfrm xmlns:a="http://schemas.openxmlformats.org/drawingml/2006/main">
-            <a:off x="8953500" y="5715000"/>
+                <a16:creationId xmlns:a16="http://schemas.microsoft.com/office/drawing/2014/main" id="{6BEE59BD-0397-4384-9CAA-D3B0DCB091B9}"/>
+              </a:ext>
+            </a:extLst>
+          </p:cNvPr>
+          <p:cNvSpPr>
+            <a:spLocks xmlns:a="http://schemas.openxmlformats.org/drawingml/2006/main" noGrp="1"/>
+          </p:cNvSpPr>
+          <p:nvPr/>
+        </p:nvSpPr>
+        <p:spPr>
+          <a:xfrm xmlns:a="http://schemas.openxmlformats.org/drawingml/2006/main">
+            <a:off x="8953500" y="5905500"/>
             <a:ext cx="1809750" cy="171450"/>
           </a:xfrm>
           <a:prstGeom xmlns:a="http://schemas.openxmlformats.org/drawingml/2006/main" prst="rect">
@@ -6960,7 +6960,7 @@
           <p:cNvPr id="131" name="">
             <a:extLst xmlns:a="http://schemas.openxmlformats.org/drawingml/2006/main">
               <a:ext uri="{FF2B5EF4-FFF2-40B4-BE49-F238E27FC236}">
-                <a16:creationId xmlns:a16="http://schemas.microsoft.com/office/drawing/2014/main" id="{AA883A8D-1053-406B-964D-5448F13A365A}"/>
+                <a16:creationId xmlns:a16="http://schemas.microsoft.com/office/drawing/2014/main" id="{01F29113-84C6-4571-BDB6-2E0C3541B442}"/>
               </a:ext>
             </a:extLst>
           </p:cNvPr>
@@ -6992,7 +6992,7 @@
           <p:cNvPr id="132" name="">
             <a:extLst xmlns:a="http://schemas.openxmlformats.org/drawingml/2006/main">
               <a:ext uri="{FF2B5EF4-FFF2-40B4-BE49-F238E27FC236}">
-                <a16:creationId xmlns:a16="http://schemas.microsoft.com/office/drawing/2014/main" id="{4F19C877-4790-4309-BFD9-FD0CB8B66BD8}"/>
+                <a16:creationId xmlns:a16="http://schemas.microsoft.com/office/drawing/2014/main" id="{1056A67C-05B2-40FE-94B5-DF0A5C752A1F}"/>
               </a:ext>
             </a:extLst>
           </p:cNvPr>
@@ -7055,7 +7055,7 @@
           <p:cNvPr id="133" name="">
             <a:extLst xmlns:a="http://schemas.openxmlformats.org/drawingml/2006/main">
               <a:ext uri="{FF2B5EF4-FFF2-40B4-BE49-F238E27FC236}">
-                <a16:creationId xmlns:a16="http://schemas.microsoft.com/office/drawing/2014/main" id="{55E9DFA7-9148-4DEF-9EA5-1F6B407EE01D}"/>
+                <a16:creationId xmlns:a16="http://schemas.microsoft.com/office/drawing/2014/main" id="{381657C3-E278-422F-A2E9-ED42134ABD1B}"/>
               </a:ext>
             </a:extLst>
           </p:cNvPr>
@@ -7116,7 +7116,7 @@
     </p:spTree>
     <p:extLst>
       <p:ext uri="{BB962C8B-B14F-4D97-AF65-F5344CB8AC3E}">
-        <p14:creationId xmlns:p14="http://schemas.microsoft.com/office/powerpoint/2010/main" val="1085448211"/>
+        <p14:creationId xmlns:p14="http://schemas.microsoft.com/office/powerpoint/2010/main" val="40265662"/>
       </p:ext>
     </p:extLst>
   </p:cSld>
@@ -7147,7 +7147,7 @@
           <p:cNvPr id="1" name="">
             <a:extLst xmlns:a="http://schemas.openxmlformats.org/drawingml/2006/main">
               <a:ext uri="{FF2B5EF4-FFF2-40B4-BE49-F238E27FC236}">
-                <a16:creationId xmlns:a16="http://schemas.microsoft.com/office/drawing/2014/main" id="{0351C407-4BE0-4394-9823-EC52EC93F13A}"/>
+                <a16:creationId xmlns:a16="http://schemas.microsoft.com/office/drawing/2014/main" id="{C82D00C0-825C-432D-B7C8-42338A6AD800}"/>
               </a:ext>
             </a:extLst>
           </p:cNvPr>
@@ -7210,7 +7210,7 @@
           <p:cNvPr id="2" name="">
             <a:extLst xmlns:a="http://schemas.openxmlformats.org/drawingml/2006/main">
               <a:ext uri="{FF2B5EF4-FFF2-40B4-BE49-F238E27FC236}">
-                <a16:creationId xmlns:a16="http://schemas.microsoft.com/office/drawing/2014/main" id="{22AC6580-6054-49C5-80FD-EC1EBCE57F3D}"/>
+                <a16:creationId xmlns:a16="http://schemas.microsoft.com/office/drawing/2014/main" id="{2406EF05-D790-4AA1-94A2-A7A5C8D17CAC}"/>
               </a:ext>
             </a:extLst>
           </p:cNvPr>
@@ -7277,7 +7277,7 @@
           <p:cNvPr id="3" name="">
             <a:extLst xmlns:a="http://schemas.openxmlformats.org/drawingml/2006/main">
               <a:ext uri="{FF2B5EF4-FFF2-40B4-BE49-F238E27FC236}">
-                <a16:creationId xmlns:a16="http://schemas.microsoft.com/office/drawing/2014/main" id="{BE928C05-F287-48DA-A117-4AD9AED5D977}"/>
+                <a16:creationId xmlns:a16="http://schemas.microsoft.com/office/drawing/2014/main" id="{B38B1ACB-C4A8-44C9-9BCD-9086BB214459}"/>
               </a:ext>
             </a:extLst>
           </p:cNvPr>
@@ -7344,7 +7344,7 @@
           <p:cNvPr id="4" name="">
             <a:extLst xmlns:a="http://schemas.openxmlformats.org/drawingml/2006/main">
               <a:ext uri="{FF2B5EF4-FFF2-40B4-BE49-F238E27FC236}">
-                <a16:creationId xmlns:a16="http://schemas.microsoft.com/office/drawing/2014/main" id="{F71D10B7-4E51-4D7B-895D-5D1E4DB9CB02}"/>
+                <a16:creationId xmlns:a16="http://schemas.microsoft.com/office/drawing/2014/main" id="{B204AEC4-250E-46EB-A20E-1FA9694A4A8D}"/>
               </a:ext>
             </a:extLst>
           </p:cNvPr>
@@ -7407,7 +7407,7 @@
           <p:cNvPr id="5" name="">
             <a:extLst xmlns:a="http://schemas.openxmlformats.org/drawingml/2006/main">
               <a:ext uri="{FF2B5EF4-FFF2-40B4-BE49-F238E27FC236}">
-                <a16:creationId xmlns:a16="http://schemas.microsoft.com/office/drawing/2014/main" id="{91981E1B-E2F9-486E-9EA8-C94AADA17CDB}"/>
+                <a16:creationId xmlns:a16="http://schemas.microsoft.com/office/drawing/2014/main" id="{184DE7AB-EA3B-41F3-A08B-27A564CA97DF}"/>
               </a:ext>
             </a:extLst>
           </p:cNvPr>
@@ -7474,7 +7474,7 @@
           <p:cNvPr id="6" name="">
             <a:extLst xmlns:a="http://schemas.openxmlformats.org/drawingml/2006/main">
               <a:ext uri="{FF2B5EF4-FFF2-40B4-BE49-F238E27FC236}">
-                <a16:creationId xmlns:a16="http://schemas.microsoft.com/office/drawing/2014/main" id="{99047BC3-F456-4928-A261-142A7A72C412}"/>
+                <a16:creationId xmlns:a16="http://schemas.microsoft.com/office/drawing/2014/main" id="{18FD7856-4D79-459D-A312-F947C15B0019}"/>
               </a:ext>
             </a:extLst>
           </p:cNvPr>
@@ -7537,7 +7537,7 @@
           <p:cNvPr id="7" name="">
             <a:extLst xmlns:a="http://schemas.openxmlformats.org/drawingml/2006/main">
               <a:ext uri="{FF2B5EF4-FFF2-40B4-BE49-F238E27FC236}">
-                <a16:creationId xmlns:a16="http://schemas.microsoft.com/office/drawing/2014/main" id="{537706F1-AFD5-44FF-9464-02A66F41C22B}"/>
+                <a16:creationId xmlns:a16="http://schemas.microsoft.com/office/drawing/2014/main" id="{5739EB67-5C9D-4E35-B467-326ED1911E7B}"/>
               </a:ext>
             </a:extLst>
           </p:cNvPr>
@@ -7604,7 +7604,7 @@
           <p:cNvPr id="8" name="">
             <a:extLst xmlns:a="http://schemas.openxmlformats.org/drawingml/2006/main">
               <a:ext uri="{FF2B5EF4-FFF2-40B4-BE49-F238E27FC236}">
-                <a16:creationId xmlns:a16="http://schemas.microsoft.com/office/drawing/2014/main" id="{42C62731-2C5F-42D0-9BD6-F392DE314013}"/>
+                <a16:creationId xmlns:a16="http://schemas.microsoft.com/office/drawing/2014/main" id="{B45E81CC-B169-42E4-8C1B-11B23710F433}"/>
               </a:ext>
             </a:extLst>
           </p:cNvPr>
@@ -7667,7 +7667,7 @@
           <p:cNvPr id="9" name="">
             <a:extLst xmlns:a="http://schemas.openxmlformats.org/drawingml/2006/main">
               <a:ext uri="{FF2B5EF4-FFF2-40B4-BE49-F238E27FC236}">
-                <a16:creationId xmlns:a16="http://schemas.microsoft.com/office/drawing/2014/main" id="{82C2299B-C1C1-4E39-A6A2-1DCBBDE1B0DB}"/>
+                <a16:creationId xmlns:a16="http://schemas.microsoft.com/office/drawing/2014/main" id="{0B2F75F6-F82A-47EA-A803-73D5252456EE}"/>
               </a:ext>
             </a:extLst>
           </p:cNvPr>
@@ -7734,7 +7734,7 @@
           <p:cNvPr id="10" name="">
             <a:extLst xmlns:a="http://schemas.openxmlformats.org/drawingml/2006/main">
               <a:ext uri="{FF2B5EF4-FFF2-40B4-BE49-F238E27FC236}">
-                <a16:creationId xmlns:a16="http://schemas.microsoft.com/office/drawing/2014/main" id="{94B23B9D-CF5C-4742-ACCE-76FBB22C1502}"/>
+                <a16:creationId xmlns:a16="http://schemas.microsoft.com/office/drawing/2014/main" id="{225FBCC1-37A7-4171-9683-12CAA2CFACDD}"/>
               </a:ext>
             </a:extLst>
           </p:cNvPr>
@@ -7797,7 +7797,7 @@
           <p:cNvPr id="11" name="">
             <a:extLst xmlns:a="http://schemas.openxmlformats.org/drawingml/2006/main">
               <a:ext uri="{FF2B5EF4-FFF2-40B4-BE49-F238E27FC236}">
-                <a16:creationId xmlns:a16="http://schemas.microsoft.com/office/drawing/2014/main" id="{5D3FE6AD-902E-4EFD-8792-88F8D6FDB52D}"/>
+                <a16:creationId xmlns:a16="http://schemas.microsoft.com/office/drawing/2014/main" id="{6FD0B103-D253-47C0-870A-B5111345A538}"/>
               </a:ext>
             </a:extLst>
           </p:cNvPr>
@@ -7864,7 +7864,7 @@
           <p:cNvPr id="12" name="">
             <a:extLst xmlns:a="http://schemas.openxmlformats.org/drawingml/2006/main">
               <a:ext uri="{FF2B5EF4-FFF2-40B4-BE49-F238E27FC236}">
-                <a16:creationId xmlns:a16="http://schemas.microsoft.com/office/drawing/2014/main" id="{BB0102F0-9892-4EC4-A2F8-535706ED87FB}"/>
+                <a16:creationId xmlns:a16="http://schemas.microsoft.com/office/drawing/2014/main" id="{996FCA17-2CD2-4E73-BF08-68F70CEB02B1}"/>
               </a:ext>
             </a:extLst>
           </p:cNvPr>
@@ -7896,7 +7896,7 @@
           <p:cNvPr id="13" name="">
             <a:extLst xmlns:a="http://schemas.openxmlformats.org/drawingml/2006/main">
               <a:ext uri="{FF2B5EF4-FFF2-40B4-BE49-F238E27FC236}">
-                <a16:creationId xmlns:a16="http://schemas.microsoft.com/office/drawing/2014/main" id="{2C465B93-D6EC-4C1F-B5B4-7F7E5935E053}"/>
+                <a16:creationId xmlns:a16="http://schemas.microsoft.com/office/drawing/2014/main" id="{92922325-6C90-45D1-860B-32C7EAEF17BC}"/>
               </a:ext>
             </a:extLst>
           </p:cNvPr>
@@ -7959,7 +7959,7 @@
           <p:cNvPr id="14" name="">
             <a:extLst xmlns:a="http://schemas.openxmlformats.org/drawingml/2006/main">
               <a:ext uri="{FF2B5EF4-FFF2-40B4-BE49-F238E27FC236}">
-                <a16:creationId xmlns:a16="http://schemas.microsoft.com/office/drawing/2014/main" id="{2D486FEE-210E-45B9-BE89-D0F6FDFACBEF}"/>
+                <a16:creationId xmlns:a16="http://schemas.microsoft.com/office/drawing/2014/main" id="{95C614E2-9551-4FBD-B63C-03FAB8FE1790}"/>
               </a:ext>
             </a:extLst>
           </p:cNvPr>
@@ -8022,7 +8022,7 @@
           <p:cNvPr id="15" name="">
             <a:extLst xmlns:a="http://schemas.openxmlformats.org/drawingml/2006/main">
               <a:ext uri="{FF2B5EF4-FFF2-40B4-BE49-F238E27FC236}">
-                <a16:creationId xmlns:a16="http://schemas.microsoft.com/office/drawing/2014/main" id="{7BFF962B-99AE-4733-8DE5-B265CF2E6567}"/>
+                <a16:creationId xmlns:a16="http://schemas.microsoft.com/office/drawing/2014/main" id="{7FBB04BD-F459-4008-8393-CF4FB6B9EEED}"/>
               </a:ext>
             </a:extLst>
           </p:cNvPr>
@@ -8034,7 +8034,7 @@
         <p:spPr>
           <a:xfrm xmlns:a="http://schemas.openxmlformats.org/drawingml/2006/main">
             <a:off x="3295650" y="4410075"/>
-            <a:ext cx="1619250" cy="114300"/>
+            <a:ext cx="1257300" cy="114300"/>
           </a:xfrm>
           <a:prstGeom xmlns:a="http://schemas.openxmlformats.org/drawingml/2006/main" prst="rect">
             <a:avLst/>
@@ -8056,7 +8056,7 @@
           <p:cNvPr id="16" name="">
             <a:extLst xmlns:a="http://schemas.openxmlformats.org/drawingml/2006/main">
               <a:ext uri="{FF2B5EF4-FFF2-40B4-BE49-F238E27FC236}">
-                <a16:creationId xmlns:a16="http://schemas.microsoft.com/office/drawing/2014/main" id="{404F2BB3-D1AA-4BF5-8AA8-8D03725DC6B0}"/>
+                <a16:creationId xmlns:a16="http://schemas.microsoft.com/office/drawing/2014/main" id="{034D56D1-8041-4737-8B4E-E0474526C1B6}"/>
               </a:ext>
             </a:extLst>
           </p:cNvPr>
@@ -8068,7 +8068,7 @@
         <p:spPr>
           <a:xfrm xmlns:a="http://schemas.openxmlformats.org/drawingml/2006/main">
             <a:off x="3295650" y="4410075"/>
-            <a:ext cx="1619250" cy="114300"/>
+            <a:ext cx="1257300" cy="114300"/>
           </a:xfrm>
           <a:prstGeom xmlns:a="http://schemas.openxmlformats.org/drawingml/2006/main" prst="rect">
             <a:avLst/>
@@ -8088,19 +8088,19 @@
           <p:cNvPr id="17" name="">
             <a:extLst xmlns:a="http://schemas.openxmlformats.org/drawingml/2006/main">
               <a:ext uri="{FF2B5EF4-FFF2-40B4-BE49-F238E27FC236}">
-                <a16:creationId xmlns:a16="http://schemas.microsoft.com/office/drawing/2014/main" id="{AB21488A-69E9-45E2-A6A3-2CB99D5D2C4B}"/>
-              </a:ext>
-            </a:extLst>
-          </p:cNvPr>
-          <p:cNvSpPr>
-            <a:spLocks xmlns:a="http://schemas.openxmlformats.org/drawingml/2006/main" noGrp="1"/>
-          </p:cNvSpPr>
-          <p:nvPr/>
-        </p:nvSpPr>
-        <p:spPr>
-          <a:xfrm xmlns:a="http://schemas.openxmlformats.org/drawingml/2006/main">
-            <a:off x="5010150" y="4381500"/>
-            <a:ext cx="857250" cy="190500"/>
+                <a16:creationId xmlns:a16="http://schemas.microsoft.com/office/drawing/2014/main" id="{DD32C6E1-E63C-4C19-92AC-62B690B56A88}"/>
+              </a:ext>
+            </a:extLst>
+          </p:cNvPr>
+          <p:cNvSpPr>
+            <a:spLocks xmlns:a="http://schemas.openxmlformats.org/drawingml/2006/main" noGrp="1"/>
+          </p:cNvSpPr>
+          <p:nvPr/>
+        </p:nvSpPr>
+        <p:spPr>
+          <a:xfrm xmlns:a="http://schemas.openxmlformats.org/drawingml/2006/main">
+            <a:off x="4648200" y="4381500"/>
+            <a:ext cx="590550" cy="190500"/>
           </a:xfrm>
           <a:prstGeom xmlns:a="http://schemas.openxmlformats.org/drawingml/2006/main" prst="rect">
             <a:avLst/>
@@ -8151,7 +8151,7 @@
           <p:cNvPr id="18" name="">
             <a:extLst xmlns:a="http://schemas.openxmlformats.org/drawingml/2006/main">
               <a:ext uri="{FF2B5EF4-FFF2-40B4-BE49-F238E27FC236}">
-                <a16:creationId xmlns:a16="http://schemas.microsoft.com/office/drawing/2014/main" id="{23B5667A-36BE-4552-B8C9-5C40F4310923}"/>
+                <a16:creationId xmlns:a16="http://schemas.microsoft.com/office/drawing/2014/main" id="{8523C5BB-695A-487B-883F-E29EAD06695F}"/>
               </a:ext>
             </a:extLst>
           </p:cNvPr>
@@ -8214,7 +8214,7 @@
           <p:cNvPr id="19" name="">
             <a:extLst xmlns:a="http://schemas.openxmlformats.org/drawingml/2006/main">
               <a:ext uri="{FF2B5EF4-FFF2-40B4-BE49-F238E27FC236}">
-                <a16:creationId xmlns:a16="http://schemas.microsoft.com/office/drawing/2014/main" id="{250A9F75-FE83-4F81-AE32-FAFD8C3F4363}"/>
+                <a16:creationId xmlns:a16="http://schemas.microsoft.com/office/drawing/2014/main" id="{588E974F-5584-4C88-B355-E67009718367}"/>
               </a:ext>
             </a:extLst>
           </p:cNvPr>
@@ -8226,7 +8226,7 @@
         <p:spPr>
           <a:xfrm xmlns:a="http://schemas.openxmlformats.org/drawingml/2006/main">
             <a:off x="3295650" y="4733925"/>
-            <a:ext cx="1619250" cy="114300"/>
+            <a:ext cx="1257300" cy="114300"/>
           </a:xfrm>
           <a:prstGeom xmlns:a="http://schemas.openxmlformats.org/drawingml/2006/main" prst="rect">
             <a:avLst/>
@@ -8248,7 +8248,7 @@
           <p:cNvPr id="20" name="">
             <a:extLst xmlns:a="http://schemas.openxmlformats.org/drawingml/2006/main">
               <a:ext uri="{FF2B5EF4-FFF2-40B4-BE49-F238E27FC236}">
-                <a16:creationId xmlns:a16="http://schemas.microsoft.com/office/drawing/2014/main" id="{EBB6AA30-B88C-42C5-AD5F-CB8949A6D3A2}"/>
+                <a16:creationId xmlns:a16="http://schemas.microsoft.com/office/drawing/2014/main" id="{5C2DC0CA-790C-42BC-A42F-8EE63B4480E6}"/>
               </a:ext>
             </a:extLst>
           </p:cNvPr>
@@ -8260,7 +8260,7 @@
         <p:spPr>
           <a:xfrm xmlns:a="http://schemas.openxmlformats.org/drawingml/2006/main">
             <a:off x="3295650" y="4733925"/>
-            <a:ext cx="82690" cy="114300"/>
+            <a:ext cx="64207" cy="114300"/>
           </a:xfrm>
           <a:prstGeom xmlns:a="http://schemas.openxmlformats.org/drawingml/2006/main" prst="rect">
             <a:avLst/>
@@ -8280,19 +8280,19 @@
           <p:cNvPr id="21" name="">
             <a:extLst xmlns:a="http://schemas.openxmlformats.org/drawingml/2006/main">
               <a:ext uri="{FF2B5EF4-FFF2-40B4-BE49-F238E27FC236}">
-                <a16:creationId xmlns:a16="http://schemas.microsoft.com/office/drawing/2014/main" id="{BCCDE459-6A54-43CD-99DC-2C7796A85164}"/>
-              </a:ext>
-            </a:extLst>
-          </p:cNvPr>
-          <p:cNvSpPr>
-            <a:spLocks xmlns:a="http://schemas.openxmlformats.org/drawingml/2006/main" noGrp="1"/>
-          </p:cNvSpPr>
-          <p:nvPr/>
-        </p:nvSpPr>
-        <p:spPr>
-          <a:xfrm xmlns:a="http://schemas.openxmlformats.org/drawingml/2006/main">
-            <a:off x="5010150" y="4705350"/>
-            <a:ext cx="857250" cy="190500"/>
+                <a16:creationId xmlns:a16="http://schemas.microsoft.com/office/drawing/2014/main" id="{AC2D7A34-8557-4494-9538-76492E3F5EFD}"/>
+              </a:ext>
+            </a:extLst>
+          </p:cNvPr>
+          <p:cNvSpPr>
+            <a:spLocks xmlns:a="http://schemas.openxmlformats.org/drawingml/2006/main" noGrp="1"/>
+          </p:cNvSpPr>
+          <p:nvPr/>
+        </p:nvSpPr>
+        <p:spPr>
+          <a:xfrm xmlns:a="http://schemas.openxmlformats.org/drawingml/2006/main">
+            <a:off x="4648200" y="4705350"/>
+            <a:ext cx="590550" cy="190500"/>
           </a:xfrm>
           <a:prstGeom xmlns:a="http://schemas.openxmlformats.org/drawingml/2006/main" prst="rect">
             <a:avLst/>
@@ -8343,7 +8343,7 @@
           <p:cNvPr id="22" name="">
             <a:extLst xmlns:a="http://schemas.openxmlformats.org/drawingml/2006/main">
               <a:ext uri="{FF2B5EF4-FFF2-40B4-BE49-F238E27FC236}">
-                <a16:creationId xmlns:a16="http://schemas.microsoft.com/office/drawing/2014/main" id="{DFFB7276-A5FC-4CDB-A3F5-D5FECE86C45F}"/>
+                <a16:creationId xmlns:a16="http://schemas.microsoft.com/office/drawing/2014/main" id="{DB607879-BA2C-4292-B539-241EEFDA7D58}"/>
               </a:ext>
             </a:extLst>
           </p:cNvPr>
@@ -8406,7 +8406,7 @@
           <p:cNvPr id="23" name="">
             <a:extLst xmlns:a="http://schemas.openxmlformats.org/drawingml/2006/main">
               <a:ext uri="{FF2B5EF4-FFF2-40B4-BE49-F238E27FC236}">
-                <a16:creationId xmlns:a16="http://schemas.microsoft.com/office/drawing/2014/main" id="{DC70889B-582A-4005-ADD7-46E83BC31F22}"/>
+                <a16:creationId xmlns:a16="http://schemas.microsoft.com/office/drawing/2014/main" id="{1C211367-19E8-4FBB-A3FC-C3EF60F97D4C}"/>
               </a:ext>
             </a:extLst>
           </p:cNvPr>
@@ -8418,7 +8418,7 @@
         <p:spPr>
           <a:xfrm xmlns:a="http://schemas.openxmlformats.org/drawingml/2006/main">
             <a:off x="3295650" y="5057775"/>
-            <a:ext cx="1619250" cy="114300"/>
+            <a:ext cx="1257300" cy="114300"/>
           </a:xfrm>
           <a:prstGeom xmlns:a="http://schemas.openxmlformats.org/drawingml/2006/main" prst="rect">
             <a:avLst/>
@@ -8440,7 +8440,7 @@
           <p:cNvPr id="24" name="">
             <a:extLst xmlns:a="http://schemas.openxmlformats.org/drawingml/2006/main">
               <a:ext uri="{FF2B5EF4-FFF2-40B4-BE49-F238E27FC236}">
-                <a16:creationId xmlns:a16="http://schemas.microsoft.com/office/drawing/2014/main" id="{8D558114-8177-4E67-BD9B-1DB3114D3934}"/>
+                <a16:creationId xmlns:a16="http://schemas.microsoft.com/office/drawing/2014/main" id="{453B7AFC-5F0D-4677-BBAB-00775D1F4ED2}"/>
               </a:ext>
             </a:extLst>
           </p:cNvPr>
@@ -8452,7 +8452,7 @@
         <p:spPr>
           <a:xfrm xmlns:a="http://schemas.openxmlformats.org/drawingml/2006/main">
             <a:off x="3295650" y="5057775"/>
-            <a:ext cx="80539" cy="114300"/>
+            <a:ext cx="62536" cy="114300"/>
           </a:xfrm>
           <a:prstGeom xmlns:a="http://schemas.openxmlformats.org/drawingml/2006/main" prst="rect">
             <a:avLst/>
@@ -8472,19 +8472,19 @@
           <p:cNvPr id="25" name="">
             <a:extLst xmlns:a="http://schemas.openxmlformats.org/drawingml/2006/main">
               <a:ext uri="{FF2B5EF4-FFF2-40B4-BE49-F238E27FC236}">
-                <a16:creationId xmlns:a16="http://schemas.microsoft.com/office/drawing/2014/main" id="{FB9CC5AA-E2C5-4B0B-86AA-72D179392E66}"/>
-              </a:ext>
-            </a:extLst>
-          </p:cNvPr>
-          <p:cNvSpPr>
-            <a:spLocks xmlns:a="http://schemas.openxmlformats.org/drawingml/2006/main" noGrp="1"/>
-          </p:cNvSpPr>
-          <p:nvPr/>
-        </p:nvSpPr>
-        <p:spPr>
-          <a:xfrm xmlns:a="http://schemas.openxmlformats.org/drawingml/2006/main">
-            <a:off x="5010150" y="5029200"/>
-            <a:ext cx="857250" cy="190500"/>
+                <a16:creationId xmlns:a16="http://schemas.microsoft.com/office/drawing/2014/main" id="{2ADAFEBB-220E-4821-9FDE-7B19CB78BF57}"/>
+              </a:ext>
+            </a:extLst>
+          </p:cNvPr>
+          <p:cNvSpPr>
+            <a:spLocks xmlns:a="http://schemas.openxmlformats.org/drawingml/2006/main" noGrp="1"/>
+          </p:cNvSpPr>
+          <p:nvPr/>
+        </p:nvSpPr>
+        <p:spPr>
+          <a:xfrm xmlns:a="http://schemas.openxmlformats.org/drawingml/2006/main">
+            <a:off x="4648200" y="5029200"/>
+            <a:ext cx="590550" cy="190500"/>
           </a:xfrm>
           <a:prstGeom xmlns:a="http://schemas.openxmlformats.org/drawingml/2006/main" prst="rect">
             <a:avLst/>
@@ -8535,19 +8535,19 @@
           <p:cNvPr id="26" name="">
             <a:extLst xmlns:a="http://schemas.openxmlformats.org/drawingml/2006/main">
               <a:ext uri="{FF2B5EF4-FFF2-40B4-BE49-F238E27FC236}">
-                <a16:creationId xmlns:a16="http://schemas.microsoft.com/office/drawing/2014/main" id="{0D6B4621-E9A9-44C2-B4A1-4FA002A5468F}"/>
-              </a:ext>
-            </a:extLst>
-          </p:cNvPr>
-          <p:cNvSpPr>
-            <a:spLocks xmlns:a="http://schemas.openxmlformats.org/drawingml/2006/main" noGrp="1"/>
-          </p:cNvSpPr>
-          <p:nvPr/>
-        </p:nvSpPr>
-        <p:spPr>
-          <a:xfrm xmlns:a="http://schemas.openxmlformats.org/drawingml/2006/main">
-            <a:off x="3295650" y="4324350"/>
-            <a:ext cx="1752600" cy="857250"/>
+                <a16:creationId xmlns:a16="http://schemas.microsoft.com/office/drawing/2014/main" id="{84FB7AF5-A308-41CC-B363-19D862815C15}"/>
+              </a:ext>
+            </a:extLst>
+          </p:cNvPr>
+          <p:cNvSpPr>
+            <a:spLocks xmlns:a="http://schemas.openxmlformats.org/drawingml/2006/main" noGrp="1"/>
+          </p:cNvSpPr>
+          <p:nvPr/>
+        </p:nvSpPr>
+        <p:spPr>
+          <a:xfrm xmlns:a="http://schemas.openxmlformats.org/drawingml/2006/main">
+            <a:off x="914400" y="5353050"/>
+            <a:ext cx="3857625" cy="209550"/>
           </a:xfrm>
           <a:prstGeom xmlns:a="http://schemas.openxmlformats.org/drawingml/2006/main" prst="rect">
             <a:avLst/>
@@ -8571,10 +8571,10 @@
           <a:p xmlns:a="http://schemas.openxmlformats.org/drawingml/2006/main">
             <a:pPr algn="l">
               <a:lnSpc>
-                <a:spcPct val="112000"/>
+                <a:spcPct val="106000"/>
               </a:lnSpc>
               <a:buNone/>
-              <a:defRPr sz="1200" b="0">
+              <a:defRPr sz="1050" b="0">
                 <a:solidFill>
                   <a:srgbClr val="65737B"/>
                 </a:solidFill>
@@ -8584,7 +8584,7 @@
               </a:defRPr>
             </a:pPr>
             <a:r>
-              <a:rPr sz="1200" b="0">
+              <a:rPr sz="1050" b="0">
                 <a:solidFill>
                   <a:srgbClr val="65737B"/>
                 </a:solidFill>
@@ -8592,7 +8592,7 @@
                 <a:ea typeface="Aptos"/>
                 <a:cs typeface="Aptos"/>
               </a:rPr>
-              <a:t>Base dominates the listed surface today. The next layer has to separate ecosystem activity from catalog spam.</a:t>
+              <a:t>Base dominates the listed surface; the product has to separate ecosystem activity from catalog inflation.</a:t>
             </a:r>
           </a:p>
         </p:txBody>
@@ -8602,7 +8602,7 @@
           <p:cNvPr id="27" name="">
             <a:extLst xmlns:a="http://schemas.openxmlformats.org/drawingml/2006/main">
               <a:ext uri="{FF2B5EF4-FFF2-40B4-BE49-F238E27FC236}">
-                <a16:creationId xmlns:a16="http://schemas.microsoft.com/office/drawing/2014/main" id="{CAEDC7D3-2348-4168-B57F-D5EF9554831F}"/>
+                <a16:creationId xmlns:a16="http://schemas.microsoft.com/office/drawing/2014/main" id="{E6F5513A-2C80-4425-A51A-747EDF7CB242}"/>
               </a:ext>
             </a:extLst>
           </p:cNvPr>
@@ -8634,7 +8634,7 @@
           <p:cNvPr id="28" name="">
             <a:extLst xmlns:a="http://schemas.openxmlformats.org/drawingml/2006/main">
               <a:ext uri="{FF2B5EF4-FFF2-40B4-BE49-F238E27FC236}">
-                <a16:creationId xmlns:a16="http://schemas.microsoft.com/office/drawing/2014/main" id="{4405475A-8B4D-404F-9A82-02F4802E681A}"/>
+                <a16:creationId xmlns:a16="http://schemas.microsoft.com/office/drawing/2014/main" id="{331073B4-E621-4919-9F9A-91512A005722}"/>
               </a:ext>
             </a:extLst>
           </p:cNvPr>
@@ -8697,7 +8697,7 @@
           <p:cNvPr id="29" name="">
             <a:extLst xmlns:a="http://schemas.openxmlformats.org/drawingml/2006/main">
               <a:ext uri="{FF2B5EF4-FFF2-40B4-BE49-F238E27FC236}">
-                <a16:creationId xmlns:a16="http://schemas.microsoft.com/office/drawing/2014/main" id="{0F5AC131-7822-44B6-B8FC-F638F99F9B69}"/>
+                <a16:creationId xmlns:a16="http://schemas.microsoft.com/office/drawing/2014/main" id="{EEFB37B5-E593-4ECF-A0C5-09CA8DF8E5E7}"/>
               </a:ext>
             </a:extLst>
           </p:cNvPr>
@@ -8760,7 +8760,7 @@
           <p:cNvPr id="30" name="">
             <a:extLst xmlns:a="http://schemas.openxmlformats.org/drawingml/2006/main">
               <a:ext uri="{FF2B5EF4-FFF2-40B4-BE49-F238E27FC236}">
-                <a16:creationId xmlns:a16="http://schemas.microsoft.com/office/drawing/2014/main" id="{6FFDB82E-F615-426A-80BC-7A2D5BBC207A}"/>
+                <a16:creationId xmlns:a16="http://schemas.microsoft.com/office/drawing/2014/main" id="{562284EF-307D-4DE1-AA44-C809DB76F824}"/>
               </a:ext>
             </a:extLst>
           </p:cNvPr>
@@ -8772,7 +8772,7 @@
         <p:spPr>
           <a:xfrm xmlns:a="http://schemas.openxmlformats.org/drawingml/2006/main">
             <a:off x="8801100" y="4410075"/>
-            <a:ext cx="1619250" cy="114300"/>
+            <a:ext cx="1257300" cy="114300"/>
           </a:xfrm>
           <a:prstGeom xmlns:a="http://schemas.openxmlformats.org/drawingml/2006/main" prst="rect">
             <a:avLst/>
@@ -8794,7 +8794,7 @@
           <p:cNvPr id="31" name="">
             <a:extLst xmlns:a="http://schemas.openxmlformats.org/drawingml/2006/main">
               <a:ext uri="{FF2B5EF4-FFF2-40B4-BE49-F238E27FC236}">
-                <a16:creationId xmlns:a16="http://schemas.microsoft.com/office/drawing/2014/main" id="{66810B93-94C9-4C6D-A152-2D89CF49841B}"/>
+                <a16:creationId xmlns:a16="http://schemas.microsoft.com/office/drawing/2014/main" id="{E7DEF380-52AD-4BFB-B2A7-B451E3425F83}"/>
               </a:ext>
             </a:extLst>
           </p:cNvPr>
@@ -8806,7 +8806,7 @@
         <p:spPr>
           <a:xfrm xmlns:a="http://schemas.openxmlformats.org/drawingml/2006/main">
             <a:off x="8801100" y="4410075"/>
-            <a:ext cx="1619250" cy="114300"/>
+            <a:ext cx="1257300" cy="114300"/>
           </a:xfrm>
           <a:prstGeom xmlns:a="http://schemas.openxmlformats.org/drawingml/2006/main" prst="rect">
             <a:avLst/>
@@ -8826,19 +8826,19 @@
           <p:cNvPr id="32" name="">
             <a:extLst xmlns:a="http://schemas.openxmlformats.org/drawingml/2006/main">
               <a:ext uri="{FF2B5EF4-FFF2-40B4-BE49-F238E27FC236}">
-                <a16:creationId xmlns:a16="http://schemas.microsoft.com/office/drawing/2014/main" id="{EB1C0867-BB0F-47C1-8E9C-1EBA2D5EE2C1}"/>
-              </a:ext>
-            </a:extLst>
-          </p:cNvPr>
-          <p:cNvSpPr>
-            <a:spLocks xmlns:a="http://schemas.openxmlformats.org/drawingml/2006/main" noGrp="1"/>
-          </p:cNvSpPr>
-          <p:nvPr/>
-        </p:nvSpPr>
-        <p:spPr>
-          <a:xfrm xmlns:a="http://schemas.openxmlformats.org/drawingml/2006/main">
-            <a:off x="10515600" y="4381500"/>
-            <a:ext cx="857250" cy="190500"/>
+                <a16:creationId xmlns:a16="http://schemas.microsoft.com/office/drawing/2014/main" id="{5979FF5A-979C-454E-8409-FB3C6BD5B586}"/>
+              </a:ext>
+            </a:extLst>
+          </p:cNvPr>
+          <p:cNvSpPr>
+            <a:spLocks xmlns:a="http://schemas.openxmlformats.org/drawingml/2006/main" noGrp="1"/>
+          </p:cNvSpPr>
+          <p:nvPr/>
+        </p:nvSpPr>
+        <p:spPr>
+          <a:xfrm xmlns:a="http://schemas.openxmlformats.org/drawingml/2006/main">
+            <a:off x="10153650" y="4381500"/>
+            <a:ext cx="590550" cy="190500"/>
           </a:xfrm>
           <a:prstGeom xmlns:a="http://schemas.openxmlformats.org/drawingml/2006/main" prst="rect">
             <a:avLst/>
@@ -8889,7 +8889,7 @@
           <p:cNvPr id="33" name="">
             <a:extLst xmlns:a="http://schemas.openxmlformats.org/drawingml/2006/main">
               <a:ext uri="{FF2B5EF4-FFF2-40B4-BE49-F238E27FC236}">
-                <a16:creationId xmlns:a16="http://schemas.microsoft.com/office/drawing/2014/main" id="{F59220D2-28D7-4A3D-8845-DB1076C60AD9}"/>
+                <a16:creationId xmlns:a16="http://schemas.microsoft.com/office/drawing/2014/main" id="{B1937A8D-755B-4F55-A6C7-7FBE1D59A3AE}"/>
               </a:ext>
             </a:extLst>
           </p:cNvPr>
@@ -8952,7 +8952,7 @@
           <p:cNvPr id="34" name="">
             <a:extLst xmlns:a="http://schemas.openxmlformats.org/drawingml/2006/main">
               <a:ext uri="{FF2B5EF4-FFF2-40B4-BE49-F238E27FC236}">
-                <a16:creationId xmlns:a16="http://schemas.microsoft.com/office/drawing/2014/main" id="{256772F9-ECC7-4E5A-9C56-446EAC45CDA7}"/>
+                <a16:creationId xmlns:a16="http://schemas.microsoft.com/office/drawing/2014/main" id="{7B682BB0-6BD5-4AD8-ACD0-A7E0C4CD0427}"/>
               </a:ext>
             </a:extLst>
           </p:cNvPr>
@@ -8964,7 +8964,7 @@
         <p:spPr>
           <a:xfrm xmlns:a="http://schemas.openxmlformats.org/drawingml/2006/main">
             <a:off x="8801100" y="4733925"/>
-            <a:ext cx="1619250" cy="114300"/>
+            <a:ext cx="1257300" cy="114300"/>
           </a:xfrm>
           <a:prstGeom xmlns:a="http://schemas.openxmlformats.org/drawingml/2006/main" prst="rect">
             <a:avLst/>
@@ -8986,7 +8986,7 @@
           <p:cNvPr id="35" name="">
             <a:extLst xmlns:a="http://schemas.openxmlformats.org/drawingml/2006/main">
               <a:ext uri="{FF2B5EF4-FFF2-40B4-BE49-F238E27FC236}">
-                <a16:creationId xmlns:a16="http://schemas.microsoft.com/office/drawing/2014/main" id="{B99D0446-F71F-47CA-8E85-BD3F99DB003B}"/>
+                <a16:creationId xmlns:a16="http://schemas.microsoft.com/office/drawing/2014/main" id="{F4CC8A52-B799-4EB8-9877-5297C7868BF9}"/>
               </a:ext>
             </a:extLst>
           </p:cNvPr>
@@ -8998,7 +8998,7 @@
         <p:spPr>
           <a:xfrm xmlns:a="http://schemas.openxmlformats.org/drawingml/2006/main">
             <a:off x="8801100" y="4733925"/>
-            <a:ext cx="466802" cy="114300"/>
+            <a:ext cx="362458" cy="114300"/>
           </a:xfrm>
           <a:prstGeom xmlns:a="http://schemas.openxmlformats.org/drawingml/2006/main" prst="rect">
             <a:avLst/>
@@ -9018,19 +9018,19 @@
           <p:cNvPr id="36" name="">
             <a:extLst xmlns:a="http://schemas.openxmlformats.org/drawingml/2006/main">
               <a:ext uri="{FF2B5EF4-FFF2-40B4-BE49-F238E27FC236}">
-                <a16:creationId xmlns:a16="http://schemas.microsoft.com/office/drawing/2014/main" id="{643168AA-173F-4504-A5BB-DA86B4F1FF54}"/>
-              </a:ext>
-            </a:extLst>
-          </p:cNvPr>
-          <p:cNvSpPr>
-            <a:spLocks xmlns:a="http://schemas.openxmlformats.org/drawingml/2006/main" noGrp="1"/>
-          </p:cNvSpPr>
-          <p:nvPr/>
-        </p:nvSpPr>
-        <p:spPr>
-          <a:xfrm xmlns:a="http://schemas.openxmlformats.org/drawingml/2006/main">
-            <a:off x="10515600" y="4705350"/>
-            <a:ext cx="857250" cy="190500"/>
+                <a16:creationId xmlns:a16="http://schemas.microsoft.com/office/drawing/2014/main" id="{E8EE33B2-44F1-44E8-8B22-E53CF3CE4268}"/>
+              </a:ext>
+            </a:extLst>
+          </p:cNvPr>
+          <p:cNvSpPr>
+            <a:spLocks xmlns:a="http://schemas.openxmlformats.org/drawingml/2006/main" noGrp="1"/>
+          </p:cNvSpPr>
+          <p:nvPr/>
+        </p:nvSpPr>
+        <p:spPr>
+          <a:xfrm xmlns:a="http://schemas.openxmlformats.org/drawingml/2006/main">
+            <a:off x="10153650" y="4705350"/>
+            <a:ext cx="590550" cy="190500"/>
           </a:xfrm>
           <a:prstGeom xmlns:a="http://schemas.openxmlformats.org/drawingml/2006/main" prst="rect">
             <a:avLst/>
@@ -9081,7 +9081,7 @@
           <p:cNvPr id="37" name="">
             <a:extLst xmlns:a="http://schemas.openxmlformats.org/drawingml/2006/main">
               <a:ext uri="{FF2B5EF4-FFF2-40B4-BE49-F238E27FC236}">
-                <a16:creationId xmlns:a16="http://schemas.microsoft.com/office/drawing/2014/main" id="{6264B0F2-AE4D-422C-9673-8184F8D4F214}"/>
+                <a16:creationId xmlns:a16="http://schemas.microsoft.com/office/drawing/2014/main" id="{8010D889-EBEA-498E-9942-CC6D6ED9E76F}"/>
               </a:ext>
             </a:extLst>
           </p:cNvPr>
@@ -9144,7 +9144,7 @@
           <p:cNvPr id="38" name="">
             <a:extLst xmlns:a="http://schemas.openxmlformats.org/drawingml/2006/main">
               <a:ext uri="{FF2B5EF4-FFF2-40B4-BE49-F238E27FC236}">
-                <a16:creationId xmlns:a16="http://schemas.microsoft.com/office/drawing/2014/main" id="{CEE0058C-0163-46DC-A815-EC512CBF4666}"/>
+                <a16:creationId xmlns:a16="http://schemas.microsoft.com/office/drawing/2014/main" id="{6E6D94D1-8E06-4EE8-85B3-1960DAE4D502}"/>
               </a:ext>
             </a:extLst>
           </p:cNvPr>
@@ -9156,7 +9156,7 @@
         <p:spPr>
           <a:xfrm xmlns:a="http://schemas.openxmlformats.org/drawingml/2006/main">
             <a:off x="8801100" y="5057775"/>
-            <a:ext cx="1619250" cy="114300"/>
+            <a:ext cx="1257300" cy="114300"/>
           </a:xfrm>
           <a:prstGeom xmlns:a="http://schemas.openxmlformats.org/drawingml/2006/main" prst="rect">
             <a:avLst/>
@@ -9178,7 +9178,7 @@
           <p:cNvPr id="39" name="">
             <a:extLst xmlns:a="http://schemas.openxmlformats.org/drawingml/2006/main">
               <a:ext uri="{FF2B5EF4-FFF2-40B4-BE49-F238E27FC236}">
-                <a16:creationId xmlns:a16="http://schemas.microsoft.com/office/drawing/2014/main" id="{701A7984-1D1F-4043-B9D0-EDC81A0F8DF6}"/>
+                <a16:creationId xmlns:a16="http://schemas.microsoft.com/office/drawing/2014/main" id="{64752577-A6BA-4E04-854C-8C04BA9283E7}"/>
               </a:ext>
             </a:extLst>
           </p:cNvPr>
@@ -9190,7 +9190,7 @@
         <p:spPr>
           <a:xfrm xmlns:a="http://schemas.openxmlformats.org/drawingml/2006/main">
             <a:off x="8801100" y="5057775"/>
-            <a:ext cx="383680" cy="114300"/>
+            <a:ext cx="297916" cy="114300"/>
           </a:xfrm>
           <a:prstGeom xmlns:a="http://schemas.openxmlformats.org/drawingml/2006/main" prst="rect">
             <a:avLst/>
@@ -9210,19 +9210,19 @@
           <p:cNvPr id="40" name="">
             <a:extLst xmlns:a="http://schemas.openxmlformats.org/drawingml/2006/main">
               <a:ext uri="{FF2B5EF4-FFF2-40B4-BE49-F238E27FC236}">
-                <a16:creationId xmlns:a16="http://schemas.microsoft.com/office/drawing/2014/main" id="{C751EC17-1A7A-4AA7-B771-E5980729D46B}"/>
-              </a:ext>
-            </a:extLst>
-          </p:cNvPr>
-          <p:cNvSpPr>
-            <a:spLocks xmlns:a="http://schemas.openxmlformats.org/drawingml/2006/main" noGrp="1"/>
-          </p:cNvSpPr>
-          <p:nvPr/>
-        </p:nvSpPr>
-        <p:spPr>
-          <a:xfrm xmlns:a="http://schemas.openxmlformats.org/drawingml/2006/main">
-            <a:off x="10515600" y="5029200"/>
-            <a:ext cx="857250" cy="190500"/>
+                <a16:creationId xmlns:a16="http://schemas.microsoft.com/office/drawing/2014/main" id="{1EDBA5A6-9E85-406E-BF92-9F6606A98052}"/>
+              </a:ext>
+            </a:extLst>
+          </p:cNvPr>
+          <p:cNvSpPr>
+            <a:spLocks xmlns:a="http://schemas.openxmlformats.org/drawingml/2006/main" noGrp="1"/>
+          </p:cNvSpPr>
+          <p:nvPr/>
+        </p:nvSpPr>
+        <p:spPr>
+          <a:xfrm xmlns:a="http://schemas.openxmlformats.org/drawingml/2006/main">
+            <a:off x="10153650" y="5029200"/>
+            <a:ext cx="590550" cy="190500"/>
           </a:xfrm>
           <a:prstGeom xmlns:a="http://schemas.openxmlformats.org/drawingml/2006/main" prst="rect">
             <a:avLst/>
@@ -9273,19 +9273,19 @@
           <p:cNvPr id="41" name="">
             <a:extLst xmlns:a="http://schemas.openxmlformats.org/drawingml/2006/main">
               <a:ext uri="{FF2B5EF4-FFF2-40B4-BE49-F238E27FC236}">
-                <a16:creationId xmlns:a16="http://schemas.microsoft.com/office/drawing/2014/main" id="{A30D7B14-0B01-49A0-8BDC-DCB593C2938F}"/>
-              </a:ext>
-            </a:extLst>
-          </p:cNvPr>
-          <p:cNvSpPr>
-            <a:spLocks xmlns:a="http://schemas.openxmlformats.org/drawingml/2006/main" noGrp="1"/>
-          </p:cNvSpPr>
-          <p:nvPr/>
-        </p:nvSpPr>
-        <p:spPr>
-          <a:xfrm xmlns:a="http://schemas.openxmlformats.org/drawingml/2006/main">
-            <a:off x="8801100" y="4324350"/>
-            <a:ext cx="1752600" cy="857250"/>
+                <a16:creationId xmlns:a16="http://schemas.microsoft.com/office/drawing/2014/main" id="{F098F4E7-672F-408A-8B53-42B582BAD412}"/>
+              </a:ext>
+            </a:extLst>
+          </p:cNvPr>
+          <p:cNvSpPr>
+            <a:spLocks xmlns:a="http://schemas.openxmlformats.org/drawingml/2006/main" noGrp="1"/>
+          </p:cNvSpPr>
+          <p:nvPr/>
+        </p:nvSpPr>
+        <p:spPr>
+          <a:xfrm xmlns:a="http://schemas.openxmlformats.org/drawingml/2006/main">
+            <a:off x="6419850" y="5353050"/>
+            <a:ext cx="3857625" cy="209550"/>
           </a:xfrm>
           <a:prstGeom xmlns:a="http://schemas.openxmlformats.org/drawingml/2006/main" prst="rect">
             <a:avLst/>
@@ -9309,10 +9309,10 @@
           <a:p xmlns:a="http://schemas.openxmlformats.org/drawingml/2006/main">
             <a:pPr algn="l">
               <a:lnSpc>
-                <a:spcPct val="112000"/>
+                <a:spcPct val="106000"/>
               </a:lnSpc>
               <a:buNone/>
-              <a:defRPr sz="1200" b="0">
+              <a:defRPr sz="1050" b="0">
                 <a:solidFill>
                   <a:srgbClr val="65737B"/>
                 </a:solidFill>
@@ -9322,7 +9322,7 @@
               </a:defRPr>
             </a:pPr>
             <a:r>
-              <a:rPr sz="1200" b="0">
+              <a:rPr sz="1050" b="0">
                 <a:solidFill>
                   <a:srgbClr val="65737B"/>
                 </a:solidFill>
@@ -9330,7 +9330,7 @@
                 <a:ea typeface="Aptos"/>
                 <a:cs typeface="Aptos"/>
               </a:rPr>
-              <a:t>The useful primitive is the cheap probe: spend pennies, collect a receipt, stop early when evidence is weak.</a:t>
+              <a:t>The useful primitive is the cheap probe: spend pennies, collect a receipt, stop early.</a:t>
             </a:r>
           </a:p>
         </p:txBody>
@@ -9340,7 +9340,7 @@
           <p:cNvPr id="42" name="">
             <a:extLst xmlns:a="http://schemas.openxmlformats.org/drawingml/2006/main">
               <a:ext uri="{FF2B5EF4-FFF2-40B4-BE49-F238E27FC236}">
-                <a16:creationId xmlns:a16="http://schemas.microsoft.com/office/drawing/2014/main" id="{090547FE-0E3A-45E8-8E28-793D6F5542ED}"/>
+                <a16:creationId xmlns:a16="http://schemas.microsoft.com/office/drawing/2014/main" id="{73D0CB0B-F914-4617-A0A8-75443C470F15}"/>
               </a:ext>
             </a:extLst>
           </p:cNvPr>
@@ -9403,7 +9403,7 @@
           <p:cNvPr id="43" name="">
             <a:extLst xmlns:a="http://schemas.openxmlformats.org/drawingml/2006/main">
               <a:ext uri="{FF2B5EF4-FFF2-40B4-BE49-F238E27FC236}">
-                <a16:creationId xmlns:a16="http://schemas.microsoft.com/office/drawing/2014/main" id="{8FFA27BD-0DE3-4471-B605-397AE6E7D6FA}"/>
+                <a16:creationId xmlns:a16="http://schemas.microsoft.com/office/drawing/2014/main" id="{95856B0C-2A84-4796-AE17-DCED6680B1F2}"/>
               </a:ext>
             </a:extLst>
           </p:cNvPr>
@@ -9435,7 +9435,7 @@
           <p:cNvPr id="44" name="">
             <a:extLst xmlns:a="http://schemas.openxmlformats.org/drawingml/2006/main">
               <a:ext uri="{FF2B5EF4-FFF2-40B4-BE49-F238E27FC236}">
-                <a16:creationId xmlns:a16="http://schemas.microsoft.com/office/drawing/2014/main" id="{03840D1C-3ECE-4A34-A5F1-3B0F7F3BDE19}"/>
+                <a16:creationId xmlns:a16="http://schemas.microsoft.com/office/drawing/2014/main" id="{C31104C8-D917-47CA-86CA-D3F415F3465C}"/>
               </a:ext>
             </a:extLst>
           </p:cNvPr>
@@ -9498,7 +9498,7 @@
           <p:cNvPr id="45" name="">
             <a:extLst xmlns:a="http://schemas.openxmlformats.org/drawingml/2006/main">
               <a:ext uri="{FF2B5EF4-FFF2-40B4-BE49-F238E27FC236}">
-                <a16:creationId xmlns:a16="http://schemas.microsoft.com/office/drawing/2014/main" id="{E6632423-6E66-4C3B-9D92-2B9165E8BE4D}"/>
+                <a16:creationId xmlns:a16="http://schemas.microsoft.com/office/drawing/2014/main" id="{96A8A5F9-6CF8-470A-A3C6-11E2B3768E1F}"/>
               </a:ext>
             </a:extLst>
           </p:cNvPr>
@@ -9559,7 +9559,7 @@
     </p:spTree>
     <p:extLst>
       <p:ext uri="{BB962C8B-B14F-4D97-AF65-F5344CB8AC3E}">
-        <p14:creationId xmlns:p14="http://schemas.microsoft.com/office/powerpoint/2010/main" val="880354582"/>
+        <p14:creationId xmlns:p14="http://schemas.microsoft.com/office/powerpoint/2010/main" val="1082522161"/>
       </p:ext>
     </p:extLst>
   </p:cSld>
@@ -9590,7 +9590,7 @@
           <p:cNvPr id="1" name="">
             <a:extLst xmlns:a="http://schemas.openxmlformats.org/drawingml/2006/main">
               <a:ext uri="{FF2B5EF4-FFF2-40B4-BE49-F238E27FC236}">
-                <a16:creationId xmlns:a16="http://schemas.microsoft.com/office/drawing/2014/main" id="{CE1FD07F-3A0F-41A7-BF7D-A50AE48BDE03}"/>
+                <a16:creationId xmlns:a16="http://schemas.microsoft.com/office/drawing/2014/main" id="{7BA53B5F-31C0-4C50-A77C-F83921C940F2}"/>
               </a:ext>
             </a:extLst>
           </p:cNvPr>
@@ -9653,7 +9653,7 @@
           <p:cNvPr id="2" name="">
             <a:extLst xmlns:a="http://schemas.openxmlformats.org/drawingml/2006/main">
               <a:ext uri="{FF2B5EF4-FFF2-40B4-BE49-F238E27FC236}">
-                <a16:creationId xmlns:a16="http://schemas.microsoft.com/office/drawing/2014/main" id="{D72BD120-418B-4D35-84C1-CDEFB807AFC8}"/>
+                <a16:creationId xmlns:a16="http://schemas.microsoft.com/office/drawing/2014/main" id="{C5E5F73A-6900-4D33-BFBE-6035FBB93354}"/>
               </a:ext>
             </a:extLst>
           </p:cNvPr>
@@ -9720,7 +9720,7 @@
           <p:cNvPr id="3" name="">
             <a:extLst xmlns:a="http://schemas.openxmlformats.org/drawingml/2006/main">
               <a:ext uri="{FF2B5EF4-FFF2-40B4-BE49-F238E27FC236}">
-                <a16:creationId xmlns:a16="http://schemas.microsoft.com/office/drawing/2014/main" id="{5F5068FF-0B75-483A-8B7F-11D849198F77}"/>
+                <a16:creationId xmlns:a16="http://schemas.microsoft.com/office/drawing/2014/main" id="{CA746005-0E72-413C-B781-BDAE2266CAC5}"/>
               </a:ext>
             </a:extLst>
           </p:cNvPr>
@@ -9787,7 +9787,7 @@
           <p:cNvPr id="4" name="">
             <a:extLst xmlns:a="http://schemas.openxmlformats.org/drawingml/2006/main">
               <a:ext uri="{FF2B5EF4-FFF2-40B4-BE49-F238E27FC236}">
-                <a16:creationId xmlns:a16="http://schemas.microsoft.com/office/drawing/2014/main" id="{CDBEFFD5-9408-49DC-9DA1-324FDF347F08}"/>
+                <a16:creationId xmlns:a16="http://schemas.microsoft.com/office/drawing/2014/main" id="{9ECA4A0A-9ED5-449F-B391-A308052FB442}"/>
               </a:ext>
             </a:extLst>
           </p:cNvPr>
@@ -9819,7 +9819,7 @@
           <p:cNvPr id="5" name="">
             <a:extLst xmlns:a="http://schemas.openxmlformats.org/drawingml/2006/main">
               <a:ext uri="{FF2B5EF4-FFF2-40B4-BE49-F238E27FC236}">
-                <a16:creationId xmlns:a16="http://schemas.microsoft.com/office/drawing/2014/main" id="{AA9479BD-FF6D-4EC7-AD59-87C338925F7A}"/>
+                <a16:creationId xmlns:a16="http://schemas.microsoft.com/office/drawing/2014/main" id="{A4EAE0BC-0FF6-4605-A830-3FA8FE485E01}"/>
               </a:ext>
             </a:extLst>
           </p:cNvPr>
@@ -9882,7 +9882,7 @@
           <p:cNvPr id="6" name="">
             <a:extLst xmlns:a="http://schemas.openxmlformats.org/drawingml/2006/main">
               <a:ext uri="{FF2B5EF4-FFF2-40B4-BE49-F238E27FC236}">
-                <a16:creationId xmlns:a16="http://schemas.microsoft.com/office/drawing/2014/main" id="{6850F884-DEB7-42CD-A971-1A1405852192}"/>
+                <a16:creationId xmlns:a16="http://schemas.microsoft.com/office/drawing/2014/main" id="{0E44FC86-03C0-474D-8D8B-ABF7AD48070F}"/>
               </a:ext>
             </a:extLst>
           </p:cNvPr>
@@ -9945,7 +9945,7 @@
           <p:cNvPr id="7" name="">
             <a:extLst xmlns:a="http://schemas.openxmlformats.org/drawingml/2006/main">
               <a:ext uri="{FF2B5EF4-FFF2-40B4-BE49-F238E27FC236}">
-                <a16:creationId xmlns:a16="http://schemas.microsoft.com/office/drawing/2014/main" id="{1620A26F-CA8A-4B01-B561-CCFAF6F624D2}"/>
+                <a16:creationId xmlns:a16="http://schemas.microsoft.com/office/drawing/2014/main" id="{8FFB45DC-03F8-4E49-B8C2-C07AEA5EF400}"/>
               </a:ext>
             </a:extLst>
           </p:cNvPr>
@@ -9979,7 +9979,7 @@
           <p:cNvPr id="8" name="">
             <a:extLst xmlns:a="http://schemas.openxmlformats.org/drawingml/2006/main">
               <a:ext uri="{FF2B5EF4-FFF2-40B4-BE49-F238E27FC236}">
-                <a16:creationId xmlns:a16="http://schemas.microsoft.com/office/drawing/2014/main" id="{A8039E86-C1A1-43BE-960F-0B41593D7AA0}"/>
+                <a16:creationId xmlns:a16="http://schemas.microsoft.com/office/drawing/2014/main" id="{5A395832-40C0-40DC-BBC5-A3D66A6A06B6}"/>
               </a:ext>
             </a:extLst>
           </p:cNvPr>
@@ -10011,7 +10011,7 @@
           <p:cNvPr id="9" name="">
             <a:extLst xmlns:a="http://schemas.openxmlformats.org/drawingml/2006/main">
               <a:ext uri="{FF2B5EF4-FFF2-40B4-BE49-F238E27FC236}">
-                <a16:creationId xmlns:a16="http://schemas.microsoft.com/office/drawing/2014/main" id="{6839FA44-7681-4D5C-B58A-618081BF1D45}"/>
+                <a16:creationId xmlns:a16="http://schemas.microsoft.com/office/drawing/2014/main" id="{585F3173-CCF1-4586-A2F4-DF33FF6CB579}"/>
               </a:ext>
             </a:extLst>
           </p:cNvPr>
@@ -10074,7 +10074,7 @@
           <p:cNvPr id="10" name="">
             <a:extLst xmlns:a="http://schemas.openxmlformats.org/drawingml/2006/main">
               <a:ext uri="{FF2B5EF4-FFF2-40B4-BE49-F238E27FC236}">
-                <a16:creationId xmlns:a16="http://schemas.microsoft.com/office/drawing/2014/main" id="{5DF2BE6F-A55B-40FC-9598-0B9752213E7A}"/>
+                <a16:creationId xmlns:a16="http://schemas.microsoft.com/office/drawing/2014/main" id="{6BF5E804-33FE-4D60-8941-A377BFD00A4D}"/>
               </a:ext>
             </a:extLst>
           </p:cNvPr>
@@ -10137,7 +10137,7 @@
           <p:cNvPr id="11" name="">
             <a:extLst xmlns:a="http://schemas.openxmlformats.org/drawingml/2006/main">
               <a:ext uri="{FF2B5EF4-FFF2-40B4-BE49-F238E27FC236}">
-                <a16:creationId xmlns:a16="http://schemas.microsoft.com/office/drawing/2014/main" id="{FFF91997-7B44-4D1F-89FA-9E7FD39F2943}"/>
+                <a16:creationId xmlns:a16="http://schemas.microsoft.com/office/drawing/2014/main" id="{4463F9E4-B78E-4501-91B4-19A9B058F0D8}"/>
               </a:ext>
             </a:extLst>
           </p:cNvPr>
@@ -10171,7 +10171,7 @@
           <p:cNvPr id="12" name="">
             <a:extLst xmlns:a="http://schemas.openxmlformats.org/drawingml/2006/main">
               <a:ext uri="{FF2B5EF4-FFF2-40B4-BE49-F238E27FC236}">
-                <a16:creationId xmlns:a16="http://schemas.microsoft.com/office/drawing/2014/main" id="{57D3D6FF-67BF-41A2-8CC1-BCF8B2E29047}"/>
+                <a16:creationId xmlns:a16="http://schemas.microsoft.com/office/drawing/2014/main" id="{89D1F161-E8AD-444D-886C-D7069057AA9E}"/>
               </a:ext>
             </a:extLst>
           </p:cNvPr>
@@ -10203,7 +10203,7 @@
           <p:cNvPr id="13" name="">
             <a:extLst xmlns:a="http://schemas.openxmlformats.org/drawingml/2006/main">
               <a:ext uri="{FF2B5EF4-FFF2-40B4-BE49-F238E27FC236}">
-                <a16:creationId xmlns:a16="http://schemas.microsoft.com/office/drawing/2014/main" id="{49EEEA9B-D86E-4319-98EC-5AAD0EAF5FD3}"/>
+                <a16:creationId xmlns:a16="http://schemas.microsoft.com/office/drawing/2014/main" id="{5BFC2E19-2ADD-44C9-B5F6-9ED4C11F895F}"/>
               </a:ext>
             </a:extLst>
           </p:cNvPr>
@@ -10266,7 +10266,7 @@
           <p:cNvPr id="14" name="">
             <a:extLst xmlns:a="http://schemas.openxmlformats.org/drawingml/2006/main">
               <a:ext uri="{FF2B5EF4-FFF2-40B4-BE49-F238E27FC236}">
-                <a16:creationId xmlns:a16="http://schemas.microsoft.com/office/drawing/2014/main" id="{BA0D68A6-F91A-4690-8E59-98A8EB57B42C}"/>
+                <a16:creationId xmlns:a16="http://schemas.microsoft.com/office/drawing/2014/main" id="{89BAF945-CD6C-4A2F-A1B5-D087BDC5DFEC}"/>
               </a:ext>
             </a:extLst>
           </p:cNvPr>
@@ -10329,7 +10329,7 @@
           <p:cNvPr id="15" name="">
             <a:extLst xmlns:a="http://schemas.openxmlformats.org/drawingml/2006/main">
               <a:ext uri="{FF2B5EF4-FFF2-40B4-BE49-F238E27FC236}">
-                <a16:creationId xmlns:a16="http://schemas.microsoft.com/office/drawing/2014/main" id="{F3C131DB-FBAC-4AB6-9256-39811D3C69BF}"/>
+                <a16:creationId xmlns:a16="http://schemas.microsoft.com/office/drawing/2014/main" id="{2B3DBE6D-5412-4121-AB43-2A280A68EE90}"/>
               </a:ext>
             </a:extLst>
           </p:cNvPr>
@@ -10363,7 +10363,7 @@
           <p:cNvPr id="16" name="">
             <a:extLst xmlns:a="http://schemas.openxmlformats.org/drawingml/2006/main">
               <a:ext uri="{FF2B5EF4-FFF2-40B4-BE49-F238E27FC236}">
-                <a16:creationId xmlns:a16="http://schemas.microsoft.com/office/drawing/2014/main" id="{EB0BF33C-7251-4954-8BB8-B2AF32EE52C7}"/>
+                <a16:creationId xmlns:a16="http://schemas.microsoft.com/office/drawing/2014/main" id="{4DDCE97D-816A-4839-B35A-0BEE42832FC8}"/>
               </a:ext>
             </a:extLst>
           </p:cNvPr>
@@ -10395,7 +10395,7 @@
           <p:cNvPr id="17" name="">
             <a:extLst xmlns:a="http://schemas.openxmlformats.org/drawingml/2006/main">
               <a:ext uri="{FF2B5EF4-FFF2-40B4-BE49-F238E27FC236}">
-                <a16:creationId xmlns:a16="http://schemas.microsoft.com/office/drawing/2014/main" id="{12B0A7A0-24F5-413C-A9BA-8317778C9C6B}"/>
+                <a16:creationId xmlns:a16="http://schemas.microsoft.com/office/drawing/2014/main" id="{45BF0263-66F6-49BB-AF5C-A887B672B986}"/>
               </a:ext>
             </a:extLst>
           </p:cNvPr>
@@ -10458,7 +10458,7 @@
           <p:cNvPr id="18" name="">
             <a:extLst xmlns:a="http://schemas.openxmlformats.org/drawingml/2006/main">
               <a:ext uri="{FF2B5EF4-FFF2-40B4-BE49-F238E27FC236}">
-                <a16:creationId xmlns:a16="http://schemas.microsoft.com/office/drawing/2014/main" id="{94885721-C2C7-45FB-95F6-49B4336C3F2E}"/>
+                <a16:creationId xmlns:a16="http://schemas.microsoft.com/office/drawing/2014/main" id="{9F2D55E7-D54D-4CED-929C-8635906AFC26}"/>
               </a:ext>
             </a:extLst>
           </p:cNvPr>
@@ -10521,7 +10521,7 @@
           <p:cNvPr id="19" name="">
             <a:extLst xmlns:a="http://schemas.openxmlformats.org/drawingml/2006/main">
               <a:ext uri="{FF2B5EF4-FFF2-40B4-BE49-F238E27FC236}">
-                <a16:creationId xmlns:a16="http://schemas.microsoft.com/office/drawing/2014/main" id="{961DBB3F-9F4D-46CA-BD28-7596AFCCFB4D}"/>
+                <a16:creationId xmlns:a16="http://schemas.microsoft.com/office/drawing/2014/main" id="{D76880EA-CDE8-4714-A56A-935777C7B72E}"/>
               </a:ext>
             </a:extLst>
           </p:cNvPr>
@@ -10555,7 +10555,7 @@
           <p:cNvPr id="20" name="">
             <a:extLst xmlns:a="http://schemas.openxmlformats.org/drawingml/2006/main">
               <a:ext uri="{FF2B5EF4-FFF2-40B4-BE49-F238E27FC236}">
-                <a16:creationId xmlns:a16="http://schemas.microsoft.com/office/drawing/2014/main" id="{7F14522E-2E24-4D81-8945-7877E2E47D24}"/>
+                <a16:creationId xmlns:a16="http://schemas.microsoft.com/office/drawing/2014/main" id="{0E5270F1-533A-4DF5-81B0-ACC2F7461A4E}"/>
               </a:ext>
             </a:extLst>
           </p:cNvPr>
@@ -10587,7 +10587,7 @@
           <p:cNvPr id="21" name="">
             <a:extLst xmlns:a="http://schemas.openxmlformats.org/drawingml/2006/main">
               <a:ext uri="{FF2B5EF4-FFF2-40B4-BE49-F238E27FC236}">
-                <a16:creationId xmlns:a16="http://schemas.microsoft.com/office/drawing/2014/main" id="{1D301700-59D9-496A-935A-3C9E095C1B49}"/>
+                <a16:creationId xmlns:a16="http://schemas.microsoft.com/office/drawing/2014/main" id="{1BE565EB-E443-4812-945F-CBF933C69304}"/>
               </a:ext>
             </a:extLst>
           </p:cNvPr>
@@ -10650,7 +10650,7 @@
           <p:cNvPr id="22" name="">
             <a:extLst xmlns:a="http://schemas.openxmlformats.org/drawingml/2006/main">
               <a:ext uri="{FF2B5EF4-FFF2-40B4-BE49-F238E27FC236}">
-                <a16:creationId xmlns:a16="http://schemas.microsoft.com/office/drawing/2014/main" id="{6E446088-8C54-440E-8AA2-EA2858E0D525}"/>
+                <a16:creationId xmlns:a16="http://schemas.microsoft.com/office/drawing/2014/main" id="{8379827E-B5A5-4F23-8B14-B63C63BBC774}"/>
               </a:ext>
             </a:extLst>
           </p:cNvPr>
@@ -10713,7 +10713,7 @@
           <p:cNvPr id="23" name="">
             <a:extLst xmlns:a="http://schemas.openxmlformats.org/drawingml/2006/main">
               <a:ext uri="{FF2B5EF4-FFF2-40B4-BE49-F238E27FC236}">
-                <a16:creationId xmlns:a16="http://schemas.microsoft.com/office/drawing/2014/main" id="{4163AAB0-7C72-4B87-A9B2-D93B0364B437}"/>
+                <a16:creationId xmlns:a16="http://schemas.microsoft.com/office/drawing/2014/main" id="{8A326871-974F-4483-BE3A-871EC5D521C2}"/>
               </a:ext>
             </a:extLst>
           </p:cNvPr>
@@ -10747,7 +10747,7 @@
           <p:cNvPr id="24" name="">
             <a:extLst xmlns:a="http://schemas.openxmlformats.org/drawingml/2006/main">
               <a:ext uri="{FF2B5EF4-FFF2-40B4-BE49-F238E27FC236}">
-                <a16:creationId xmlns:a16="http://schemas.microsoft.com/office/drawing/2014/main" id="{08C82596-0855-41FA-BDFE-E209ED908D6D}"/>
+                <a16:creationId xmlns:a16="http://schemas.microsoft.com/office/drawing/2014/main" id="{C2EB4001-9BB3-4B93-85FF-C77B3F7D75EF}"/>
               </a:ext>
             </a:extLst>
           </p:cNvPr>
@@ -10779,7 +10779,7 @@
           <p:cNvPr id="25" name="">
             <a:extLst xmlns:a="http://schemas.openxmlformats.org/drawingml/2006/main">
               <a:ext uri="{FF2B5EF4-FFF2-40B4-BE49-F238E27FC236}">
-                <a16:creationId xmlns:a16="http://schemas.microsoft.com/office/drawing/2014/main" id="{D0BE9864-8160-4B39-8EAD-E404EEE1D1D6}"/>
+                <a16:creationId xmlns:a16="http://schemas.microsoft.com/office/drawing/2014/main" id="{4551FA2F-6E0C-4573-B2F8-B9AF350BBCF2}"/>
               </a:ext>
             </a:extLst>
           </p:cNvPr>
@@ -10842,7 +10842,7 @@
           <p:cNvPr id="26" name="">
             <a:extLst xmlns:a="http://schemas.openxmlformats.org/drawingml/2006/main">
               <a:ext uri="{FF2B5EF4-FFF2-40B4-BE49-F238E27FC236}">
-                <a16:creationId xmlns:a16="http://schemas.microsoft.com/office/drawing/2014/main" id="{8DF8CB06-3B0F-4CB1-9026-993372EF9A52}"/>
+                <a16:creationId xmlns:a16="http://schemas.microsoft.com/office/drawing/2014/main" id="{E7D4C33F-0FFE-4CD0-9B29-C18197C425F9}"/>
               </a:ext>
             </a:extLst>
           </p:cNvPr>
@@ -10909,7 +10909,7 @@
           <p:cNvPr id="27" name="">
             <a:extLst xmlns:a="http://schemas.openxmlformats.org/drawingml/2006/main">
               <a:ext uri="{FF2B5EF4-FFF2-40B4-BE49-F238E27FC236}">
-                <a16:creationId xmlns:a16="http://schemas.microsoft.com/office/drawing/2014/main" id="{D3BA2FFF-15B0-4589-B988-2A25F38954F1}"/>
+                <a16:creationId xmlns:a16="http://schemas.microsoft.com/office/drawing/2014/main" id="{586095BC-403E-4447-AFA0-18B5ECEC2AD6}"/>
               </a:ext>
             </a:extLst>
           </p:cNvPr>
@@ -10941,7 +10941,7 @@
           <p:cNvPr id="28" name="">
             <a:extLst xmlns:a="http://schemas.openxmlformats.org/drawingml/2006/main">
               <a:ext uri="{FF2B5EF4-FFF2-40B4-BE49-F238E27FC236}">
-                <a16:creationId xmlns:a16="http://schemas.microsoft.com/office/drawing/2014/main" id="{8DE75F08-2936-424E-A09C-93E03AF5F3EF}"/>
+                <a16:creationId xmlns:a16="http://schemas.microsoft.com/office/drawing/2014/main" id="{88A1F11C-7FF1-4729-8373-BD68304038B6}"/>
               </a:ext>
             </a:extLst>
           </p:cNvPr>
@@ -10973,7 +10973,7 @@
           <p:cNvPr id="29" name="">
             <a:extLst xmlns:a="http://schemas.openxmlformats.org/drawingml/2006/main">
               <a:ext uri="{FF2B5EF4-FFF2-40B4-BE49-F238E27FC236}">
-                <a16:creationId xmlns:a16="http://schemas.microsoft.com/office/drawing/2014/main" id="{6BDF9726-9598-4EFD-B97C-F83C9504D69C}"/>
+                <a16:creationId xmlns:a16="http://schemas.microsoft.com/office/drawing/2014/main" id="{3554561B-8839-469B-A703-F870E7A212C7}"/>
               </a:ext>
             </a:extLst>
           </p:cNvPr>
@@ -11036,7 +11036,7 @@
           <p:cNvPr id="30" name="">
             <a:extLst xmlns:a="http://schemas.openxmlformats.org/drawingml/2006/main">
               <a:ext uri="{FF2B5EF4-FFF2-40B4-BE49-F238E27FC236}">
-                <a16:creationId xmlns:a16="http://schemas.microsoft.com/office/drawing/2014/main" id="{AD0FF5EF-4BDD-44FC-9195-43B0663AB65D}"/>
+                <a16:creationId xmlns:a16="http://schemas.microsoft.com/office/drawing/2014/main" id="{344410D7-DE51-4E4C-A55F-3E7473AD9DBA}"/>
               </a:ext>
             </a:extLst>
           </p:cNvPr>
@@ -11103,7 +11103,7 @@
           <p:cNvPr id="31" name="">
             <a:extLst xmlns:a="http://schemas.openxmlformats.org/drawingml/2006/main">
               <a:ext uri="{FF2B5EF4-FFF2-40B4-BE49-F238E27FC236}">
-                <a16:creationId xmlns:a16="http://schemas.microsoft.com/office/drawing/2014/main" id="{35F7C192-A49C-4E6A-AA30-D0DDFFAC2A25}"/>
+                <a16:creationId xmlns:a16="http://schemas.microsoft.com/office/drawing/2014/main" id="{C1FFAE24-5496-4AAC-8244-833765AAB1B6}"/>
               </a:ext>
             </a:extLst>
           </p:cNvPr>
@@ -11135,7 +11135,7 @@
           <p:cNvPr id="32" name="">
             <a:extLst xmlns:a="http://schemas.openxmlformats.org/drawingml/2006/main">
               <a:ext uri="{FF2B5EF4-FFF2-40B4-BE49-F238E27FC236}">
-                <a16:creationId xmlns:a16="http://schemas.microsoft.com/office/drawing/2014/main" id="{89CD3462-E837-46B4-8EB6-FE72F2B70FD9}"/>
+                <a16:creationId xmlns:a16="http://schemas.microsoft.com/office/drawing/2014/main" id="{896FB773-5C19-4055-9A3E-38730B8D56D3}"/>
               </a:ext>
             </a:extLst>
           </p:cNvPr>
@@ -11167,7 +11167,7 @@
           <p:cNvPr id="33" name="">
             <a:extLst xmlns:a="http://schemas.openxmlformats.org/drawingml/2006/main">
               <a:ext uri="{FF2B5EF4-FFF2-40B4-BE49-F238E27FC236}">
-                <a16:creationId xmlns:a16="http://schemas.microsoft.com/office/drawing/2014/main" id="{E67D7DA3-9FC6-4B2A-9E1D-CEF41A4BE1A7}"/>
+                <a16:creationId xmlns:a16="http://schemas.microsoft.com/office/drawing/2014/main" id="{088119C8-8D8F-4989-8753-688F4C4C2299}"/>
               </a:ext>
             </a:extLst>
           </p:cNvPr>
@@ -11230,7 +11230,7 @@
           <p:cNvPr id="34" name="">
             <a:extLst xmlns:a="http://schemas.openxmlformats.org/drawingml/2006/main">
               <a:ext uri="{FF2B5EF4-FFF2-40B4-BE49-F238E27FC236}">
-                <a16:creationId xmlns:a16="http://schemas.microsoft.com/office/drawing/2014/main" id="{6CDBA2A4-954F-46EA-972A-DA331227BB41}"/>
+                <a16:creationId xmlns:a16="http://schemas.microsoft.com/office/drawing/2014/main" id="{14D53C25-17B5-453E-B7B7-9E8BA3E96490}"/>
               </a:ext>
             </a:extLst>
           </p:cNvPr>
@@ -11297,7 +11297,7 @@
           <p:cNvPr id="35" name="">
             <a:extLst xmlns:a="http://schemas.openxmlformats.org/drawingml/2006/main">
               <a:ext uri="{FF2B5EF4-FFF2-40B4-BE49-F238E27FC236}">
-                <a16:creationId xmlns:a16="http://schemas.microsoft.com/office/drawing/2014/main" id="{2E24C28C-4728-46DD-AFBA-DC8D7E71F921}"/>
+                <a16:creationId xmlns:a16="http://schemas.microsoft.com/office/drawing/2014/main" id="{0ACF5CC0-F61B-474A-BE30-8651E8FCA7D2}"/>
               </a:ext>
             </a:extLst>
           </p:cNvPr>
@@ -11360,7 +11360,7 @@
           <p:cNvPr id="36" name="">
             <a:extLst xmlns:a="http://schemas.openxmlformats.org/drawingml/2006/main">
               <a:ext uri="{FF2B5EF4-FFF2-40B4-BE49-F238E27FC236}">
-                <a16:creationId xmlns:a16="http://schemas.microsoft.com/office/drawing/2014/main" id="{DF3F9436-B1D9-4376-B385-B9C19AB96295}"/>
+                <a16:creationId xmlns:a16="http://schemas.microsoft.com/office/drawing/2014/main" id="{F3325052-F709-4FEC-BA2E-39019A2E64E1}"/>
               </a:ext>
             </a:extLst>
           </p:cNvPr>
@@ -11392,7 +11392,7 @@
           <p:cNvPr id="37" name="">
             <a:extLst xmlns:a="http://schemas.openxmlformats.org/drawingml/2006/main">
               <a:ext uri="{FF2B5EF4-FFF2-40B4-BE49-F238E27FC236}">
-                <a16:creationId xmlns:a16="http://schemas.microsoft.com/office/drawing/2014/main" id="{A08A62EF-CD82-4B3F-967A-6E75A0ECF32D}"/>
+                <a16:creationId xmlns:a16="http://schemas.microsoft.com/office/drawing/2014/main" id="{741C172B-FF07-4B8B-B72A-4E7BEE303646}"/>
               </a:ext>
             </a:extLst>
           </p:cNvPr>
@@ -11455,7 +11455,7 @@
           <p:cNvPr id="38" name="">
             <a:extLst xmlns:a="http://schemas.openxmlformats.org/drawingml/2006/main">
               <a:ext uri="{FF2B5EF4-FFF2-40B4-BE49-F238E27FC236}">
-                <a16:creationId xmlns:a16="http://schemas.microsoft.com/office/drawing/2014/main" id="{DF415AF8-C6D1-46B9-A516-1807536DEFD6}"/>
+                <a16:creationId xmlns:a16="http://schemas.microsoft.com/office/drawing/2014/main" id="{5794EA64-D3E6-4154-A9E0-A179BD2B03D2}"/>
               </a:ext>
             </a:extLst>
           </p:cNvPr>
@@ -11516,7 +11516,7 @@
     </p:spTree>
     <p:extLst>
       <p:ext uri="{BB962C8B-B14F-4D97-AF65-F5344CB8AC3E}">
-        <p14:creationId xmlns:p14="http://schemas.microsoft.com/office/powerpoint/2010/main" val="1514204252"/>
+        <p14:creationId xmlns:p14="http://schemas.microsoft.com/office/powerpoint/2010/main" val="255013019"/>
       </p:ext>
     </p:extLst>
   </p:cSld>
@@ -11547,7 +11547,7 @@
           <p:cNvPr id="1" name="">
             <a:extLst xmlns:a="http://schemas.openxmlformats.org/drawingml/2006/main">
               <a:ext uri="{FF2B5EF4-FFF2-40B4-BE49-F238E27FC236}">
-                <a16:creationId xmlns:a16="http://schemas.microsoft.com/office/drawing/2014/main" id="{D1756163-807F-45A2-A755-7D207CF2BF67}"/>
+                <a16:creationId xmlns:a16="http://schemas.microsoft.com/office/drawing/2014/main" id="{50722344-B976-40F1-9D4D-4C5A40E9BB1D}"/>
               </a:ext>
             </a:extLst>
           </p:cNvPr>
@@ -11610,7 +11610,7 @@
           <p:cNvPr id="2" name="">
             <a:extLst xmlns:a="http://schemas.openxmlformats.org/drawingml/2006/main">
               <a:ext uri="{FF2B5EF4-FFF2-40B4-BE49-F238E27FC236}">
-                <a16:creationId xmlns:a16="http://schemas.microsoft.com/office/drawing/2014/main" id="{3CD7973F-A8E2-4E10-BB25-4401E5D398F4}"/>
+                <a16:creationId xmlns:a16="http://schemas.microsoft.com/office/drawing/2014/main" id="{2014EA45-B985-471E-9DE0-BFF0DCE5F0BA}"/>
               </a:ext>
             </a:extLst>
           </p:cNvPr>
@@ -11677,7 +11677,7 @@
           <p:cNvPr id="3" name="">
             <a:extLst xmlns:a="http://schemas.openxmlformats.org/drawingml/2006/main">
               <a:ext uri="{FF2B5EF4-FFF2-40B4-BE49-F238E27FC236}">
-                <a16:creationId xmlns:a16="http://schemas.microsoft.com/office/drawing/2014/main" id="{C5DF1889-4E02-49D4-9C05-17AC92A14885}"/>
+                <a16:creationId xmlns:a16="http://schemas.microsoft.com/office/drawing/2014/main" id="{A170CFCF-AC38-4FDE-84BD-FF0F8FB49BB2}"/>
               </a:ext>
             </a:extLst>
           </p:cNvPr>
@@ -11744,7 +11744,7 @@
           <p:cNvPr id="4" name="">
             <a:extLst xmlns:a="http://schemas.openxmlformats.org/drawingml/2006/main">
               <a:ext uri="{FF2B5EF4-FFF2-40B4-BE49-F238E27FC236}">
-                <a16:creationId xmlns:a16="http://schemas.microsoft.com/office/drawing/2014/main" id="{E74A6AE0-A0D4-46B1-B99F-889B0D77015E}"/>
+                <a16:creationId xmlns:a16="http://schemas.microsoft.com/office/drawing/2014/main" id="{A0F884B3-5B47-4B3E-9D3F-485F8DD61396}"/>
               </a:ext>
             </a:extLst>
           </p:cNvPr>
@@ -11776,7 +11776,7 @@
           <p:cNvPr id="5" name="">
             <a:extLst xmlns:a="http://schemas.openxmlformats.org/drawingml/2006/main">
               <a:ext uri="{FF2B5EF4-FFF2-40B4-BE49-F238E27FC236}">
-                <a16:creationId xmlns:a16="http://schemas.microsoft.com/office/drawing/2014/main" id="{4BB7A12E-EB08-467C-8468-0D36796E1222}"/>
+                <a16:creationId xmlns:a16="http://schemas.microsoft.com/office/drawing/2014/main" id="{3E1DB092-FC4C-422D-A3BA-7C7ED22F7DC1}"/>
               </a:ext>
             </a:extLst>
           </p:cNvPr>
@@ -11839,7 +11839,7 @@
           <p:cNvPr id="6" name="">
             <a:extLst xmlns:a="http://schemas.openxmlformats.org/drawingml/2006/main">
               <a:ext uri="{FF2B5EF4-FFF2-40B4-BE49-F238E27FC236}">
-                <a16:creationId xmlns:a16="http://schemas.microsoft.com/office/drawing/2014/main" id="{5A99D277-581E-4339-BA98-638AA3F9686B}"/>
+                <a16:creationId xmlns:a16="http://schemas.microsoft.com/office/drawing/2014/main" id="{5122018C-C274-4E4A-9DBB-F01BA54EDB67}"/>
               </a:ext>
             </a:extLst>
           </p:cNvPr>
@@ -11902,7 +11902,7 @@
           <p:cNvPr id="7" name="">
             <a:extLst xmlns:a="http://schemas.openxmlformats.org/drawingml/2006/main">
               <a:ext uri="{FF2B5EF4-FFF2-40B4-BE49-F238E27FC236}">
-                <a16:creationId xmlns:a16="http://schemas.microsoft.com/office/drawing/2014/main" id="{2CE7202A-FAB3-4715-AA2C-C9F7B2B8592C}"/>
+                <a16:creationId xmlns:a16="http://schemas.microsoft.com/office/drawing/2014/main" id="{D949F5B9-0B47-4447-AF7F-73C4FA63E33B}"/>
               </a:ext>
             </a:extLst>
           </p:cNvPr>
@@ -11914,7 +11914,7 @@
         <p:spPr>
           <a:xfrm xmlns:a="http://schemas.openxmlformats.org/drawingml/2006/main">
             <a:off x="3295650" y="3190875"/>
-            <a:ext cx="2000250" cy="114300"/>
+            <a:ext cx="1619250" cy="114300"/>
           </a:xfrm>
           <a:prstGeom xmlns:a="http://schemas.openxmlformats.org/drawingml/2006/main" prst="rect">
             <a:avLst/>
@@ -11936,7 +11936,7 @@
           <p:cNvPr id="8" name="">
             <a:extLst xmlns:a="http://schemas.openxmlformats.org/drawingml/2006/main">
               <a:ext uri="{FF2B5EF4-FFF2-40B4-BE49-F238E27FC236}">
-                <a16:creationId xmlns:a16="http://schemas.microsoft.com/office/drawing/2014/main" id="{FD897E7F-23D9-4EE0-94C6-469C29323BD9}"/>
+                <a16:creationId xmlns:a16="http://schemas.microsoft.com/office/drawing/2014/main" id="{5B95BD44-B7B9-4AA7-9AEE-12BB98B1BF84}"/>
               </a:ext>
             </a:extLst>
           </p:cNvPr>
@@ -11948,7 +11948,7 @@
         <p:spPr>
           <a:xfrm xmlns:a="http://schemas.openxmlformats.org/drawingml/2006/main">
             <a:off x="3295650" y="3190875"/>
-            <a:ext cx="2000250" cy="114300"/>
+            <a:ext cx="1619250" cy="114300"/>
           </a:xfrm>
           <a:prstGeom xmlns:a="http://schemas.openxmlformats.org/drawingml/2006/main" prst="rect">
             <a:avLst/>
@@ -11968,19 +11968,19 @@
           <p:cNvPr id="9" name="">
             <a:extLst xmlns:a="http://schemas.openxmlformats.org/drawingml/2006/main">
               <a:ext uri="{FF2B5EF4-FFF2-40B4-BE49-F238E27FC236}">
-                <a16:creationId xmlns:a16="http://schemas.microsoft.com/office/drawing/2014/main" id="{B12D7241-9FA3-4323-A11F-F82AD4790C0E}"/>
-              </a:ext>
-            </a:extLst>
-          </p:cNvPr>
-          <p:cNvSpPr>
-            <a:spLocks xmlns:a="http://schemas.openxmlformats.org/drawingml/2006/main" noGrp="1"/>
-          </p:cNvSpPr>
-          <p:nvPr/>
-        </p:nvSpPr>
-        <p:spPr>
-          <a:xfrm xmlns:a="http://schemas.openxmlformats.org/drawingml/2006/main">
-            <a:off x="5391150" y="3162300"/>
-            <a:ext cx="857250" cy="190500"/>
+                <a16:creationId xmlns:a16="http://schemas.microsoft.com/office/drawing/2014/main" id="{B5D17EE7-CEC1-4524-8F80-99988963BDFA}"/>
+              </a:ext>
+            </a:extLst>
+          </p:cNvPr>
+          <p:cNvSpPr>
+            <a:spLocks xmlns:a="http://schemas.openxmlformats.org/drawingml/2006/main" noGrp="1"/>
+          </p:cNvSpPr>
+          <p:nvPr/>
+        </p:nvSpPr>
+        <p:spPr>
+          <a:xfrm xmlns:a="http://schemas.openxmlformats.org/drawingml/2006/main">
+            <a:off x="5010150" y="3162300"/>
+            <a:ext cx="552450" cy="190500"/>
           </a:xfrm>
           <a:prstGeom xmlns:a="http://schemas.openxmlformats.org/drawingml/2006/main" prst="rect">
             <a:avLst/>
@@ -12031,7 +12031,7 @@
           <p:cNvPr id="10" name="">
             <a:extLst xmlns:a="http://schemas.openxmlformats.org/drawingml/2006/main">
               <a:ext uri="{FF2B5EF4-FFF2-40B4-BE49-F238E27FC236}">
-                <a16:creationId xmlns:a16="http://schemas.microsoft.com/office/drawing/2014/main" id="{ADC6F43D-AC3F-4D2D-B0FF-749DF1BE7B95}"/>
+                <a16:creationId xmlns:a16="http://schemas.microsoft.com/office/drawing/2014/main" id="{99430139-18AB-4E78-AC38-32D49EDA8F33}"/>
               </a:ext>
             </a:extLst>
           </p:cNvPr>
@@ -12094,7 +12094,7 @@
           <p:cNvPr id="11" name="">
             <a:extLst xmlns:a="http://schemas.openxmlformats.org/drawingml/2006/main">
               <a:ext uri="{FF2B5EF4-FFF2-40B4-BE49-F238E27FC236}">
-                <a16:creationId xmlns:a16="http://schemas.microsoft.com/office/drawing/2014/main" id="{A68B432E-FA75-4A86-9018-FAC4C06DA259}"/>
+                <a16:creationId xmlns:a16="http://schemas.microsoft.com/office/drawing/2014/main" id="{66631484-7AB8-4BB4-9BE1-A2C3D215AD6E}"/>
               </a:ext>
             </a:extLst>
           </p:cNvPr>
@@ -12106,7 +12106,7 @@
         <p:spPr>
           <a:xfrm xmlns:a="http://schemas.openxmlformats.org/drawingml/2006/main">
             <a:off x="3295650" y="3667125"/>
-            <a:ext cx="2000250" cy="114300"/>
+            <a:ext cx="1619250" cy="114300"/>
           </a:xfrm>
           <a:prstGeom xmlns:a="http://schemas.openxmlformats.org/drawingml/2006/main" prst="rect">
             <a:avLst/>
@@ -12128,7 +12128,7 @@
           <p:cNvPr id="12" name="">
             <a:extLst xmlns:a="http://schemas.openxmlformats.org/drawingml/2006/main">
               <a:ext uri="{FF2B5EF4-FFF2-40B4-BE49-F238E27FC236}">
-                <a16:creationId xmlns:a16="http://schemas.microsoft.com/office/drawing/2014/main" id="{1011634E-AA70-431C-A33C-E1AF43BC5DF8}"/>
+                <a16:creationId xmlns:a16="http://schemas.microsoft.com/office/drawing/2014/main" id="{192AF1F0-6FB2-41BF-94BD-C2E387AB319A}"/>
               </a:ext>
             </a:extLst>
           </p:cNvPr>
@@ -12140,7 +12140,7 @@
         <p:spPr>
           <a:xfrm xmlns:a="http://schemas.openxmlformats.org/drawingml/2006/main">
             <a:off x="3295650" y="3667125"/>
-            <a:ext cx="1837264" cy="114300"/>
+            <a:ext cx="1487309" cy="114300"/>
           </a:xfrm>
           <a:prstGeom xmlns:a="http://schemas.openxmlformats.org/drawingml/2006/main" prst="rect">
             <a:avLst/>
@@ -12160,19 +12160,19 @@
           <p:cNvPr id="13" name="">
             <a:extLst xmlns:a="http://schemas.openxmlformats.org/drawingml/2006/main">
               <a:ext uri="{FF2B5EF4-FFF2-40B4-BE49-F238E27FC236}">
-                <a16:creationId xmlns:a16="http://schemas.microsoft.com/office/drawing/2014/main" id="{272BDBE5-237B-48F8-9F02-53494EEE8546}"/>
-              </a:ext>
-            </a:extLst>
-          </p:cNvPr>
-          <p:cNvSpPr>
-            <a:spLocks xmlns:a="http://schemas.openxmlformats.org/drawingml/2006/main" noGrp="1"/>
-          </p:cNvSpPr>
-          <p:nvPr/>
-        </p:nvSpPr>
-        <p:spPr>
-          <a:xfrm xmlns:a="http://schemas.openxmlformats.org/drawingml/2006/main">
-            <a:off x="5391150" y="3638550"/>
-            <a:ext cx="857250" cy="190500"/>
+                <a16:creationId xmlns:a16="http://schemas.microsoft.com/office/drawing/2014/main" id="{7FF6DFE2-E233-49BC-A642-5EF3356209F8}"/>
+              </a:ext>
+            </a:extLst>
+          </p:cNvPr>
+          <p:cNvSpPr>
+            <a:spLocks xmlns:a="http://schemas.openxmlformats.org/drawingml/2006/main" noGrp="1"/>
+          </p:cNvSpPr>
+          <p:nvPr/>
+        </p:nvSpPr>
+        <p:spPr>
+          <a:xfrm xmlns:a="http://schemas.openxmlformats.org/drawingml/2006/main">
+            <a:off x="5010150" y="3638550"/>
+            <a:ext cx="552450" cy="190500"/>
           </a:xfrm>
           <a:prstGeom xmlns:a="http://schemas.openxmlformats.org/drawingml/2006/main" prst="rect">
             <a:avLst/>
@@ -12223,7 +12223,7 @@
           <p:cNvPr id="14" name="">
             <a:extLst xmlns:a="http://schemas.openxmlformats.org/drawingml/2006/main">
               <a:ext uri="{FF2B5EF4-FFF2-40B4-BE49-F238E27FC236}">
-                <a16:creationId xmlns:a16="http://schemas.microsoft.com/office/drawing/2014/main" id="{CDE1988A-1214-423B-B47A-FDF9EF99DA42}"/>
+                <a16:creationId xmlns:a16="http://schemas.microsoft.com/office/drawing/2014/main" id="{FAEE2CB3-FB64-4AEC-854C-30D316D5FEF8}"/>
               </a:ext>
             </a:extLst>
           </p:cNvPr>
@@ -12286,7 +12286,7 @@
           <p:cNvPr id="15" name="">
             <a:extLst xmlns:a="http://schemas.openxmlformats.org/drawingml/2006/main">
               <a:ext uri="{FF2B5EF4-FFF2-40B4-BE49-F238E27FC236}">
-                <a16:creationId xmlns:a16="http://schemas.microsoft.com/office/drawing/2014/main" id="{7752FD48-9AB0-445D-88CA-C815850B0CEF}"/>
+                <a16:creationId xmlns:a16="http://schemas.microsoft.com/office/drawing/2014/main" id="{7E78A9B5-DFDA-435D-B477-6A2CC90DDA8E}"/>
               </a:ext>
             </a:extLst>
           </p:cNvPr>
@@ -12298,7 +12298,7 @@
         <p:spPr>
           <a:xfrm xmlns:a="http://schemas.openxmlformats.org/drawingml/2006/main">
             <a:off x="3295650" y="4143375"/>
-            <a:ext cx="2000250" cy="114300"/>
+            <a:ext cx="1619250" cy="114300"/>
           </a:xfrm>
           <a:prstGeom xmlns:a="http://schemas.openxmlformats.org/drawingml/2006/main" prst="rect">
             <a:avLst/>
@@ -12320,7 +12320,7 @@
           <p:cNvPr id="16" name="">
             <a:extLst xmlns:a="http://schemas.openxmlformats.org/drawingml/2006/main">
               <a:ext uri="{FF2B5EF4-FFF2-40B4-BE49-F238E27FC236}">
-                <a16:creationId xmlns:a16="http://schemas.microsoft.com/office/drawing/2014/main" id="{E57DF4DC-FBDF-4EC9-9977-701BEF4DB7E0}"/>
+                <a16:creationId xmlns:a16="http://schemas.microsoft.com/office/drawing/2014/main" id="{D1743DBC-70A0-4890-B353-F3174AF4D37A}"/>
               </a:ext>
             </a:extLst>
           </p:cNvPr>
@@ -12332,7 +12332,7 @@
         <p:spPr>
           <a:xfrm xmlns:a="http://schemas.openxmlformats.org/drawingml/2006/main">
             <a:off x="3295650" y="4143375"/>
-            <a:ext cx="260458" cy="114300"/>
+            <a:ext cx="210847" cy="114300"/>
           </a:xfrm>
           <a:prstGeom xmlns:a="http://schemas.openxmlformats.org/drawingml/2006/main" prst="rect">
             <a:avLst/>
@@ -12352,19 +12352,19 @@
           <p:cNvPr id="17" name="">
             <a:extLst xmlns:a="http://schemas.openxmlformats.org/drawingml/2006/main">
               <a:ext uri="{FF2B5EF4-FFF2-40B4-BE49-F238E27FC236}">
-                <a16:creationId xmlns:a16="http://schemas.microsoft.com/office/drawing/2014/main" id="{9C833779-83F1-4B03-BFA9-0817B851F570}"/>
-              </a:ext>
-            </a:extLst>
-          </p:cNvPr>
-          <p:cNvSpPr>
-            <a:spLocks xmlns:a="http://schemas.openxmlformats.org/drawingml/2006/main" noGrp="1"/>
-          </p:cNvSpPr>
-          <p:nvPr/>
-        </p:nvSpPr>
-        <p:spPr>
-          <a:xfrm xmlns:a="http://schemas.openxmlformats.org/drawingml/2006/main">
-            <a:off x="5391150" y="4114800"/>
-            <a:ext cx="857250" cy="190500"/>
+                <a16:creationId xmlns:a16="http://schemas.microsoft.com/office/drawing/2014/main" id="{9F90DBC5-EBE1-4FC2-8580-3A2A93748D8F}"/>
+              </a:ext>
+            </a:extLst>
+          </p:cNvPr>
+          <p:cNvSpPr>
+            <a:spLocks xmlns:a="http://schemas.openxmlformats.org/drawingml/2006/main" noGrp="1"/>
+          </p:cNvSpPr>
+          <p:nvPr/>
+        </p:nvSpPr>
+        <p:spPr>
+          <a:xfrm xmlns:a="http://schemas.openxmlformats.org/drawingml/2006/main">
+            <a:off x="5010150" y="4114800"/>
+            <a:ext cx="552450" cy="190500"/>
           </a:xfrm>
           <a:prstGeom xmlns:a="http://schemas.openxmlformats.org/drawingml/2006/main" prst="rect">
             <a:avLst/>
@@ -12415,7 +12415,7 @@
           <p:cNvPr id="18" name="">
             <a:extLst xmlns:a="http://schemas.openxmlformats.org/drawingml/2006/main">
               <a:ext uri="{FF2B5EF4-FFF2-40B4-BE49-F238E27FC236}">
-                <a16:creationId xmlns:a16="http://schemas.microsoft.com/office/drawing/2014/main" id="{3C03294A-15FF-4368-8EBB-9652F528E3AA}"/>
+                <a16:creationId xmlns:a16="http://schemas.microsoft.com/office/drawing/2014/main" id="{BF568D5F-7C7B-4D28-9E63-96D035A24218}"/>
               </a:ext>
             </a:extLst>
           </p:cNvPr>
@@ -12478,7 +12478,7 @@
           <p:cNvPr id="19" name="">
             <a:extLst xmlns:a="http://schemas.openxmlformats.org/drawingml/2006/main">
               <a:ext uri="{FF2B5EF4-FFF2-40B4-BE49-F238E27FC236}">
-                <a16:creationId xmlns:a16="http://schemas.microsoft.com/office/drawing/2014/main" id="{1032C314-A370-4353-A10E-A41E491D9A91}"/>
+                <a16:creationId xmlns:a16="http://schemas.microsoft.com/office/drawing/2014/main" id="{84C1DB14-66A0-4042-B56C-03990FF35B07}"/>
               </a:ext>
             </a:extLst>
           </p:cNvPr>
@@ -12490,7 +12490,7 @@
         <p:spPr>
           <a:xfrm xmlns:a="http://schemas.openxmlformats.org/drawingml/2006/main">
             <a:off x="3295650" y="4619625"/>
-            <a:ext cx="2000250" cy="114300"/>
+            <a:ext cx="1619250" cy="114300"/>
           </a:xfrm>
           <a:prstGeom xmlns:a="http://schemas.openxmlformats.org/drawingml/2006/main" prst="rect">
             <a:avLst/>
@@ -12512,7 +12512,7 @@
           <p:cNvPr id="20" name="">
             <a:extLst xmlns:a="http://schemas.openxmlformats.org/drawingml/2006/main">
               <a:ext uri="{FF2B5EF4-FFF2-40B4-BE49-F238E27FC236}">
-                <a16:creationId xmlns:a16="http://schemas.microsoft.com/office/drawing/2014/main" id="{9B4BC232-AFAC-4422-9365-EF199BCF11BF}"/>
+                <a16:creationId xmlns:a16="http://schemas.microsoft.com/office/drawing/2014/main" id="{B052C903-63EF-4A57-BCCF-16CDD5B59BF4}"/>
               </a:ext>
             </a:extLst>
           </p:cNvPr>
@@ -12524,7 +12524,7 @@
         <p:spPr>
           <a:xfrm xmlns:a="http://schemas.openxmlformats.org/drawingml/2006/main">
             <a:off x="3295650" y="4619625"/>
-            <a:ext cx="221788" cy="114300"/>
+            <a:ext cx="179543" cy="114300"/>
           </a:xfrm>
           <a:prstGeom xmlns:a="http://schemas.openxmlformats.org/drawingml/2006/main" prst="rect">
             <a:avLst/>
@@ -12544,19 +12544,19 @@
           <p:cNvPr id="21" name="">
             <a:extLst xmlns:a="http://schemas.openxmlformats.org/drawingml/2006/main">
               <a:ext uri="{FF2B5EF4-FFF2-40B4-BE49-F238E27FC236}">
-                <a16:creationId xmlns:a16="http://schemas.microsoft.com/office/drawing/2014/main" id="{90C2DABF-1F52-40CE-A6DC-23D95D2D5668}"/>
-              </a:ext>
-            </a:extLst>
-          </p:cNvPr>
-          <p:cNvSpPr>
-            <a:spLocks xmlns:a="http://schemas.openxmlformats.org/drawingml/2006/main" noGrp="1"/>
-          </p:cNvSpPr>
-          <p:nvPr/>
-        </p:nvSpPr>
-        <p:spPr>
-          <a:xfrm xmlns:a="http://schemas.openxmlformats.org/drawingml/2006/main">
-            <a:off x="5391150" y="4591050"/>
-            <a:ext cx="857250" cy="190500"/>
+                <a16:creationId xmlns:a16="http://schemas.microsoft.com/office/drawing/2014/main" id="{F9E16F44-3001-46EF-8810-15F23C7CA62E}"/>
+              </a:ext>
+            </a:extLst>
+          </p:cNvPr>
+          <p:cNvSpPr>
+            <a:spLocks xmlns:a="http://schemas.openxmlformats.org/drawingml/2006/main" noGrp="1"/>
+          </p:cNvSpPr>
+          <p:nvPr/>
+        </p:nvSpPr>
+        <p:spPr>
+          <a:xfrm xmlns:a="http://schemas.openxmlformats.org/drawingml/2006/main">
+            <a:off x="5010150" y="4591050"/>
+            <a:ext cx="552450" cy="190500"/>
           </a:xfrm>
           <a:prstGeom xmlns:a="http://schemas.openxmlformats.org/drawingml/2006/main" prst="rect">
             <a:avLst/>
@@ -12607,7 +12607,7 @@
           <p:cNvPr id="22" name="">
             <a:extLst xmlns:a="http://schemas.openxmlformats.org/drawingml/2006/main">
               <a:ext uri="{FF2B5EF4-FFF2-40B4-BE49-F238E27FC236}">
-                <a16:creationId xmlns:a16="http://schemas.microsoft.com/office/drawing/2014/main" id="{D2BAF31E-73A3-48B8-82F6-A68F775FD5C5}"/>
+                <a16:creationId xmlns:a16="http://schemas.microsoft.com/office/drawing/2014/main" id="{189DDA1F-DFD4-480B-9F53-CA8CCF31B7C8}"/>
               </a:ext>
             </a:extLst>
           </p:cNvPr>
@@ -12639,7 +12639,7 @@
           <p:cNvPr id="23" name="">
             <a:extLst xmlns:a="http://schemas.openxmlformats.org/drawingml/2006/main">
               <a:ext uri="{FF2B5EF4-FFF2-40B4-BE49-F238E27FC236}">
-                <a16:creationId xmlns:a16="http://schemas.microsoft.com/office/drawing/2014/main" id="{6DCEF1F6-44D1-4148-997A-980CF0A06277}"/>
+                <a16:creationId xmlns:a16="http://schemas.microsoft.com/office/drawing/2014/main" id="{DF89474C-1EFC-4962-8A6F-236C3B62FBB6}"/>
               </a:ext>
             </a:extLst>
           </p:cNvPr>
@@ -12702,7 +12702,7 @@
           <p:cNvPr id="24" name="">
             <a:extLst xmlns:a="http://schemas.openxmlformats.org/drawingml/2006/main">
               <a:ext uri="{FF2B5EF4-FFF2-40B4-BE49-F238E27FC236}">
-                <a16:creationId xmlns:a16="http://schemas.microsoft.com/office/drawing/2014/main" id="{E27955C4-50C1-4E9F-904A-93BDA65D8431}"/>
+                <a16:creationId xmlns:a16="http://schemas.microsoft.com/office/drawing/2014/main" id="{4790CCD6-2720-4F9A-98DD-D105ED58D3B2}"/>
               </a:ext>
             </a:extLst>
           </p:cNvPr>
@@ -12765,7 +12765,7 @@
           <p:cNvPr id="25" name="">
             <a:extLst xmlns:a="http://schemas.openxmlformats.org/drawingml/2006/main">
               <a:ext uri="{FF2B5EF4-FFF2-40B4-BE49-F238E27FC236}">
-                <a16:creationId xmlns:a16="http://schemas.microsoft.com/office/drawing/2014/main" id="{4F564B2E-AA13-4B9B-8A3D-A71B1A7155A9}"/>
+                <a16:creationId xmlns:a16="http://schemas.microsoft.com/office/drawing/2014/main" id="{886C6898-2D6E-4D46-8456-2F04679B87EA}"/>
               </a:ext>
             </a:extLst>
           </p:cNvPr>
@@ -12832,7 +12832,7 @@
           <p:cNvPr id="26" name="">
             <a:extLst xmlns:a="http://schemas.openxmlformats.org/drawingml/2006/main">
               <a:ext uri="{FF2B5EF4-FFF2-40B4-BE49-F238E27FC236}">
-                <a16:creationId xmlns:a16="http://schemas.microsoft.com/office/drawing/2014/main" id="{19EC0930-59DF-4BD8-83DC-E64247058A9B}"/>
+                <a16:creationId xmlns:a16="http://schemas.microsoft.com/office/drawing/2014/main" id="{F6FA5B67-BE06-4013-9901-F94A59461CE6}"/>
               </a:ext>
             </a:extLst>
           </p:cNvPr>
@@ -12895,7 +12895,7 @@
           <p:cNvPr id="27" name="">
             <a:extLst xmlns:a="http://schemas.openxmlformats.org/drawingml/2006/main">
               <a:ext uri="{FF2B5EF4-FFF2-40B4-BE49-F238E27FC236}">
-                <a16:creationId xmlns:a16="http://schemas.microsoft.com/office/drawing/2014/main" id="{D323B0D8-5DB8-4609-B353-DE7D64ED128E}"/>
+                <a16:creationId xmlns:a16="http://schemas.microsoft.com/office/drawing/2014/main" id="{54659694-DD2F-48F9-9301-7D4D3D221B43}"/>
               </a:ext>
             </a:extLst>
           </p:cNvPr>
@@ -12962,7 +12962,7 @@
           <p:cNvPr id="28" name="">
             <a:extLst xmlns:a="http://schemas.openxmlformats.org/drawingml/2006/main">
               <a:ext uri="{FF2B5EF4-FFF2-40B4-BE49-F238E27FC236}">
-                <a16:creationId xmlns:a16="http://schemas.microsoft.com/office/drawing/2014/main" id="{AA2718C2-AD04-4BE2-90C4-7A6870F8482C}"/>
+                <a16:creationId xmlns:a16="http://schemas.microsoft.com/office/drawing/2014/main" id="{02157B68-36DA-4127-BD29-231977095534}"/>
               </a:ext>
             </a:extLst>
           </p:cNvPr>
@@ -13025,7 +13025,7 @@
           <p:cNvPr id="29" name="">
             <a:extLst xmlns:a="http://schemas.openxmlformats.org/drawingml/2006/main">
               <a:ext uri="{FF2B5EF4-FFF2-40B4-BE49-F238E27FC236}">
-                <a16:creationId xmlns:a16="http://schemas.microsoft.com/office/drawing/2014/main" id="{475FFFE9-8052-4873-815C-E81ADB444EC6}"/>
+                <a16:creationId xmlns:a16="http://schemas.microsoft.com/office/drawing/2014/main" id="{6E577D2D-1F18-4ACC-B0DC-9697A264D48F}"/>
               </a:ext>
             </a:extLst>
           </p:cNvPr>
@@ -13092,7 +13092,7 @@
           <p:cNvPr id="30" name="">
             <a:extLst xmlns:a="http://schemas.openxmlformats.org/drawingml/2006/main">
               <a:ext uri="{FF2B5EF4-FFF2-40B4-BE49-F238E27FC236}">
-                <a16:creationId xmlns:a16="http://schemas.microsoft.com/office/drawing/2014/main" id="{83C43492-6975-4E01-8939-3D7A2417F6FE}"/>
+                <a16:creationId xmlns:a16="http://schemas.microsoft.com/office/drawing/2014/main" id="{1F04A6A1-196A-4485-945E-3D72F43A3673}"/>
               </a:ext>
             </a:extLst>
           </p:cNvPr>
@@ -13124,7 +13124,7 @@
           <p:cNvPr id="31" name="">
             <a:extLst xmlns:a="http://schemas.openxmlformats.org/drawingml/2006/main">
               <a:ext uri="{FF2B5EF4-FFF2-40B4-BE49-F238E27FC236}">
-                <a16:creationId xmlns:a16="http://schemas.microsoft.com/office/drawing/2014/main" id="{32119DEB-A73B-4E03-A918-FDCB000B755A}"/>
+                <a16:creationId xmlns:a16="http://schemas.microsoft.com/office/drawing/2014/main" id="{85208437-1157-4F6D-85B8-2B149A14F535}"/>
               </a:ext>
             </a:extLst>
           </p:cNvPr>
@@ -13156,7 +13156,7 @@
           <p:cNvPr id="32" name="">
             <a:extLst xmlns:a="http://schemas.openxmlformats.org/drawingml/2006/main">
               <a:ext uri="{FF2B5EF4-FFF2-40B4-BE49-F238E27FC236}">
-                <a16:creationId xmlns:a16="http://schemas.microsoft.com/office/drawing/2014/main" id="{D802D266-1069-44FE-9B3E-2F1369EF2DA5}"/>
+                <a16:creationId xmlns:a16="http://schemas.microsoft.com/office/drawing/2014/main" id="{37903784-8161-4EBD-A5AF-CA1B0C55C4B0}"/>
               </a:ext>
             </a:extLst>
           </p:cNvPr>
@@ -13223,7 +13223,7 @@
           <p:cNvPr id="33" name="">
             <a:extLst xmlns:a="http://schemas.openxmlformats.org/drawingml/2006/main">
               <a:ext uri="{FF2B5EF4-FFF2-40B4-BE49-F238E27FC236}">
-                <a16:creationId xmlns:a16="http://schemas.microsoft.com/office/drawing/2014/main" id="{0111C5F3-1A3C-429B-93CE-89BB060B8EFE}"/>
+                <a16:creationId xmlns:a16="http://schemas.microsoft.com/office/drawing/2014/main" id="{CAA6E47F-70DD-4D68-9EEF-2ED747454636}"/>
               </a:ext>
             </a:extLst>
           </p:cNvPr>
@@ -13286,7 +13286,7 @@
           <p:cNvPr id="34" name="">
             <a:extLst xmlns:a="http://schemas.openxmlformats.org/drawingml/2006/main">
               <a:ext uri="{FF2B5EF4-FFF2-40B4-BE49-F238E27FC236}">
-                <a16:creationId xmlns:a16="http://schemas.microsoft.com/office/drawing/2014/main" id="{4DD76B39-E6DA-4B5A-9B3F-6AA1CD5B788F}"/>
+                <a16:creationId xmlns:a16="http://schemas.microsoft.com/office/drawing/2014/main" id="{361AB778-4619-4B4E-8EE9-1BDF482901DA}"/>
               </a:ext>
             </a:extLst>
           </p:cNvPr>
@@ -13318,7 +13318,7 @@
           <p:cNvPr id="35" name="">
             <a:extLst xmlns:a="http://schemas.openxmlformats.org/drawingml/2006/main">
               <a:ext uri="{FF2B5EF4-FFF2-40B4-BE49-F238E27FC236}">
-                <a16:creationId xmlns:a16="http://schemas.microsoft.com/office/drawing/2014/main" id="{86003DD2-08EF-44F8-81E5-9D79AE636960}"/>
+                <a16:creationId xmlns:a16="http://schemas.microsoft.com/office/drawing/2014/main" id="{984FE5CE-673F-465D-9C2E-4810EAD44205}"/>
               </a:ext>
             </a:extLst>
           </p:cNvPr>
@@ -13381,7 +13381,7 @@
           <p:cNvPr id="36" name="">
             <a:extLst xmlns:a="http://schemas.openxmlformats.org/drawingml/2006/main">
               <a:ext uri="{FF2B5EF4-FFF2-40B4-BE49-F238E27FC236}">
-                <a16:creationId xmlns:a16="http://schemas.microsoft.com/office/drawing/2014/main" id="{C8213F12-9285-4587-96F2-8AF79D5CF546}"/>
+                <a16:creationId xmlns:a16="http://schemas.microsoft.com/office/drawing/2014/main" id="{006E0808-9E2C-4AA2-BCB3-FB1262FBF07C}"/>
               </a:ext>
             </a:extLst>
           </p:cNvPr>
@@ -13442,7 +13442,7 @@
     </p:spTree>
     <p:extLst>
       <p:ext uri="{BB962C8B-B14F-4D97-AF65-F5344CB8AC3E}">
-        <p14:creationId xmlns:p14="http://schemas.microsoft.com/office/powerpoint/2010/main" val="1800584457"/>
+        <p14:creationId xmlns:p14="http://schemas.microsoft.com/office/powerpoint/2010/main" val="1226466060"/>
       </p:ext>
     </p:extLst>
   </p:cSld>
@@ -13473,7 +13473,7 @@
           <p:cNvPr id="1" name="">
             <a:extLst xmlns:a="http://schemas.openxmlformats.org/drawingml/2006/main">
               <a:ext uri="{FF2B5EF4-FFF2-40B4-BE49-F238E27FC236}">
-                <a16:creationId xmlns:a16="http://schemas.microsoft.com/office/drawing/2014/main" id="{ABA1320A-9AC1-415A-899A-2F280133A99D}"/>
+                <a16:creationId xmlns:a16="http://schemas.microsoft.com/office/drawing/2014/main" id="{30B83682-41B7-4264-8413-372CBE984B4D}"/>
               </a:ext>
             </a:extLst>
           </p:cNvPr>
@@ -13536,7 +13536,7 @@
           <p:cNvPr id="2" name="">
             <a:extLst xmlns:a="http://schemas.openxmlformats.org/drawingml/2006/main">
               <a:ext uri="{FF2B5EF4-FFF2-40B4-BE49-F238E27FC236}">
-                <a16:creationId xmlns:a16="http://schemas.microsoft.com/office/drawing/2014/main" id="{876EFFE9-AB18-4B30-9607-A8CCF7DCE7C2}"/>
+                <a16:creationId xmlns:a16="http://schemas.microsoft.com/office/drawing/2014/main" id="{B606A888-26D5-4E33-91C0-BCCAA8638EAD}"/>
               </a:ext>
             </a:extLst>
           </p:cNvPr>
@@ -13603,7 +13603,7 @@
           <p:cNvPr id="3" name="">
             <a:extLst xmlns:a="http://schemas.openxmlformats.org/drawingml/2006/main">
               <a:ext uri="{FF2B5EF4-FFF2-40B4-BE49-F238E27FC236}">
-                <a16:creationId xmlns:a16="http://schemas.microsoft.com/office/drawing/2014/main" id="{9DA7AF11-E1C2-43BE-B4D3-AEAD80FACD56}"/>
+                <a16:creationId xmlns:a16="http://schemas.microsoft.com/office/drawing/2014/main" id="{299AB854-F798-47D1-8258-29EA0428F464}"/>
               </a:ext>
             </a:extLst>
           </p:cNvPr>
@@ -13670,7 +13670,7 @@
           <p:cNvPr id="4" name="">
             <a:extLst xmlns:a="http://schemas.openxmlformats.org/drawingml/2006/main">
               <a:ext uri="{FF2B5EF4-FFF2-40B4-BE49-F238E27FC236}">
-                <a16:creationId xmlns:a16="http://schemas.microsoft.com/office/drawing/2014/main" id="{F87A41AC-2810-4301-A445-C1AC9CE325EA}"/>
+                <a16:creationId xmlns:a16="http://schemas.microsoft.com/office/drawing/2014/main" id="{4138E417-F73C-43AE-937C-D2BFA532A376}"/>
               </a:ext>
             </a:extLst>
           </p:cNvPr>
@@ -13702,7 +13702,7 @@
           <p:cNvPr id="5" name="">
             <a:extLst xmlns:a="http://schemas.openxmlformats.org/drawingml/2006/main">
               <a:ext uri="{FF2B5EF4-FFF2-40B4-BE49-F238E27FC236}">
-                <a16:creationId xmlns:a16="http://schemas.microsoft.com/office/drawing/2014/main" id="{B9539136-2586-489A-9EC7-119FA7E537B7}"/>
+                <a16:creationId xmlns:a16="http://schemas.microsoft.com/office/drawing/2014/main" id="{EE8B5F0F-F8F4-42B5-9627-CD4941C186D9}"/>
               </a:ext>
             </a:extLst>
           </p:cNvPr>
@@ -13765,7 +13765,7 @@
           <p:cNvPr id="6" name="">
             <a:extLst xmlns:a="http://schemas.openxmlformats.org/drawingml/2006/main">
               <a:ext uri="{FF2B5EF4-FFF2-40B4-BE49-F238E27FC236}">
-                <a16:creationId xmlns:a16="http://schemas.microsoft.com/office/drawing/2014/main" id="{89342451-CD4A-475F-A89F-CFEBE1502D95}"/>
+                <a16:creationId xmlns:a16="http://schemas.microsoft.com/office/drawing/2014/main" id="{0F772E77-16D5-40F2-9E29-C94B325DB1A2}"/>
               </a:ext>
             </a:extLst>
           </p:cNvPr>
@@ -13797,7 +13797,7 @@
           <p:cNvPr id="7" name="">
             <a:extLst xmlns:a="http://schemas.openxmlformats.org/drawingml/2006/main">
               <a:ext uri="{FF2B5EF4-FFF2-40B4-BE49-F238E27FC236}">
-                <a16:creationId xmlns:a16="http://schemas.microsoft.com/office/drawing/2014/main" id="{9BD46393-1B7A-4F62-B34C-14BA5874F879}"/>
+                <a16:creationId xmlns:a16="http://schemas.microsoft.com/office/drawing/2014/main" id="{C4CEEA44-A798-410A-8EC7-F6560E24AF28}"/>
               </a:ext>
             </a:extLst>
           </p:cNvPr>
@@ -13860,7 +13860,7 @@
           <p:cNvPr id="8" name="">
             <a:extLst xmlns:a="http://schemas.openxmlformats.org/drawingml/2006/main">
               <a:ext uri="{FF2B5EF4-FFF2-40B4-BE49-F238E27FC236}">
-                <a16:creationId xmlns:a16="http://schemas.microsoft.com/office/drawing/2014/main" id="{47BBD216-B032-43A3-AAB7-C9EEAFD9E3AB}"/>
+                <a16:creationId xmlns:a16="http://schemas.microsoft.com/office/drawing/2014/main" id="{20862B60-4175-4AA4-B8E0-DF537B7D2E87}"/>
               </a:ext>
             </a:extLst>
           </p:cNvPr>
@@ -13923,7 +13923,7 @@
           <p:cNvPr id="9" name="">
             <a:extLst xmlns:a="http://schemas.openxmlformats.org/drawingml/2006/main">
               <a:ext uri="{FF2B5EF4-FFF2-40B4-BE49-F238E27FC236}">
-                <a16:creationId xmlns:a16="http://schemas.microsoft.com/office/drawing/2014/main" id="{D6CEC54F-376F-4E3A-8B60-DCC1C9A95092}"/>
+                <a16:creationId xmlns:a16="http://schemas.microsoft.com/office/drawing/2014/main" id="{9666DDC9-676E-40D3-A2BA-5C2A9D767FA4}"/>
               </a:ext>
             </a:extLst>
           </p:cNvPr>
@@ -13955,7 +13955,7 @@
           <p:cNvPr id="10" name="">
             <a:extLst xmlns:a="http://schemas.openxmlformats.org/drawingml/2006/main">
               <a:ext uri="{FF2B5EF4-FFF2-40B4-BE49-F238E27FC236}">
-                <a16:creationId xmlns:a16="http://schemas.microsoft.com/office/drawing/2014/main" id="{A2819DF1-2CB4-46BF-88ED-FBDB27422303}"/>
+                <a16:creationId xmlns:a16="http://schemas.microsoft.com/office/drawing/2014/main" id="{A8F471FF-00AA-43D8-996E-5CF3B244726A}"/>
               </a:ext>
             </a:extLst>
           </p:cNvPr>
@@ -14018,7 +14018,7 @@
           <p:cNvPr id="11" name="">
             <a:extLst xmlns:a="http://schemas.openxmlformats.org/drawingml/2006/main">
               <a:ext uri="{FF2B5EF4-FFF2-40B4-BE49-F238E27FC236}">
-                <a16:creationId xmlns:a16="http://schemas.microsoft.com/office/drawing/2014/main" id="{D46E9133-21FE-4547-9A9C-96CD8DA53022}"/>
+                <a16:creationId xmlns:a16="http://schemas.microsoft.com/office/drawing/2014/main" id="{7569FAEF-BE80-4352-B7FE-319BCFE97160}"/>
               </a:ext>
             </a:extLst>
           </p:cNvPr>
@@ -14081,7 +14081,7 @@
           <p:cNvPr id="12" name="">
             <a:extLst xmlns:a="http://schemas.openxmlformats.org/drawingml/2006/main">
               <a:ext uri="{FF2B5EF4-FFF2-40B4-BE49-F238E27FC236}">
-                <a16:creationId xmlns:a16="http://schemas.microsoft.com/office/drawing/2014/main" id="{3FA73319-F82A-402C-B0A3-9CDF97387D5E}"/>
+                <a16:creationId xmlns:a16="http://schemas.microsoft.com/office/drawing/2014/main" id="{B0B749A9-D4DE-4148-98B8-A42A647C6AB3}"/>
               </a:ext>
             </a:extLst>
           </p:cNvPr>
@@ -14113,7 +14113,7 @@
           <p:cNvPr id="13" name="">
             <a:extLst xmlns:a="http://schemas.openxmlformats.org/drawingml/2006/main">
               <a:ext uri="{FF2B5EF4-FFF2-40B4-BE49-F238E27FC236}">
-                <a16:creationId xmlns:a16="http://schemas.microsoft.com/office/drawing/2014/main" id="{691DC46A-7A07-4C07-AF28-4B14F0C9F86F}"/>
+                <a16:creationId xmlns:a16="http://schemas.microsoft.com/office/drawing/2014/main" id="{91E8C93B-3758-4A04-BADE-A1EECBF01EF0}"/>
               </a:ext>
             </a:extLst>
           </p:cNvPr>
@@ -14176,7 +14176,7 @@
           <p:cNvPr id="14" name="">
             <a:extLst xmlns:a="http://schemas.openxmlformats.org/drawingml/2006/main">
               <a:ext uri="{FF2B5EF4-FFF2-40B4-BE49-F238E27FC236}">
-                <a16:creationId xmlns:a16="http://schemas.microsoft.com/office/drawing/2014/main" id="{D4FEF28C-3991-46FA-8895-10D0C305DEA4}"/>
+                <a16:creationId xmlns:a16="http://schemas.microsoft.com/office/drawing/2014/main" id="{E1F8C13F-D037-49E8-A31E-63112C68563B}"/>
               </a:ext>
             </a:extLst>
           </p:cNvPr>
@@ -14239,7 +14239,7 @@
           <p:cNvPr id="15" name="">
             <a:extLst xmlns:a="http://schemas.openxmlformats.org/drawingml/2006/main">
               <a:ext uri="{FF2B5EF4-FFF2-40B4-BE49-F238E27FC236}">
-                <a16:creationId xmlns:a16="http://schemas.microsoft.com/office/drawing/2014/main" id="{D3FA0431-6265-46A0-914D-79172491B92A}"/>
+                <a16:creationId xmlns:a16="http://schemas.microsoft.com/office/drawing/2014/main" id="{AF492165-C9E8-4E53-B046-DCCE0CE408BF}"/>
               </a:ext>
             </a:extLst>
           </p:cNvPr>
@@ -14271,7 +14271,7 @@
           <p:cNvPr id="16" name="">
             <a:extLst xmlns:a="http://schemas.openxmlformats.org/drawingml/2006/main">
               <a:ext uri="{FF2B5EF4-FFF2-40B4-BE49-F238E27FC236}">
-                <a16:creationId xmlns:a16="http://schemas.microsoft.com/office/drawing/2014/main" id="{B7199522-597F-4C60-A41D-5E15E0EF713B}"/>
+                <a16:creationId xmlns:a16="http://schemas.microsoft.com/office/drawing/2014/main" id="{AABEFB46-F433-416F-8F3A-5C70CECA5171}"/>
               </a:ext>
             </a:extLst>
           </p:cNvPr>
@@ -14334,7 +14334,7 @@
           <p:cNvPr id="17" name="">
             <a:extLst xmlns:a="http://schemas.openxmlformats.org/drawingml/2006/main">
               <a:ext uri="{FF2B5EF4-FFF2-40B4-BE49-F238E27FC236}">
-                <a16:creationId xmlns:a16="http://schemas.microsoft.com/office/drawing/2014/main" id="{540B0D52-772B-44AC-85F2-17BACE137FA6}"/>
+                <a16:creationId xmlns:a16="http://schemas.microsoft.com/office/drawing/2014/main" id="{830E8488-A5D9-4C93-9B33-251707398963}"/>
               </a:ext>
             </a:extLst>
           </p:cNvPr>
@@ -14397,7 +14397,7 @@
           <p:cNvPr id="18" name="">
             <a:extLst xmlns:a="http://schemas.openxmlformats.org/drawingml/2006/main">
               <a:ext uri="{FF2B5EF4-FFF2-40B4-BE49-F238E27FC236}">
-                <a16:creationId xmlns:a16="http://schemas.microsoft.com/office/drawing/2014/main" id="{F70E59FE-DA8F-4333-ADE7-9EC0F4EB1F9F}"/>
+                <a16:creationId xmlns:a16="http://schemas.microsoft.com/office/drawing/2014/main" id="{737AD6A1-A25B-44C6-8E31-1C490CB593E8}"/>
               </a:ext>
             </a:extLst>
           </p:cNvPr>
@@ -14429,7 +14429,7 @@
           <p:cNvPr id="19" name="">
             <a:extLst xmlns:a="http://schemas.openxmlformats.org/drawingml/2006/main">
               <a:ext uri="{FF2B5EF4-FFF2-40B4-BE49-F238E27FC236}">
-                <a16:creationId xmlns:a16="http://schemas.microsoft.com/office/drawing/2014/main" id="{487D3E18-677B-4E5B-8EE4-E9D2C9CB2282}"/>
+                <a16:creationId xmlns:a16="http://schemas.microsoft.com/office/drawing/2014/main" id="{253F16E2-E389-460C-8863-968470B09545}"/>
               </a:ext>
             </a:extLst>
           </p:cNvPr>
@@ -14492,7 +14492,7 @@
           <p:cNvPr id="20" name="">
             <a:extLst xmlns:a="http://schemas.openxmlformats.org/drawingml/2006/main">
               <a:ext uri="{FF2B5EF4-FFF2-40B4-BE49-F238E27FC236}">
-                <a16:creationId xmlns:a16="http://schemas.microsoft.com/office/drawing/2014/main" id="{4549514B-837C-48B7-94D7-3004C4BBAB54}"/>
+                <a16:creationId xmlns:a16="http://schemas.microsoft.com/office/drawing/2014/main" id="{913A8E35-5AD2-4A0C-8D2B-7AE15B8902CE}"/>
               </a:ext>
             </a:extLst>
           </p:cNvPr>
@@ -14555,7 +14555,7 @@
           <p:cNvPr id="21" name="">
             <a:extLst xmlns:a="http://schemas.openxmlformats.org/drawingml/2006/main">
               <a:ext uri="{FF2B5EF4-FFF2-40B4-BE49-F238E27FC236}">
-                <a16:creationId xmlns:a16="http://schemas.microsoft.com/office/drawing/2014/main" id="{10126138-CDE4-4A4F-BCB6-38415EB3B4D6}"/>
+                <a16:creationId xmlns:a16="http://schemas.microsoft.com/office/drawing/2014/main" id="{879BD98A-7B96-43B8-92DE-DBCC52DFAA6F}"/>
               </a:ext>
             </a:extLst>
           </p:cNvPr>
@@ -14587,7 +14587,7 @@
           <p:cNvPr id="22" name="">
             <a:extLst xmlns:a="http://schemas.openxmlformats.org/drawingml/2006/main">
               <a:ext uri="{FF2B5EF4-FFF2-40B4-BE49-F238E27FC236}">
-                <a16:creationId xmlns:a16="http://schemas.microsoft.com/office/drawing/2014/main" id="{1E59832D-9A95-49DE-B1DA-2B0D622E5458}"/>
+                <a16:creationId xmlns:a16="http://schemas.microsoft.com/office/drawing/2014/main" id="{119826F4-4907-47C1-8902-A5686EA19D87}"/>
               </a:ext>
             </a:extLst>
           </p:cNvPr>
@@ -14650,7 +14650,7 @@
           <p:cNvPr id="23" name="">
             <a:extLst xmlns:a="http://schemas.openxmlformats.org/drawingml/2006/main">
               <a:ext uri="{FF2B5EF4-FFF2-40B4-BE49-F238E27FC236}">
-                <a16:creationId xmlns:a16="http://schemas.microsoft.com/office/drawing/2014/main" id="{907EEB81-B6B7-4CBC-84C3-69F4D3E4D5F7}"/>
+                <a16:creationId xmlns:a16="http://schemas.microsoft.com/office/drawing/2014/main" id="{039172AE-EE20-4062-8723-3594206A7E08}"/>
               </a:ext>
             </a:extLst>
           </p:cNvPr>
@@ -14713,7 +14713,7 @@
           <p:cNvPr id="24" name="">
             <a:extLst xmlns:a="http://schemas.openxmlformats.org/drawingml/2006/main">
               <a:ext uri="{FF2B5EF4-FFF2-40B4-BE49-F238E27FC236}">
-                <a16:creationId xmlns:a16="http://schemas.microsoft.com/office/drawing/2014/main" id="{768E3F42-84BA-4ABD-9A69-B6F19F126643}"/>
+                <a16:creationId xmlns:a16="http://schemas.microsoft.com/office/drawing/2014/main" id="{ADFF53F3-A797-41B8-96E4-61413892DF36}"/>
               </a:ext>
             </a:extLst>
           </p:cNvPr>
@@ -14745,7 +14745,7 @@
           <p:cNvPr id="25" name="">
             <a:extLst xmlns:a="http://schemas.openxmlformats.org/drawingml/2006/main">
               <a:ext uri="{FF2B5EF4-FFF2-40B4-BE49-F238E27FC236}">
-                <a16:creationId xmlns:a16="http://schemas.microsoft.com/office/drawing/2014/main" id="{C1F241DC-4D7E-49D5-9325-F305C95F3A4D}"/>
+                <a16:creationId xmlns:a16="http://schemas.microsoft.com/office/drawing/2014/main" id="{127D625D-1266-41F9-8B07-39946E133657}"/>
               </a:ext>
             </a:extLst>
           </p:cNvPr>
@@ -14808,7 +14808,7 @@
           <p:cNvPr id="26" name="">
             <a:extLst xmlns:a="http://schemas.openxmlformats.org/drawingml/2006/main">
               <a:ext uri="{FF2B5EF4-FFF2-40B4-BE49-F238E27FC236}">
-                <a16:creationId xmlns:a16="http://schemas.microsoft.com/office/drawing/2014/main" id="{4EE4FA4F-FD6B-4EFC-861B-EC2735F18328}"/>
+                <a16:creationId xmlns:a16="http://schemas.microsoft.com/office/drawing/2014/main" id="{A95CD9BB-737F-4737-9D8B-3CAA969898A4}"/>
               </a:ext>
             </a:extLst>
           </p:cNvPr>
@@ -14871,7 +14871,7 @@
           <p:cNvPr id="27" name="">
             <a:extLst xmlns:a="http://schemas.openxmlformats.org/drawingml/2006/main">
               <a:ext uri="{FF2B5EF4-FFF2-40B4-BE49-F238E27FC236}">
-                <a16:creationId xmlns:a16="http://schemas.microsoft.com/office/drawing/2014/main" id="{50C83181-4396-469A-986E-357AAEB86AD5}"/>
+                <a16:creationId xmlns:a16="http://schemas.microsoft.com/office/drawing/2014/main" id="{9331D46A-5E8A-4DC0-9939-CB2A95598BEB}"/>
               </a:ext>
             </a:extLst>
           </p:cNvPr>
@@ -14903,7 +14903,7 @@
           <p:cNvPr id="28" name="">
             <a:extLst xmlns:a="http://schemas.openxmlformats.org/drawingml/2006/main">
               <a:ext uri="{FF2B5EF4-FFF2-40B4-BE49-F238E27FC236}">
-                <a16:creationId xmlns:a16="http://schemas.microsoft.com/office/drawing/2014/main" id="{36AC28F3-8FA6-4306-BFED-402AACDF4525}"/>
+                <a16:creationId xmlns:a16="http://schemas.microsoft.com/office/drawing/2014/main" id="{A26F2186-73E2-4C7B-9293-AC22E2FFA7D5}"/>
               </a:ext>
             </a:extLst>
           </p:cNvPr>
@@ -14966,7 +14966,7 @@
           <p:cNvPr id="29" name="">
             <a:extLst xmlns:a="http://schemas.openxmlformats.org/drawingml/2006/main">
               <a:ext uri="{FF2B5EF4-FFF2-40B4-BE49-F238E27FC236}">
-                <a16:creationId xmlns:a16="http://schemas.microsoft.com/office/drawing/2014/main" id="{EB48F71A-819C-4AF0-B0B9-C64E3F9DB4E7}"/>
+                <a16:creationId xmlns:a16="http://schemas.microsoft.com/office/drawing/2014/main" id="{3F252646-6106-4568-A8B8-BB062F4C9B8D}"/>
               </a:ext>
             </a:extLst>
           </p:cNvPr>
@@ -15029,7 +15029,7 @@
           <p:cNvPr id="30" name="">
             <a:extLst xmlns:a="http://schemas.openxmlformats.org/drawingml/2006/main">
               <a:ext uri="{FF2B5EF4-FFF2-40B4-BE49-F238E27FC236}">
-                <a16:creationId xmlns:a16="http://schemas.microsoft.com/office/drawing/2014/main" id="{481CADBC-570B-45CD-AD65-FBA7EC025023}"/>
+                <a16:creationId xmlns:a16="http://schemas.microsoft.com/office/drawing/2014/main" id="{45FFEE00-7D2B-4482-B970-3B9E104286E9}"/>
               </a:ext>
             </a:extLst>
           </p:cNvPr>
@@ -15061,7 +15061,7 @@
           <p:cNvPr id="31" name="">
             <a:extLst xmlns:a="http://schemas.openxmlformats.org/drawingml/2006/main">
               <a:ext uri="{FF2B5EF4-FFF2-40B4-BE49-F238E27FC236}">
-                <a16:creationId xmlns:a16="http://schemas.microsoft.com/office/drawing/2014/main" id="{95F91BEB-996E-4F2E-90F2-33C1F9BB8051}"/>
+                <a16:creationId xmlns:a16="http://schemas.microsoft.com/office/drawing/2014/main" id="{F83B3AFF-F6C9-4F39-853F-AE034C6FBDD1}"/>
               </a:ext>
             </a:extLst>
           </p:cNvPr>
@@ -15124,7 +15124,7 @@
           <p:cNvPr id="32" name="">
             <a:extLst xmlns:a="http://schemas.openxmlformats.org/drawingml/2006/main">
               <a:ext uri="{FF2B5EF4-FFF2-40B4-BE49-F238E27FC236}">
-                <a16:creationId xmlns:a16="http://schemas.microsoft.com/office/drawing/2014/main" id="{FE48A186-B929-40ED-90C7-C2FE66A0C2A0}"/>
+                <a16:creationId xmlns:a16="http://schemas.microsoft.com/office/drawing/2014/main" id="{78BF5452-471B-4E71-985F-BA6C2CEE8299}"/>
               </a:ext>
             </a:extLst>
           </p:cNvPr>
@@ -15187,7 +15187,7 @@
           <p:cNvPr id="33" name="">
             <a:extLst xmlns:a="http://schemas.openxmlformats.org/drawingml/2006/main">
               <a:ext uri="{FF2B5EF4-FFF2-40B4-BE49-F238E27FC236}">
-                <a16:creationId xmlns:a16="http://schemas.microsoft.com/office/drawing/2014/main" id="{771C22BC-1241-4FA5-8BA9-36936663E200}"/>
+                <a16:creationId xmlns:a16="http://schemas.microsoft.com/office/drawing/2014/main" id="{39973831-B340-40DC-AB3D-89E9D0049B24}"/>
               </a:ext>
             </a:extLst>
           </p:cNvPr>
@@ -15219,7 +15219,7 @@
           <p:cNvPr id="34" name="">
             <a:extLst xmlns:a="http://schemas.openxmlformats.org/drawingml/2006/main">
               <a:ext uri="{FF2B5EF4-FFF2-40B4-BE49-F238E27FC236}">
-                <a16:creationId xmlns:a16="http://schemas.microsoft.com/office/drawing/2014/main" id="{8C45D86E-17CB-4C11-9438-EFCBB1BB2164}"/>
+                <a16:creationId xmlns:a16="http://schemas.microsoft.com/office/drawing/2014/main" id="{A70152F0-956C-4D94-BED9-F7E7B834A12A}"/>
               </a:ext>
             </a:extLst>
           </p:cNvPr>
@@ -15282,7 +15282,7 @@
           <p:cNvPr id="35" name="">
             <a:extLst xmlns:a="http://schemas.openxmlformats.org/drawingml/2006/main">
               <a:ext uri="{FF2B5EF4-FFF2-40B4-BE49-F238E27FC236}">
-                <a16:creationId xmlns:a16="http://schemas.microsoft.com/office/drawing/2014/main" id="{AB6E102D-48C8-4DE4-8FAD-F57C04895815}"/>
+                <a16:creationId xmlns:a16="http://schemas.microsoft.com/office/drawing/2014/main" id="{B888558F-0923-4C28-B583-0C709B10DB53}"/>
               </a:ext>
             </a:extLst>
           </p:cNvPr>
@@ -15345,7 +15345,7 @@
           <p:cNvPr id="36" name="">
             <a:extLst xmlns:a="http://schemas.openxmlformats.org/drawingml/2006/main">
               <a:ext uri="{FF2B5EF4-FFF2-40B4-BE49-F238E27FC236}">
-                <a16:creationId xmlns:a16="http://schemas.microsoft.com/office/drawing/2014/main" id="{D7799461-1054-45CA-9978-3D802566AE9C}"/>
+                <a16:creationId xmlns:a16="http://schemas.microsoft.com/office/drawing/2014/main" id="{500F7BDA-954C-48C0-B42E-B35A0E29D9E6}"/>
               </a:ext>
             </a:extLst>
           </p:cNvPr>
@@ -15377,7 +15377,7 @@
           <p:cNvPr id="37" name="">
             <a:extLst xmlns:a="http://schemas.openxmlformats.org/drawingml/2006/main">
               <a:ext uri="{FF2B5EF4-FFF2-40B4-BE49-F238E27FC236}">
-                <a16:creationId xmlns:a16="http://schemas.microsoft.com/office/drawing/2014/main" id="{FFF2654F-97D2-4891-B88C-59B8DD6AE60E}"/>
+                <a16:creationId xmlns:a16="http://schemas.microsoft.com/office/drawing/2014/main" id="{9245D438-94F6-45E2-BD0D-F72869556E67}"/>
               </a:ext>
             </a:extLst>
           </p:cNvPr>
@@ -15440,7 +15440,7 @@
           <p:cNvPr id="38" name="">
             <a:extLst xmlns:a="http://schemas.openxmlformats.org/drawingml/2006/main">
               <a:ext uri="{FF2B5EF4-FFF2-40B4-BE49-F238E27FC236}">
-                <a16:creationId xmlns:a16="http://schemas.microsoft.com/office/drawing/2014/main" id="{175FAA24-4CDB-463B-9C54-FC7EC25B8CF1}"/>
+                <a16:creationId xmlns:a16="http://schemas.microsoft.com/office/drawing/2014/main" id="{65F10F63-CB76-4006-A37F-DEBF7221DB6A}"/>
               </a:ext>
             </a:extLst>
           </p:cNvPr>
@@ -15503,7 +15503,7 @@
           <p:cNvPr id="39" name="">
             <a:extLst xmlns:a="http://schemas.openxmlformats.org/drawingml/2006/main">
               <a:ext uri="{FF2B5EF4-FFF2-40B4-BE49-F238E27FC236}">
-                <a16:creationId xmlns:a16="http://schemas.microsoft.com/office/drawing/2014/main" id="{C47780EB-2B52-498B-AA54-A28F3A06609C}"/>
+                <a16:creationId xmlns:a16="http://schemas.microsoft.com/office/drawing/2014/main" id="{DF678264-52AA-4666-929A-3156A244A316}"/>
               </a:ext>
             </a:extLst>
           </p:cNvPr>
@@ -15535,7 +15535,7 @@
           <p:cNvPr id="40" name="">
             <a:extLst xmlns:a="http://schemas.openxmlformats.org/drawingml/2006/main">
               <a:ext uri="{FF2B5EF4-FFF2-40B4-BE49-F238E27FC236}">
-                <a16:creationId xmlns:a16="http://schemas.microsoft.com/office/drawing/2014/main" id="{DDD335BD-8BD5-4909-BF8B-1F2704DAF80F}"/>
+                <a16:creationId xmlns:a16="http://schemas.microsoft.com/office/drawing/2014/main" id="{0CFE92B0-5E44-4837-B923-A5FEBB741823}"/>
               </a:ext>
             </a:extLst>
           </p:cNvPr>
@@ -15598,7 +15598,7 @@
           <p:cNvPr id="41" name="">
             <a:extLst xmlns:a="http://schemas.openxmlformats.org/drawingml/2006/main">
               <a:ext uri="{FF2B5EF4-FFF2-40B4-BE49-F238E27FC236}">
-                <a16:creationId xmlns:a16="http://schemas.microsoft.com/office/drawing/2014/main" id="{2ABE7E19-6E1F-4169-8452-820A72F3E9E1}"/>
+                <a16:creationId xmlns:a16="http://schemas.microsoft.com/office/drawing/2014/main" id="{5E7783B2-8358-4BB1-AC64-2BF86C638049}"/>
               </a:ext>
             </a:extLst>
           </p:cNvPr>
@@ -15661,7 +15661,7 @@
           <p:cNvPr id="42" name="">
             <a:extLst xmlns:a="http://schemas.openxmlformats.org/drawingml/2006/main">
               <a:ext uri="{FF2B5EF4-FFF2-40B4-BE49-F238E27FC236}">
-                <a16:creationId xmlns:a16="http://schemas.microsoft.com/office/drawing/2014/main" id="{C2001BCA-1E37-4499-A9E1-AE0E11B82886}"/>
+                <a16:creationId xmlns:a16="http://schemas.microsoft.com/office/drawing/2014/main" id="{EDE6B86C-943E-4202-97D8-0708324E9B71}"/>
               </a:ext>
             </a:extLst>
           </p:cNvPr>
@@ -15693,7 +15693,7 @@
           <p:cNvPr id="43" name="">
             <a:extLst xmlns:a="http://schemas.openxmlformats.org/drawingml/2006/main">
               <a:ext uri="{FF2B5EF4-FFF2-40B4-BE49-F238E27FC236}">
-                <a16:creationId xmlns:a16="http://schemas.microsoft.com/office/drawing/2014/main" id="{07BF79FE-7767-42FD-9522-091BE766D17C}"/>
+                <a16:creationId xmlns:a16="http://schemas.microsoft.com/office/drawing/2014/main" id="{1D9B6D1A-3C3A-4342-8A61-E52C18B59417}"/>
               </a:ext>
             </a:extLst>
           </p:cNvPr>
@@ -15756,7 +15756,7 @@
           <p:cNvPr id="44" name="">
             <a:extLst xmlns:a="http://schemas.openxmlformats.org/drawingml/2006/main">
               <a:ext uri="{FF2B5EF4-FFF2-40B4-BE49-F238E27FC236}">
-                <a16:creationId xmlns:a16="http://schemas.microsoft.com/office/drawing/2014/main" id="{4E92B6D5-A925-4E57-A99A-B8385AC3D9DA}"/>
+                <a16:creationId xmlns:a16="http://schemas.microsoft.com/office/drawing/2014/main" id="{ADAFD550-A437-4359-B28C-FDDACC1F5A6F}"/>
               </a:ext>
             </a:extLst>
           </p:cNvPr>
@@ -15819,7 +15819,7 @@
           <p:cNvPr id="45" name="">
             <a:extLst xmlns:a="http://schemas.openxmlformats.org/drawingml/2006/main">
               <a:ext uri="{FF2B5EF4-FFF2-40B4-BE49-F238E27FC236}">
-                <a16:creationId xmlns:a16="http://schemas.microsoft.com/office/drawing/2014/main" id="{83CD0C83-8D65-45E4-9D23-B7D276993EEE}"/>
+                <a16:creationId xmlns:a16="http://schemas.microsoft.com/office/drawing/2014/main" id="{2457844C-0313-47ED-B0DD-28EDF6C1854A}"/>
               </a:ext>
             </a:extLst>
           </p:cNvPr>
@@ -15851,7 +15851,7 @@
           <p:cNvPr id="46" name="">
             <a:extLst xmlns:a="http://schemas.openxmlformats.org/drawingml/2006/main">
               <a:ext uri="{FF2B5EF4-FFF2-40B4-BE49-F238E27FC236}">
-                <a16:creationId xmlns:a16="http://schemas.microsoft.com/office/drawing/2014/main" id="{8CA26869-1B19-4446-B180-F495C20A39B9}"/>
+                <a16:creationId xmlns:a16="http://schemas.microsoft.com/office/drawing/2014/main" id="{606C9B9A-772D-4666-8645-2F43F4A4112D}"/>
               </a:ext>
             </a:extLst>
           </p:cNvPr>
@@ -15914,7 +15914,7 @@
           <p:cNvPr id="47" name="">
             <a:extLst xmlns:a="http://schemas.openxmlformats.org/drawingml/2006/main">
               <a:ext uri="{FF2B5EF4-FFF2-40B4-BE49-F238E27FC236}">
-                <a16:creationId xmlns:a16="http://schemas.microsoft.com/office/drawing/2014/main" id="{ADEAB4DF-E0DF-4C4D-A550-BBF9FD43E5E5}"/>
+                <a16:creationId xmlns:a16="http://schemas.microsoft.com/office/drawing/2014/main" id="{5A960454-B20B-4BFF-A202-A32D457C2AAC}"/>
               </a:ext>
             </a:extLst>
           </p:cNvPr>
@@ -15977,7 +15977,7 @@
           <p:cNvPr id="48" name="">
             <a:extLst xmlns:a="http://schemas.openxmlformats.org/drawingml/2006/main">
               <a:ext uri="{FF2B5EF4-FFF2-40B4-BE49-F238E27FC236}">
-                <a16:creationId xmlns:a16="http://schemas.microsoft.com/office/drawing/2014/main" id="{B672305A-82FD-4B66-89A0-D654C58DB02A}"/>
+                <a16:creationId xmlns:a16="http://schemas.microsoft.com/office/drawing/2014/main" id="{5F2B6C46-EF6E-43A4-BAAE-435FAE74BF0A}"/>
               </a:ext>
             </a:extLst>
           </p:cNvPr>
@@ -16009,7 +16009,7 @@
           <p:cNvPr id="49" name="">
             <a:extLst xmlns:a="http://schemas.openxmlformats.org/drawingml/2006/main">
               <a:ext uri="{FF2B5EF4-FFF2-40B4-BE49-F238E27FC236}">
-                <a16:creationId xmlns:a16="http://schemas.microsoft.com/office/drawing/2014/main" id="{0D3FB0FF-D33F-496B-9268-6BEAC68ADC2B}"/>
+                <a16:creationId xmlns:a16="http://schemas.microsoft.com/office/drawing/2014/main" id="{E927F704-B750-455F-AB51-50CEDF8251CF}"/>
               </a:ext>
             </a:extLst>
           </p:cNvPr>
@@ -16072,7 +16072,7 @@
           <p:cNvPr id="50" name="">
             <a:extLst xmlns:a="http://schemas.openxmlformats.org/drawingml/2006/main">
               <a:ext uri="{FF2B5EF4-FFF2-40B4-BE49-F238E27FC236}">
-                <a16:creationId xmlns:a16="http://schemas.microsoft.com/office/drawing/2014/main" id="{5CF13D22-A252-471E-ABDB-C3887900210F}"/>
+                <a16:creationId xmlns:a16="http://schemas.microsoft.com/office/drawing/2014/main" id="{64CC5159-93BB-44E5-8BCF-3A1CA83DDC94}"/>
               </a:ext>
             </a:extLst>
           </p:cNvPr>
@@ -16135,7 +16135,7 @@
           <p:cNvPr id="51" name="">
             <a:extLst xmlns:a="http://schemas.openxmlformats.org/drawingml/2006/main">
               <a:ext uri="{FF2B5EF4-FFF2-40B4-BE49-F238E27FC236}">
-                <a16:creationId xmlns:a16="http://schemas.microsoft.com/office/drawing/2014/main" id="{10848BB5-0CBE-4ED7-8FB3-433C629EFCBA}"/>
+                <a16:creationId xmlns:a16="http://schemas.microsoft.com/office/drawing/2014/main" id="{4E106983-BD97-4EA3-85DC-0F1633024601}"/>
               </a:ext>
             </a:extLst>
           </p:cNvPr>
@@ -16167,7 +16167,7 @@
           <p:cNvPr id="52" name="">
             <a:extLst xmlns:a="http://schemas.openxmlformats.org/drawingml/2006/main">
               <a:ext uri="{FF2B5EF4-FFF2-40B4-BE49-F238E27FC236}">
-                <a16:creationId xmlns:a16="http://schemas.microsoft.com/office/drawing/2014/main" id="{DECBA539-7D17-414D-965C-694A5790DB2E}"/>
+                <a16:creationId xmlns:a16="http://schemas.microsoft.com/office/drawing/2014/main" id="{A0ECF009-55D4-4A0A-A1E3-E442CE51A735}"/>
               </a:ext>
             </a:extLst>
           </p:cNvPr>
@@ -16230,7 +16230,7 @@
           <p:cNvPr id="53" name="">
             <a:extLst xmlns:a="http://schemas.openxmlformats.org/drawingml/2006/main">
               <a:ext uri="{FF2B5EF4-FFF2-40B4-BE49-F238E27FC236}">
-                <a16:creationId xmlns:a16="http://schemas.microsoft.com/office/drawing/2014/main" id="{B52952FF-82FC-4105-920D-69A3E3FD3C08}"/>
+                <a16:creationId xmlns:a16="http://schemas.microsoft.com/office/drawing/2014/main" id="{1BE12676-9D1F-45EF-A514-AE74F66A5A01}"/>
               </a:ext>
             </a:extLst>
           </p:cNvPr>
@@ -16293,7 +16293,7 @@
           <p:cNvPr id="54" name="">
             <a:extLst xmlns:a="http://schemas.openxmlformats.org/drawingml/2006/main">
               <a:ext uri="{FF2B5EF4-FFF2-40B4-BE49-F238E27FC236}">
-                <a16:creationId xmlns:a16="http://schemas.microsoft.com/office/drawing/2014/main" id="{B93AFFC1-A613-4259-85C3-9A582FAE39CC}"/>
+                <a16:creationId xmlns:a16="http://schemas.microsoft.com/office/drawing/2014/main" id="{728303C2-8110-4D4B-8F47-5F7D3FAB8F77}"/>
               </a:ext>
             </a:extLst>
           </p:cNvPr>
@@ -16325,7 +16325,7 @@
           <p:cNvPr id="55" name="">
             <a:extLst xmlns:a="http://schemas.openxmlformats.org/drawingml/2006/main">
               <a:ext uri="{FF2B5EF4-FFF2-40B4-BE49-F238E27FC236}">
-                <a16:creationId xmlns:a16="http://schemas.microsoft.com/office/drawing/2014/main" id="{8CE93E9E-5C3E-4F4C-89B4-E4E8409E6C7D}"/>
+                <a16:creationId xmlns:a16="http://schemas.microsoft.com/office/drawing/2014/main" id="{519EE5E5-7614-4AF7-A079-B1CE3FE4BEAD}"/>
               </a:ext>
             </a:extLst>
           </p:cNvPr>
@@ -16388,7 +16388,7 @@
           <p:cNvPr id="56" name="">
             <a:extLst xmlns:a="http://schemas.openxmlformats.org/drawingml/2006/main">
               <a:ext uri="{FF2B5EF4-FFF2-40B4-BE49-F238E27FC236}">
-                <a16:creationId xmlns:a16="http://schemas.microsoft.com/office/drawing/2014/main" id="{197223D1-EA92-4543-8ABC-ECA2D2400A5F}"/>
+                <a16:creationId xmlns:a16="http://schemas.microsoft.com/office/drawing/2014/main" id="{4002D0A3-F56C-44DF-A6E6-1D6C0FCE1A6C}"/>
               </a:ext>
             </a:extLst>
           </p:cNvPr>
@@ -16451,7 +16451,7 @@
           <p:cNvPr id="57" name="">
             <a:extLst xmlns:a="http://schemas.openxmlformats.org/drawingml/2006/main">
               <a:ext uri="{FF2B5EF4-FFF2-40B4-BE49-F238E27FC236}">
-                <a16:creationId xmlns:a16="http://schemas.microsoft.com/office/drawing/2014/main" id="{ECD2B810-FDFE-44D4-A53E-2C6A57F64FA1}"/>
+                <a16:creationId xmlns:a16="http://schemas.microsoft.com/office/drawing/2014/main" id="{7625CE7E-C751-4F41-A4CB-295DB1BF678C}"/>
               </a:ext>
             </a:extLst>
           </p:cNvPr>
@@ -16483,7 +16483,7 @@
           <p:cNvPr id="58" name="">
             <a:extLst xmlns:a="http://schemas.openxmlformats.org/drawingml/2006/main">
               <a:ext uri="{FF2B5EF4-FFF2-40B4-BE49-F238E27FC236}">
-                <a16:creationId xmlns:a16="http://schemas.microsoft.com/office/drawing/2014/main" id="{C23D4CF3-4A75-41E7-BB46-9CFCE638B50E}"/>
+                <a16:creationId xmlns:a16="http://schemas.microsoft.com/office/drawing/2014/main" id="{E99EE062-60E9-4BB3-BEA0-8A36A7E66E53}"/>
               </a:ext>
             </a:extLst>
           </p:cNvPr>
@@ -16546,7 +16546,7 @@
           <p:cNvPr id="59" name="">
             <a:extLst xmlns:a="http://schemas.openxmlformats.org/drawingml/2006/main">
               <a:ext uri="{FF2B5EF4-FFF2-40B4-BE49-F238E27FC236}">
-                <a16:creationId xmlns:a16="http://schemas.microsoft.com/office/drawing/2014/main" id="{0C2D8D4F-3689-4EE3-A966-76EF9D63CC3A}"/>
+                <a16:creationId xmlns:a16="http://schemas.microsoft.com/office/drawing/2014/main" id="{09D22FD6-6B54-4370-A9C9-A6F90FE9A2B3}"/>
               </a:ext>
             </a:extLst>
           </p:cNvPr>
@@ -16609,7 +16609,7 @@
           <p:cNvPr id="60" name="">
             <a:extLst xmlns:a="http://schemas.openxmlformats.org/drawingml/2006/main">
               <a:ext uri="{FF2B5EF4-FFF2-40B4-BE49-F238E27FC236}">
-                <a16:creationId xmlns:a16="http://schemas.microsoft.com/office/drawing/2014/main" id="{BCB4F85F-D95F-457D-90CC-3BB6E7436163}"/>
+                <a16:creationId xmlns:a16="http://schemas.microsoft.com/office/drawing/2014/main" id="{8799939D-6B26-4920-9CCD-F4088C9C683A}"/>
               </a:ext>
             </a:extLst>
           </p:cNvPr>
@@ -16641,7 +16641,7 @@
           <p:cNvPr id="61" name="">
             <a:extLst xmlns:a="http://schemas.openxmlformats.org/drawingml/2006/main">
               <a:ext uri="{FF2B5EF4-FFF2-40B4-BE49-F238E27FC236}">
-                <a16:creationId xmlns:a16="http://schemas.microsoft.com/office/drawing/2014/main" id="{0E7E538A-2ACA-49F1-A4EB-94026C120110}"/>
+                <a16:creationId xmlns:a16="http://schemas.microsoft.com/office/drawing/2014/main" id="{D594A95A-0BA6-4598-AB67-273DA540E5B7}"/>
               </a:ext>
             </a:extLst>
           </p:cNvPr>
@@ -16704,7 +16704,7 @@
           <p:cNvPr id="62" name="">
             <a:extLst xmlns:a="http://schemas.openxmlformats.org/drawingml/2006/main">
               <a:ext uri="{FF2B5EF4-FFF2-40B4-BE49-F238E27FC236}">
-                <a16:creationId xmlns:a16="http://schemas.microsoft.com/office/drawing/2014/main" id="{0E42568B-502F-4A58-A77E-8C250151E733}"/>
+                <a16:creationId xmlns:a16="http://schemas.microsoft.com/office/drawing/2014/main" id="{B37BC3B8-8F45-49CF-AFCA-8F485BB7A866}"/>
               </a:ext>
             </a:extLst>
           </p:cNvPr>
@@ -16767,7 +16767,7 @@
           <p:cNvPr id="63" name="">
             <a:extLst xmlns:a="http://schemas.openxmlformats.org/drawingml/2006/main">
               <a:ext uri="{FF2B5EF4-FFF2-40B4-BE49-F238E27FC236}">
-                <a16:creationId xmlns:a16="http://schemas.microsoft.com/office/drawing/2014/main" id="{633BEB2A-042C-42DD-BDE2-0761737D1A35}"/>
+                <a16:creationId xmlns:a16="http://schemas.microsoft.com/office/drawing/2014/main" id="{C4784276-2815-4C3E-BB66-74271B05E7E6}"/>
               </a:ext>
             </a:extLst>
           </p:cNvPr>
@@ -16799,7 +16799,7 @@
           <p:cNvPr id="64" name="">
             <a:extLst xmlns:a="http://schemas.openxmlformats.org/drawingml/2006/main">
               <a:ext uri="{FF2B5EF4-FFF2-40B4-BE49-F238E27FC236}">
-                <a16:creationId xmlns:a16="http://schemas.microsoft.com/office/drawing/2014/main" id="{68973703-F186-4BCE-BB52-D077CE93B8BA}"/>
+                <a16:creationId xmlns:a16="http://schemas.microsoft.com/office/drawing/2014/main" id="{8052EE5C-FA71-49D8-9393-FA157E925B2A}"/>
               </a:ext>
             </a:extLst>
           </p:cNvPr>
@@ -16862,7 +16862,7 @@
           <p:cNvPr id="65" name="">
             <a:extLst xmlns:a="http://schemas.openxmlformats.org/drawingml/2006/main">
               <a:ext uri="{FF2B5EF4-FFF2-40B4-BE49-F238E27FC236}">
-                <a16:creationId xmlns:a16="http://schemas.microsoft.com/office/drawing/2014/main" id="{CCA0B313-F0EA-4DB7-87ED-17837FA63DDD}"/>
+                <a16:creationId xmlns:a16="http://schemas.microsoft.com/office/drawing/2014/main" id="{73330BA9-8F30-4A96-BC79-70E40DF418AB}"/>
               </a:ext>
             </a:extLst>
           </p:cNvPr>
@@ -16894,7 +16894,7 @@
           <p:cNvPr id="66" name="">
             <a:extLst xmlns:a="http://schemas.openxmlformats.org/drawingml/2006/main">
               <a:ext uri="{FF2B5EF4-FFF2-40B4-BE49-F238E27FC236}">
-                <a16:creationId xmlns:a16="http://schemas.microsoft.com/office/drawing/2014/main" id="{B287605D-B936-481A-B578-2134630AD34C}"/>
+                <a16:creationId xmlns:a16="http://schemas.microsoft.com/office/drawing/2014/main" id="{A55CB807-601E-433F-955A-4BB859CF90B2}"/>
               </a:ext>
             </a:extLst>
           </p:cNvPr>
@@ -16926,7 +16926,7 @@
           <p:cNvPr id="67" name="">
             <a:extLst xmlns:a="http://schemas.openxmlformats.org/drawingml/2006/main">
               <a:ext uri="{FF2B5EF4-FFF2-40B4-BE49-F238E27FC236}">
-                <a16:creationId xmlns:a16="http://schemas.microsoft.com/office/drawing/2014/main" id="{8CB91AD7-6770-445D-AD46-7B4AA42EF728}"/>
+                <a16:creationId xmlns:a16="http://schemas.microsoft.com/office/drawing/2014/main" id="{4EAB83EC-FB0B-4B81-A4A8-B7801BFA3007}"/>
               </a:ext>
             </a:extLst>
           </p:cNvPr>
@@ -16989,7 +16989,7 @@
           <p:cNvPr id="68" name="">
             <a:extLst xmlns:a="http://schemas.openxmlformats.org/drawingml/2006/main">
               <a:ext uri="{FF2B5EF4-FFF2-40B4-BE49-F238E27FC236}">
-                <a16:creationId xmlns:a16="http://schemas.microsoft.com/office/drawing/2014/main" id="{69059A25-122F-49CB-BD7F-FCFD9EEB0005}"/>
+                <a16:creationId xmlns:a16="http://schemas.microsoft.com/office/drawing/2014/main" id="{62F0B85B-2560-442E-9DE9-E355C0A4AEDF}"/>
               </a:ext>
             </a:extLst>
           </p:cNvPr>
@@ -17056,7 +17056,7 @@
           <p:cNvPr id="69" name="">
             <a:extLst xmlns:a="http://schemas.openxmlformats.org/drawingml/2006/main">
               <a:ext uri="{FF2B5EF4-FFF2-40B4-BE49-F238E27FC236}">
-                <a16:creationId xmlns:a16="http://schemas.microsoft.com/office/drawing/2014/main" id="{016004D5-B0B6-4DEC-B0A0-BCED38C40FBE}"/>
+                <a16:creationId xmlns:a16="http://schemas.microsoft.com/office/drawing/2014/main" id="{43FC03E6-7299-4231-B62A-2099F9BE1A41}"/>
               </a:ext>
             </a:extLst>
           </p:cNvPr>
@@ -17088,7 +17088,7 @@
           <p:cNvPr id="70" name="">
             <a:extLst xmlns:a="http://schemas.openxmlformats.org/drawingml/2006/main">
               <a:ext uri="{FF2B5EF4-FFF2-40B4-BE49-F238E27FC236}">
-                <a16:creationId xmlns:a16="http://schemas.microsoft.com/office/drawing/2014/main" id="{C2C2F685-E89C-4EF4-AD94-5ADACA1B9305}"/>
+                <a16:creationId xmlns:a16="http://schemas.microsoft.com/office/drawing/2014/main" id="{53CAA86D-0987-40F2-91DF-09ECC8506625}"/>
               </a:ext>
             </a:extLst>
           </p:cNvPr>
@@ -17120,7 +17120,7 @@
           <p:cNvPr id="71" name="">
             <a:extLst xmlns:a="http://schemas.openxmlformats.org/drawingml/2006/main">
               <a:ext uri="{FF2B5EF4-FFF2-40B4-BE49-F238E27FC236}">
-                <a16:creationId xmlns:a16="http://schemas.microsoft.com/office/drawing/2014/main" id="{C9684735-8F0C-4C53-90E0-88BAE0C2002B}"/>
+                <a16:creationId xmlns:a16="http://schemas.microsoft.com/office/drawing/2014/main" id="{81A57CC2-4491-4019-BD1D-DBB529F8447F}"/>
               </a:ext>
             </a:extLst>
           </p:cNvPr>
@@ -17183,7 +17183,7 @@
           <p:cNvPr id="72" name="">
             <a:extLst xmlns:a="http://schemas.openxmlformats.org/drawingml/2006/main">
               <a:ext uri="{FF2B5EF4-FFF2-40B4-BE49-F238E27FC236}">
-                <a16:creationId xmlns:a16="http://schemas.microsoft.com/office/drawing/2014/main" id="{53B625C1-B307-4BEF-8A76-BDCAAC4C7DC3}"/>
+                <a16:creationId xmlns:a16="http://schemas.microsoft.com/office/drawing/2014/main" id="{4BA71FEA-FF0A-4D78-A958-C8A28E333F16}"/>
               </a:ext>
             </a:extLst>
           </p:cNvPr>
@@ -17250,7 +17250,7 @@
           <p:cNvPr id="73" name="">
             <a:extLst xmlns:a="http://schemas.openxmlformats.org/drawingml/2006/main">
               <a:ext uri="{FF2B5EF4-FFF2-40B4-BE49-F238E27FC236}">
-                <a16:creationId xmlns:a16="http://schemas.microsoft.com/office/drawing/2014/main" id="{3E7B2207-1C8B-4C05-BEDB-DD69775EDE9E}"/>
+                <a16:creationId xmlns:a16="http://schemas.microsoft.com/office/drawing/2014/main" id="{94F7EF32-CD38-4DC8-96F4-F51734B61854}"/>
               </a:ext>
             </a:extLst>
           </p:cNvPr>
@@ -17313,7 +17313,7 @@
           <p:cNvPr id="74" name="">
             <a:extLst xmlns:a="http://schemas.openxmlformats.org/drawingml/2006/main">
               <a:ext uri="{FF2B5EF4-FFF2-40B4-BE49-F238E27FC236}">
-                <a16:creationId xmlns:a16="http://schemas.microsoft.com/office/drawing/2014/main" id="{CCC6E45D-6E58-4A59-82F8-04D7A173260A}"/>
+                <a16:creationId xmlns:a16="http://schemas.microsoft.com/office/drawing/2014/main" id="{97108FC0-E548-4BF1-97BB-7CF524E31654}"/>
               </a:ext>
             </a:extLst>
           </p:cNvPr>
@@ -17345,7 +17345,7 @@
           <p:cNvPr id="75" name="">
             <a:extLst xmlns:a="http://schemas.openxmlformats.org/drawingml/2006/main">
               <a:ext uri="{FF2B5EF4-FFF2-40B4-BE49-F238E27FC236}">
-                <a16:creationId xmlns:a16="http://schemas.microsoft.com/office/drawing/2014/main" id="{68959542-3E99-4EA1-8152-D02D0441E060}"/>
+                <a16:creationId xmlns:a16="http://schemas.microsoft.com/office/drawing/2014/main" id="{74031AF1-2087-4FAD-9EAA-BA7F7C662090}"/>
               </a:ext>
             </a:extLst>
           </p:cNvPr>
@@ -17408,7 +17408,7 @@
           <p:cNvPr id="76" name="">
             <a:extLst xmlns:a="http://schemas.openxmlformats.org/drawingml/2006/main">
               <a:ext uri="{FF2B5EF4-FFF2-40B4-BE49-F238E27FC236}">
-                <a16:creationId xmlns:a16="http://schemas.microsoft.com/office/drawing/2014/main" id="{664C379A-3F24-4647-A2BF-406F607E1CEF}"/>
+                <a16:creationId xmlns:a16="http://schemas.microsoft.com/office/drawing/2014/main" id="{A53C5819-989C-410B-A52B-0342D513E41B}"/>
               </a:ext>
             </a:extLst>
           </p:cNvPr>
@@ -17469,7 +17469,7 @@
     </p:spTree>
     <p:extLst>
       <p:ext uri="{BB962C8B-B14F-4D97-AF65-F5344CB8AC3E}">
-        <p14:creationId xmlns:p14="http://schemas.microsoft.com/office/powerpoint/2010/main" val="1001168661"/>
+        <p14:creationId xmlns:p14="http://schemas.microsoft.com/office/powerpoint/2010/main" val="995318522"/>
       </p:ext>
     </p:extLst>
   </p:cSld>
@@ -17500,7 +17500,7 @@
           <p:cNvPr id="1" name="">
             <a:extLst xmlns:a="http://schemas.openxmlformats.org/drawingml/2006/main">
               <a:ext uri="{FF2B5EF4-FFF2-40B4-BE49-F238E27FC236}">
-                <a16:creationId xmlns:a16="http://schemas.microsoft.com/office/drawing/2014/main" id="{A2EBA334-D127-4E73-8FCB-21B36FBF6E6F}"/>
+                <a16:creationId xmlns:a16="http://schemas.microsoft.com/office/drawing/2014/main" id="{D3D738D4-1C1B-4082-AC5A-62095560D8EC}"/>
               </a:ext>
             </a:extLst>
           </p:cNvPr>
@@ -17563,7 +17563,7 @@
           <p:cNvPr id="2" name="">
             <a:extLst xmlns:a="http://schemas.openxmlformats.org/drawingml/2006/main">
               <a:ext uri="{FF2B5EF4-FFF2-40B4-BE49-F238E27FC236}">
-                <a16:creationId xmlns:a16="http://schemas.microsoft.com/office/drawing/2014/main" id="{5B383306-0471-4F1F-A238-B2015C0ECEC7}"/>
+                <a16:creationId xmlns:a16="http://schemas.microsoft.com/office/drawing/2014/main" id="{2F352C8E-CBD3-4FE2-8453-FCC42FF7DE8D}"/>
               </a:ext>
             </a:extLst>
           </p:cNvPr>
@@ -17630,7 +17630,7 @@
           <p:cNvPr id="3" name="">
             <a:extLst xmlns:a="http://schemas.openxmlformats.org/drawingml/2006/main">
               <a:ext uri="{FF2B5EF4-FFF2-40B4-BE49-F238E27FC236}">
-                <a16:creationId xmlns:a16="http://schemas.microsoft.com/office/drawing/2014/main" id="{5065EF85-6A07-46FE-B5AA-D15BD2A6F496}"/>
+                <a16:creationId xmlns:a16="http://schemas.microsoft.com/office/drawing/2014/main" id="{6D73D1EE-AA47-4CA3-AEBD-068693E6CF90}"/>
               </a:ext>
             </a:extLst>
           </p:cNvPr>
@@ -17697,7 +17697,7 @@
           <p:cNvPr id="4" name="">
             <a:extLst xmlns:a="http://schemas.openxmlformats.org/drawingml/2006/main">
               <a:ext uri="{FF2B5EF4-FFF2-40B4-BE49-F238E27FC236}">
-                <a16:creationId xmlns:a16="http://schemas.microsoft.com/office/drawing/2014/main" id="{C53671E2-02F1-47C8-A05E-F59CC8494C5D}"/>
+                <a16:creationId xmlns:a16="http://schemas.microsoft.com/office/drawing/2014/main" id="{8BA441C5-623C-4666-A64C-922834F48843}"/>
               </a:ext>
             </a:extLst>
           </p:cNvPr>
@@ -17729,7 +17729,7 @@
           <p:cNvPr id="5" name="">
             <a:extLst xmlns:a="http://schemas.openxmlformats.org/drawingml/2006/main">
               <a:ext uri="{FF2B5EF4-FFF2-40B4-BE49-F238E27FC236}">
-                <a16:creationId xmlns:a16="http://schemas.microsoft.com/office/drawing/2014/main" id="{7815C358-7ECA-423C-9957-4FB9AA736243}"/>
+                <a16:creationId xmlns:a16="http://schemas.microsoft.com/office/drawing/2014/main" id="{16D72792-960A-495B-B821-AB58FAEE3D9B}"/>
               </a:ext>
             </a:extLst>
           </p:cNvPr>
@@ -17761,7 +17761,7 @@
           <p:cNvPr id="6" name="">
             <a:extLst xmlns:a="http://schemas.openxmlformats.org/drawingml/2006/main">
               <a:ext uri="{FF2B5EF4-FFF2-40B4-BE49-F238E27FC236}">
-                <a16:creationId xmlns:a16="http://schemas.microsoft.com/office/drawing/2014/main" id="{9E7791A2-4ECE-4846-A8C5-21401FABF5F9}"/>
+                <a16:creationId xmlns:a16="http://schemas.microsoft.com/office/drawing/2014/main" id="{B021291A-F8C3-4152-BE7E-F77172BBCC8B}"/>
               </a:ext>
             </a:extLst>
           </p:cNvPr>
@@ -17824,7 +17824,7 @@
           <p:cNvPr id="7" name="">
             <a:extLst xmlns:a="http://schemas.openxmlformats.org/drawingml/2006/main">
               <a:ext uri="{FF2B5EF4-FFF2-40B4-BE49-F238E27FC236}">
-                <a16:creationId xmlns:a16="http://schemas.microsoft.com/office/drawing/2014/main" id="{0006216A-3420-4734-9398-D63895A1CC62}"/>
+                <a16:creationId xmlns:a16="http://schemas.microsoft.com/office/drawing/2014/main" id="{F346C671-7BD5-4157-A630-801FD9876403}"/>
               </a:ext>
             </a:extLst>
           </p:cNvPr>
@@ -17891,7 +17891,7 @@
           <p:cNvPr id="8" name="">
             <a:extLst xmlns:a="http://schemas.openxmlformats.org/drawingml/2006/main">
               <a:ext uri="{FF2B5EF4-FFF2-40B4-BE49-F238E27FC236}">
-                <a16:creationId xmlns:a16="http://schemas.microsoft.com/office/drawing/2014/main" id="{7BAFFCF3-37A9-4A26-AA9F-4FC0C03EA60D}"/>
+                <a16:creationId xmlns:a16="http://schemas.microsoft.com/office/drawing/2014/main" id="{898DAC09-F184-4427-9D06-59276671AA71}"/>
               </a:ext>
             </a:extLst>
           </p:cNvPr>
@@ -17925,7 +17925,7 @@
           <p:cNvPr id="9" name="">
             <a:extLst xmlns:a="http://schemas.openxmlformats.org/drawingml/2006/main">
               <a:ext uri="{FF2B5EF4-FFF2-40B4-BE49-F238E27FC236}">
-                <a16:creationId xmlns:a16="http://schemas.microsoft.com/office/drawing/2014/main" id="{DF730E79-3516-437C-8BBF-6D004198C878}"/>
+                <a16:creationId xmlns:a16="http://schemas.microsoft.com/office/drawing/2014/main" id="{F3759540-8EBF-416E-93FF-9A3EB5333D12}"/>
               </a:ext>
             </a:extLst>
           </p:cNvPr>
@@ -17957,7 +17957,7 @@
           <p:cNvPr id="10" name="">
             <a:extLst xmlns:a="http://schemas.openxmlformats.org/drawingml/2006/main">
               <a:ext uri="{FF2B5EF4-FFF2-40B4-BE49-F238E27FC236}">
-                <a16:creationId xmlns:a16="http://schemas.microsoft.com/office/drawing/2014/main" id="{60900D06-25A4-4EC8-B860-0FBCCF492D95}"/>
+                <a16:creationId xmlns:a16="http://schemas.microsoft.com/office/drawing/2014/main" id="{75B556A7-A7DC-4EA1-828C-25148D1EEC2E}"/>
               </a:ext>
             </a:extLst>
           </p:cNvPr>
@@ -17989,7 +17989,7 @@
           <p:cNvPr id="11" name="">
             <a:extLst xmlns:a="http://schemas.openxmlformats.org/drawingml/2006/main">
               <a:ext uri="{FF2B5EF4-FFF2-40B4-BE49-F238E27FC236}">
-                <a16:creationId xmlns:a16="http://schemas.microsoft.com/office/drawing/2014/main" id="{CF0AEF72-23F9-4289-BECD-6105DCE782DB}"/>
+                <a16:creationId xmlns:a16="http://schemas.microsoft.com/office/drawing/2014/main" id="{2150C7DE-0BC8-42EB-B8EA-86826D346905}"/>
               </a:ext>
             </a:extLst>
           </p:cNvPr>
@@ -18021,7 +18021,7 @@
           <p:cNvPr id="12" name="">
             <a:extLst xmlns:a="http://schemas.openxmlformats.org/drawingml/2006/main">
               <a:ext uri="{FF2B5EF4-FFF2-40B4-BE49-F238E27FC236}">
-                <a16:creationId xmlns:a16="http://schemas.microsoft.com/office/drawing/2014/main" id="{D8FA384C-CE3C-4252-975F-92DCF0F6F591}"/>
+                <a16:creationId xmlns:a16="http://schemas.microsoft.com/office/drawing/2014/main" id="{D7EF082A-FD06-49BC-B95C-6B60DF0360DC}"/>
               </a:ext>
             </a:extLst>
           </p:cNvPr>
@@ -18084,7 +18084,7 @@
           <p:cNvPr id="13" name="">
             <a:extLst xmlns:a="http://schemas.openxmlformats.org/drawingml/2006/main">
               <a:ext uri="{FF2B5EF4-FFF2-40B4-BE49-F238E27FC236}">
-                <a16:creationId xmlns:a16="http://schemas.microsoft.com/office/drawing/2014/main" id="{7610D6DF-004F-4D00-BAA4-9D9C2CB3E91F}"/>
+                <a16:creationId xmlns:a16="http://schemas.microsoft.com/office/drawing/2014/main" id="{2E4F4BE0-4803-44CC-87AD-BFC8FE080BFF}"/>
               </a:ext>
             </a:extLst>
           </p:cNvPr>
@@ -18151,7 +18151,7 @@
           <p:cNvPr id="14" name="">
             <a:extLst xmlns:a="http://schemas.openxmlformats.org/drawingml/2006/main">
               <a:ext uri="{FF2B5EF4-FFF2-40B4-BE49-F238E27FC236}">
-                <a16:creationId xmlns:a16="http://schemas.microsoft.com/office/drawing/2014/main" id="{6416FCFD-7452-46EE-8CF8-B652A8761C95}"/>
+                <a16:creationId xmlns:a16="http://schemas.microsoft.com/office/drawing/2014/main" id="{DF6559A3-C4E9-4040-AEF8-BA3E6E49510E}"/>
               </a:ext>
             </a:extLst>
           </p:cNvPr>
@@ -18185,7 +18185,7 @@
           <p:cNvPr id="15" name="">
             <a:extLst xmlns:a="http://schemas.openxmlformats.org/drawingml/2006/main">
               <a:ext uri="{FF2B5EF4-FFF2-40B4-BE49-F238E27FC236}">
-                <a16:creationId xmlns:a16="http://schemas.microsoft.com/office/drawing/2014/main" id="{A75B9D0F-8548-49EA-BF88-0D55812D1EA7}"/>
+                <a16:creationId xmlns:a16="http://schemas.microsoft.com/office/drawing/2014/main" id="{059D16C8-EBC1-4408-A484-0259EC1ACCA2}"/>
               </a:ext>
             </a:extLst>
           </p:cNvPr>
@@ -18217,7 +18217,7 @@
           <p:cNvPr id="16" name="">
             <a:extLst xmlns:a="http://schemas.openxmlformats.org/drawingml/2006/main">
               <a:ext uri="{FF2B5EF4-FFF2-40B4-BE49-F238E27FC236}">
-                <a16:creationId xmlns:a16="http://schemas.microsoft.com/office/drawing/2014/main" id="{ED34BD79-F7C8-4222-9911-49EE26316E91}"/>
+                <a16:creationId xmlns:a16="http://schemas.microsoft.com/office/drawing/2014/main" id="{80DE65D0-2661-41F0-A24E-BDDDE706E685}"/>
               </a:ext>
             </a:extLst>
           </p:cNvPr>
@@ -18249,7 +18249,7 @@
           <p:cNvPr id="17" name="">
             <a:extLst xmlns:a="http://schemas.openxmlformats.org/drawingml/2006/main">
               <a:ext uri="{FF2B5EF4-FFF2-40B4-BE49-F238E27FC236}">
-                <a16:creationId xmlns:a16="http://schemas.microsoft.com/office/drawing/2014/main" id="{8CA5D409-DC22-4F30-AA54-84A4797BFC68}"/>
+                <a16:creationId xmlns:a16="http://schemas.microsoft.com/office/drawing/2014/main" id="{6ADB968B-A8B3-44FB-9A7C-6ACBCC6CF7EE}"/>
               </a:ext>
             </a:extLst>
           </p:cNvPr>
@@ -18281,7 +18281,7 @@
           <p:cNvPr id="18" name="">
             <a:extLst xmlns:a="http://schemas.openxmlformats.org/drawingml/2006/main">
               <a:ext uri="{FF2B5EF4-FFF2-40B4-BE49-F238E27FC236}">
-                <a16:creationId xmlns:a16="http://schemas.microsoft.com/office/drawing/2014/main" id="{F648DA98-193F-4E13-9980-801C57CEB24E}"/>
+                <a16:creationId xmlns:a16="http://schemas.microsoft.com/office/drawing/2014/main" id="{57624637-A074-4A19-BB46-857B58322386}"/>
               </a:ext>
             </a:extLst>
           </p:cNvPr>
@@ -18344,7 +18344,7 @@
           <p:cNvPr id="19" name="">
             <a:extLst xmlns:a="http://schemas.openxmlformats.org/drawingml/2006/main">
               <a:ext uri="{FF2B5EF4-FFF2-40B4-BE49-F238E27FC236}">
-                <a16:creationId xmlns:a16="http://schemas.microsoft.com/office/drawing/2014/main" id="{02D410A3-F31C-4B45-949B-54AB90D53838}"/>
+                <a16:creationId xmlns:a16="http://schemas.microsoft.com/office/drawing/2014/main" id="{3FABCE0B-63BD-4D82-9812-D7687799A626}"/>
               </a:ext>
             </a:extLst>
           </p:cNvPr>
@@ -18411,7 +18411,7 @@
           <p:cNvPr id="20" name="">
             <a:extLst xmlns:a="http://schemas.openxmlformats.org/drawingml/2006/main">
               <a:ext uri="{FF2B5EF4-FFF2-40B4-BE49-F238E27FC236}">
-                <a16:creationId xmlns:a16="http://schemas.microsoft.com/office/drawing/2014/main" id="{2AEF1796-275C-477E-A450-E3CC253DEF09}"/>
+                <a16:creationId xmlns:a16="http://schemas.microsoft.com/office/drawing/2014/main" id="{1F83C52C-0820-470E-976F-3DA1713B785E}"/>
               </a:ext>
             </a:extLst>
           </p:cNvPr>
@@ -18445,7 +18445,7 @@
           <p:cNvPr id="21" name="">
             <a:extLst xmlns:a="http://schemas.openxmlformats.org/drawingml/2006/main">
               <a:ext uri="{FF2B5EF4-FFF2-40B4-BE49-F238E27FC236}">
-                <a16:creationId xmlns:a16="http://schemas.microsoft.com/office/drawing/2014/main" id="{FFDF4475-2A9E-4397-9621-5623A9B2D4F0}"/>
+                <a16:creationId xmlns:a16="http://schemas.microsoft.com/office/drawing/2014/main" id="{71811D9F-7FBA-4E56-ADCD-03CAAFB4132B}"/>
               </a:ext>
             </a:extLst>
           </p:cNvPr>
@@ -18477,7 +18477,7 @@
           <p:cNvPr id="22" name="">
             <a:extLst xmlns:a="http://schemas.openxmlformats.org/drawingml/2006/main">
               <a:ext uri="{FF2B5EF4-FFF2-40B4-BE49-F238E27FC236}">
-                <a16:creationId xmlns:a16="http://schemas.microsoft.com/office/drawing/2014/main" id="{92BB58A1-3159-415D-8AE6-9F12E8C4AAFE}"/>
+                <a16:creationId xmlns:a16="http://schemas.microsoft.com/office/drawing/2014/main" id="{F23D22ED-0D2B-4A70-A048-3CB454AEB1E5}"/>
               </a:ext>
             </a:extLst>
           </p:cNvPr>
@@ -18540,7 +18540,7 @@
           <p:cNvPr id="23" name="">
             <a:extLst xmlns:a="http://schemas.openxmlformats.org/drawingml/2006/main">
               <a:ext uri="{FF2B5EF4-FFF2-40B4-BE49-F238E27FC236}">
-                <a16:creationId xmlns:a16="http://schemas.microsoft.com/office/drawing/2014/main" id="{1902331A-361E-403D-8799-677819C5FE79}"/>
+                <a16:creationId xmlns:a16="http://schemas.microsoft.com/office/drawing/2014/main" id="{5703300D-FB9C-48AA-806E-C3F243825827}"/>
               </a:ext>
             </a:extLst>
           </p:cNvPr>
@@ -18572,7 +18572,7 @@
           <p:cNvPr id="24" name="">
             <a:extLst xmlns:a="http://schemas.openxmlformats.org/drawingml/2006/main">
               <a:ext uri="{FF2B5EF4-FFF2-40B4-BE49-F238E27FC236}">
-                <a16:creationId xmlns:a16="http://schemas.microsoft.com/office/drawing/2014/main" id="{D7468ED4-F6D8-4263-8DC4-7DBA6D7CAF06}"/>
+                <a16:creationId xmlns:a16="http://schemas.microsoft.com/office/drawing/2014/main" id="{9EB913B9-A6F4-44BE-AFCE-A2D846E8DD60}"/>
               </a:ext>
             </a:extLst>
           </p:cNvPr>
@@ -18635,7 +18635,7 @@
           <p:cNvPr id="25" name="">
             <a:extLst xmlns:a="http://schemas.openxmlformats.org/drawingml/2006/main">
               <a:ext uri="{FF2B5EF4-FFF2-40B4-BE49-F238E27FC236}">
-                <a16:creationId xmlns:a16="http://schemas.microsoft.com/office/drawing/2014/main" id="{EF56D7FE-438B-440B-8762-59F6DA8D4C4E}"/>
+                <a16:creationId xmlns:a16="http://schemas.microsoft.com/office/drawing/2014/main" id="{F725F2E2-E3A8-4331-B632-5F3792ABAB5E}"/>
               </a:ext>
             </a:extLst>
           </p:cNvPr>
@@ -18696,7 +18696,7 @@
     </p:spTree>
     <p:extLst>
       <p:ext uri="{BB962C8B-B14F-4D97-AF65-F5344CB8AC3E}">
-        <p14:creationId xmlns:p14="http://schemas.microsoft.com/office/powerpoint/2010/main" val="332937094"/>
+        <p14:creationId xmlns:p14="http://schemas.microsoft.com/office/powerpoint/2010/main" val="124041450"/>
       </p:ext>
     </p:extLst>
   </p:cSld>
@@ -18727,7 +18727,7 @@
           <p:cNvPr id="1" name="">
             <a:extLst xmlns:a="http://schemas.openxmlformats.org/drawingml/2006/main">
               <a:ext uri="{FF2B5EF4-FFF2-40B4-BE49-F238E27FC236}">
-                <a16:creationId xmlns:a16="http://schemas.microsoft.com/office/drawing/2014/main" id="{6EB447CA-FB5D-4A7A-A8B9-3483B48B4B45}"/>
+                <a16:creationId xmlns:a16="http://schemas.microsoft.com/office/drawing/2014/main" id="{93F0FF78-24DA-4C37-B6C2-EC6EC51CC94E}"/>
               </a:ext>
             </a:extLst>
           </p:cNvPr>
@@ -18790,7 +18790,7 @@
           <p:cNvPr id="2" name="">
             <a:extLst xmlns:a="http://schemas.openxmlformats.org/drawingml/2006/main">
               <a:ext uri="{FF2B5EF4-FFF2-40B4-BE49-F238E27FC236}">
-                <a16:creationId xmlns:a16="http://schemas.microsoft.com/office/drawing/2014/main" id="{AC094105-F128-434A-B0D3-21887B90F5D5}"/>
+                <a16:creationId xmlns:a16="http://schemas.microsoft.com/office/drawing/2014/main" id="{08B76F4B-1534-40A0-A858-3FD910B84AD3}"/>
               </a:ext>
             </a:extLst>
           </p:cNvPr>
@@ -18857,7 +18857,7 @@
           <p:cNvPr id="3" name="">
             <a:extLst xmlns:a="http://schemas.openxmlformats.org/drawingml/2006/main">
               <a:ext uri="{FF2B5EF4-FFF2-40B4-BE49-F238E27FC236}">
-                <a16:creationId xmlns:a16="http://schemas.microsoft.com/office/drawing/2014/main" id="{32561CE2-0128-4309-AF7D-7DB792AC070E}"/>
+                <a16:creationId xmlns:a16="http://schemas.microsoft.com/office/drawing/2014/main" id="{2D03D82B-D14F-4CEA-9518-DA3BF0AC6E00}"/>
               </a:ext>
             </a:extLst>
           </p:cNvPr>
@@ -18924,7 +18924,7 @@
           <p:cNvPr id="4" name="">
             <a:extLst xmlns:a="http://schemas.openxmlformats.org/drawingml/2006/main">
               <a:ext uri="{FF2B5EF4-FFF2-40B4-BE49-F238E27FC236}">
-                <a16:creationId xmlns:a16="http://schemas.microsoft.com/office/drawing/2014/main" id="{1C62E253-9859-454E-B3DF-53C15624E180}"/>
+                <a16:creationId xmlns:a16="http://schemas.microsoft.com/office/drawing/2014/main" id="{EC820CF7-875E-4D85-80A8-FEF648776C99}"/>
               </a:ext>
             </a:extLst>
           </p:cNvPr>
@@ -18956,7 +18956,7 @@
           <p:cNvPr id="5" name="">
             <a:extLst xmlns:a="http://schemas.openxmlformats.org/drawingml/2006/main">
               <a:ext uri="{FF2B5EF4-FFF2-40B4-BE49-F238E27FC236}">
-                <a16:creationId xmlns:a16="http://schemas.microsoft.com/office/drawing/2014/main" id="{FF60B980-5674-4662-B9BC-992020744F1B}"/>
+                <a16:creationId xmlns:a16="http://schemas.microsoft.com/office/drawing/2014/main" id="{41075DEF-0383-440D-A10B-A7476D349BC9}"/>
               </a:ext>
             </a:extLst>
           </p:cNvPr>
@@ -18988,7 +18988,7 @@
           <p:cNvPr id="6" name="">
             <a:extLst xmlns:a="http://schemas.openxmlformats.org/drawingml/2006/main">
               <a:ext uri="{FF2B5EF4-FFF2-40B4-BE49-F238E27FC236}">
-                <a16:creationId xmlns:a16="http://schemas.microsoft.com/office/drawing/2014/main" id="{F79EDDFF-FD39-45EC-9576-B040821F0E33}"/>
+                <a16:creationId xmlns:a16="http://schemas.microsoft.com/office/drawing/2014/main" id="{7947BCC5-6C65-4B97-8DEF-EB92349BF045}"/>
               </a:ext>
             </a:extLst>
           </p:cNvPr>
@@ -19051,7 +19051,7 @@
           <p:cNvPr id="7" name="">
             <a:extLst xmlns:a="http://schemas.openxmlformats.org/drawingml/2006/main">
               <a:ext uri="{FF2B5EF4-FFF2-40B4-BE49-F238E27FC236}">
-                <a16:creationId xmlns:a16="http://schemas.microsoft.com/office/drawing/2014/main" id="{C372E896-9DD2-4C56-B260-1EBDBB47FFBA}"/>
+                <a16:creationId xmlns:a16="http://schemas.microsoft.com/office/drawing/2014/main" id="{5399B584-7678-461C-9138-4197FD564BBC}"/>
               </a:ext>
             </a:extLst>
           </p:cNvPr>
@@ -19118,7 +19118,7 @@
           <p:cNvPr id="8" name="">
             <a:extLst xmlns:a="http://schemas.openxmlformats.org/drawingml/2006/main">
               <a:ext uri="{FF2B5EF4-FFF2-40B4-BE49-F238E27FC236}">
-                <a16:creationId xmlns:a16="http://schemas.microsoft.com/office/drawing/2014/main" id="{ABE8E2F1-9B21-465C-9325-BF7DC2A77C18}"/>
+                <a16:creationId xmlns:a16="http://schemas.microsoft.com/office/drawing/2014/main" id="{590B00B2-41C8-463E-886D-35590FE5B291}"/>
               </a:ext>
             </a:extLst>
           </p:cNvPr>
@@ -19150,7 +19150,7 @@
           <p:cNvPr id="9" name="">
             <a:extLst xmlns:a="http://schemas.openxmlformats.org/drawingml/2006/main">
               <a:ext uri="{FF2B5EF4-FFF2-40B4-BE49-F238E27FC236}">
-                <a16:creationId xmlns:a16="http://schemas.microsoft.com/office/drawing/2014/main" id="{454E250F-D464-438D-AF0E-4FAE88D75B7C}"/>
+                <a16:creationId xmlns:a16="http://schemas.microsoft.com/office/drawing/2014/main" id="{3321C56E-11ED-4EC1-95F5-127BFEE52066}"/>
               </a:ext>
             </a:extLst>
           </p:cNvPr>
@@ -19182,7 +19182,7 @@
           <p:cNvPr id="10" name="">
             <a:extLst xmlns:a="http://schemas.openxmlformats.org/drawingml/2006/main">
               <a:ext uri="{FF2B5EF4-FFF2-40B4-BE49-F238E27FC236}">
-                <a16:creationId xmlns:a16="http://schemas.microsoft.com/office/drawing/2014/main" id="{5A076F2E-CC68-45BC-8AB8-46EAA31D1E6D}"/>
+                <a16:creationId xmlns:a16="http://schemas.microsoft.com/office/drawing/2014/main" id="{09FCE60F-2A48-4000-B347-D7DBF2918C56}"/>
               </a:ext>
             </a:extLst>
           </p:cNvPr>
@@ -19245,7 +19245,7 @@
           <p:cNvPr id="11" name="">
             <a:extLst xmlns:a="http://schemas.openxmlformats.org/drawingml/2006/main">
               <a:ext uri="{FF2B5EF4-FFF2-40B4-BE49-F238E27FC236}">
-                <a16:creationId xmlns:a16="http://schemas.microsoft.com/office/drawing/2014/main" id="{661DAD70-AD0A-4CD9-A975-5F4FE673FB81}"/>
+                <a16:creationId xmlns:a16="http://schemas.microsoft.com/office/drawing/2014/main" id="{8651C157-9CA2-41EE-B359-F8CAE511AF3D}"/>
               </a:ext>
             </a:extLst>
           </p:cNvPr>
@@ -19312,7 +19312,7 @@
           <p:cNvPr id="12" name="">
             <a:extLst xmlns:a="http://schemas.openxmlformats.org/drawingml/2006/main">
               <a:ext uri="{FF2B5EF4-FFF2-40B4-BE49-F238E27FC236}">
-                <a16:creationId xmlns:a16="http://schemas.microsoft.com/office/drawing/2014/main" id="{48F44199-B5D2-420C-907D-A7E0034B48AB}"/>
+                <a16:creationId xmlns:a16="http://schemas.microsoft.com/office/drawing/2014/main" id="{AB0A29D2-2524-4F44-A937-23C0064E0DED}"/>
               </a:ext>
             </a:extLst>
           </p:cNvPr>
@@ -19344,7 +19344,7 @@
           <p:cNvPr id="13" name="">
             <a:extLst xmlns:a="http://schemas.openxmlformats.org/drawingml/2006/main">
               <a:ext uri="{FF2B5EF4-FFF2-40B4-BE49-F238E27FC236}">
-                <a16:creationId xmlns:a16="http://schemas.microsoft.com/office/drawing/2014/main" id="{345553E9-90E5-4452-970A-453512920BEC}"/>
+                <a16:creationId xmlns:a16="http://schemas.microsoft.com/office/drawing/2014/main" id="{B6618D0A-6F55-469E-B96B-988506752356}"/>
               </a:ext>
             </a:extLst>
           </p:cNvPr>
@@ -19376,7 +19376,7 @@
           <p:cNvPr id="14" name="">
             <a:extLst xmlns:a="http://schemas.openxmlformats.org/drawingml/2006/main">
               <a:ext uri="{FF2B5EF4-FFF2-40B4-BE49-F238E27FC236}">
-                <a16:creationId xmlns:a16="http://schemas.microsoft.com/office/drawing/2014/main" id="{BC325F4B-2B4B-4905-8233-85A7D1BC1B16}"/>
+                <a16:creationId xmlns:a16="http://schemas.microsoft.com/office/drawing/2014/main" id="{13838AF5-63B0-4841-8576-320E216D8DA7}"/>
               </a:ext>
             </a:extLst>
           </p:cNvPr>
@@ -19439,7 +19439,7 @@
           <p:cNvPr id="15" name="">
             <a:extLst xmlns:a="http://schemas.openxmlformats.org/drawingml/2006/main">
               <a:ext uri="{FF2B5EF4-FFF2-40B4-BE49-F238E27FC236}">
-                <a16:creationId xmlns:a16="http://schemas.microsoft.com/office/drawing/2014/main" id="{60F3B69C-2A80-4DA9-AECB-DDCF9255EF6D}"/>
+                <a16:creationId xmlns:a16="http://schemas.microsoft.com/office/drawing/2014/main" id="{68B8C6E8-FFA7-4170-8411-F3854ED0F654}"/>
               </a:ext>
             </a:extLst>
           </p:cNvPr>
@@ -19506,7 +19506,7 @@
           <p:cNvPr id="16" name="">
             <a:extLst xmlns:a="http://schemas.openxmlformats.org/drawingml/2006/main">
               <a:ext uri="{FF2B5EF4-FFF2-40B4-BE49-F238E27FC236}">
-                <a16:creationId xmlns:a16="http://schemas.microsoft.com/office/drawing/2014/main" id="{86F77243-2D47-4DC7-A5A3-98F49273DC7B}"/>
+                <a16:creationId xmlns:a16="http://schemas.microsoft.com/office/drawing/2014/main" id="{D89FAECF-596B-4F37-AF20-1D39B9BBDA49}"/>
               </a:ext>
             </a:extLst>
           </p:cNvPr>
@@ -19538,7 +19538,7 @@
           <p:cNvPr id="17" name="">
             <a:extLst xmlns:a="http://schemas.openxmlformats.org/drawingml/2006/main">
               <a:ext uri="{FF2B5EF4-FFF2-40B4-BE49-F238E27FC236}">
-                <a16:creationId xmlns:a16="http://schemas.microsoft.com/office/drawing/2014/main" id="{31C7F7C8-E6AB-4565-9CD0-023A4AA7152B}"/>
+                <a16:creationId xmlns:a16="http://schemas.microsoft.com/office/drawing/2014/main" id="{48F961AF-A327-4BB2-B1DC-55A0C4B16BF2}"/>
               </a:ext>
             </a:extLst>
           </p:cNvPr>
@@ -19570,7 +19570,7 @@
           <p:cNvPr id="18" name="">
             <a:extLst xmlns:a="http://schemas.openxmlformats.org/drawingml/2006/main">
               <a:ext uri="{FF2B5EF4-FFF2-40B4-BE49-F238E27FC236}">
-                <a16:creationId xmlns:a16="http://schemas.microsoft.com/office/drawing/2014/main" id="{A6CA36E6-F3D3-43DF-A42E-0AA8D20635E6}"/>
+                <a16:creationId xmlns:a16="http://schemas.microsoft.com/office/drawing/2014/main" id="{B2379B50-FBFC-41A9-9B36-14F9E0CA06F2}"/>
               </a:ext>
             </a:extLst>
           </p:cNvPr>
@@ -19633,7 +19633,7 @@
           <p:cNvPr id="19" name="">
             <a:extLst xmlns:a="http://schemas.openxmlformats.org/drawingml/2006/main">
               <a:ext uri="{FF2B5EF4-FFF2-40B4-BE49-F238E27FC236}">
-                <a16:creationId xmlns:a16="http://schemas.microsoft.com/office/drawing/2014/main" id="{46A21570-B9A7-413F-A508-61806BA13142}"/>
+                <a16:creationId xmlns:a16="http://schemas.microsoft.com/office/drawing/2014/main" id="{DD802F91-4AC7-40D7-B3AC-1E11CB6EFFE0}"/>
               </a:ext>
             </a:extLst>
           </p:cNvPr>
@@ -19700,7 +19700,7 @@
           <p:cNvPr id="20" name="">
             <a:extLst xmlns:a="http://schemas.openxmlformats.org/drawingml/2006/main">
               <a:ext uri="{FF2B5EF4-FFF2-40B4-BE49-F238E27FC236}">
-                <a16:creationId xmlns:a16="http://schemas.microsoft.com/office/drawing/2014/main" id="{547FD849-FC1D-48AC-9167-29CCF8DAAD90}"/>
+                <a16:creationId xmlns:a16="http://schemas.microsoft.com/office/drawing/2014/main" id="{7F9C61EF-CC0F-4C08-BB82-0A72B4ADE960}"/>
               </a:ext>
             </a:extLst>
           </p:cNvPr>
@@ -19732,7 +19732,7 @@
           <p:cNvPr id="21" name="">
             <a:extLst xmlns:a="http://schemas.openxmlformats.org/drawingml/2006/main">
               <a:ext uri="{FF2B5EF4-FFF2-40B4-BE49-F238E27FC236}">
-                <a16:creationId xmlns:a16="http://schemas.microsoft.com/office/drawing/2014/main" id="{EC1B6B10-69D1-4389-8138-07A777A4869D}"/>
+                <a16:creationId xmlns:a16="http://schemas.microsoft.com/office/drawing/2014/main" id="{61AA0AFC-6E77-4911-9B2C-BA74E741EC8C}"/>
               </a:ext>
             </a:extLst>
           </p:cNvPr>
@@ -19799,7 +19799,7 @@
           <p:cNvPr id="22" name="">
             <a:extLst xmlns:a="http://schemas.openxmlformats.org/drawingml/2006/main">
               <a:ext uri="{FF2B5EF4-FFF2-40B4-BE49-F238E27FC236}">
-                <a16:creationId xmlns:a16="http://schemas.microsoft.com/office/drawing/2014/main" id="{FE8AD96B-D0CC-4FB5-B6BF-75C15AFD3133}"/>
+                <a16:creationId xmlns:a16="http://schemas.microsoft.com/office/drawing/2014/main" id="{43F9012A-6C5D-49BE-BFB2-522231792C22}"/>
               </a:ext>
             </a:extLst>
           </p:cNvPr>
@@ -19831,7 +19831,7 @@
           <p:cNvPr id="23" name="">
             <a:extLst xmlns:a="http://schemas.openxmlformats.org/drawingml/2006/main">
               <a:ext uri="{FF2B5EF4-FFF2-40B4-BE49-F238E27FC236}">
-                <a16:creationId xmlns:a16="http://schemas.microsoft.com/office/drawing/2014/main" id="{35D16CAA-8186-4C67-B99F-D9C7F09D0D4D}"/>
+                <a16:creationId xmlns:a16="http://schemas.microsoft.com/office/drawing/2014/main" id="{3B6D71DB-D400-40C0-87F0-C84DAB5307C9}"/>
               </a:ext>
             </a:extLst>
           </p:cNvPr>
@@ -19894,7 +19894,7 @@
           <p:cNvPr id="24" name="">
             <a:extLst xmlns:a="http://schemas.openxmlformats.org/drawingml/2006/main">
               <a:ext uri="{FF2B5EF4-FFF2-40B4-BE49-F238E27FC236}">
-                <a16:creationId xmlns:a16="http://schemas.microsoft.com/office/drawing/2014/main" id="{9A5E8711-3212-4AC6-AD64-C73F7D692C4A}"/>
+                <a16:creationId xmlns:a16="http://schemas.microsoft.com/office/drawing/2014/main" id="{58DAF718-1841-4142-8AD7-B07A4AC19C62}"/>
               </a:ext>
             </a:extLst>
           </p:cNvPr>
@@ -19955,7 +19955,7 @@
     </p:spTree>
     <p:extLst>
       <p:ext uri="{BB962C8B-B14F-4D97-AF65-F5344CB8AC3E}">
-        <p14:creationId xmlns:p14="http://schemas.microsoft.com/office/powerpoint/2010/main" val="693066242"/>
+        <p14:creationId xmlns:p14="http://schemas.microsoft.com/office/powerpoint/2010/main" val="1216330727"/>
       </p:ext>
     </p:extLst>
   </p:cSld>

--- a/pitch/routesignal-hackathon-pitch.pptx
+++ b/pitch/routesignal-hackathon-pitch.pptx
@@ -2,20 +2,20 @@
 <file path=ppt/presentation.xml><?xml version="1.0" encoding="utf-8"?>
 <p:presentation xmlns:p="http://schemas.openxmlformats.org/presentationml/2006/main">
   <p:sldMasterIdLst>
-    <p:sldMasterId xmlns:r="http://schemas.openxmlformats.org/officeDocument/2006/relationships" id="2147483648" r:id="R11c0ef667ef04f59"/>
+    <p:sldMasterId xmlns:r="http://schemas.openxmlformats.org/officeDocument/2006/relationships" id="2147483648" r:id="R01222ea71fce42e7"/>
   </p:sldMasterIdLst>
   <p:notesMasterIdLst>
-    <p:notesMasterId xmlns:r="http://schemas.openxmlformats.org/officeDocument/2006/relationships" r:id="R8dd81e4fd9844cd1"/>
+    <p:notesMasterId xmlns:r="http://schemas.openxmlformats.org/officeDocument/2006/relationships" r:id="R8fa2b2cbf8554eb3"/>
   </p:notesMasterIdLst>
   <p:sldIdLst>
-    <p:sldId xmlns:r="http://schemas.openxmlformats.org/officeDocument/2006/relationships" id="256" r:id="Rcb894ee1e90d4e6c"/>
-    <p:sldId xmlns:r="http://schemas.openxmlformats.org/officeDocument/2006/relationships" id="257" r:id="R0b454a5993b245df"/>
-    <p:sldId xmlns:r="http://schemas.openxmlformats.org/officeDocument/2006/relationships" id="258" r:id="Re0778b2fcf314996"/>
-    <p:sldId xmlns:r="http://schemas.openxmlformats.org/officeDocument/2006/relationships" id="259" r:id="Re8c2160a96514d23"/>
-    <p:sldId xmlns:r="http://schemas.openxmlformats.org/officeDocument/2006/relationships" id="260" r:id="R6a94fdcb2fa24efb"/>
-    <p:sldId xmlns:r="http://schemas.openxmlformats.org/officeDocument/2006/relationships" id="261" r:id="R500dfd2d29754535"/>
-    <p:sldId xmlns:r="http://schemas.openxmlformats.org/officeDocument/2006/relationships" id="262" r:id="Rccb556179dda4e0c"/>
-    <p:sldId xmlns:r="http://schemas.openxmlformats.org/officeDocument/2006/relationships" id="263" r:id="R35f5a9d9717a494b"/>
+    <p:sldId xmlns:r="http://schemas.openxmlformats.org/officeDocument/2006/relationships" id="256" r:id="R4e5bf58bec5b4b85"/>
+    <p:sldId xmlns:r="http://schemas.openxmlformats.org/officeDocument/2006/relationships" id="257" r:id="R645a1469e6b241eb"/>
+    <p:sldId xmlns:r="http://schemas.openxmlformats.org/officeDocument/2006/relationships" id="258" r:id="R5eaa6e674d954ff8"/>
+    <p:sldId xmlns:r="http://schemas.openxmlformats.org/officeDocument/2006/relationships" id="259" r:id="R308ee16387d14fcc"/>
+    <p:sldId xmlns:r="http://schemas.openxmlformats.org/officeDocument/2006/relationships" id="260" r:id="R3029dc1c29014d5c"/>
+    <p:sldId xmlns:r="http://schemas.openxmlformats.org/officeDocument/2006/relationships" id="261" r:id="R6505d221c3e64a1f"/>
+    <p:sldId xmlns:r="http://schemas.openxmlformats.org/officeDocument/2006/relationships" id="262" r:id="R0c43a11243ce4eb8"/>
+    <p:sldId xmlns:r="http://schemas.openxmlformats.org/officeDocument/2006/relationships" id="263" r:id="R6d60651b6d92477f"/>
   </p:sldIdLst>
   <p:sldSz cx="12192000" cy="6858000"/>
   <p:notesSz cx="6858000" cy="9144000"/>
@@ -1024,7 +1024,7 @@
   </p:cSld>
   <p:clrMap bg1="lt1" tx1="dk1" bg2="lt2" tx2="dk2" accent1="accent1" accent2="accent2" accent3="accent3" accent4="accent4" accent5="accent5" accent6="accent6" hlink="hlink" folHlink="folHlink"/>
   <p:sldLayoutIdLst>
-    <p:sldLayoutId xmlns:r="http://schemas.openxmlformats.org/officeDocument/2006/relationships" id="2147483649" r:id="Rd3a687b170af4c32"/>
+    <p:sldLayoutId xmlns:r="http://schemas.openxmlformats.org/officeDocument/2006/relationships" id="2147483649" r:id="R86c7e4352b0c48e0"/>
   </p:sldLayoutIdLst>
   <p:txStyles>
     <p:titleStyle>
@@ -1334,7 +1334,7 @@
           <p:nvPr/>
         </p:nvPicPr>
         <p:blipFill>
-          <a:blip xmlns:r="http://schemas.openxmlformats.org/officeDocument/2006/relationships" xmlns:a="http://schemas.openxmlformats.org/drawingml/2006/main" r:embed="Rf593bb4497d142ca"/>
+          <a:blip xmlns:r="http://schemas.openxmlformats.org/officeDocument/2006/relationships" xmlns:a="http://schemas.openxmlformats.org/drawingml/2006/main" r:embed="Rcc6c790de01c4ebb"/>
           <a:srcRect xmlns:a="http://schemas.openxmlformats.org/drawingml/2006/main" l="23814" t="0" r="23814" b="0"/>
           <a:stretch xmlns:a="http://schemas.openxmlformats.org/drawingml/2006/main">
             <a:fillRect l="0" t="0" r="0" b="0"/>
@@ -1355,7 +1355,7 @@
           <p:cNvPr id="2" name="">
             <a:extLst xmlns:a="http://schemas.openxmlformats.org/drawingml/2006/main">
               <a:ext uri="{FF2B5EF4-FFF2-40B4-BE49-F238E27FC236}">
-                <a16:creationId xmlns:a16="http://schemas.microsoft.com/office/drawing/2014/main" id="{955C4E98-0E2E-43B1-B7A1-4871B6829D7F}"/>
+                <a16:creationId xmlns:a16="http://schemas.microsoft.com/office/drawing/2014/main" id="{6799F585-2ADF-4C17-9D32-C6551B83E726}"/>
               </a:ext>
             </a:extLst>
           </p:cNvPr>
@@ -1391,7 +1391,7 @@
           <p:cNvPr id="3" name="">
             <a:extLst xmlns:a="http://schemas.openxmlformats.org/drawingml/2006/main">
               <a:ext uri="{FF2B5EF4-FFF2-40B4-BE49-F238E27FC236}">
-                <a16:creationId xmlns:a16="http://schemas.microsoft.com/office/drawing/2014/main" id="{87715C3F-794C-4AE3-B9E0-CAC3135018EB}"/>
+                <a16:creationId xmlns:a16="http://schemas.microsoft.com/office/drawing/2014/main" id="{3F94AD42-2FAB-43B0-AE53-FB0934FB7CB4}"/>
               </a:ext>
             </a:extLst>
           </p:cNvPr>
@@ -1423,7 +1423,7 @@
           <p:cNvPr id="4" name="">
             <a:extLst xmlns:a="http://schemas.openxmlformats.org/drawingml/2006/main">
               <a:ext uri="{FF2B5EF4-FFF2-40B4-BE49-F238E27FC236}">
-                <a16:creationId xmlns:a16="http://schemas.microsoft.com/office/drawing/2014/main" id="{97BF86B7-AA53-4D59-A405-54BF52A2CA45}"/>
+                <a16:creationId xmlns:a16="http://schemas.microsoft.com/office/drawing/2014/main" id="{BDA03A7A-FFF8-4B2E-8165-87E7DE17DD71}"/>
               </a:ext>
             </a:extLst>
           </p:cNvPr>
@@ -1486,7 +1486,7 @@
           <p:cNvPr id="5" name="">
             <a:extLst xmlns:a="http://schemas.openxmlformats.org/drawingml/2006/main">
               <a:ext uri="{FF2B5EF4-FFF2-40B4-BE49-F238E27FC236}">
-                <a16:creationId xmlns:a16="http://schemas.microsoft.com/office/drawing/2014/main" id="{68D7D5B7-AF99-4183-B135-B7DDB6FCEA3C}"/>
+                <a16:creationId xmlns:a16="http://schemas.microsoft.com/office/drawing/2014/main" id="{FD287D24-2629-4EB7-871E-603A56B201EF}"/>
               </a:ext>
             </a:extLst>
           </p:cNvPr>
@@ -1553,7 +1553,7 @@
           <p:cNvPr id="6" name="">
             <a:extLst xmlns:a="http://schemas.openxmlformats.org/drawingml/2006/main">
               <a:ext uri="{FF2B5EF4-FFF2-40B4-BE49-F238E27FC236}">
-                <a16:creationId xmlns:a16="http://schemas.microsoft.com/office/drawing/2014/main" id="{34C9ED30-4536-4306-8F6D-85631D2385B6}"/>
+                <a16:creationId xmlns:a16="http://schemas.microsoft.com/office/drawing/2014/main" id="{AA081FC1-05D1-4299-AD83-3FA4722E5756}"/>
               </a:ext>
             </a:extLst>
           </p:cNvPr>
@@ -1620,7 +1620,7 @@
           <p:cNvPr id="7" name="">
             <a:extLst xmlns:a="http://schemas.openxmlformats.org/drawingml/2006/main">
               <a:ext uri="{FF2B5EF4-FFF2-40B4-BE49-F238E27FC236}">
-                <a16:creationId xmlns:a16="http://schemas.microsoft.com/office/drawing/2014/main" id="{064A4A85-7075-482E-AC70-49C6CB6D6A05}"/>
+                <a16:creationId xmlns:a16="http://schemas.microsoft.com/office/drawing/2014/main" id="{61D50A71-7C03-4437-8D91-459148AC8B0D}"/>
               </a:ext>
             </a:extLst>
           </p:cNvPr>
@@ -1687,7 +1687,7 @@
           <p:cNvPr id="8" name="">
             <a:extLst xmlns:a="http://schemas.openxmlformats.org/drawingml/2006/main">
               <a:ext uri="{FF2B5EF4-FFF2-40B4-BE49-F238E27FC236}">
-                <a16:creationId xmlns:a16="http://schemas.microsoft.com/office/drawing/2014/main" id="{926154C2-E80E-4E56-8497-1D5DC2A15608}"/>
+                <a16:creationId xmlns:a16="http://schemas.microsoft.com/office/drawing/2014/main" id="{132AFB88-F926-48E1-B363-84EF2CC080A7}"/>
               </a:ext>
             </a:extLst>
           </p:cNvPr>
@@ -1699,7 +1699,7 @@
         <p:spPr>
           <a:xfrm xmlns:a="http://schemas.openxmlformats.org/drawingml/2006/main">
             <a:off x="571500" y="4686300"/>
-            <a:ext cx="2000250" cy="495300"/>
+            <a:ext cx="1714500" cy="457200"/>
           </a:xfrm>
           <a:prstGeom xmlns:a="http://schemas.openxmlformats.org/drawingml/2006/main" prst="rect">
             <a:avLst/>
@@ -1750,19 +1750,19 @@
           <p:cNvPr id="9" name="">
             <a:extLst xmlns:a="http://schemas.openxmlformats.org/drawingml/2006/main">
               <a:ext uri="{FF2B5EF4-FFF2-40B4-BE49-F238E27FC236}">
-                <a16:creationId xmlns:a16="http://schemas.microsoft.com/office/drawing/2014/main" id="{55F1720D-C129-4609-B99F-358572946F5F}"/>
-              </a:ext>
-            </a:extLst>
-          </p:cNvPr>
-          <p:cNvSpPr>
-            <a:spLocks xmlns:a="http://schemas.openxmlformats.org/drawingml/2006/main" noGrp="1"/>
-          </p:cNvSpPr>
-          <p:nvPr/>
-        </p:nvSpPr>
-        <p:spPr>
-          <a:xfrm xmlns:a="http://schemas.openxmlformats.org/drawingml/2006/main">
-            <a:off x="571500" y="5162550"/>
-            <a:ext cx="2000250" cy="419100"/>
+                <a16:creationId xmlns:a16="http://schemas.microsoft.com/office/drawing/2014/main" id="{CFB35C5A-28D0-4B5B-A736-462D32FC5630}"/>
+              </a:ext>
+            </a:extLst>
+          </p:cNvPr>
+          <p:cNvSpPr>
+            <a:spLocks xmlns:a="http://schemas.openxmlformats.org/drawingml/2006/main" noGrp="1"/>
+          </p:cNvSpPr>
+          <p:nvPr/>
+        </p:nvSpPr>
+        <p:spPr>
+          <a:xfrm xmlns:a="http://schemas.openxmlformats.org/drawingml/2006/main">
+            <a:off x="571500" y="5219700"/>
+            <a:ext cx="1714500" cy="342900"/>
           </a:xfrm>
           <a:prstGeom xmlns:a="http://schemas.openxmlformats.org/drawingml/2006/main" prst="rect">
             <a:avLst/>
@@ -1817,7 +1817,7 @@
           <p:cNvPr id="10" name="">
             <a:extLst xmlns:a="http://schemas.openxmlformats.org/drawingml/2006/main">
               <a:ext uri="{FF2B5EF4-FFF2-40B4-BE49-F238E27FC236}">
-                <a16:creationId xmlns:a16="http://schemas.microsoft.com/office/drawing/2014/main" id="{A89650A4-0019-4861-AE17-1D78D74055D8}"/>
+                <a16:creationId xmlns:a16="http://schemas.microsoft.com/office/drawing/2014/main" id="{414EF852-D542-4001-8A44-5248D251F611}"/>
               </a:ext>
             </a:extLst>
           </p:cNvPr>
@@ -1829,7 +1829,7 @@
         <p:spPr>
           <a:xfrm xmlns:a="http://schemas.openxmlformats.org/drawingml/2006/main">
             <a:off x="2705100" y="4686300"/>
-            <a:ext cx="2000250" cy="495300"/>
+            <a:ext cx="1714500" cy="457200"/>
           </a:xfrm>
           <a:prstGeom xmlns:a="http://schemas.openxmlformats.org/drawingml/2006/main" prst="rect">
             <a:avLst/>
@@ -1880,19 +1880,19 @@
           <p:cNvPr id="11" name="">
             <a:extLst xmlns:a="http://schemas.openxmlformats.org/drawingml/2006/main">
               <a:ext uri="{FF2B5EF4-FFF2-40B4-BE49-F238E27FC236}">
-                <a16:creationId xmlns:a16="http://schemas.microsoft.com/office/drawing/2014/main" id="{42F8EC8F-12D6-4ECF-8696-9BF3B89F2455}"/>
-              </a:ext>
-            </a:extLst>
-          </p:cNvPr>
-          <p:cNvSpPr>
-            <a:spLocks xmlns:a="http://schemas.openxmlformats.org/drawingml/2006/main" noGrp="1"/>
-          </p:cNvSpPr>
-          <p:nvPr/>
-        </p:nvSpPr>
-        <p:spPr>
-          <a:xfrm xmlns:a="http://schemas.openxmlformats.org/drawingml/2006/main">
-            <a:off x="2705100" y="5162550"/>
-            <a:ext cx="2000250" cy="419100"/>
+                <a16:creationId xmlns:a16="http://schemas.microsoft.com/office/drawing/2014/main" id="{0AF3BAF3-F2BD-460D-8CF1-C6F3A49D9AB3}"/>
+              </a:ext>
+            </a:extLst>
+          </p:cNvPr>
+          <p:cNvSpPr>
+            <a:spLocks xmlns:a="http://schemas.openxmlformats.org/drawingml/2006/main" noGrp="1"/>
+          </p:cNvSpPr>
+          <p:nvPr/>
+        </p:nvSpPr>
+        <p:spPr>
+          <a:xfrm xmlns:a="http://schemas.openxmlformats.org/drawingml/2006/main">
+            <a:off x="2705100" y="5219700"/>
+            <a:ext cx="1714500" cy="342900"/>
           </a:xfrm>
           <a:prstGeom xmlns:a="http://schemas.openxmlformats.org/drawingml/2006/main" prst="rect">
             <a:avLst/>
@@ -1947,7 +1947,7 @@
           <p:cNvPr id="12" name="">
             <a:extLst xmlns:a="http://schemas.openxmlformats.org/drawingml/2006/main">
               <a:ext uri="{FF2B5EF4-FFF2-40B4-BE49-F238E27FC236}">
-                <a16:creationId xmlns:a16="http://schemas.microsoft.com/office/drawing/2014/main" id="{8CD6F7FC-2505-4E22-A6C9-96B21A1BC98E}"/>
+                <a16:creationId xmlns:a16="http://schemas.microsoft.com/office/drawing/2014/main" id="{4741CE34-0E1B-4077-A7CE-8739272BEC68}"/>
               </a:ext>
             </a:extLst>
           </p:cNvPr>
@@ -1959,7 +1959,7 @@
         <p:spPr>
           <a:xfrm xmlns:a="http://schemas.openxmlformats.org/drawingml/2006/main">
             <a:off x="4629150" y="4686300"/>
-            <a:ext cx="2000250" cy="495300"/>
+            <a:ext cx="1714500" cy="457200"/>
           </a:xfrm>
           <a:prstGeom xmlns:a="http://schemas.openxmlformats.org/drawingml/2006/main" prst="rect">
             <a:avLst/>
@@ -2010,19 +2010,19 @@
           <p:cNvPr id="13" name="">
             <a:extLst xmlns:a="http://schemas.openxmlformats.org/drawingml/2006/main">
               <a:ext uri="{FF2B5EF4-FFF2-40B4-BE49-F238E27FC236}">
-                <a16:creationId xmlns:a16="http://schemas.microsoft.com/office/drawing/2014/main" id="{0877BF8E-C379-431A-BD19-E1F3D8B40DB5}"/>
-              </a:ext>
-            </a:extLst>
-          </p:cNvPr>
-          <p:cNvSpPr>
-            <a:spLocks xmlns:a="http://schemas.openxmlformats.org/drawingml/2006/main" noGrp="1"/>
-          </p:cNvSpPr>
-          <p:nvPr/>
-        </p:nvSpPr>
-        <p:spPr>
-          <a:xfrm xmlns:a="http://schemas.openxmlformats.org/drawingml/2006/main">
-            <a:off x="4629150" y="5162550"/>
-            <a:ext cx="2000250" cy="419100"/>
+                <a16:creationId xmlns:a16="http://schemas.microsoft.com/office/drawing/2014/main" id="{06813B7F-7A79-4B73-833E-2D02263CDBF3}"/>
+              </a:ext>
+            </a:extLst>
+          </p:cNvPr>
+          <p:cNvSpPr>
+            <a:spLocks xmlns:a="http://schemas.openxmlformats.org/drawingml/2006/main" noGrp="1"/>
+          </p:cNvSpPr>
+          <p:nvPr/>
+        </p:nvSpPr>
+        <p:spPr>
+          <a:xfrm xmlns:a="http://schemas.openxmlformats.org/drawingml/2006/main">
+            <a:off x="4629150" y="5219700"/>
+            <a:ext cx="1714500" cy="342900"/>
           </a:xfrm>
           <a:prstGeom xmlns:a="http://schemas.openxmlformats.org/drawingml/2006/main" prst="rect">
             <a:avLst/>
@@ -2077,7 +2077,7 @@
           <p:cNvPr id="14" name="">
             <a:extLst xmlns:a="http://schemas.openxmlformats.org/drawingml/2006/main">
               <a:ext uri="{FF2B5EF4-FFF2-40B4-BE49-F238E27FC236}">
-                <a16:creationId xmlns:a16="http://schemas.microsoft.com/office/drawing/2014/main" id="{28B45F79-5FFC-46D7-B38B-5303DB271B40}"/>
+                <a16:creationId xmlns:a16="http://schemas.microsoft.com/office/drawing/2014/main" id="{FC5E7C53-7021-4FEE-BC07-EF888CDA62F2}"/>
               </a:ext>
             </a:extLst>
           </p:cNvPr>
@@ -2109,7 +2109,7 @@
           <p:cNvPr id="15" name="">
             <a:extLst xmlns:a="http://schemas.openxmlformats.org/drawingml/2006/main">
               <a:ext uri="{FF2B5EF4-FFF2-40B4-BE49-F238E27FC236}">
-                <a16:creationId xmlns:a16="http://schemas.microsoft.com/office/drawing/2014/main" id="{DD530DCE-77AD-4D0C-8411-A2E4659B2136}"/>
+                <a16:creationId xmlns:a16="http://schemas.microsoft.com/office/drawing/2014/main" id="{FFA727FF-1A6F-41CA-A81B-34041B05AA8A}"/>
               </a:ext>
             </a:extLst>
           </p:cNvPr>
@@ -2172,7 +2172,7 @@
           <p:cNvPr id="16" name="">
             <a:extLst xmlns:a="http://schemas.openxmlformats.org/drawingml/2006/main">
               <a:ext uri="{FF2B5EF4-FFF2-40B4-BE49-F238E27FC236}">
-                <a16:creationId xmlns:a16="http://schemas.microsoft.com/office/drawing/2014/main" id="{17341A16-C8F7-4BB5-98F9-0D57204A984F}"/>
+                <a16:creationId xmlns:a16="http://schemas.microsoft.com/office/drawing/2014/main" id="{97029115-A92A-47CA-A6C7-D7B70AE7AADC}"/>
               </a:ext>
             </a:extLst>
           </p:cNvPr>
@@ -2233,7 +2233,7 @@
     </p:spTree>
     <p:extLst>
       <p:ext uri="{BB962C8B-B14F-4D97-AF65-F5344CB8AC3E}">
-        <p14:creationId xmlns:p14="http://schemas.microsoft.com/office/powerpoint/2010/main" val="1543227665"/>
+        <p14:creationId xmlns:p14="http://schemas.microsoft.com/office/powerpoint/2010/main" val="1486989717"/>
       </p:ext>
     </p:extLst>
   </p:cSld>
@@ -2264,7 +2264,7 @@
           <p:cNvPr id="1" name="">
             <a:extLst xmlns:a="http://schemas.openxmlformats.org/drawingml/2006/main">
               <a:ext uri="{FF2B5EF4-FFF2-40B4-BE49-F238E27FC236}">
-                <a16:creationId xmlns:a16="http://schemas.microsoft.com/office/drawing/2014/main" id="{7E06280A-2C87-4922-BBA1-17395B82162C}"/>
+                <a16:creationId xmlns:a16="http://schemas.microsoft.com/office/drawing/2014/main" id="{7001A8C0-45C8-48A4-A176-16BFB1268F4D}"/>
               </a:ext>
             </a:extLst>
           </p:cNvPr>
@@ -2327,7 +2327,7 @@
           <p:cNvPr id="2" name="">
             <a:extLst xmlns:a="http://schemas.openxmlformats.org/drawingml/2006/main">
               <a:ext uri="{FF2B5EF4-FFF2-40B4-BE49-F238E27FC236}">
-                <a16:creationId xmlns:a16="http://schemas.microsoft.com/office/drawing/2014/main" id="{D3EF07DE-CEF2-4C0B-A1C5-D11F67DB833A}"/>
+                <a16:creationId xmlns:a16="http://schemas.microsoft.com/office/drawing/2014/main" id="{2439EDE0-6E2D-4C3C-ADC4-C83261811C00}"/>
               </a:ext>
             </a:extLst>
           </p:cNvPr>
@@ -2394,7 +2394,7 @@
           <p:cNvPr id="3" name="">
             <a:extLst xmlns:a="http://schemas.openxmlformats.org/drawingml/2006/main">
               <a:ext uri="{FF2B5EF4-FFF2-40B4-BE49-F238E27FC236}">
-                <a16:creationId xmlns:a16="http://schemas.microsoft.com/office/drawing/2014/main" id="{B3C96CCF-B821-4BAC-91F6-B7FFF7769EF1}"/>
+                <a16:creationId xmlns:a16="http://schemas.microsoft.com/office/drawing/2014/main" id="{D00694AA-6AD6-49BD-B6BD-CC69B7CE0353}"/>
               </a:ext>
             </a:extLst>
           </p:cNvPr>
@@ -2461,7 +2461,7 @@
           <p:cNvPr id="4" name="">
             <a:extLst xmlns:a="http://schemas.openxmlformats.org/drawingml/2006/main">
               <a:ext uri="{FF2B5EF4-FFF2-40B4-BE49-F238E27FC236}">
-                <a16:creationId xmlns:a16="http://schemas.microsoft.com/office/drawing/2014/main" id="{B9A4366A-7909-4DAD-BB47-4657A65DAA6C}"/>
+                <a16:creationId xmlns:a16="http://schemas.microsoft.com/office/drawing/2014/main" id="{A1ECCCC7-98EE-40A1-BDA9-F7E38E0DB0C7}"/>
               </a:ext>
             </a:extLst>
           </p:cNvPr>
@@ -2495,7 +2495,7 @@
           <p:cNvPr id="5" name="">
             <a:extLst xmlns:a="http://schemas.openxmlformats.org/drawingml/2006/main">
               <a:ext uri="{FF2B5EF4-FFF2-40B4-BE49-F238E27FC236}">
-                <a16:creationId xmlns:a16="http://schemas.microsoft.com/office/drawing/2014/main" id="{D21240EF-1F82-46F2-AA5D-DF1E662709F1}"/>
+                <a16:creationId xmlns:a16="http://schemas.microsoft.com/office/drawing/2014/main" id="{FE9BE149-6B22-4EF4-8B1A-82F6811E1807}"/>
               </a:ext>
             </a:extLst>
           </p:cNvPr>
@@ -2529,7 +2529,7 @@
           <p:cNvPr id="6" name="">
             <a:extLst xmlns:a="http://schemas.openxmlformats.org/drawingml/2006/main">
               <a:ext uri="{FF2B5EF4-FFF2-40B4-BE49-F238E27FC236}">
-                <a16:creationId xmlns:a16="http://schemas.microsoft.com/office/drawing/2014/main" id="{64B3B270-CE01-429E-A5C4-A792DE5B2E7F}"/>
+                <a16:creationId xmlns:a16="http://schemas.microsoft.com/office/drawing/2014/main" id="{75AA364C-C948-4413-97A0-25AEF1F3D399}"/>
               </a:ext>
             </a:extLst>
           </p:cNvPr>
@@ -2563,7 +2563,7 @@
           <p:cNvPr id="7" name="">
             <a:extLst xmlns:a="http://schemas.openxmlformats.org/drawingml/2006/main">
               <a:ext uri="{FF2B5EF4-FFF2-40B4-BE49-F238E27FC236}">
-                <a16:creationId xmlns:a16="http://schemas.microsoft.com/office/drawing/2014/main" id="{E0977D2B-1997-468F-AAF8-F65A1DFDB3AB}"/>
+                <a16:creationId xmlns:a16="http://schemas.microsoft.com/office/drawing/2014/main" id="{F9CEAD16-3C6C-4DF8-AD4D-6513F488105D}"/>
               </a:ext>
             </a:extLst>
           </p:cNvPr>
@@ -2597,7 +2597,7 @@
           <p:cNvPr id="8" name="">
             <a:extLst xmlns:a="http://schemas.openxmlformats.org/drawingml/2006/main">
               <a:ext uri="{FF2B5EF4-FFF2-40B4-BE49-F238E27FC236}">
-                <a16:creationId xmlns:a16="http://schemas.microsoft.com/office/drawing/2014/main" id="{E278BC12-1E23-465C-89FB-F0B4F5A4A046}"/>
+                <a16:creationId xmlns:a16="http://schemas.microsoft.com/office/drawing/2014/main" id="{30A210D6-872D-41A4-BE0C-CA821E431766}"/>
               </a:ext>
             </a:extLst>
           </p:cNvPr>
@@ -2631,7 +2631,7 @@
           <p:cNvPr id="9" name="">
             <a:extLst xmlns:a="http://schemas.openxmlformats.org/drawingml/2006/main">
               <a:ext uri="{FF2B5EF4-FFF2-40B4-BE49-F238E27FC236}">
-                <a16:creationId xmlns:a16="http://schemas.microsoft.com/office/drawing/2014/main" id="{02325945-6097-4985-9526-5F349B3F5CA2}"/>
+                <a16:creationId xmlns:a16="http://schemas.microsoft.com/office/drawing/2014/main" id="{58A58868-5302-4CC5-92D4-7459FA695912}"/>
               </a:ext>
             </a:extLst>
           </p:cNvPr>
@@ -2665,7 +2665,7 @@
           <p:cNvPr id="10" name="">
             <a:extLst xmlns:a="http://schemas.openxmlformats.org/drawingml/2006/main">
               <a:ext uri="{FF2B5EF4-FFF2-40B4-BE49-F238E27FC236}">
-                <a16:creationId xmlns:a16="http://schemas.microsoft.com/office/drawing/2014/main" id="{B3A4EBAE-C020-4213-946C-F506EC119EB9}"/>
+                <a16:creationId xmlns:a16="http://schemas.microsoft.com/office/drawing/2014/main" id="{9B3D3EC2-E378-4DE7-91BA-8A681099648E}"/>
               </a:ext>
             </a:extLst>
           </p:cNvPr>
@@ -2699,7 +2699,7 @@
           <p:cNvPr id="11" name="">
             <a:extLst xmlns:a="http://schemas.openxmlformats.org/drawingml/2006/main">
               <a:ext uri="{FF2B5EF4-FFF2-40B4-BE49-F238E27FC236}">
-                <a16:creationId xmlns:a16="http://schemas.microsoft.com/office/drawing/2014/main" id="{DD901E1C-DF42-44BB-8472-435C3E2187BA}"/>
+                <a16:creationId xmlns:a16="http://schemas.microsoft.com/office/drawing/2014/main" id="{BFCB9F56-5612-4B09-9A4C-BEE3AE5C2F99}"/>
               </a:ext>
             </a:extLst>
           </p:cNvPr>
@@ -2733,7 +2733,7 @@
           <p:cNvPr id="12" name="">
             <a:extLst xmlns:a="http://schemas.openxmlformats.org/drawingml/2006/main">
               <a:ext uri="{FF2B5EF4-FFF2-40B4-BE49-F238E27FC236}">
-                <a16:creationId xmlns:a16="http://schemas.microsoft.com/office/drawing/2014/main" id="{D9572B43-EDA8-4E5C-9AD5-6B8BA5AB1953}"/>
+                <a16:creationId xmlns:a16="http://schemas.microsoft.com/office/drawing/2014/main" id="{7957DEC2-2B33-4252-B772-2126CD218447}"/>
               </a:ext>
             </a:extLst>
           </p:cNvPr>
@@ -2767,7 +2767,7 @@
           <p:cNvPr id="13" name="">
             <a:extLst xmlns:a="http://schemas.openxmlformats.org/drawingml/2006/main">
               <a:ext uri="{FF2B5EF4-FFF2-40B4-BE49-F238E27FC236}">
-                <a16:creationId xmlns:a16="http://schemas.microsoft.com/office/drawing/2014/main" id="{9BA190C8-4A3D-4F8A-8A7B-535605B4AA97}"/>
+                <a16:creationId xmlns:a16="http://schemas.microsoft.com/office/drawing/2014/main" id="{CA5667C4-0B42-4DDC-8E4B-44616FEDA434}"/>
               </a:ext>
             </a:extLst>
           </p:cNvPr>
@@ -2801,7 +2801,7 @@
           <p:cNvPr id="14" name="">
             <a:extLst xmlns:a="http://schemas.openxmlformats.org/drawingml/2006/main">
               <a:ext uri="{FF2B5EF4-FFF2-40B4-BE49-F238E27FC236}">
-                <a16:creationId xmlns:a16="http://schemas.microsoft.com/office/drawing/2014/main" id="{3091E2DC-D8B0-4C5F-82A9-923732403204}"/>
+                <a16:creationId xmlns:a16="http://schemas.microsoft.com/office/drawing/2014/main" id="{FBC35FCC-3674-4E30-997F-D89C6098E40B}"/>
               </a:ext>
             </a:extLst>
           </p:cNvPr>
@@ -2835,7 +2835,7 @@
           <p:cNvPr id="15" name="">
             <a:extLst xmlns:a="http://schemas.openxmlformats.org/drawingml/2006/main">
               <a:ext uri="{FF2B5EF4-FFF2-40B4-BE49-F238E27FC236}">
-                <a16:creationId xmlns:a16="http://schemas.microsoft.com/office/drawing/2014/main" id="{7C67AED0-B7BA-4CF9-B5C1-1B111053FF86}"/>
+                <a16:creationId xmlns:a16="http://schemas.microsoft.com/office/drawing/2014/main" id="{7533C949-91DE-4B58-9171-2A76A3F4E59A}"/>
               </a:ext>
             </a:extLst>
           </p:cNvPr>
@@ -2869,7 +2869,7 @@
           <p:cNvPr id="16" name="">
             <a:extLst xmlns:a="http://schemas.openxmlformats.org/drawingml/2006/main">
               <a:ext uri="{FF2B5EF4-FFF2-40B4-BE49-F238E27FC236}">
-                <a16:creationId xmlns:a16="http://schemas.microsoft.com/office/drawing/2014/main" id="{3E990B68-B8A9-418F-A424-88AD9A5AA310}"/>
+                <a16:creationId xmlns:a16="http://schemas.microsoft.com/office/drawing/2014/main" id="{7064E149-00F5-4AD6-AE36-194842E4176E}"/>
               </a:ext>
             </a:extLst>
           </p:cNvPr>
@@ -2903,7 +2903,7 @@
           <p:cNvPr id="17" name="">
             <a:extLst xmlns:a="http://schemas.openxmlformats.org/drawingml/2006/main">
               <a:ext uri="{FF2B5EF4-FFF2-40B4-BE49-F238E27FC236}">
-                <a16:creationId xmlns:a16="http://schemas.microsoft.com/office/drawing/2014/main" id="{5CD0BDBC-3F16-40D1-B060-AC504DC7EE78}"/>
+                <a16:creationId xmlns:a16="http://schemas.microsoft.com/office/drawing/2014/main" id="{E2D0AB8E-1384-4D6A-8B5E-AC96E102A70E}"/>
               </a:ext>
             </a:extLst>
           </p:cNvPr>
@@ -2937,7 +2937,7 @@
           <p:cNvPr id="18" name="">
             <a:extLst xmlns:a="http://schemas.openxmlformats.org/drawingml/2006/main">
               <a:ext uri="{FF2B5EF4-FFF2-40B4-BE49-F238E27FC236}">
-                <a16:creationId xmlns:a16="http://schemas.microsoft.com/office/drawing/2014/main" id="{5D6502B3-DBF1-41A6-B30F-7B566E0EACDF}"/>
+                <a16:creationId xmlns:a16="http://schemas.microsoft.com/office/drawing/2014/main" id="{9C0FF8F8-33CD-454B-8236-1FF06D56C951}"/>
               </a:ext>
             </a:extLst>
           </p:cNvPr>
@@ -2971,7 +2971,7 @@
           <p:cNvPr id="19" name="">
             <a:extLst xmlns:a="http://schemas.openxmlformats.org/drawingml/2006/main">
               <a:ext uri="{FF2B5EF4-FFF2-40B4-BE49-F238E27FC236}">
-                <a16:creationId xmlns:a16="http://schemas.microsoft.com/office/drawing/2014/main" id="{1190D16F-B28E-48EE-B7F2-4204A0645E13}"/>
+                <a16:creationId xmlns:a16="http://schemas.microsoft.com/office/drawing/2014/main" id="{BA0FBDF9-D71C-4A55-9C1A-3DD26128F3EA}"/>
               </a:ext>
             </a:extLst>
           </p:cNvPr>
@@ -3005,7 +3005,7 @@
           <p:cNvPr id="20" name="">
             <a:extLst xmlns:a="http://schemas.openxmlformats.org/drawingml/2006/main">
               <a:ext uri="{FF2B5EF4-FFF2-40B4-BE49-F238E27FC236}">
-                <a16:creationId xmlns:a16="http://schemas.microsoft.com/office/drawing/2014/main" id="{E1C87DB9-1D12-46ED-B2F0-13F0120D90C3}"/>
+                <a16:creationId xmlns:a16="http://schemas.microsoft.com/office/drawing/2014/main" id="{1B9A203A-FBAA-40DC-A51E-CBF02D07B3EA}"/>
               </a:ext>
             </a:extLst>
           </p:cNvPr>
@@ -3039,7 +3039,7 @@
           <p:cNvPr id="21" name="">
             <a:extLst xmlns:a="http://schemas.openxmlformats.org/drawingml/2006/main">
               <a:ext uri="{FF2B5EF4-FFF2-40B4-BE49-F238E27FC236}">
-                <a16:creationId xmlns:a16="http://schemas.microsoft.com/office/drawing/2014/main" id="{8370DD99-0214-4599-9F63-BEDBD848343F}"/>
+                <a16:creationId xmlns:a16="http://schemas.microsoft.com/office/drawing/2014/main" id="{67108C2B-88C3-4BF3-88FA-8278B249D20E}"/>
               </a:ext>
             </a:extLst>
           </p:cNvPr>
@@ -3073,7 +3073,7 @@
           <p:cNvPr id="22" name="">
             <a:extLst xmlns:a="http://schemas.openxmlformats.org/drawingml/2006/main">
               <a:ext uri="{FF2B5EF4-FFF2-40B4-BE49-F238E27FC236}">
-                <a16:creationId xmlns:a16="http://schemas.microsoft.com/office/drawing/2014/main" id="{42BC0F0D-2545-4EAC-8429-56F969356AEF}"/>
+                <a16:creationId xmlns:a16="http://schemas.microsoft.com/office/drawing/2014/main" id="{0DE40863-2343-487C-BF82-ED4D55A376A3}"/>
               </a:ext>
             </a:extLst>
           </p:cNvPr>
@@ -3107,7 +3107,7 @@
           <p:cNvPr id="23" name="">
             <a:extLst xmlns:a="http://schemas.openxmlformats.org/drawingml/2006/main">
               <a:ext uri="{FF2B5EF4-FFF2-40B4-BE49-F238E27FC236}">
-                <a16:creationId xmlns:a16="http://schemas.microsoft.com/office/drawing/2014/main" id="{DBCAD59F-2EA1-4F07-B8EC-4E5C692FFB8D}"/>
+                <a16:creationId xmlns:a16="http://schemas.microsoft.com/office/drawing/2014/main" id="{C5FCFC23-8D0B-4E6B-A834-64E399C84238}"/>
               </a:ext>
             </a:extLst>
           </p:cNvPr>
@@ -3141,7 +3141,7 @@
           <p:cNvPr id="24" name="">
             <a:extLst xmlns:a="http://schemas.openxmlformats.org/drawingml/2006/main">
               <a:ext uri="{FF2B5EF4-FFF2-40B4-BE49-F238E27FC236}">
-                <a16:creationId xmlns:a16="http://schemas.microsoft.com/office/drawing/2014/main" id="{982FA721-515A-4E4F-ACE2-C8EF185AAB61}"/>
+                <a16:creationId xmlns:a16="http://schemas.microsoft.com/office/drawing/2014/main" id="{E51A7EA4-BC12-45EB-9448-0DBD5FBE2459}"/>
               </a:ext>
             </a:extLst>
           </p:cNvPr>
@@ -3175,7 +3175,7 @@
           <p:cNvPr id="25" name="">
             <a:extLst xmlns:a="http://schemas.openxmlformats.org/drawingml/2006/main">
               <a:ext uri="{FF2B5EF4-FFF2-40B4-BE49-F238E27FC236}">
-                <a16:creationId xmlns:a16="http://schemas.microsoft.com/office/drawing/2014/main" id="{7AAC41C3-BE1D-4B90-B448-4461E7B1D1D1}"/>
+                <a16:creationId xmlns:a16="http://schemas.microsoft.com/office/drawing/2014/main" id="{FAC8849D-1882-4503-9419-E7E4626B93E8}"/>
               </a:ext>
             </a:extLst>
           </p:cNvPr>
@@ -3209,7 +3209,7 @@
           <p:cNvPr id="26" name="">
             <a:extLst xmlns:a="http://schemas.openxmlformats.org/drawingml/2006/main">
               <a:ext uri="{FF2B5EF4-FFF2-40B4-BE49-F238E27FC236}">
-                <a16:creationId xmlns:a16="http://schemas.microsoft.com/office/drawing/2014/main" id="{080C4B3D-6F43-409F-8946-785CD6AE5FCA}"/>
+                <a16:creationId xmlns:a16="http://schemas.microsoft.com/office/drawing/2014/main" id="{46B85398-C0DE-41F9-85A6-AEE91AB03EB9}"/>
               </a:ext>
             </a:extLst>
           </p:cNvPr>
@@ -3243,7 +3243,7 @@
           <p:cNvPr id="27" name="">
             <a:extLst xmlns:a="http://schemas.openxmlformats.org/drawingml/2006/main">
               <a:ext uri="{FF2B5EF4-FFF2-40B4-BE49-F238E27FC236}">
-                <a16:creationId xmlns:a16="http://schemas.microsoft.com/office/drawing/2014/main" id="{4AD55E3A-90F4-4EB2-8F66-70B159CCFDFF}"/>
+                <a16:creationId xmlns:a16="http://schemas.microsoft.com/office/drawing/2014/main" id="{70C1DAF3-E546-416A-BD4B-C62C719697A0}"/>
               </a:ext>
             </a:extLst>
           </p:cNvPr>
@@ -3277,7 +3277,7 @@
           <p:cNvPr id="28" name="">
             <a:extLst xmlns:a="http://schemas.openxmlformats.org/drawingml/2006/main">
               <a:ext uri="{FF2B5EF4-FFF2-40B4-BE49-F238E27FC236}">
-                <a16:creationId xmlns:a16="http://schemas.microsoft.com/office/drawing/2014/main" id="{1D37AC29-6E7E-4935-9C34-C4389F1076E1}"/>
+                <a16:creationId xmlns:a16="http://schemas.microsoft.com/office/drawing/2014/main" id="{1B5BFB04-2CEB-4D99-B79A-1AAE1DE3A697}"/>
               </a:ext>
             </a:extLst>
           </p:cNvPr>
@@ -3311,7 +3311,7 @@
           <p:cNvPr id="29" name="">
             <a:extLst xmlns:a="http://schemas.openxmlformats.org/drawingml/2006/main">
               <a:ext uri="{FF2B5EF4-FFF2-40B4-BE49-F238E27FC236}">
-                <a16:creationId xmlns:a16="http://schemas.microsoft.com/office/drawing/2014/main" id="{F66C3B70-338B-4354-8517-7AE451DFE5AE}"/>
+                <a16:creationId xmlns:a16="http://schemas.microsoft.com/office/drawing/2014/main" id="{2FFC9620-6022-4A3B-85E8-78572497CACE}"/>
               </a:ext>
             </a:extLst>
           </p:cNvPr>
@@ -3345,7 +3345,7 @@
           <p:cNvPr id="30" name="">
             <a:extLst xmlns:a="http://schemas.openxmlformats.org/drawingml/2006/main">
               <a:ext uri="{FF2B5EF4-FFF2-40B4-BE49-F238E27FC236}">
-                <a16:creationId xmlns:a16="http://schemas.microsoft.com/office/drawing/2014/main" id="{F4AD8120-8CF4-471A-8F91-DD18C41478E6}"/>
+                <a16:creationId xmlns:a16="http://schemas.microsoft.com/office/drawing/2014/main" id="{BC662781-B00F-47E3-BF3F-FBEF281AF167}"/>
               </a:ext>
             </a:extLst>
           </p:cNvPr>
@@ -3379,7 +3379,7 @@
           <p:cNvPr id="31" name="">
             <a:extLst xmlns:a="http://schemas.openxmlformats.org/drawingml/2006/main">
               <a:ext uri="{FF2B5EF4-FFF2-40B4-BE49-F238E27FC236}">
-                <a16:creationId xmlns:a16="http://schemas.microsoft.com/office/drawing/2014/main" id="{633BFAB1-196E-4C2E-9253-84C43D6B982E}"/>
+                <a16:creationId xmlns:a16="http://schemas.microsoft.com/office/drawing/2014/main" id="{300FD765-0CEA-469F-8EFC-C4DC05F39212}"/>
               </a:ext>
             </a:extLst>
           </p:cNvPr>
@@ -3413,7 +3413,7 @@
           <p:cNvPr id="32" name="">
             <a:extLst xmlns:a="http://schemas.openxmlformats.org/drawingml/2006/main">
               <a:ext uri="{FF2B5EF4-FFF2-40B4-BE49-F238E27FC236}">
-                <a16:creationId xmlns:a16="http://schemas.microsoft.com/office/drawing/2014/main" id="{E834D057-9D85-42DD-A286-28B7817D26B9}"/>
+                <a16:creationId xmlns:a16="http://schemas.microsoft.com/office/drawing/2014/main" id="{C214E17C-6E27-49D1-86F5-4F49ACA350B2}"/>
               </a:ext>
             </a:extLst>
           </p:cNvPr>
@@ -3447,7 +3447,7 @@
           <p:cNvPr id="33" name="">
             <a:extLst xmlns:a="http://schemas.openxmlformats.org/drawingml/2006/main">
               <a:ext uri="{FF2B5EF4-FFF2-40B4-BE49-F238E27FC236}">
-                <a16:creationId xmlns:a16="http://schemas.microsoft.com/office/drawing/2014/main" id="{0DEA1797-6743-4841-A8B3-4ABCBA210FCE}"/>
+                <a16:creationId xmlns:a16="http://schemas.microsoft.com/office/drawing/2014/main" id="{0DAC04DA-74E5-4F34-AC46-16F851CEDF5F}"/>
               </a:ext>
             </a:extLst>
           </p:cNvPr>
@@ -3481,7 +3481,7 @@
           <p:cNvPr id="34" name="">
             <a:extLst xmlns:a="http://schemas.openxmlformats.org/drawingml/2006/main">
               <a:ext uri="{FF2B5EF4-FFF2-40B4-BE49-F238E27FC236}">
-                <a16:creationId xmlns:a16="http://schemas.microsoft.com/office/drawing/2014/main" id="{5732F7EA-AE59-4B35-94A2-B1A32658B701}"/>
+                <a16:creationId xmlns:a16="http://schemas.microsoft.com/office/drawing/2014/main" id="{BE5DD8AC-D501-410C-93B6-1A4B803C4189}"/>
               </a:ext>
             </a:extLst>
           </p:cNvPr>
@@ -3515,7 +3515,7 @@
           <p:cNvPr id="35" name="">
             <a:extLst xmlns:a="http://schemas.openxmlformats.org/drawingml/2006/main">
               <a:ext uri="{FF2B5EF4-FFF2-40B4-BE49-F238E27FC236}">
-                <a16:creationId xmlns:a16="http://schemas.microsoft.com/office/drawing/2014/main" id="{0E7A29EB-E695-4EDC-AFD6-9C30B63CDC39}"/>
+                <a16:creationId xmlns:a16="http://schemas.microsoft.com/office/drawing/2014/main" id="{9CC337EE-3812-4EE2-AB37-6161735AA850}"/>
               </a:ext>
             </a:extLst>
           </p:cNvPr>
@@ -3549,7 +3549,7 @@
           <p:cNvPr id="36" name="">
             <a:extLst xmlns:a="http://schemas.openxmlformats.org/drawingml/2006/main">
               <a:ext uri="{FF2B5EF4-FFF2-40B4-BE49-F238E27FC236}">
-                <a16:creationId xmlns:a16="http://schemas.microsoft.com/office/drawing/2014/main" id="{290710D2-2717-46E1-9130-3FF1D9F25CD6}"/>
+                <a16:creationId xmlns:a16="http://schemas.microsoft.com/office/drawing/2014/main" id="{03E4733D-0D02-44E2-AA91-657EF26D1C8F}"/>
               </a:ext>
             </a:extLst>
           </p:cNvPr>
@@ -3583,7 +3583,7 @@
           <p:cNvPr id="37" name="">
             <a:extLst xmlns:a="http://schemas.openxmlformats.org/drawingml/2006/main">
               <a:ext uri="{FF2B5EF4-FFF2-40B4-BE49-F238E27FC236}">
-                <a16:creationId xmlns:a16="http://schemas.microsoft.com/office/drawing/2014/main" id="{A7CE8725-D0AE-4A13-8B55-158ACDE80ABC}"/>
+                <a16:creationId xmlns:a16="http://schemas.microsoft.com/office/drawing/2014/main" id="{8F3D29C9-B7B6-4E46-8AB2-6694FEE16EFC}"/>
               </a:ext>
             </a:extLst>
           </p:cNvPr>
@@ -3617,7 +3617,7 @@
           <p:cNvPr id="38" name="">
             <a:extLst xmlns:a="http://schemas.openxmlformats.org/drawingml/2006/main">
               <a:ext uri="{FF2B5EF4-FFF2-40B4-BE49-F238E27FC236}">
-                <a16:creationId xmlns:a16="http://schemas.microsoft.com/office/drawing/2014/main" id="{444A1C59-6D3C-42AB-AC05-551157F8E08E}"/>
+                <a16:creationId xmlns:a16="http://schemas.microsoft.com/office/drawing/2014/main" id="{1B58D860-63BF-4D25-84DF-F68B9CA334F2}"/>
               </a:ext>
             </a:extLst>
           </p:cNvPr>
@@ -3651,7 +3651,7 @@
           <p:cNvPr id="39" name="">
             <a:extLst xmlns:a="http://schemas.openxmlformats.org/drawingml/2006/main">
               <a:ext uri="{FF2B5EF4-FFF2-40B4-BE49-F238E27FC236}">
-                <a16:creationId xmlns:a16="http://schemas.microsoft.com/office/drawing/2014/main" id="{FB66F15F-0884-4DBD-83D8-93BC35342C09}"/>
+                <a16:creationId xmlns:a16="http://schemas.microsoft.com/office/drawing/2014/main" id="{8A473D82-E4C7-4DF4-AAD4-288222DD4B61}"/>
               </a:ext>
             </a:extLst>
           </p:cNvPr>
@@ -3685,7 +3685,7 @@
           <p:cNvPr id="40" name="">
             <a:extLst xmlns:a="http://schemas.openxmlformats.org/drawingml/2006/main">
               <a:ext uri="{FF2B5EF4-FFF2-40B4-BE49-F238E27FC236}">
-                <a16:creationId xmlns:a16="http://schemas.microsoft.com/office/drawing/2014/main" id="{1CF3EBE9-38A1-45F8-BC85-4A33F3A8B991}"/>
+                <a16:creationId xmlns:a16="http://schemas.microsoft.com/office/drawing/2014/main" id="{169C39D5-49C3-4809-8102-6799E16E8F16}"/>
               </a:ext>
             </a:extLst>
           </p:cNvPr>
@@ -3719,7 +3719,7 @@
           <p:cNvPr id="41" name="">
             <a:extLst xmlns:a="http://schemas.openxmlformats.org/drawingml/2006/main">
               <a:ext uri="{FF2B5EF4-FFF2-40B4-BE49-F238E27FC236}">
-                <a16:creationId xmlns:a16="http://schemas.microsoft.com/office/drawing/2014/main" id="{E372AD63-90E1-43D8-82D8-CB08A65A6CA2}"/>
+                <a16:creationId xmlns:a16="http://schemas.microsoft.com/office/drawing/2014/main" id="{C0446442-C545-4AA2-B594-E29FA045FBDF}"/>
               </a:ext>
             </a:extLst>
           </p:cNvPr>
@@ -3753,7 +3753,7 @@
           <p:cNvPr id="42" name="">
             <a:extLst xmlns:a="http://schemas.openxmlformats.org/drawingml/2006/main">
               <a:ext uri="{FF2B5EF4-FFF2-40B4-BE49-F238E27FC236}">
-                <a16:creationId xmlns:a16="http://schemas.microsoft.com/office/drawing/2014/main" id="{6D2E87F6-A3CC-466C-999D-56EAE848BE00}"/>
+                <a16:creationId xmlns:a16="http://schemas.microsoft.com/office/drawing/2014/main" id="{CF4E46F5-C1E7-4C02-9F11-57C20E7BBCE4}"/>
               </a:ext>
             </a:extLst>
           </p:cNvPr>
@@ -3787,7 +3787,7 @@
           <p:cNvPr id="43" name="">
             <a:extLst xmlns:a="http://schemas.openxmlformats.org/drawingml/2006/main">
               <a:ext uri="{FF2B5EF4-FFF2-40B4-BE49-F238E27FC236}">
-                <a16:creationId xmlns:a16="http://schemas.microsoft.com/office/drawing/2014/main" id="{22D01BD6-3681-47BC-AB0B-362AAEE67587}"/>
+                <a16:creationId xmlns:a16="http://schemas.microsoft.com/office/drawing/2014/main" id="{142B247C-BC14-4180-A374-D46CAE516BCA}"/>
               </a:ext>
             </a:extLst>
           </p:cNvPr>
@@ -3821,7 +3821,7 @@
           <p:cNvPr id="44" name="">
             <a:extLst xmlns:a="http://schemas.openxmlformats.org/drawingml/2006/main">
               <a:ext uri="{FF2B5EF4-FFF2-40B4-BE49-F238E27FC236}">
-                <a16:creationId xmlns:a16="http://schemas.microsoft.com/office/drawing/2014/main" id="{3E2BD45F-7385-4A5D-989F-64A982B19B2F}"/>
+                <a16:creationId xmlns:a16="http://schemas.microsoft.com/office/drawing/2014/main" id="{EC90F9EF-73D2-4DAE-9291-68EB81E33ACD}"/>
               </a:ext>
             </a:extLst>
           </p:cNvPr>
@@ -3855,7 +3855,7 @@
           <p:cNvPr id="45" name="">
             <a:extLst xmlns:a="http://schemas.openxmlformats.org/drawingml/2006/main">
               <a:ext uri="{FF2B5EF4-FFF2-40B4-BE49-F238E27FC236}">
-                <a16:creationId xmlns:a16="http://schemas.microsoft.com/office/drawing/2014/main" id="{4F27EAA4-A1B5-4252-8875-278296E7D4D1}"/>
+                <a16:creationId xmlns:a16="http://schemas.microsoft.com/office/drawing/2014/main" id="{495C3CF0-8AB4-4D38-9A87-64602BF863CA}"/>
               </a:ext>
             </a:extLst>
           </p:cNvPr>
@@ -3889,7 +3889,7 @@
           <p:cNvPr id="46" name="">
             <a:extLst xmlns:a="http://schemas.openxmlformats.org/drawingml/2006/main">
               <a:ext uri="{FF2B5EF4-FFF2-40B4-BE49-F238E27FC236}">
-                <a16:creationId xmlns:a16="http://schemas.microsoft.com/office/drawing/2014/main" id="{AAFCBE49-3F1F-46D2-9110-252DBDF1B189}"/>
+                <a16:creationId xmlns:a16="http://schemas.microsoft.com/office/drawing/2014/main" id="{3220F6A6-4304-46F8-B147-96D1B1910D42}"/>
               </a:ext>
             </a:extLst>
           </p:cNvPr>
@@ -3923,7 +3923,7 @@
           <p:cNvPr id="47" name="">
             <a:extLst xmlns:a="http://schemas.openxmlformats.org/drawingml/2006/main">
               <a:ext uri="{FF2B5EF4-FFF2-40B4-BE49-F238E27FC236}">
-                <a16:creationId xmlns:a16="http://schemas.microsoft.com/office/drawing/2014/main" id="{0CB510D3-115E-4433-BFA0-36D8F0C3E0CF}"/>
+                <a16:creationId xmlns:a16="http://schemas.microsoft.com/office/drawing/2014/main" id="{C147BC84-7F2E-4341-A113-47AD609334D3}"/>
               </a:ext>
             </a:extLst>
           </p:cNvPr>
@@ -3957,7 +3957,7 @@
           <p:cNvPr id="48" name="">
             <a:extLst xmlns:a="http://schemas.openxmlformats.org/drawingml/2006/main">
               <a:ext uri="{FF2B5EF4-FFF2-40B4-BE49-F238E27FC236}">
-                <a16:creationId xmlns:a16="http://schemas.microsoft.com/office/drawing/2014/main" id="{A9D23018-6D48-4725-93EA-773F1101D459}"/>
+                <a16:creationId xmlns:a16="http://schemas.microsoft.com/office/drawing/2014/main" id="{854DF6CB-0847-4C4D-9118-8FC75651B3EC}"/>
               </a:ext>
             </a:extLst>
           </p:cNvPr>
@@ -3991,7 +3991,7 @@
           <p:cNvPr id="49" name="">
             <a:extLst xmlns:a="http://schemas.openxmlformats.org/drawingml/2006/main">
               <a:ext uri="{FF2B5EF4-FFF2-40B4-BE49-F238E27FC236}">
-                <a16:creationId xmlns:a16="http://schemas.microsoft.com/office/drawing/2014/main" id="{5A470371-E85F-4199-8F1D-0F347EAD1B00}"/>
+                <a16:creationId xmlns:a16="http://schemas.microsoft.com/office/drawing/2014/main" id="{E3C81CE5-150C-47CF-840E-AEB2C2FF0108}"/>
               </a:ext>
             </a:extLst>
           </p:cNvPr>
@@ -4025,7 +4025,7 @@
           <p:cNvPr id="50" name="">
             <a:extLst xmlns:a="http://schemas.openxmlformats.org/drawingml/2006/main">
               <a:ext uri="{FF2B5EF4-FFF2-40B4-BE49-F238E27FC236}">
-                <a16:creationId xmlns:a16="http://schemas.microsoft.com/office/drawing/2014/main" id="{F6468DB0-0C44-4D8B-9DF2-0933D197B5E7}"/>
+                <a16:creationId xmlns:a16="http://schemas.microsoft.com/office/drawing/2014/main" id="{76755B59-647A-4D77-B57B-302F4E3539CD}"/>
               </a:ext>
             </a:extLst>
           </p:cNvPr>
@@ -4059,7 +4059,7 @@
           <p:cNvPr id="51" name="">
             <a:extLst xmlns:a="http://schemas.openxmlformats.org/drawingml/2006/main">
               <a:ext uri="{FF2B5EF4-FFF2-40B4-BE49-F238E27FC236}">
-                <a16:creationId xmlns:a16="http://schemas.microsoft.com/office/drawing/2014/main" id="{565FB5C9-1306-4C1C-AFB5-E3D26925C4B6}"/>
+                <a16:creationId xmlns:a16="http://schemas.microsoft.com/office/drawing/2014/main" id="{92CC7C79-0B74-491B-8828-6C91C801191F}"/>
               </a:ext>
             </a:extLst>
           </p:cNvPr>
@@ -4093,7 +4093,7 @@
           <p:cNvPr id="52" name="">
             <a:extLst xmlns:a="http://schemas.openxmlformats.org/drawingml/2006/main">
               <a:ext uri="{FF2B5EF4-FFF2-40B4-BE49-F238E27FC236}">
-                <a16:creationId xmlns:a16="http://schemas.microsoft.com/office/drawing/2014/main" id="{6F45A012-673E-4CAD-B22A-7CFDBA0144FE}"/>
+                <a16:creationId xmlns:a16="http://schemas.microsoft.com/office/drawing/2014/main" id="{7E9C3ABB-5FD4-4BA9-9F10-4283F7F51924}"/>
               </a:ext>
             </a:extLst>
           </p:cNvPr>
@@ -4127,7 +4127,7 @@
           <p:cNvPr id="53" name="">
             <a:extLst xmlns:a="http://schemas.openxmlformats.org/drawingml/2006/main">
               <a:ext uri="{FF2B5EF4-FFF2-40B4-BE49-F238E27FC236}">
-                <a16:creationId xmlns:a16="http://schemas.microsoft.com/office/drawing/2014/main" id="{0688FBCB-2C92-41FA-9C53-49C15FA99889}"/>
+                <a16:creationId xmlns:a16="http://schemas.microsoft.com/office/drawing/2014/main" id="{4BD9A536-2710-4EDC-891E-FADA405B26A8}"/>
               </a:ext>
             </a:extLst>
           </p:cNvPr>
@@ -4161,7 +4161,7 @@
           <p:cNvPr id="54" name="">
             <a:extLst xmlns:a="http://schemas.openxmlformats.org/drawingml/2006/main">
               <a:ext uri="{FF2B5EF4-FFF2-40B4-BE49-F238E27FC236}">
-                <a16:creationId xmlns:a16="http://schemas.microsoft.com/office/drawing/2014/main" id="{6E7E27B7-7C0E-42CD-A787-6D136E15DB0E}"/>
+                <a16:creationId xmlns:a16="http://schemas.microsoft.com/office/drawing/2014/main" id="{A6C6B287-DE61-457B-ADE2-422BB7B109D1}"/>
               </a:ext>
             </a:extLst>
           </p:cNvPr>
@@ -4195,7 +4195,7 @@
           <p:cNvPr id="55" name="">
             <a:extLst xmlns:a="http://schemas.openxmlformats.org/drawingml/2006/main">
               <a:ext uri="{FF2B5EF4-FFF2-40B4-BE49-F238E27FC236}">
-                <a16:creationId xmlns:a16="http://schemas.microsoft.com/office/drawing/2014/main" id="{C6175563-C851-484A-B005-DA615E84F366}"/>
+                <a16:creationId xmlns:a16="http://schemas.microsoft.com/office/drawing/2014/main" id="{37A85F8E-4A18-4009-8F29-D76CA21AB1D8}"/>
               </a:ext>
             </a:extLst>
           </p:cNvPr>
@@ -4229,7 +4229,7 @@
           <p:cNvPr id="56" name="">
             <a:extLst xmlns:a="http://schemas.openxmlformats.org/drawingml/2006/main">
               <a:ext uri="{FF2B5EF4-FFF2-40B4-BE49-F238E27FC236}">
-                <a16:creationId xmlns:a16="http://schemas.microsoft.com/office/drawing/2014/main" id="{570F51BF-7908-4AC3-8203-15395F335CE0}"/>
+                <a16:creationId xmlns:a16="http://schemas.microsoft.com/office/drawing/2014/main" id="{F9CC33DD-FEDA-45D3-906A-D6FB06921864}"/>
               </a:ext>
             </a:extLst>
           </p:cNvPr>
@@ -4263,7 +4263,7 @@
           <p:cNvPr id="57" name="">
             <a:extLst xmlns:a="http://schemas.openxmlformats.org/drawingml/2006/main">
               <a:ext uri="{FF2B5EF4-FFF2-40B4-BE49-F238E27FC236}">
-                <a16:creationId xmlns:a16="http://schemas.microsoft.com/office/drawing/2014/main" id="{A0FDDBAF-89D6-4CFF-921E-295B3AD7F52C}"/>
+                <a16:creationId xmlns:a16="http://schemas.microsoft.com/office/drawing/2014/main" id="{FF5F78EC-C987-436D-A10A-09511EFE68CC}"/>
               </a:ext>
             </a:extLst>
           </p:cNvPr>
@@ -4297,7 +4297,7 @@
           <p:cNvPr id="58" name="">
             <a:extLst xmlns:a="http://schemas.openxmlformats.org/drawingml/2006/main">
               <a:ext uri="{FF2B5EF4-FFF2-40B4-BE49-F238E27FC236}">
-                <a16:creationId xmlns:a16="http://schemas.microsoft.com/office/drawing/2014/main" id="{31174D9C-5B31-4366-A90A-63DE8F7F4EB1}"/>
+                <a16:creationId xmlns:a16="http://schemas.microsoft.com/office/drawing/2014/main" id="{C56F1086-BB37-409C-AEB1-FBA5F6632B87}"/>
               </a:ext>
             </a:extLst>
           </p:cNvPr>
@@ -4331,7 +4331,7 @@
           <p:cNvPr id="59" name="">
             <a:extLst xmlns:a="http://schemas.openxmlformats.org/drawingml/2006/main">
               <a:ext uri="{FF2B5EF4-FFF2-40B4-BE49-F238E27FC236}">
-                <a16:creationId xmlns:a16="http://schemas.microsoft.com/office/drawing/2014/main" id="{465671A5-0828-4A9D-8ACA-8DC455D4CA5E}"/>
+                <a16:creationId xmlns:a16="http://schemas.microsoft.com/office/drawing/2014/main" id="{FCBE87D6-47C1-444F-B60D-72EB2917B1FA}"/>
               </a:ext>
             </a:extLst>
           </p:cNvPr>
@@ -4365,7 +4365,7 @@
           <p:cNvPr id="60" name="">
             <a:extLst xmlns:a="http://schemas.openxmlformats.org/drawingml/2006/main">
               <a:ext uri="{FF2B5EF4-FFF2-40B4-BE49-F238E27FC236}">
-                <a16:creationId xmlns:a16="http://schemas.microsoft.com/office/drawing/2014/main" id="{CB213283-18E5-4F92-9C87-D60B556F2086}"/>
+                <a16:creationId xmlns:a16="http://schemas.microsoft.com/office/drawing/2014/main" id="{EDEF5A72-CF98-46F6-BDAA-28F8B530110B}"/>
               </a:ext>
             </a:extLst>
           </p:cNvPr>
@@ -4399,7 +4399,7 @@
           <p:cNvPr id="61" name="">
             <a:extLst xmlns:a="http://schemas.openxmlformats.org/drawingml/2006/main">
               <a:ext uri="{FF2B5EF4-FFF2-40B4-BE49-F238E27FC236}">
-                <a16:creationId xmlns:a16="http://schemas.microsoft.com/office/drawing/2014/main" id="{01B90540-CCE5-4B5C-A3E1-99845C444B70}"/>
+                <a16:creationId xmlns:a16="http://schemas.microsoft.com/office/drawing/2014/main" id="{10404262-AB46-4B3C-AC35-AF05F81EE6F3}"/>
               </a:ext>
             </a:extLst>
           </p:cNvPr>
@@ -4433,7 +4433,7 @@
           <p:cNvPr id="62" name="">
             <a:extLst xmlns:a="http://schemas.openxmlformats.org/drawingml/2006/main">
               <a:ext uri="{FF2B5EF4-FFF2-40B4-BE49-F238E27FC236}">
-                <a16:creationId xmlns:a16="http://schemas.microsoft.com/office/drawing/2014/main" id="{D6973122-5E96-4D06-9F6B-011C591AD16C}"/>
+                <a16:creationId xmlns:a16="http://schemas.microsoft.com/office/drawing/2014/main" id="{B0E6364C-B64E-4208-8360-E839DAB1EA65}"/>
               </a:ext>
             </a:extLst>
           </p:cNvPr>
@@ -4467,7 +4467,7 @@
           <p:cNvPr id="63" name="">
             <a:extLst xmlns:a="http://schemas.openxmlformats.org/drawingml/2006/main">
               <a:ext uri="{FF2B5EF4-FFF2-40B4-BE49-F238E27FC236}">
-                <a16:creationId xmlns:a16="http://schemas.microsoft.com/office/drawing/2014/main" id="{F50405AF-9AA0-44CB-9E8C-2B29A6C2C302}"/>
+                <a16:creationId xmlns:a16="http://schemas.microsoft.com/office/drawing/2014/main" id="{AE9C9B4C-7A31-4921-BF34-069FE72A94E3}"/>
               </a:ext>
             </a:extLst>
           </p:cNvPr>
@@ -4501,7 +4501,7 @@
           <p:cNvPr id="64" name="">
             <a:extLst xmlns:a="http://schemas.openxmlformats.org/drawingml/2006/main">
               <a:ext uri="{FF2B5EF4-FFF2-40B4-BE49-F238E27FC236}">
-                <a16:creationId xmlns:a16="http://schemas.microsoft.com/office/drawing/2014/main" id="{810A1D8B-B3FE-46B3-A096-71B7D49BB4BC}"/>
+                <a16:creationId xmlns:a16="http://schemas.microsoft.com/office/drawing/2014/main" id="{8EDC9890-6EF8-4C71-A95C-97632031A5FC}"/>
               </a:ext>
             </a:extLst>
           </p:cNvPr>
@@ -4535,7 +4535,7 @@
           <p:cNvPr id="65" name="">
             <a:extLst xmlns:a="http://schemas.openxmlformats.org/drawingml/2006/main">
               <a:ext uri="{FF2B5EF4-FFF2-40B4-BE49-F238E27FC236}">
-                <a16:creationId xmlns:a16="http://schemas.microsoft.com/office/drawing/2014/main" id="{9BD0506C-C26B-4E4F-89C8-744EFB87D03B}"/>
+                <a16:creationId xmlns:a16="http://schemas.microsoft.com/office/drawing/2014/main" id="{3AEA44A1-1814-4DDD-9CEE-A0EAADB1EB5C}"/>
               </a:ext>
             </a:extLst>
           </p:cNvPr>
@@ -4569,7 +4569,7 @@
           <p:cNvPr id="66" name="">
             <a:extLst xmlns:a="http://schemas.openxmlformats.org/drawingml/2006/main">
               <a:ext uri="{FF2B5EF4-FFF2-40B4-BE49-F238E27FC236}">
-                <a16:creationId xmlns:a16="http://schemas.microsoft.com/office/drawing/2014/main" id="{FEDAB8AD-73ED-417C-A109-ADF55314D92F}"/>
+                <a16:creationId xmlns:a16="http://schemas.microsoft.com/office/drawing/2014/main" id="{C91B525D-AE0B-4265-A181-79D969CB8C6D}"/>
               </a:ext>
             </a:extLst>
           </p:cNvPr>
@@ -4603,7 +4603,7 @@
           <p:cNvPr id="67" name="">
             <a:extLst xmlns:a="http://schemas.openxmlformats.org/drawingml/2006/main">
               <a:ext uri="{FF2B5EF4-FFF2-40B4-BE49-F238E27FC236}">
-                <a16:creationId xmlns:a16="http://schemas.microsoft.com/office/drawing/2014/main" id="{775DBF11-2F58-4E10-B867-05A4D30BEF12}"/>
+                <a16:creationId xmlns:a16="http://schemas.microsoft.com/office/drawing/2014/main" id="{25964636-8C49-4F6E-BACC-EC7C72001B19}"/>
               </a:ext>
             </a:extLst>
           </p:cNvPr>
@@ -4637,7 +4637,7 @@
           <p:cNvPr id="68" name="">
             <a:extLst xmlns:a="http://schemas.openxmlformats.org/drawingml/2006/main">
               <a:ext uri="{FF2B5EF4-FFF2-40B4-BE49-F238E27FC236}">
-                <a16:creationId xmlns:a16="http://schemas.microsoft.com/office/drawing/2014/main" id="{DCB47729-5652-4176-B3C9-EE41241A999F}"/>
+                <a16:creationId xmlns:a16="http://schemas.microsoft.com/office/drawing/2014/main" id="{71944D15-D155-4B07-97C0-F77948975664}"/>
               </a:ext>
             </a:extLst>
           </p:cNvPr>
@@ -4671,7 +4671,7 @@
           <p:cNvPr id="69" name="">
             <a:extLst xmlns:a="http://schemas.openxmlformats.org/drawingml/2006/main">
               <a:ext uri="{FF2B5EF4-FFF2-40B4-BE49-F238E27FC236}">
-                <a16:creationId xmlns:a16="http://schemas.microsoft.com/office/drawing/2014/main" id="{67F53D6C-8F02-456C-A7D7-3EEAB7BB2908}"/>
+                <a16:creationId xmlns:a16="http://schemas.microsoft.com/office/drawing/2014/main" id="{527E6984-B3E5-42CC-886F-0AC43631F62C}"/>
               </a:ext>
             </a:extLst>
           </p:cNvPr>
@@ -4705,7 +4705,7 @@
           <p:cNvPr id="70" name="">
             <a:extLst xmlns:a="http://schemas.openxmlformats.org/drawingml/2006/main">
               <a:ext uri="{FF2B5EF4-FFF2-40B4-BE49-F238E27FC236}">
-                <a16:creationId xmlns:a16="http://schemas.microsoft.com/office/drawing/2014/main" id="{9CD45085-A338-41A6-A3A4-52211EA20AA7}"/>
+                <a16:creationId xmlns:a16="http://schemas.microsoft.com/office/drawing/2014/main" id="{4BCD28D7-2479-4D28-82DD-DF63EF224E52}"/>
               </a:ext>
             </a:extLst>
           </p:cNvPr>
@@ -4739,7 +4739,7 @@
           <p:cNvPr id="71" name="">
             <a:extLst xmlns:a="http://schemas.openxmlformats.org/drawingml/2006/main">
               <a:ext uri="{FF2B5EF4-FFF2-40B4-BE49-F238E27FC236}">
-                <a16:creationId xmlns:a16="http://schemas.microsoft.com/office/drawing/2014/main" id="{BE62C9C0-3310-4237-888D-D99DA7E86808}"/>
+                <a16:creationId xmlns:a16="http://schemas.microsoft.com/office/drawing/2014/main" id="{AA19CDFC-400C-4264-A117-0890E19188C3}"/>
               </a:ext>
             </a:extLst>
           </p:cNvPr>
@@ -4773,7 +4773,7 @@
           <p:cNvPr id="72" name="">
             <a:extLst xmlns:a="http://schemas.openxmlformats.org/drawingml/2006/main">
               <a:ext uri="{FF2B5EF4-FFF2-40B4-BE49-F238E27FC236}">
-                <a16:creationId xmlns:a16="http://schemas.microsoft.com/office/drawing/2014/main" id="{EA88F51E-C671-4FC3-9B39-CFE0DDBD8E13}"/>
+                <a16:creationId xmlns:a16="http://schemas.microsoft.com/office/drawing/2014/main" id="{5BB58FD4-519E-4C34-9707-1CD88D98DAF5}"/>
               </a:ext>
             </a:extLst>
           </p:cNvPr>
@@ -4807,7 +4807,7 @@
           <p:cNvPr id="73" name="">
             <a:extLst xmlns:a="http://schemas.openxmlformats.org/drawingml/2006/main">
               <a:ext uri="{FF2B5EF4-FFF2-40B4-BE49-F238E27FC236}">
-                <a16:creationId xmlns:a16="http://schemas.microsoft.com/office/drawing/2014/main" id="{2002BF9A-A5E7-46E2-B482-F60A20DF07C2}"/>
+                <a16:creationId xmlns:a16="http://schemas.microsoft.com/office/drawing/2014/main" id="{82042D84-92C3-43B4-9155-AF9287AEDB25}"/>
               </a:ext>
             </a:extLst>
           </p:cNvPr>
@@ -4841,7 +4841,7 @@
           <p:cNvPr id="74" name="">
             <a:extLst xmlns:a="http://schemas.openxmlformats.org/drawingml/2006/main">
               <a:ext uri="{FF2B5EF4-FFF2-40B4-BE49-F238E27FC236}">
-                <a16:creationId xmlns:a16="http://schemas.microsoft.com/office/drawing/2014/main" id="{76B599B1-7740-4F8D-9EA9-09604DDF0C45}"/>
+                <a16:creationId xmlns:a16="http://schemas.microsoft.com/office/drawing/2014/main" id="{3AE6C8C0-7FB0-4635-A1DF-05E4D4440B4A}"/>
               </a:ext>
             </a:extLst>
           </p:cNvPr>
@@ -4875,7 +4875,7 @@
           <p:cNvPr id="75" name="">
             <a:extLst xmlns:a="http://schemas.openxmlformats.org/drawingml/2006/main">
               <a:ext uri="{FF2B5EF4-FFF2-40B4-BE49-F238E27FC236}">
-                <a16:creationId xmlns:a16="http://schemas.microsoft.com/office/drawing/2014/main" id="{6B993998-3922-453A-8FC1-517D6003AFDE}"/>
+                <a16:creationId xmlns:a16="http://schemas.microsoft.com/office/drawing/2014/main" id="{20B378FA-EBC9-4ACD-8961-29D51D5DD0B3}"/>
               </a:ext>
             </a:extLst>
           </p:cNvPr>
@@ -4909,7 +4909,7 @@
           <p:cNvPr id="76" name="">
             <a:extLst xmlns:a="http://schemas.openxmlformats.org/drawingml/2006/main">
               <a:ext uri="{FF2B5EF4-FFF2-40B4-BE49-F238E27FC236}">
-                <a16:creationId xmlns:a16="http://schemas.microsoft.com/office/drawing/2014/main" id="{E1AACCE1-5230-4C45-86F9-029E76377175}"/>
+                <a16:creationId xmlns:a16="http://schemas.microsoft.com/office/drawing/2014/main" id="{6D9CC666-682F-4DCE-B2F1-F903B337B50B}"/>
               </a:ext>
             </a:extLst>
           </p:cNvPr>
@@ -4943,7 +4943,7 @@
           <p:cNvPr id="77" name="">
             <a:extLst xmlns:a="http://schemas.openxmlformats.org/drawingml/2006/main">
               <a:ext uri="{FF2B5EF4-FFF2-40B4-BE49-F238E27FC236}">
-                <a16:creationId xmlns:a16="http://schemas.microsoft.com/office/drawing/2014/main" id="{17C6BA69-B5AB-4BC8-9232-0A40387DB229}"/>
+                <a16:creationId xmlns:a16="http://schemas.microsoft.com/office/drawing/2014/main" id="{B5F9CC1A-669B-498B-B9D9-E9F206954CC7}"/>
               </a:ext>
             </a:extLst>
           </p:cNvPr>
@@ -4977,7 +4977,7 @@
           <p:cNvPr id="78" name="">
             <a:extLst xmlns:a="http://schemas.openxmlformats.org/drawingml/2006/main">
               <a:ext uri="{FF2B5EF4-FFF2-40B4-BE49-F238E27FC236}">
-                <a16:creationId xmlns:a16="http://schemas.microsoft.com/office/drawing/2014/main" id="{6823F967-0FBF-480F-96C9-E4AA909EE860}"/>
+                <a16:creationId xmlns:a16="http://schemas.microsoft.com/office/drawing/2014/main" id="{7A0720FE-123A-4128-B5EA-B5789FEACC38}"/>
               </a:ext>
             </a:extLst>
           </p:cNvPr>
@@ -5011,7 +5011,7 @@
           <p:cNvPr id="79" name="">
             <a:extLst xmlns:a="http://schemas.openxmlformats.org/drawingml/2006/main">
               <a:ext uri="{FF2B5EF4-FFF2-40B4-BE49-F238E27FC236}">
-                <a16:creationId xmlns:a16="http://schemas.microsoft.com/office/drawing/2014/main" id="{FAF7F706-AC37-455D-AA56-A6109EFFE190}"/>
+                <a16:creationId xmlns:a16="http://schemas.microsoft.com/office/drawing/2014/main" id="{384E2B06-071D-4A43-9F12-89B5C9C92921}"/>
               </a:ext>
             </a:extLst>
           </p:cNvPr>
@@ -5045,7 +5045,7 @@
           <p:cNvPr id="80" name="">
             <a:extLst xmlns:a="http://schemas.openxmlformats.org/drawingml/2006/main">
               <a:ext uri="{FF2B5EF4-FFF2-40B4-BE49-F238E27FC236}">
-                <a16:creationId xmlns:a16="http://schemas.microsoft.com/office/drawing/2014/main" id="{C6416DF6-D545-45E8-A20A-24788BFCA547}"/>
+                <a16:creationId xmlns:a16="http://schemas.microsoft.com/office/drawing/2014/main" id="{26E07B93-01B9-4A95-B60A-B6276FBBC6C7}"/>
               </a:ext>
             </a:extLst>
           </p:cNvPr>
@@ -5079,7 +5079,7 @@
           <p:cNvPr id="81" name="">
             <a:extLst xmlns:a="http://schemas.openxmlformats.org/drawingml/2006/main">
               <a:ext uri="{FF2B5EF4-FFF2-40B4-BE49-F238E27FC236}">
-                <a16:creationId xmlns:a16="http://schemas.microsoft.com/office/drawing/2014/main" id="{B36ACEC1-C819-4445-9CAD-CCBCF61CFA53}"/>
+                <a16:creationId xmlns:a16="http://schemas.microsoft.com/office/drawing/2014/main" id="{A9C94E6D-5617-4414-8CEA-9F9A0D9FF850}"/>
               </a:ext>
             </a:extLst>
           </p:cNvPr>
@@ -5113,7 +5113,7 @@
           <p:cNvPr id="82" name="">
             <a:extLst xmlns:a="http://schemas.openxmlformats.org/drawingml/2006/main">
               <a:ext uri="{FF2B5EF4-FFF2-40B4-BE49-F238E27FC236}">
-                <a16:creationId xmlns:a16="http://schemas.microsoft.com/office/drawing/2014/main" id="{686F336C-C54A-47F9-8481-42DF5B891393}"/>
+                <a16:creationId xmlns:a16="http://schemas.microsoft.com/office/drawing/2014/main" id="{D12222B9-BA84-4E58-AD84-756E4E2DF790}"/>
               </a:ext>
             </a:extLst>
           </p:cNvPr>
@@ -5147,7 +5147,7 @@
           <p:cNvPr id="83" name="">
             <a:extLst xmlns:a="http://schemas.openxmlformats.org/drawingml/2006/main">
               <a:ext uri="{FF2B5EF4-FFF2-40B4-BE49-F238E27FC236}">
-                <a16:creationId xmlns:a16="http://schemas.microsoft.com/office/drawing/2014/main" id="{E630886B-3C88-48D9-834B-7EA2091695A0}"/>
+                <a16:creationId xmlns:a16="http://schemas.microsoft.com/office/drawing/2014/main" id="{4EAE3CDA-816C-4D86-89D6-151FB6040CDF}"/>
               </a:ext>
             </a:extLst>
           </p:cNvPr>
@@ -5181,7 +5181,7 @@
           <p:cNvPr id="84" name="">
             <a:extLst xmlns:a="http://schemas.openxmlformats.org/drawingml/2006/main">
               <a:ext uri="{FF2B5EF4-FFF2-40B4-BE49-F238E27FC236}">
-                <a16:creationId xmlns:a16="http://schemas.microsoft.com/office/drawing/2014/main" id="{6B3E07DC-124A-4ACF-A67D-0ABBC0529125}"/>
+                <a16:creationId xmlns:a16="http://schemas.microsoft.com/office/drawing/2014/main" id="{D0FEFE6D-58FB-433D-99C4-8A9694EF7E96}"/>
               </a:ext>
             </a:extLst>
           </p:cNvPr>
@@ -5215,7 +5215,7 @@
           <p:cNvPr id="85" name="">
             <a:extLst xmlns:a="http://schemas.openxmlformats.org/drawingml/2006/main">
               <a:ext uri="{FF2B5EF4-FFF2-40B4-BE49-F238E27FC236}">
-                <a16:creationId xmlns:a16="http://schemas.microsoft.com/office/drawing/2014/main" id="{5947CF18-0A74-4158-AAE7-399149ADBF24}"/>
+                <a16:creationId xmlns:a16="http://schemas.microsoft.com/office/drawing/2014/main" id="{C8044F71-B78D-48EA-86A1-92DE62F010E1}"/>
               </a:ext>
             </a:extLst>
           </p:cNvPr>
@@ -5249,7 +5249,7 @@
           <p:cNvPr id="86" name="">
             <a:extLst xmlns:a="http://schemas.openxmlformats.org/drawingml/2006/main">
               <a:ext uri="{FF2B5EF4-FFF2-40B4-BE49-F238E27FC236}">
-                <a16:creationId xmlns:a16="http://schemas.microsoft.com/office/drawing/2014/main" id="{B7B21D53-346D-447F-AD44-56CA0AFA3A48}"/>
+                <a16:creationId xmlns:a16="http://schemas.microsoft.com/office/drawing/2014/main" id="{8E510E26-272B-42C7-9B62-C11EDDF998BF}"/>
               </a:ext>
             </a:extLst>
           </p:cNvPr>
@@ -5283,7 +5283,7 @@
           <p:cNvPr id="87" name="">
             <a:extLst xmlns:a="http://schemas.openxmlformats.org/drawingml/2006/main">
               <a:ext uri="{FF2B5EF4-FFF2-40B4-BE49-F238E27FC236}">
-                <a16:creationId xmlns:a16="http://schemas.microsoft.com/office/drawing/2014/main" id="{4D6F9D32-7A8A-4680-AC17-DC27746B2B7D}"/>
+                <a16:creationId xmlns:a16="http://schemas.microsoft.com/office/drawing/2014/main" id="{FFB21433-BFDF-4F55-8DAA-E0CB7D92521E}"/>
               </a:ext>
             </a:extLst>
           </p:cNvPr>
@@ -5317,7 +5317,7 @@
           <p:cNvPr id="88" name="">
             <a:extLst xmlns:a="http://schemas.openxmlformats.org/drawingml/2006/main">
               <a:ext uri="{FF2B5EF4-FFF2-40B4-BE49-F238E27FC236}">
-                <a16:creationId xmlns:a16="http://schemas.microsoft.com/office/drawing/2014/main" id="{D395AAA1-5E10-4CF2-835D-69A3F0C876CB}"/>
+                <a16:creationId xmlns:a16="http://schemas.microsoft.com/office/drawing/2014/main" id="{4CDE37C6-B7EB-4FB2-AAFA-D5BA132A61C4}"/>
               </a:ext>
             </a:extLst>
           </p:cNvPr>
@@ -5351,7 +5351,7 @@
           <p:cNvPr id="89" name="">
             <a:extLst xmlns:a="http://schemas.openxmlformats.org/drawingml/2006/main">
               <a:ext uri="{FF2B5EF4-FFF2-40B4-BE49-F238E27FC236}">
-                <a16:creationId xmlns:a16="http://schemas.microsoft.com/office/drawing/2014/main" id="{23D5AB63-E68F-4D62-BEF1-D6628701F44C}"/>
+                <a16:creationId xmlns:a16="http://schemas.microsoft.com/office/drawing/2014/main" id="{2EA1D609-9E30-4D02-8675-01A4CA762A8A}"/>
               </a:ext>
             </a:extLst>
           </p:cNvPr>
@@ -5385,7 +5385,7 @@
           <p:cNvPr id="90" name="">
             <a:extLst xmlns:a="http://schemas.openxmlformats.org/drawingml/2006/main">
               <a:ext uri="{FF2B5EF4-FFF2-40B4-BE49-F238E27FC236}">
-                <a16:creationId xmlns:a16="http://schemas.microsoft.com/office/drawing/2014/main" id="{646E9301-886B-439A-938B-297D49636AC1}"/>
+                <a16:creationId xmlns:a16="http://schemas.microsoft.com/office/drawing/2014/main" id="{3301E1C1-1486-4B72-8F1A-5A62B6D46B24}"/>
               </a:ext>
             </a:extLst>
           </p:cNvPr>
@@ -5419,7 +5419,7 @@
           <p:cNvPr id="91" name="">
             <a:extLst xmlns:a="http://schemas.openxmlformats.org/drawingml/2006/main">
               <a:ext uri="{FF2B5EF4-FFF2-40B4-BE49-F238E27FC236}">
-                <a16:creationId xmlns:a16="http://schemas.microsoft.com/office/drawing/2014/main" id="{6C441074-50E7-430F-ABEA-8DC458E7DE46}"/>
+                <a16:creationId xmlns:a16="http://schemas.microsoft.com/office/drawing/2014/main" id="{369C1C3E-A6C0-4E28-9563-61C4B693DED0}"/>
               </a:ext>
             </a:extLst>
           </p:cNvPr>
@@ -5453,7 +5453,7 @@
           <p:cNvPr id="92" name="">
             <a:extLst xmlns:a="http://schemas.openxmlformats.org/drawingml/2006/main">
               <a:ext uri="{FF2B5EF4-FFF2-40B4-BE49-F238E27FC236}">
-                <a16:creationId xmlns:a16="http://schemas.microsoft.com/office/drawing/2014/main" id="{1E24916B-1B38-4C91-AF2D-5E35C0D1F1DB}"/>
+                <a16:creationId xmlns:a16="http://schemas.microsoft.com/office/drawing/2014/main" id="{3BA3928F-D0B4-4983-8CAC-3EB87EE7FEC1}"/>
               </a:ext>
             </a:extLst>
           </p:cNvPr>
@@ -5487,7 +5487,7 @@
           <p:cNvPr id="93" name="">
             <a:extLst xmlns:a="http://schemas.openxmlformats.org/drawingml/2006/main">
               <a:ext uri="{FF2B5EF4-FFF2-40B4-BE49-F238E27FC236}">
-                <a16:creationId xmlns:a16="http://schemas.microsoft.com/office/drawing/2014/main" id="{ADB3069E-7FC6-43FE-B97F-5E5A37CDFAA5}"/>
+                <a16:creationId xmlns:a16="http://schemas.microsoft.com/office/drawing/2014/main" id="{31F30BF5-DECF-4A2A-83A9-05685DC1E975}"/>
               </a:ext>
             </a:extLst>
           </p:cNvPr>
@@ -5521,7 +5521,7 @@
           <p:cNvPr id="94" name="">
             <a:extLst xmlns:a="http://schemas.openxmlformats.org/drawingml/2006/main">
               <a:ext uri="{FF2B5EF4-FFF2-40B4-BE49-F238E27FC236}">
-                <a16:creationId xmlns:a16="http://schemas.microsoft.com/office/drawing/2014/main" id="{DA4BE8A6-C458-4C4B-A86A-935F15C6CC55}"/>
+                <a16:creationId xmlns:a16="http://schemas.microsoft.com/office/drawing/2014/main" id="{F1599CE3-5F3F-4ACA-A2E5-E9D28EC991E6}"/>
               </a:ext>
             </a:extLst>
           </p:cNvPr>
@@ -5555,7 +5555,7 @@
           <p:cNvPr id="95" name="">
             <a:extLst xmlns:a="http://schemas.openxmlformats.org/drawingml/2006/main">
               <a:ext uri="{FF2B5EF4-FFF2-40B4-BE49-F238E27FC236}">
-                <a16:creationId xmlns:a16="http://schemas.microsoft.com/office/drawing/2014/main" id="{75E8520D-072F-45C4-B1C2-77FF6F2BF632}"/>
+                <a16:creationId xmlns:a16="http://schemas.microsoft.com/office/drawing/2014/main" id="{A948DFE4-54D1-47C0-A928-47326EAF0B3B}"/>
               </a:ext>
             </a:extLst>
           </p:cNvPr>
@@ -5589,7 +5589,7 @@
           <p:cNvPr id="96" name="">
             <a:extLst xmlns:a="http://schemas.openxmlformats.org/drawingml/2006/main">
               <a:ext uri="{FF2B5EF4-FFF2-40B4-BE49-F238E27FC236}">
-                <a16:creationId xmlns:a16="http://schemas.microsoft.com/office/drawing/2014/main" id="{F16EB392-5727-4882-B004-18CC6474781D}"/>
+                <a16:creationId xmlns:a16="http://schemas.microsoft.com/office/drawing/2014/main" id="{77BB0E95-F080-4E78-950D-8732EBFA059E}"/>
               </a:ext>
             </a:extLst>
           </p:cNvPr>
@@ -5623,7 +5623,7 @@
           <p:cNvPr id="97" name="">
             <a:extLst xmlns:a="http://schemas.openxmlformats.org/drawingml/2006/main">
               <a:ext uri="{FF2B5EF4-FFF2-40B4-BE49-F238E27FC236}">
-                <a16:creationId xmlns:a16="http://schemas.microsoft.com/office/drawing/2014/main" id="{8E375C43-BF55-43B3-A0E5-D9D7AD3F32BB}"/>
+                <a16:creationId xmlns:a16="http://schemas.microsoft.com/office/drawing/2014/main" id="{2A5C2125-D24A-490A-AB3A-FB5ABE805CA5}"/>
               </a:ext>
             </a:extLst>
           </p:cNvPr>
@@ -5657,7 +5657,7 @@
           <p:cNvPr id="98" name="">
             <a:extLst xmlns:a="http://schemas.openxmlformats.org/drawingml/2006/main">
               <a:ext uri="{FF2B5EF4-FFF2-40B4-BE49-F238E27FC236}">
-                <a16:creationId xmlns:a16="http://schemas.microsoft.com/office/drawing/2014/main" id="{F8E72EF1-4086-4E8B-ABAA-3D27019498A9}"/>
+                <a16:creationId xmlns:a16="http://schemas.microsoft.com/office/drawing/2014/main" id="{5406CC5A-2C92-4F37-9CFD-BEB9A65F319B}"/>
               </a:ext>
             </a:extLst>
           </p:cNvPr>
@@ -5691,7 +5691,7 @@
           <p:cNvPr id="99" name="">
             <a:extLst xmlns:a="http://schemas.openxmlformats.org/drawingml/2006/main">
               <a:ext uri="{FF2B5EF4-FFF2-40B4-BE49-F238E27FC236}">
-                <a16:creationId xmlns:a16="http://schemas.microsoft.com/office/drawing/2014/main" id="{DDE52B24-0D02-4299-A531-6A912DF3A898}"/>
+                <a16:creationId xmlns:a16="http://schemas.microsoft.com/office/drawing/2014/main" id="{ECEA6C5A-7CE6-4DE8-96B3-6470DB328BFC}"/>
               </a:ext>
             </a:extLst>
           </p:cNvPr>
@@ -5725,7 +5725,7 @@
           <p:cNvPr id="100" name="">
             <a:extLst xmlns:a="http://schemas.openxmlformats.org/drawingml/2006/main">
               <a:ext uri="{FF2B5EF4-FFF2-40B4-BE49-F238E27FC236}">
-                <a16:creationId xmlns:a16="http://schemas.microsoft.com/office/drawing/2014/main" id="{1024582D-91F9-448F-B642-B6A17D1A9AC6}"/>
+                <a16:creationId xmlns:a16="http://schemas.microsoft.com/office/drawing/2014/main" id="{02EC6AF8-3627-430E-8B5C-6809744AB645}"/>
               </a:ext>
             </a:extLst>
           </p:cNvPr>
@@ -5757,7 +5757,7 @@
           <p:cNvPr id="101" name="">
             <a:extLst xmlns:a="http://schemas.openxmlformats.org/drawingml/2006/main">
               <a:ext uri="{FF2B5EF4-FFF2-40B4-BE49-F238E27FC236}">
-                <a16:creationId xmlns:a16="http://schemas.microsoft.com/office/drawing/2014/main" id="{74B33431-ADD5-4876-83CF-5BD97718D73E}"/>
+                <a16:creationId xmlns:a16="http://schemas.microsoft.com/office/drawing/2014/main" id="{505A6A0B-6478-47C0-A60B-45EDFA397403}"/>
               </a:ext>
             </a:extLst>
           </p:cNvPr>
@@ -5791,7 +5791,7 @@
           <p:cNvPr id="102" name="">
             <a:extLst xmlns:a="http://schemas.openxmlformats.org/drawingml/2006/main">
               <a:ext uri="{FF2B5EF4-FFF2-40B4-BE49-F238E27FC236}">
-                <a16:creationId xmlns:a16="http://schemas.microsoft.com/office/drawing/2014/main" id="{8375F5BC-1D9D-4843-ABFC-AB4264A7A859}"/>
+                <a16:creationId xmlns:a16="http://schemas.microsoft.com/office/drawing/2014/main" id="{9A6731AB-40EC-4355-91B3-63668C002D25}"/>
               </a:ext>
             </a:extLst>
           </p:cNvPr>
@@ -5825,7 +5825,7 @@
           <p:cNvPr id="103" name="">
             <a:extLst xmlns:a="http://schemas.openxmlformats.org/drawingml/2006/main">
               <a:ext uri="{FF2B5EF4-FFF2-40B4-BE49-F238E27FC236}">
-                <a16:creationId xmlns:a16="http://schemas.microsoft.com/office/drawing/2014/main" id="{2DCCE72C-8336-484D-B8D1-B53BCEA6188E}"/>
+                <a16:creationId xmlns:a16="http://schemas.microsoft.com/office/drawing/2014/main" id="{F25FBF02-CA5F-44CE-AC5F-9B0DAE957A07}"/>
               </a:ext>
             </a:extLst>
           </p:cNvPr>
@@ -5859,7 +5859,7 @@
           <p:cNvPr id="104" name="">
             <a:extLst xmlns:a="http://schemas.openxmlformats.org/drawingml/2006/main">
               <a:ext uri="{FF2B5EF4-FFF2-40B4-BE49-F238E27FC236}">
-                <a16:creationId xmlns:a16="http://schemas.microsoft.com/office/drawing/2014/main" id="{C8E86DCF-E9D4-4DB9-B289-1C7DF914B93E}"/>
+                <a16:creationId xmlns:a16="http://schemas.microsoft.com/office/drawing/2014/main" id="{D3C79B0F-96D6-46D0-9557-C32D89811356}"/>
               </a:ext>
             </a:extLst>
           </p:cNvPr>
@@ -5893,7 +5893,7 @@
           <p:cNvPr id="105" name="">
             <a:extLst xmlns:a="http://schemas.openxmlformats.org/drawingml/2006/main">
               <a:ext uri="{FF2B5EF4-FFF2-40B4-BE49-F238E27FC236}">
-                <a16:creationId xmlns:a16="http://schemas.microsoft.com/office/drawing/2014/main" id="{BFFC6BE3-9911-4C6C-952C-FC7FB5B1F4CB}"/>
+                <a16:creationId xmlns:a16="http://schemas.microsoft.com/office/drawing/2014/main" id="{C19DFEF7-92F8-4ACA-9664-27378C720AFE}"/>
               </a:ext>
             </a:extLst>
           </p:cNvPr>
@@ -5927,7 +5927,7 @@
           <p:cNvPr id="106" name="">
             <a:extLst xmlns:a="http://schemas.openxmlformats.org/drawingml/2006/main">
               <a:ext uri="{FF2B5EF4-FFF2-40B4-BE49-F238E27FC236}">
-                <a16:creationId xmlns:a16="http://schemas.microsoft.com/office/drawing/2014/main" id="{1B3A242A-D4A0-4055-BE63-54267CF826F0}"/>
+                <a16:creationId xmlns:a16="http://schemas.microsoft.com/office/drawing/2014/main" id="{1916A460-49FB-4B79-A220-A6C55AD739C3}"/>
               </a:ext>
             </a:extLst>
           </p:cNvPr>
@@ -5961,7 +5961,7 @@
           <p:cNvPr id="107" name="">
             <a:extLst xmlns:a="http://schemas.openxmlformats.org/drawingml/2006/main">
               <a:ext uri="{FF2B5EF4-FFF2-40B4-BE49-F238E27FC236}">
-                <a16:creationId xmlns:a16="http://schemas.microsoft.com/office/drawing/2014/main" id="{A06E75F0-7506-41CC-B1CF-F849DC5106C0}"/>
+                <a16:creationId xmlns:a16="http://schemas.microsoft.com/office/drawing/2014/main" id="{C88AF906-F69E-41C5-A6CC-21F2F79CC363}"/>
               </a:ext>
             </a:extLst>
           </p:cNvPr>
@@ -5995,7 +5995,7 @@
           <p:cNvPr id="108" name="">
             <a:extLst xmlns:a="http://schemas.openxmlformats.org/drawingml/2006/main">
               <a:ext uri="{FF2B5EF4-FFF2-40B4-BE49-F238E27FC236}">
-                <a16:creationId xmlns:a16="http://schemas.microsoft.com/office/drawing/2014/main" id="{5B92CDC7-9052-480A-ACDE-AF7912B6C3F5}"/>
+                <a16:creationId xmlns:a16="http://schemas.microsoft.com/office/drawing/2014/main" id="{0B5DD9B3-AB71-4EB7-AB2B-096287C03E14}"/>
               </a:ext>
             </a:extLst>
           </p:cNvPr>
@@ -6029,7 +6029,7 @@
           <p:cNvPr id="109" name="">
             <a:extLst xmlns:a="http://schemas.openxmlformats.org/drawingml/2006/main">
               <a:ext uri="{FF2B5EF4-FFF2-40B4-BE49-F238E27FC236}">
-                <a16:creationId xmlns:a16="http://schemas.microsoft.com/office/drawing/2014/main" id="{A28B2001-39B2-41C0-9A27-348609D1AD6E}"/>
+                <a16:creationId xmlns:a16="http://schemas.microsoft.com/office/drawing/2014/main" id="{ACC21638-B272-4C38-9BB2-70B28CC351C5}"/>
               </a:ext>
             </a:extLst>
           </p:cNvPr>
@@ -6063,7 +6063,7 @@
           <p:cNvPr id="110" name="">
             <a:extLst xmlns:a="http://schemas.openxmlformats.org/drawingml/2006/main">
               <a:ext uri="{FF2B5EF4-FFF2-40B4-BE49-F238E27FC236}">
-                <a16:creationId xmlns:a16="http://schemas.microsoft.com/office/drawing/2014/main" id="{95C250A1-8397-4BAF-8C2F-65E6DA8B4906}"/>
+                <a16:creationId xmlns:a16="http://schemas.microsoft.com/office/drawing/2014/main" id="{19BB0BCC-D4E9-4FB4-9D36-A33575C87DE5}"/>
               </a:ext>
             </a:extLst>
           </p:cNvPr>
@@ -6097,7 +6097,7 @@
           <p:cNvPr id="111" name="">
             <a:extLst xmlns:a="http://schemas.openxmlformats.org/drawingml/2006/main">
               <a:ext uri="{FF2B5EF4-FFF2-40B4-BE49-F238E27FC236}">
-                <a16:creationId xmlns:a16="http://schemas.microsoft.com/office/drawing/2014/main" id="{FF5A2BD9-4D92-448D-BD8D-0AF8806BF1EC}"/>
+                <a16:creationId xmlns:a16="http://schemas.microsoft.com/office/drawing/2014/main" id="{7481A0AE-2624-4CB8-89FA-E6EEE43501FF}"/>
               </a:ext>
             </a:extLst>
           </p:cNvPr>
@@ -6131,7 +6131,7 @@
           <p:cNvPr id="112" name="">
             <a:extLst xmlns:a="http://schemas.openxmlformats.org/drawingml/2006/main">
               <a:ext uri="{FF2B5EF4-FFF2-40B4-BE49-F238E27FC236}">
-                <a16:creationId xmlns:a16="http://schemas.microsoft.com/office/drawing/2014/main" id="{2FD0ECD2-540B-4575-ACC9-3EA0AAB29BED}"/>
+                <a16:creationId xmlns:a16="http://schemas.microsoft.com/office/drawing/2014/main" id="{8CCEA27A-89D3-4368-8088-1CA8D9960CF6}"/>
               </a:ext>
             </a:extLst>
           </p:cNvPr>
@@ -6165,7 +6165,7 @@
           <p:cNvPr id="113" name="">
             <a:extLst xmlns:a="http://schemas.openxmlformats.org/drawingml/2006/main">
               <a:ext uri="{FF2B5EF4-FFF2-40B4-BE49-F238E27FC236}">
-                <a16:creationId xmlns:a16="http://schemas.microsoft.com/office/drawing/2014/main" id="{5E957B8A-80E8-4EE5-8178-4D632D935B79}"/>
+                <a16:creationId xmlns:a16="http://schemas.microsoft.com/office/drawing/2014/main" id="{ACFCD77C-FA62-48CC-A53C-FABB7133F44B}"/>
               </a:ext>
             </a:extLst>
           </p:cNvPr>
@@ -6199,7 +6199,7 @@
           <p:cNvPr id="114" name="">
             <a:extLst xmlns:a="http://schemas.openxmlformats.org/drawingml/2006/main">
               <a:ext uri="{FF2B5EF4-FFF2-40B4-BE49-F238E27FC236}">
-                <a16:creationId xmlns:a16="http://schemas.microsoft.com/office/drawing/2014/main" id="{37181BF4-6224-43B9-B1C0-FB80DCE79277}"/>
+                <a16:creationId xmlns:a16="http://schemas.microsoft.com/office/drawing/2014/main" id="{D56672AB-E13F-4A93-87EC-8BD9B087F3B6}"/>
               </a:ext>
             </a:extLst>
           </p:cNvPr>
@@ -6262,7 +6262,7 @@
           <p:cNvPr id="115" name="">
             <a:extLst xmlns:a="http://schemas.openxmlformats.org/drawingml/2006/main">
               <a:ext uri="{FF2B5EF4-FFF2-40B4-BE49-F238E27FC236}">
-                <a16:creationId xmlns:a16="http://schemas.microsoft.com/office/drawing/2014/main" id="{57854300-DEED-447E-9DAD-312505C3B17F}"/>
+                <a16:creationId xmlns:a16="http://schemas.microsoft.com/office/drawing/2014/main" id="{062CC726-6D97-47B8-8C5B-FC464FDF021E}"/>
               </a:ext>
             </a:extLst>
           </p:cNvPr>
@@ -6294,7 +6294,7 @@
           <p:cNvPr id="116" name="">
             <a:extLst xmlns:a="http://schemas.openxmlformats.org/drawingml/2006/main">
               <a:ext uri="{FF2B5EF4-FFF2-40B4-BE49-F238E27FC236}">
-                <a16:creationId xmlns:a16="http://schemas.microsoft.com/office/drawing/2014/main" id="{30A659E7-40EA-4CD3-BFFB-473E0DC0A30B}"/>
+                <a16:creationId xmlns:a16="http://schemas.microsoft.com/office/drawing/2014/main" id="{1CA2207D-472F-413A-98F4-5721AB88ADA1}"/>
               </a:ext>
             </a:extLst>
           </p:cNvPr>
@@ -6326,7 +6326,7 @@
           <p:cNvPr id="117" name="">
             <a:extLst xmlns:a="http://schemas.openxmlformats.org/drawingml/2006/main">
               <a:ext uri="{FF2B5EF4-FFF2-40B4-BE49-F238E27FC236}">
-                <a16:creationId xmlns:a16="http://schemas.microsoft.com/office/drawing/2014/main" id="{22BA769A-5D70-44B3-A509-CB847E8AF766}"/>
+                <a16:creationId xmlns:a16="http://schemas.microsoft.com/office/drawing/2014/main" id="{9CE356FF-7908-4C53-AC34-4A6236AF064E}"/>
               </a:ext>
             </a:extLst>
           </p:cNvPr>
@@ -6389,7 +6389,7 @@
           <p:cNvPr id="118" name="">
             <a:extLst xmlns:a="http://schemas.openxmlformats.org/drawingml/2006/main">
               <a:ext uri="{FF2B5EF4-FFF2-40B4-BE49-F238E27FC236}">
-                <a16:creationId xmlns:a16="http://schemas.microsoft.com/office/drawing/2014/main" id="{401AA6F7-4AC5-40F6-9E3F-4A839544E4E0}"/>
+                <a16:creationId xmlns:a16="http://schemas.microsoft.com/office/drawing/2014/main" id="{1DF833CE-DADD-4E7A-AC27-C30630535288}"/>
               </a:ext>
             </a:extLst>
           </p:cNvPr>
@@ -6421,7 +6421,7 @@
           <p:cNvPr id="119" name="">
             <a:extLst xmlns:a="http://schemas.openxmlformats.org/drawingml/2006/main">
               <a:ext uri="{FF2B5EF4-FFF2-40B4-BE49-F238E27FC236}">
-                <a16:creationId xmlns:a16="http://schemas.microsoft.com/office/drawing/2014/main" id="{17C9A6C5-0833-43F6-8D6F-0447AC9B3DE0}"/>
+                <a16:creationId xmlns:a16="http://schemas.microsoft.com/office/drawing/2014/main" id="{2C9509E1-D782-4DE0-9AB1-ABA7D855AEE8}"/>
               </a:ext>
             </a:extLst>
           </p:cNvPr>
@@ -6453,7 +6453,7 @@
           <p:cNvPr id="120" name="">
             <a:extLst xmlns:a="http://schemas.openxmlformats.org/drawingml/2006/main">
               <a:ext uri="{FF2B5EF4-FFF2-40B4-BE49-F238E27FC236}">
-                <a16:creationId xmlns:a16="http://schemas.microsoft.com/office/drawing/2014/main" id="{A4F22F63-3B68-497E-BF4F-6AB36BEB521C}"/>
+                <a16:creationId xmlns:a16="http://schemas.microsoft.com/office/drawing/2014/main" id="{CE774A4C-84B4-4475-B413-A5D8694A291B}"/>
               </a:ext>
             </a:extLst>
           </p:cNvPr>
@@ -6516,7 +6516,7 @@
           <p:cNvPr id="121" name="">
             <a:extLst xmlns:a="http://schemas.openxmlformats.org/drawingml/2006/main">
               <a:ext uri="{FF2B5EF4-FFF2-40B4-BE49-F238E27FC236}">
-                <a16:creationId xmlns:a16="http://schemas.microsoft.com/office/drawing/2014/main" id="{7E21BE7F-58FF-41F5-8B6E-B7B89EEE4685}"/>
+                <a16:creationId xmlns:a16="http://schemas.microsoft.com/office/drawing/2014/main" id="{BC16A8ED-1991-404E-8F63-DEB87D437C44}"/>
               </a:ext>
             </a:extLst>
           </p:cNvPr>
@@ -6548,7 +6548,7 @@
           <p:cNvPr id="122" name="">
             <a:extLst xmlns:a="http://schemas.openxmlformats.org/drawingml/2006/main">
               <a:ext uri="{FF2B5EF4-FFF2-40B4-BE49-F238E27FC236}">
-                <a16:creationId xmlns:a16="http://schemas.microsoft.com/office/drawing/2014/main" id="{E0CD0E48-C8F0-4B4F-BE8D-E3AEF0D8892A}"/>
+                <a16:creationId xmlns:a16="http://schemas.microsoft.com/office/drawing/2014/main" id="{38680AF2-CB7F-461E-9122-444095D93EC9}"/>
               </a:ext>
             </a:extLst>
           </p:cNvPr>
@@ -6580,7 +6580,7 @@
           <p:cNvPr id="123" name="">
             <a:extLst xmlns:a="http://schemas.openxmlformats.org/drawingml/2006/main">
               <a:ext uri="{FF2B5EF4-FFF2-40B4-BE49-F238E27FC236}">
-                <a16:creationId xmlns:a16="http://schemas.microsoft.com/office/drawing/2014/main" id="{E0BC1AFC-A827-4136-BB5A-9E02923E0A0A}"/>
+                <a16:creationId xmlns:a16="http://schemas.microsoft.com/office/drawing/2014/main" id="{C940FC6D-21BC-4BE3-9865-E27A2C978D63}"/>
               </a:ext>
             </a:extLst>
           </p:cNvPr>
@@ -6643,7 +6643,7 @@
           <p:cNvPr id="124" name="">
             <a:extLst xmlns:a="http://schemas.openxmlformats.org/drawingml/2006/main">
               <a:ext uri="{FF2B5EF4-FFF2-40B4-BE49-F238E27FC236}">
-                <a16:creationId xmlns:a16="http://schemas.microsoft.com/office/drawing/2014/main" id="{EB724EB0-E899-4DB6-9D91-658CF9E6421F}"/>
+                <a16:creationId xmlns:a16="http://schemas.microsoft.com/office/drawing/2014/main" id="{9271C0F0-A766-481D-88CF-0B118B859C50}"/>
               </a:ext>
             </a:extLst>
           </p:cNvPr>
@@ -6675,7 +6675,7 @@
           <p:cNvPr id="125" name="">
             <a:extLst xmlns:a="http://schemas.openxmlformats.org/drawingml/2006/main">
               <a:ext uri="{FF2B5EF4-FFF2-40B4-BE49-F238E27FC236}">
-                <a16:creationId xmlns:a16="http://schemas.microsoft.com/office/drawing/2014/main" id="{F15C74D9-ACD1-49A3-9892-3A1F1773A7A9}"/>
+                <a16:creationId xmlns:a16="http://schemas.microsoft.com/office/drawing/2014/main" id="{DF270FD8-8119-4225-8F1B-2D5B34964611}"/>
               </a:ext>
             </a:extLst>
           </p:cNvPr>
@@ -6707,7 +6707,7 @@
           <p:cNvPr id="126" name="">
             <a:extLst xmlns:a="http://schemas.openxmlformats.org/drawingml/2006/main">
               <a:ext uri="{FF2B5EF4-FFF2-40B4-BE49-F238E27FC236}">
-                <a16:creationId xmlns:a16="http://schemas.microsoft.com/office/drawing/2014/main" id="{01538746-28F5-4CCB-845E-BC840216C582}"/>
+                <a16:creationId xmlns:a16="http://schemas.microsoft.com/office/drawing/2014/main" id="{C74942AA-14C2-4B44-8AF3-C214B156C75F}"/>
               </a:ext>
             </a:extLst>
           </p:cNvPr>
@@ -6770,7 +6770,7 @@
           <p:cNvPr id="127" name="">
             <a:extLst xmlns:a="http://schemas.openxmlformats.org/drawingml/2006/main">
               <a:ext uri="{FF2B5EF4-FFF2-40B4-BE49-F238E27FC236}">
-                <a16:creationId xmlns:a16="http://schemas.microsoft.com/office/drawing/2014/main" id="{EC808D9F-BD07-47E9-AC46-A8A11CEE2A32}"/>
+                <a16:creationId xmlns:a16="http://schemas.microsoft.com/office/drawing/2014/main" id="{5ADF5ADE-A429-4FB6-9311-6EB0A96C2852}"/>
               </a:ext>
             </a:extLst>
           </p:cNvPr>
@@ -6802,7 +6802,7 @@
           <p:cNvPr id="128" name="">
             <a:extLst xmlns:a="http://schemas.openxmlformats.org/drawingml/2006/main">
               <a:ext uri="{FF2B5EF4-FFF2-40B4-BE49-F238E27FC236}">
-                <a16:creationId xmlns:a16="http://schemas.microsoft.com/office/drawing/2014/main" id="{E828E894-7E9A-4B1D-BCD5-633B8C47406F}"/>
+                <a16:creationId xmlns:a16="http://schemas.microsoft.com/office/drawing/2014/main" id="{EB41F193-7B2D-48EA-AC0B-4E60FA9EA425}"/>
               </a:ext>
             </a:extLst>
           </p:cNvPr>
@@ -6865,7 +6865,7 @@
           <p:cNvPr id="129" name="">
             <a:extLst xmlns:a="http://schemas.openxmlformats.org/drawingml/2006/main">
               <a:ext uri="{FF2B5EF4-FFF2-40B4-BE49-F238E27FC236}">
-                <a16:creationId xmlns:a16="http://schemas.microsoft.com/office/drawing/2014/main" id="{0D765698-8B21-47F4-901E-E5D797BE23FC}"/>
+                <a16:creationId xmlns:a16="http://schemas.microsoft.com/office/drawing/2014/main" id="{20344787-43B0-4A8F-9389-8C46747A5A14}"/>
               </a:ext>
             </a:extLst>
           </p:cNvPr>
@@ -6897,7 +6897,7 @@
           <p:cNvPr id="130" name="">
             <a:extLst xmlns:a="http://schemas.openxmlformats.org/drawingml/2006/main">
               <a:ext uri="{FF2B5EF4-FFF2-40B4-BE49-F238E27FC236}">
-                <a16:creationId xmlns:a16="http://schemas.microsoft.com/office/drawing/2014/main" id="{6BEE59BD-0397-4384-9CAA-D3B0DCB091B9}"/>
+                <a16:creationId xmlns:a16="http://schemas.microsoft.com/office/drawing/2014/main" id="{20C6F088-20DD-43FF-BC90-DF745B2041DF}"/>
               </a:ext>
             </a:extLst>
           </p:cNvPr>
@@ -6960,7 +6960,7 @@
           <p:cNvPr id="131" name="">
             <a:extLst xmlns:a="http://schemas.openxmlformats.org/drawingml/2006/main">
               <a:ext uri="{FF2B5EF4-FFF2-40B4-BE49-F238E27FC236}">
-                <a16:creationId xmlns:a16="http://schemas.microsoft.com/office/drawing/2014/main" id="{01F29113-84C6-4571-BDB6-2E0C3541B442}"/>
+                <a16:creationId xmlns:a16="http://schemas.microsoft.com/office/drawing/2014/main" id="{52DA8180-EBD8-4D3B-B774-FBFA7DC6C428}"/>
               </a:ext>
             </a:extLst>
           </p:cNvPr>
@@ -6992,7 +6992,7 @@
           <p:cNvPr id="132" name="">
             <a:extLst xmlns:a="http://schemas.openxmlformats.org/drawingml/2006/main">
               <a:ext uri="{FF2B5EF4-FFF2-40B4-BE49-F238E27FC236}">
-                <a16:creationId xmlns:a16="http://schemas.microsoft.com/office/drawing/2014/main" id="{1056A67C-05B2-40FE-94B5-DF0A5C752A1F}"/>
+                <a16:creationId xmlns:a16="http://schemas.microsoft.com/office/drawing/2014/main" id="{790D75B4-3043-4E89-B419-1911C67E4BD0}"/>
               </a:ext>
             </a:extLst>
           </p:cNvPr>
@@ -7055,7 +7055,7 @@
           <p:cNvPr id="133" name="">
             <a:extLst xmlns:a="http://schemas.openxmlformats.org/drawingml/2006/main">
               <a:ext uri="{FF2B5EF4-FFF2-40B4-BE49-F238E27FC236}">
-                <a16:creationId xmlns:a16="http://schemas.microsoft.com/office/drawing/2014/main" id="{381657C3-E278-422F-A2E9-ED42134ABD1B}"/>
+                <a16:creationId xmlns:a16="http://schemas.microsoft.com/office/drawing/2014/main" id="{5FC06E05-D6CE-46BE-9768-030C74117BE1}"/>
               </a:ext>
             </a:extLst>
           </p:cNvPr>
@@ -7116,7 +7116,7 @@
     </p:spTree>
     <p:extLst>
       <p:ext uri="{BB962C8B-B14F-4D97-AF65-F5344CB8AC3E}">
-        <p14:creationId xmlns:p14="http://schemas.microsoft.com/office/powerpoint/2010/main" val="40265662"/>
+        <p14:creationId xmlns:p14="http://schemas.microsoft.com/office/powerpoint/2010/main" val="970556176"/>
       </p:ext>
     </p:extLst>
   </p:cSld>
@@ -7147,7 +7147,7 @@
           <p:cNvPr id="1" name="">
             <a:extLst xmlns:a="http://schemas.openxmlformats.org/drawingml/2006/main">
               <a:ext uri="{FF2B5EF4-FFF2-40B4-BE49-F238E27FC236}">
-                <a16:creationId xmlns:a16="http://schemas.microsoft.com/office/drawing/2014/main" id="{C82D00C0-825C-432D-B7C8-42338A6AD800}"/>
+                <a16:creationId xmlns:a16="http://schemas.microsoft.com/office/drawing/2014/main" id="{4E1A2612-8F21-4883-8A8B-70E66556A57E}"/>
               </a:ext>
             </a:extLst>
           </p:cNvPr>
@@ -7210,7 +7210,7 @@
           <p:cNvPr id="2" name="">
             <a:extLst xmlns:a="http://schemas.openxmlformats.org/drawingml/2006/main">
               <a:ext uri="{FF2B5EF4-FFF2-40B4-BE49-F238E27FC236}">
-                <a16:creationId xmlns:a16="http://schemas.microsoft.com/office/drawing/2014/main" id="{2406EF05-D790-4AA1-94A2-A7A5C8D17CAC}"/>
+                <a16:creationId xmlns:a16="http://schemas.microsoft.com/office/drawing/2014/main" id="{8D0A79C7-F133-44A8-9451-B9E2A2C1D481}"/>
               </a:ext>
             </a:extLst>
           </p:cNvPr>
@@ -7277,7 +7277,7 @@
           <p:cNvPr id="3" name="">
             <a:extLst xmlns:a="http://schemas.openxmlformats.org/drawingml/2006/main">
               <a:ext uri="{FF2B5EF4-FFF2-40B4-BE49-F238E27FC236}">
-                <a16:creationId xmlns:a16="http://schemas.microsoft.com/office/drawing/2014/main" id="{B38B1ACB-C4A8-44C9-9BCD-9086BB214459}"/>
+                <a16:creationId xmlns:a16="http://schemas.microsoft.com/office/drawing/2014/main" id="{CBC94086-CB33-4804-BB20-173A3FFD38CA}"/>
               </a:ext>
             </a:extLst>
           </p:cNvPr>
@@ -7344,7 +7344,7 @@
           <p:cNvPr id="4" name="">
             <a:extLst xmlns:a="http://schemas.openxmlformats.org/drawingml/2006/main">
               <a:ext uri="{FF2B5EF4-FFF2-40B4-BE49-F238E27FC236}">
-                <a16:creationId xmlns:a16="http://schemas.microsoft.com/office/drawing/2014/main" id="{B204AEC4-250E-46EB-A20E-1FA9694A4A8D}"/>
+                <a16:creationId xmlns:a16="http://schemas.microsoft.com/office/drawing/2014/main" id="{96E6CC76-0A73-4079-B3C0-F01B191444D1}"/>
               </a:ext>
             </a:extLst>
           </p:cNvPr>
@@ -7356,7 +7356,7 @@
         <p:spPr>
           <a:xfrm xmlns:a="http://schemas.openxmlformats.org/drawingml/2006/main">
             <a:off x="685800" y="2457450"/>
-            <a:ext cx="2000250" cy="495300"/>
+            <a:ext cx="1714500" cy="457200"/>
           </a:xfrm>
           <a:prstGeom xmlns:a="http://schemas.openxmlformats.org/drawingml/2006/main" prst="rect">
             <a:avLst/>
@@ -7407,19 +7407,19 @@
           <p:cNvPr id="5" name="">
             <a:extLst xmlns:a="http://schemas.openxmlformats.org/drawingml/2006/main">
               <a:ext uri="{FF2B5EF4-FFF2-40B4-BE49-F238E27FC236}">
-                <a16:creationId xmlns:a16="http://schemas.microsoft.com/office/drawing/2014/main" id="{184DE7AB-EA3B-41F3-A08B-27A564CA97DF}"/>
-              </a:ext>
-            </a:extLst>
-          </p:cNvPr>
-          <p:cNvSpPr>
-            <a:spLocks xmlns:a="http://schemas.openxmlformats.org/drawingml/2006/main" noGrp="1"/>
-          </p:cNvSpPr>
-          <p:nvPr/>
-        </p:nvSpPr>
-        <p:spPr>
-          <a:xfrm xmlns:a="http://schemas.openxmlformats.org/drawingml/2006/main">
-            <a:off x="685800" y="2933700"/>
-            <a:ext cx="2000250" cy="419100"/>
+                <a16:creationId xmlns:a16="http://schemas.microsoft.com/office/drawing/2014/main" id="{BC45047D-06A6-4F97-A046-68C55EBA3634}"/>
+              </a:ext>
+            </a:extLst>
+          </p:cNvPr>
+          <p:cNvSpPr>
+            <a:spLocks xmlns:a="http://schemas.openxmlformats.org/drawingml/2006/main" noGrp="1"/>
+          </p:cNvSpPr>
+          <p:nvPr/>
+        </p:nvSpPr>
+        <p:spPr>
+          <a:xfrm xmlns:a="http://schemas.openxmlformats.org/drawingml/2006/main">
+            <a:off x="685800" y="2990850"/>
+            <a:ext cx="1714500" cy="342900"/>
           </a:xfrm>
           <a:prstGeom xmlns:a="http://schemas.openxmlformats.org/drawingml/2006/main" prst="rect">
             <a:avLst/>
@@ -7474,7 +7474,7 @@
           <p:cNvPr id="6" name="">
             <a:extLst xmlns:a="http://schemas.openxmlformats.org/drawingml/2006/main">
               <a:ext uri="{FF2B5EF4-FFF2-40B4-BE49-F238E27FC236}">
-                <a16:creationId xmlns:a16="http://schemas.microsoft.com/office/drawing/2014/main" id="{18FD7856-4D79-459D-A312-F947C15B0019}"/>
+                <a16:creationId xmlns:a16="http://schemas.microsoft.com/office/drawing/2014/main" id="{63992B78-AF86-4BEF-B060-6CFA4A29666D}"/>
               </a:ext>
             </a:extLst>
           </p:cNvPr>
@@ -7486,7 +7486,7 @@
         <p:spPr>
           <a:xfrm xmlns:a="http://schemas.openxmlformats.org/drawingml/2006/main">
             <a:off x="2781300" y="2457450"/>
-            <a:ext cx="2000250" cy="495300"/>
+            <a:ext cx="1714500" cy="457200"/>
           </a:xfrm>
           <a:prstGeom xmlns:a="http://schemas.openxmlformats.org/drawingml/2006/main" prst="rect">
             <a:avLst/>
@@ -7537,19 +7537,19 @@
           <p:cNvPr id="7" name="">
             <a:extLst xmlns:a="http://schemas.openxmlformats.org/drawingml/2006/main">
               <a:ext uri="{FF2B5EF4-FFF2-40B4-BE49-F238E27FC236}">
-                <a16:creationId xmlns:a16="http://schemas.microsoft.com/office/drawing/2014/main" id="{5739EB67-5C9D-4E35-B467-326ED1911E7B}"/>
-              </a:ext>
-            </a:extLst>
-          </p:cNvPr>
-          <p:cNvSpPr>
-            <a:spLocks xmlns:a="http://schemas.openxmlformats.org/drawingml/2006/main" noGrp="1"/>
-          </p:cNvSpPr>
-          <p:nvPr/>
-        </p:nvSpPr>
-        <p:spPr>
-          <a:xfrm xmlns:a="http://schemas.openxmlformats.org/drawingml/2006/main">
-            <a:off x="2781300" y="2933700"/>
-            <a:ext cx="2000250" cy="419100"/>
+                <a16:creationId xmlns:a16="http://schemas.microsoft.com/office/drawing/2014/main" id="{BB1674F9-0D58-4BA6-9B29-3CBDD324864B}"/>
+              </a:ext>
+            </a:extLst>
+          </p:cNvPr>
+          <p:cNvSpPr>
+            <a:spLocks xmlns:a="http://schemas.openxmlformats.org/drawingml/2006/main" noGrp="1"/>
+          </p:cNvSpPr>
+          <p:nvPr/>
+        </p:nvSpPr>
+        <p:spPr>
+          <a:xfrm xmlns:a="http://schemas.openxmlformats.org/drawingml/2006/main">
+            <a:off x="2781300" y="2990850"/>
+            <a:ext cx="1714500" cy="342900"/>
           </a:xfrm>
           <a:prstGeom xmlns:a="http://schemas.openxmlformats.org/drawingml/2006/main" prst="rect">
             <a:avLst/>
@@ -7604,7 +7604,7 @@
           <p:cNvPr id="8" name="">
             <a:extLst xmlns:a="http://schemas.openxmlformats.org/drawingml/2006/main">
               <a:ext uri="{FF2B5EF4-FFF2-40B4-BE49-F238E27FC236}">
-                <a16:creationId xmlns:a16="http://schemas.microsoft.com/office/drawing/2014/main" id="{B45E81CC-B169-42E4-8C1B-11B23710F433}"/>
+                <a16:creationId xmlns:a16="http://schemas.microsoft.com/office/drawing/2014/main" id="{BF309F47-449E-493D-86F5-646828F4AD91}"/>
               </a:ext>
             </a:extLst>
           </p:cNvPr>
@@ -7616,7 +7616,7 @@
         <p:spPr>
           <a:xfrm xmlns:a="http://schemas.openxmlformats.org/drawingml/2006/main">
             <a:off x="4876800" y="2457450"/>
-            <a:ext cx="2000250" cy="495300"/>
+            <a:ext cx="1714500" cy="457200"/>
           </a:xfrm>
           <a:prstGeom xmlns:a="http://schemas.openxmlformats.org/drawingml/2006/main" prst="rect">
             <a:avLst/>
@@ -7667,19 +7667,19 @@
           <p:cNvPr id="9" name="">
             <a:extLst xmlns:a="http://schemas.openxmlformats.org/drawingml/2006/main">
               <a:ext uri="{FF2B5EF4-FFF2-40B4-BE49-F238E27FC236}">
-                <a16:creationId xmlns:a16="http://schemas.microsoft.com/office/drawing/2014/main" id="{0B2F75F6-F82A-47EA-A803-73D5252456EE}"/>
-              </a:ext>
-            </a:extLst>
-          </p:cNvPr>
-          <p:cNvSpPr>
-            <a:spLocks xmlns:a="http://schemas.openxmlformats.org/drawingml/2006/main" noGrp="1"/>
-          </p:cNvSpPr>
-          <p:nvPr/>
-        </p:nvSpPr>
-        <p:spPr>
-          <a:xfrm xmlns:a="http://schemas.openxmlformats.org/drawingml/2006/main">
-            <a:off x="4876800" y="2933700"/>
-            <a:ext cx="2000250" cy="419100"/>
+                <a16:creationId xmlns:a16="http://schemas.microsoft.com/office/drawing/2014/main" id="{3A29D9EF-7224-4D01-9981-CC79EA386EAD}"/>
+              </a:ext>
+            </a:extLst>
+          </p:cNvPr>
+          <p:cNvSpPr>
+            <a:spLocks xmlns:a="http://schemas.openxmlformats.org/drawingml/2006/main" noGrp="1"/>
+          </p:cNvSpPr>
+          <p:nvPr/>
+        </p:nvSpPr>
+        <p:spPr>
+          <a:xfrm xmlns:a="http://schemas.openxmlformats.org/drawingml/2006/main">
+            <a:off x="4876800" y="2990850"/>
+            <a:ext cx="1714500" cy="342900"/>
           </a:xfrm>
           <a:prstGeom xmlns:a="http://schemas.openxmlformats.org/drawingml/2006/main" prst="rect">
             <a:avLst/>
@@ -7734,7 +7734,7 @@
           <p:cNvPr id="10" name="">
             <a:extLst xmlns:a="http://schemas.openxmlformats.org/drawingml/2006/main">
               <a:ext uri="{FF2B5EF4-FFF2-40B4-BE49-F238E27FC236}">
-                <a16:creationId xmlns:a16="http://schemas.microsoft.com/office/drawing/2014/main" id="{225FBCC1-37A7-4171-9683-12CAA2CFACDD}"/>
+                <a16:creationId xmlns:a16="http://schemas.microsoft.com/office/drawing/2014/main" id="{F2A8491C-FC2C-4BC4-9D4E-BCFF8C5703DB}"/>
               </a:ext>
             </a:extLst>
           </p:cNvPr>
@@ -7746,7 +7746,7 @@
         <p:spPr>
           <a:xfrm xmlns:a="http://schemas.openxmlformats.org/drawingml/2006/main">
             <a:off x="6972300" y="2457450"/>
-            <a:ext cx="2000250" cy="495300"/>
+            <a:ext cx="1714500" cy="457200"/>
           </a:xfrm>
           <a:prstGeom xmlns:a="http://schemas.openxmlformats.org/drawingml/2006/main" prst="rect">
             <a:avLst/>
@@ -7797,19 +7797,19 @@
           <p:cNvPr id="11" name="">
             <a:extLst xmlns:a="http://schemas.openxmlformats.org/drawingml/2006/main">
               <a:ext uri="{FF2B5EF4-FFF2-40B4-BE49-F238E27FC236}">
-                <a16:creationId xmlns:a16="http://schemas.microsoft.com/office/drawing/2014/main" id="{6FD0B103-D253-47C0-870A-B5111345A538}"/>
-              </a:ext>
-            </a:extLst>
-          </p:cNvPr>
-          <p:cNvSpPr>
-            <a:spLocks xmlns:a="http://schemas.openxmlformats.org/drawingml/2006/main" noGrp="1"/>
-          </p:cNvSpPr>
-          <p:nvPr/>
-        </p:nvSpPr>
-        <p:spPr>
-          <a:xfrm xmlns:a="http://schemas.openxmlformats.org/drawingml/2006/main">
-            <a:off x="6972300" y="2933700"/>
-            <a:ext cx="2000250" cy="419100"/>
+                <a16:creationId xmlns:a16="http://schemas.microsoft.com/office/drawing/2014/main" id="{5C2FC74F-BE66-44DC-97D3-27195DE2E97D}"/>
+              </a:ext>
+            </a:extLst>
+          </p:cNvPr>
+          <p:cNvSpPr>
+            <a:spLocks xmlns:a="http://schemas.openxmlformats.org/drawingml/2006/main" noGrp="1"/>
+          </p:cNvSpPr>
+          <p:nvPr/>
+        </p:nvSpPr>
+        <p:spPr>
+          <a:xfrm xmlns:a="http://schemas.openxmlformats.org/drawingml/2006/main">
+            <a:off x="6972300" y="2990850"/>
+            <a:ext cx="1714500" cy="342900"/>
           </a:xfrm>
           <a:prstGeom xmlns:a="http://schemas.openxmlformats.org/drawingml/2006/main" prst="rect">
             <a:avLst/>
@@ -7864,7 +7864,7 @@
           <p:cNvPr id="12" name="">
             <a:extLst xmlns:a="http://schemas.openxmlformats.org/drawingml/2006/main">
               <a:ext uri="{FF2B5EF4-FFF2-40B4-BE49-F238E27FC236}">
-                <a16:creationId xmlns:a16="http://schemas.microsoft.com/office/drawing/2014/main" id="{996FCA17-2CD2-4E73-BF08-68F70CEB02B1}"/>
+                <a16:creationId xmlns:a16="http://schemas.microsoft.com/office/drawing/2014/main" id="{619F95E4-089D-404C-BB85-863918F8CCF6}"/>
               </a:ext>
             </a:extLst>
           </p:cNvPr>
@@ -7896,7 +7896,7 @@
           <p:cNvPr id="13" name="">
             <a:extLst xmlns:a="http://schemas.openxmlformats.org/drawingml/2006/main">
               <a:ext uri="{FF2B5EF4-FFF2-40B4-BE49-F238E27FC236}">
-                <a16:creationId xmlns:a16="http://schemas.microsoft.com/office/drawing/2014/main" id="{92922325-6C90-45D1-860B-32C7EAEF17BC}"/>
+                <a16:creationId xmlns:a16="http://schemas.microsoft.com/office/drawing/2014/main" id="{91B26793-3611-4D99-9714-5B5CC7CAA972}"/>
               </a:ext>
             </a:extLst>
           </p:cNvPr>
@@ -7959,7 +7959,7 @@
           <p:cNvPr id="14" name="">
             <a:extLst xmlns:a="http://schemas.openxmlformats.org/drawingml/2006/main">
               <a:ext uri="{FF2B5EF4-FFF2-40B4-BE49-F238E27FC236}">
-                <a16:creationId xmlns:a16="http://schemas.microsoft.com/office/drawing/2014/main" id="{95C614E2-9551-4FBD-B63C-03FAB8FE1790}"/>
+                <a16:creationId xmlns:a16="http://schemas.microsoft.com/office/drawing/2014/main" id="{7D09D023-9795-4894-9174-3C6DA89B41D6}"/>
               </a:ext>
             </a:extLst>
           </p:cNvPr>
@@ -8022,7 +8022,7 @@
           <p:cNvPr id="15" name="">
             <a:extLst xmlns:a="http://schemas.openxmlformats.org/drawingml/2006/main">
               <a:ext uri="{FF2B5EF4-FFF2-40B4-BE49-F238E27FC236}">
-                <a16:creationId xmlns:a16="http://schemas.microsoft.com/office/drawing/2014/main" id="{7FBB04BD-F459-4008-8393-CF4FB6B9EEED}"/>
+                <a16:creationId xmlns:a16="http://schemas.microsoft.com/office/drawing/2014/main" id="{D2C59B45-EDBA-4A27-A4C9-9763A3DCD0AD}"/>
               </a:ext>
             </a:extLst>
           </p:cNvPr>
@@ -8056,7 +8056,7 @@
           <p:cNvPr id="16" name="">
             <a:extLst xmlns:a="http://schemas.openxmlformats.org/drawingml/2006/main">
               <a:ext uri="{FF2B5EF4-FFF2-40B4-BE49-F238E27FC236}">
-                <a16:creationId xmlns:a16="http://schemas.microsoft.com/office/drawing/2014/main" id="{034D56D1-8041-4737-8B4E-E0474526C1B6}"/>
+                <a16:creationId xmlns:a16="http://schemas.microsoft.com/office/drawing/2014/main" id="{41FD10DA-6294-4A1C-A91F-38EC7253C11C}"/>
               </a:ext>
             </a:extLst>
           </p:cNvPr>
@@ -8088,7 +8088,7 @@
           <p:cNvPr id="17" name="">
             <a:extLst xmlns:a="http://schemas.openxmlformats.org/drawingml/2006/main">
               <a:ext uri="{FF2B5EF4-FFF2-40B4-BE49-F238E27FC236}">
-                <a16:creationId xmlns:a16="http://schemas.microsoft.com/office/drawing/2014/main" id="{DD32C6E1-E63C-4C19-92AC-62B690B56A88}"/>
+                <a16:creationId xmlns:a16="http://schemas.microsoft.com/office/drawing/2014/main" id="{CB907B38-5031-4247-B2FB-57E22B9EA7AB}"/>
               </a:ext>
             </a:extLst>
           </p:cNvPr>
@@ -8151,7 +8151,7 @@
           <p:cNvPr id="18" name="">
             <a:extLst xmlns:a="http://schemas.openxmlformats.org/drawingml/2006/main">
               <a:ext uri="{FF2B5EF4-FFF2-40B4-BE49-F238E27FC236}">
-                <a16:creationId xmlns:a16="http://schemas.microsoft.com/office/drawing/2014/main" id="{8523C5BB-695A-487B-883F-E29EAD06695F}"/>
+                <a16:creationId xmlns:a16="http://schemas.microsoft.com/office/drawing/2014/main" id="{52AE6051-582B-4FC0-9013-45937DB50F9A}"/>
               </a:ext>
             </a:extLst>
           </p:cNvPr>
@@ -8214,7 +8214,7 @@
           <p:cNvPr id="19" name="">
             <a:extLst xmlns:a="http://schemas.openxmlformats.org/drawingml/2006/main">
               <a:ext uri="{FF2B5EF4-FFF2-40B4-BE49-F238E27FC236}">
-                <a16:creationId xmlns:a16="http://schemas.microsoft.com/office/drawing/2014/main" id="{588E974F-5584-4C88-B355-E67009718367}"/>
+                <a16:creationId xmlns:a16="http://schemas.microsoft.com/office/drawing/2014/main" id="{31EBCC9B-5F0F-4D9D-905C-89F0DA328E41}"/>
               </a:ext>
             </a:extLst>
           </p:cNvPr>
@@ -8248,7 +8248,7 @@
           <p:cNvPr id="20" name="">
             <a:extLst xmlns:a="http://schemas.openxmlformats.org/drawingml/2006/main">
               <a:ext uri="{FF2B5EF4-FFF2-40B4-BE49-F238E27FC236}">
-                <a16:creationId xmlns:a16="http://schemas.microsoft.com/office/drawing/2014/main" id="{5C2DC0CA-790C-42BC-A42F-8EE63B4480E6}"/>
+                <a16:creationId xmlns:a16="http://schemas.microsoft.com/office/drawing/2014/main" id="{F7923DA8-38C2-4B87-86E7-BF7848F0C687}"/>
               </a:ext>
             </a:extLst>
           </p:cNvPr>
@@ -8280,7 +8280,7 @@
           <p:cNvPr id="21" name="">
             <a:extLst xmlns:a="http://schemas.openxmlformats.org/drawingml/2006/main">
               <a:ext uri="{FF2B5EF4-FFF2-40B4-BE49-F238E27FC236}">
-                <a16:creationId xmlns:a16="http://schemas.microsoft.com/office/drawing/2014/main" id="{AC2D7A34-8557-4494-9538-76492E3F5EFD}"/>
+                <a16:creationId xmlns:a16="http://schemas.microsoft.com/office/drawing/2014/main" id="{2F289E50-3023-45E8-9456-26BAE314B56F}"/>
               </a:ext>
             </a:extLst>
           </p:cNvPr>
@@ -8343,7 +8343,7 @@
           <p:cNvPr id="22" name="">
             <a:extLst xmlns:a="http://schemas.openxmlformats.org/drawingml/2006/main">
               <a:ext uri="{FF2B5EF4-FFF2-40B4-BE49-F238E27FC236}">
-                <a16:creationId xmlns:a16="http://schemas.microsoft.com/office/drawing/2014/main" id="{DB607879-BA2C-4292-B539-241EEFDA7D58}"/>
+                <a16:creationId xmlns:a16="http://schemas.microsoft.com/office/drawing/2014/main" id="{936597DE-FD43-42BB-BD45-09A266EACC61}"/>
               </a:ext>
             </a:extLst>
           </p:cNvPr>
@@ -8406,7 +8406,7 @@
           <p:cNvPr id="23" name="">
             <a:extLst xmlns:a="http://schemas.openxmlformats.org/drawingml/2006/main">
               <a:ext uri="{FF2B5EF4-FFF2-40B4-BE49-F238E27FC236}">
-                <a16:creationId xmlns:a16="http://schemas.microsoft.com/office/drawing/2014/main" id="{1C211367-19E8-4FBB-A3FC-C3EF60F97D4C}"/>
+                <a16:creationId xmlns:a16="http://schemas.microsoft.com/office/drawing/2014/main" id="{97C5CC2A-7B30-4116-BFE1-0667FF50A6A5}"/>
               </a:ext>
             </a:extLst>
           </p:cNvPr>
@@ -8440,7 +8440,7 @@
           <p:cNvPr id="24" name="">
             <a:extLst xmlns:a="http://schemas.openxmlformats.org/drawingml/2006/main">
               <a:ext uri="{FF2B5EF4-FFF2-40B4-BE49-F238E27FC236}">
-                <a16:creationId xmlns:a16="http://schemas.microsoft.com/office/drawing/2014/main" id="{453B7AFC-5F0D-4677-BBAB-00775D1F4ED2}"/>
+                <a16:creationId xmlns:a16="http://schemas.microsoft.com/office/drawing/2014/main" id="{BCC12B81-A712-4BDF-8B55-99872CA58F29}"/>
               </a:ext>
             </a:extLst>
           </p:cNvPr>
@@ -8472,7 +8472,7 @@
           <p:cNvPr id="25" name="">
             <a:extLst xmlns:a="http://schemas.openxmlformats.org/drawingml/2006/main">
               <a:ext uri="{FF2B5EF4-FFF2-40B4-BE49-F238E27FC236}">
-                <a16:creationId xmlns:a16="http://schemas.microsoft.com/office/drawing/2014/main" id="{2ADAFEBB-220E-4821-9FDE-7B19CB78BF57}"/>
+                <a16:creationId xmlns:a16="http://schemas.microsoft.com/office/drawing/2014/main" id="{101D3979-892F-4BF3-958E-83CA0725A6EF}"/>
               </a:ext>
             </a:extLst>
           </p:cNvPr>
@@ -8535,19 +8535,19 @@
           <p:cNvPr id="26" name="">
             <a:extLst xmlns:a="http://schemas.openxmlformats.org/drawingml/2006/main">
               <a:ext uri="{FF2B5EF4-FFF2-40B4-BE49-F238E27FC236}">
-                <a16:creationId xmlns:a16="http://schemas.microsoft.com/office/drawing/2014/main" id="{84FB7AF5-A308-41CC-B363-19D862815C15}"/>
-              </a:ext>
-            </a:extLst>
-          </p:cNvPr>
-          <p:cNvSpPr>
-            <a:spLocks xmlns:a="http://schemas.openxmlformats.org/drawingml/2006/main" noGrp="1"/>
-          </p:cNvSpPr>
-          <p:nvPr/>
-        </p:nvSpPr>
-        <p:spPr>
-          <a:xfrm xmlns:a="http://schemas.openxmlformats.org/drawingml/2006/main">
-            <a:off x="914400" y="5353050"/>
-            <a:ext cx="3857625" cy="209550"/>
+                <a16:creationId xmlns:a16="http://schemas.microsoft.com/office/drawing/2014/main" id="{FD307C7B-477C-4F56-8ECC-85BC36C24605}"/>
+              </a:ext>
+            </a:extLst>
+          </p:cNvPr>
+          <p:cNvSpPr>
+            <a:spLocks xmlns:a="http://schemas.openxmlformats.org/drawingml/2006/main" noGrp="1"/>
+          </p:cNvSpPr>
+          <p:nvPr/>
+        </p:nvSpPr>
+        <p:spPr>
+          <a:xfrm xmlns:a="http://schemas.openxmlformats.org/drawingml/2006/main">
+            <a:off x="914400" y="5219700"/>
+            <a:ext cx="3857625" cy="228600"/>
           </a:xfrm>
           <a:prstGeom xmlns:a="http://schemas.openxmlformats.org/drawingml/2006/main" prst="rect">
             <a:avLst/>
@@ -8602,7 +8602,7 @@
           <p:cNvPr id="27" name="">
             <a:extLst xmlns:a="http://schemas.openxmlformats.org/drawingml/2006/main">
               <a:ext uri="{FF2B5EF4-FFF2-40B4-BE49-F238E27FC236}">
-                <a16:creationId xmlns:a16="http://schemas.microsoft.com/office/drawing/2014/main" id="{E6F5513A-2C80-4425-A51A-747EDF7CB242}"/>
+                <a16:creationId xmlns:a16="http://schemas.microsoft.com/office/drawing/2014/main" id="{DBB484E7-81BC-433F-8FC6-36E94D68533F}"/>
               </a:ext>
             </a:extLst>
           </p:cNvPr>
@@ -8634,7 +8634,7 @@
           <p:cNvPr id="28" name="">
             <a:extLst xmlns:a="http://schemas.openxmlformats.org/drawingml/2006/main">
               <a:ext uri="{FF2B5EF4-FFF2-40B4-BE49-F238E27FC236}">
-                <a16:creationId xmlns:a16="http://schemas.microsoft.com/office/drawing/2014/main" id="{331073B4-E621-4919-9F9A-91512A005722}"/>
+                <a16:creationId xmlns:a16="http://schemas.microsoft.com/office/drawing/2014/main" id="{F3847438-CEB3-4E70-BE30-91DDEE09D0E9}"/>
               </a:ext>
             </a:extLst>
           </p:cNvPr>
@@ -8697,7 +8697,7 @@
           <p:cNvPr id="29" name="">
             <a:extLst xmlns:a="http://schemas.openxmlformats.org/drawingml/2006/main">
               <a:ext uri="{FF2B5EF4-FFF2-40B4-BE49-F238E27FC236}">
-                <a16:creationId xmlns:a16="http://schemas.microsoft.com/office/drawing/2014/main" id="{EEFB37B5-E593-4ECF-A0C5-09CA8DF8E5E7}"/>
+                <a16:creationId xmlns:a16="http://schemas.microsoft.com/office/drawing/2014/main" id="{11B0C01D-62AC-4A42-9DC7-6D2BE1A4F84F}"/>
               </a:ext>
             </a:extLst>
           </p:cNvPr>
@@ -8760,7 +8760,7 @@
           <p:cNvPr id="30" name="">
             <a:extLst xmlns:a="http://schemas.openxmlformats.org/drawingml/2006/main">
               <a:ext uri="{FF2B5EF4-FFF2-40B4-BE49-F238E27FC236}">
-                <a16:creationId xmlns:a16="http://schemas.microsoft.com/office/drawing/2014/main" id="{562284EF-307D-4DE1-AA44-C809DB76F824}"/>
+                <a16:creationId xmlns:a16="http://schemas.microsoft.com/office/drawing/2014/main" id="{B038BCC7-D01D-4CD1-B920-92B4E3235430}"/>
               </a:ext>
             </a:extLst>
           </p:cNvPr>
@@ -8794,7 +8794,7 @@
           <p:cNvPr id="31" name="">
             <a:extLst xmlns:a="http://schemas.openxmlformats.org/drawingml/2006/main">
               <a:ext uri="{FF2B5EF4-FFF2-40B4-BE49-F238E27FC236}">
-                <a16:creationId xmlns:a16="http://schemas.microsoft.com/office/drawing/2014/main" id="{E7DEF380-52AD-4BFB-B2A7-B451E3425F83}"/>
+                <a16:creationId xmlns:a16="http://schemas.microsoft.com/office/drawing/2014/main" id="{3B13504A-4535-46BB-92D8-3B20F0601CC5}"/>
               </a:ext>
             </a:extLst>
           </p:cNvPr>
@@ -8826,7 +8826,7 @@
           <p:cNvPr id="32" name="">
             <a:extLst xmlns:a="http://schemas.openxmlformats.org/drawingml/2006/main">
               <a:ext uri="{FF2B5EF4-FFF2-40B4-BE49-F238E27FC236}">
-                <a16:creationId xmlns:a16="http://schemas.microsoft.com/office/drawing/2014/main" id="{5979FF5A-979C-454E-8409-FB3C6BD5B586}"/>
+                <a16:creationId xmlns:a16="http://schemas.microsoft.com/office/drawing/2014/main" id="{1DE7F031-94E1-4293-8BC0-1269231399B5}"/>
               </a:ext>
             </a:extLst>
           </p:cNvPr>
@@ -8889,7 +8889,7 @@
           <p:cNvPr id="33" name="">
             <a:extLst xmlns:a="http://schemas.openxmlformats.org/drawingml/2006/main">
               <a:ext uri="{FF2B5EF4-FFF2-40B4-BE49-F238E27FC236}">
-                <a16:creationId xmlns:a16="http://schemas.microsoft.com/office/drawing/2014/main" id="{B1937A8D-755B-4F55-A6C7-7FBE1D59A3AE}"/>
+                <a16:creationId xmlns:a16="http://schemas.microsoft.com/office/drawing/2014/main" id="{2824B660-E551-4B0A-B731-5B000531E647}"/>
               </a:ext>
             </a:extLst>
           </p:cNvPr>
@@ -8952,7 +8952,7 @@
           <p:cNvPr id="34" name="">
             <a:extLst xmlns:a="http://schemas.openxmlformats.org/drawingml/2006/main">
               <a:ext uri="{FF2B5EF4-FFF2-40B4-BE49-F238E27FC236}">
-                <a16:creationId xmlns:a16="http://schemas.microsoft.com/office/drawing/2014/main" id="{7B682BB0-6BD5-4AD8-ACD0-A7E0C4CD0427}"/>
+                <a16:creationId xmlns:a16="http://schemas.microsoft.com/office/drawing/2014/main" id="{963A6BF1-0ADA-43A8-AA8B-BE5C024BE386}"/>
               </a:ext>
             </a:extLst>
           </p:cNvPr>
@@ -8986,7 +8986,7 @@
           <p:cNvPr id="35" name="">
             <a:extLst xmlns:a="http://schemas.openxmlformats.org/drawingml/2006/main">
               <a:ext uri="{FF2B5EF4-FFF2-40B4-BE49-F238E27FC236}">
-                <a16:creationId xmlns:a16="http://schemas.microsoft.com/office/drawing/2014/main" id="{F4CC8A52-B799-4EB8-9877-5297C7868BF9}"/>
+                <a16:creationId xmlns:a16="http://schemas.microsoft.com/office/drawing/2014/main" id="{85B1C8DF-15FE-4279-8731-EC87C4A88ACA}"/>
               </a:ext>
             </a:extLst>
           </p:cNvPr>
@@ -9018,7 +9018,7 @@
           <p:cNvPr id="36" name="">
             <a:extLst xmlns:a="http://schemas.openxmlformats.org/drawingml/2006/main">
               <a:ext uri="{FF2B5EF4-FFF2-40B4-BE49-F238E27FC236}">
-                <a16:creationId xmlns:a16="http://schemas.microsoft.com/office/drawing/2014/main" id="{E8EE33B2-44F1-44E8-8B22-E53CF3CE4268}"/>
+                <a16:creationId xmlns:a16="http://schemas.microsoft.com/office/drawing/2014/main" id="{EB65F3F8-3EBA-4FF9-87F6-D2D39BB309BD}"/>
               </a:ext>
             </a:extLst>
           </p:cNvPr>
@@ -9081,7 +9081,7 @@
           <p:cNvPr id="37" name="">
             <a:extLst xmlns:a="http://schemas.openxmlformats.org/drawingml/2006/main">
               <a:ext uri="{FF2B5EF4-FFF2-40B4-BE49-F238E27FC236}">
-                <a16:creationId xmlns:a16="http://schemas.microsoft.com/office/drawing/2014/main" id="{8010D889-EBEA-498E-9942-CC6D6ED9E76F}"/>
+                <a16:creationId xmlns:a16="http://schemas.microsoft.com/office/drawing/2014/main" id="{D2F74D7B-A2BE-4F54-AD38-1E447AF2C926}"/>
               </a:ext>
             </a:extLst>
           </p:cNvPr>
@@ -9144,7 +9144,7 @@
           <p:cNvPr id="38" name="">
             <a:extLst xmlns:a="http://schemas.openxmlformats.org/drawingml/2006/main">
               <a:ext uri="{FF2B5EF4-FFF2-40B4-BE49-F238E27FC236}">
-                <a16:creationId xmlns:a16="http://schemas.microsoft.com/office/drawing/2014/main" id="{6E6D94D1-8E06-4EE8-85B3-1960DAE4D502}"/>
+                <a16:creationId xmlns:a16="http://schemas.microsoft.com/office/drawing/2014/main" id="{12EE79E9-8E19-4596-A568-37F6333E7522}"/>
               </a:ext>
             </a:extLst>
           </p:cNvPr>
@@ -9178,7 +9178,7 @@
           <p:cNvPr id="39" name="">
             <a:extLst xmlns:a="http://schemas.openxmlformats.org/drawingml/2006/main">
               <a:ext uri="{FF2B5EF4-FFF2-40B4-BE49-F238E27FC236}">
-                <a16:creationId xmlns:a16="http://schemas.microsoft.com/office/drawing/2014/main" id="{64752577-A6BA-4E04-854C-8C04BA9283E7}"/>
+                <a16:creationId xmlns:a16="http://schemas.microsoft.com/office/drawing/2014/main" id="{D7393702-E1A0-460D-97D9-7185A60C35DB}"/>
               </a:ext>
             </a:extLst>
           </p:cNvPr>
@@ -9210,7 +9210,7 @@
           <p:cNvPr id="40" name="">
             <a:extLst xmlns:a="http://schemas.openxmlformats.org/drawingml/2006/main">
               <a:ext uri="{FF2B5EF4-FFF2-40B4-BE49-F238E27FC236}">
-                <a16:creationId xmlns:a16="http://schemas.microsoft.com/office/drawing/2014/main" id="{1EDBA5A6-9E85-406E-BF92-9F6606A98052}"/>
+                <a16:creationId xmlns:a16="http://schemas.microsoft.com/office/drawing/2014/main" id="{AC4D3756-0BBF-445E-B6F0-E99443CEE728}"/>
               </a:ext>
             </a:extLst>
           </p:cNvPr>
@@ -9273,19 +9273,19 @@
           <p:cNvPr id="41" name="">
             <a:extLst xmlns:a="http://schemas.openxmlformats.org/drawingml/2006/main">
               <a:ext uri="{FF2B5EF4-FFF2-40B4-BE49-F238E27FC236}">
-                <a16:creationId xmlns:a16="http://schemas.microsoft.com/office/drawing/2014/main" id="{F098F4E7-672F-408A-8B53-42B582BAD412}"/>
-              </a:ext>
-            </a:extLst>
-          </p:cNvPr>
-          <p:cNvSpPr>
-            <a:spLocks xmlns:a="http://schemas.openxmlformats.org/drawingml/2006/main" noGrp="1"/>
-          </p:cNvSpPr>
-          <p:nvPr/>
-        </p:nvSpPr>
-        <p:spPr>
-          <a:xfrm xmlns:a="http://schemas.openxmlformats.org/drawingml/2006/main">
-            <a:off x="6419850" y="5353050"/>
-            <a:ext cx="3857625" cy="209550"/>
+                <a16:creationId xmlns:a16="http://schemas.microsoft.com/office/drawing/2014/main" id="{B863B60E-101F-4E0F-B1C5-2A4CCA2E7F0B}"/>
+              </a:ext>
+            </a:extLst>
+          </p:cNvPr>
+          <p:cNvSpPr>
+            <a:spLocks xmlns:a="http://schemas.openxmlformats.org/drawingml/2006/main" noGrp="1"/>
+          </p:cNvSpPr>
+          <p:nvPr/>
+        </p:nvSpPr>
+        <p:spPr>
+          <a:xfrm xmlns:a="http://schemas.openxmlformats.org/drawingml/2006/main">
+            <a:off x="6419850" y="5219700"/>
+            <a:ext cx="3857625" cy="228600"/>
           </a:xfrm>
           <a:prstGeom xmlns:a="http://schemas.openxmlformats.org/drawingml/2006/main" prst="rect">
             <a:avLst/>
@@ -9340,7 +9340,7 @@
           <p:cNvPr id="42" name="">
             <a:extLst xmlns:a="http://schemas.openxmlformats.org/drawingml/2006/main">
               <a:ext uri="{FF2B5EF4-FFF2-40B4-BE49-F238E27FC236}">
-                <a16:creationId xmlns:a16="http://schemas.microsoft.com/office/drawing/2014/main" id="{73D0CB0B-F914-4617-A0A8-75443C470F15}"/>
+                <a16:creationId xmlns:a16="http://schemas.microsoft.com/office/drawing/2014/main" id="{1DA4712E-0B07-48BF-BC0A-E4548E5F4F81}"/>
               </a:ext>
             </a:extLst>
           </p:cNvPr>
@@ -9403,7 +9403,7 @@
           <p:cNvPr id="43" name="">
             <a:extLst xmlns:a="http://schemas.openxmlformats.org/drawingml/2006/main">
               <a:ext uri="{FF2B5EF4-FFF2-40B4-BE49-F238E27FC236}">
-                <a16:creationId xmlns:a16="http://schemas.microsoft.com/office/drawing/2014/main" id="{95856B0C-2A84-4796-AE17-DCED6680B1F2}"/>
+                <a16:creationId xmlns:a16="http://schemas.microsoft.com/office/drawing/2014/main" id="{D63F3A6B-FBFF-47E5-871C-00D70E629784}"/>
               </a:ext>
             </a:extLst>
           </p:cNvPr>
@@ -9435,7 +9435,7 @@
           <p:cNvPr id="44" name="">
             <a:extLst xmlns:a="http://schemas.openxmlformats.org/drawingml/2006/main">
               <a:ext uri="{FF2B5EF4-FFF2-40B4-BE49-F238E27FC236}">
-                <a16:creationId xmlns:a16="http://schemas.microsoft.com/office/drawing/2014/main" id="{C31104C8-D917-47CA-86CA-D3F415F3465C}"/>
+                <a16:creationId xmlns:a16="http://schemas.microsoft.com/office/drawing/2014/main" id="{D0EF95D8-D98B-4E49-9B1B-75658F488ED7}"/>
               </a:ext>
             </a:extLst>
           </p:cNvPr>
@@ -9498,7 +9498,7 @@
           <p:cNvPr id="45" name="">
             <a:extLst xmlns:a="http://schemas.openxmlformats.org/drawingml/2006/main">
               <a:ext uri="{FF2B5EF4-FFF2-40B4-BE49-F238E27FC236}">
-                <a16:creationId xmlns:a16="http://schemas.microsoft.com/office/drawing/2014/main" id="{96A8A5F9-6CF8-470A-A3C6-11E2B3768E1F}"/>
+                <a16:creationId xmlns:a16="http://schemas.microsoft.com/office/drawing/2014/main" id="{64E321AC-F676-4D91-8476-FA0F200FFA5C}"/>
               </a:ext>
             </a:extLst>
           </p:cNvPr>
@@ -9559,7 +9559,7 @@
     </p:spTree>
     <p:extLst>
       <p:ext uri="{BB962C8B-B14F-4D97-AF65-F5344CB8AC3E}">
-        <p14:creationId xmlns:p14="http://schemas.microsoft.com/office/powerpoint/2010/main" val="1082522161"/>
+        <p14:creationId xmlns:p14="http://schemas.microsoft.com/office/powerpoint/2010/main" val="1229948495"/>
       </p:ext>
     </p:extLst>
   </p:cSld>
@@ -9590,7 +9590,7 @@
           <p:cNvPr id="1" name="">
             <a:extLst xmlns:a="http://schemas.openxmlformats.org/drawingml/2006/main">
               <a:ext uri="{FF2B5EF4-FFF2-40B4-BE49-F238E27FC236}">
-                <a16:creationId xmlns:a16="http://schemas.microsoft.com/office/drawing/2014/main" id="{7BA53B5F-31C0-4C50-A77C-F83921C940F2}"/>
+                <a16:creationId xmlns:a16="http://schemas.microsoft.com/office/drawing/2014/main" id="{1457CAA7-21D2-4036-8FC3-5A648A08288E}"/>
               </a:ext>
             </a:extLst>
           </p:cNvPr>
@@ -9653,7 +9653,7 @@
           <p:cNvPr id="2" name="">
             <a:extLst xmlns:a="http://schemas.openxmlformats.org/drawingml/2006/main">
               <a:ext uri="{FF2B5EF4-FFF2-40B4-BE49-F238E27FC236}">
-                <a16:creationId xmlns:a16="http://schemas.microsoft.com/office/drawing/2014/main" id="{C5E5F73A-6900-4D33-BFBE-6035FBB93354}"/>
+                <a16:creationId xmlns:a16="http://schemas.microsoft.com/office/drawing/2014/main" id="{725495BF-2696-4B1F-A5CC-989810568E08}"/>
               </a:ext>
             </a:extLst>
           </p:cNvPr>
@@ -9720,7 +9720,7 @@
           <p:cNvPr id="3" name="">
             <a:extLst xmlns:a="http://schemas.openxmlformats.org/drawingml/2006/main">
               <a:ext uri="{FF2B5EF4-FFF2-40B4-BE49-F238E27FC236}">
-                <a16:creationId xmlns:a16="http://schemas.microsoft.com/office/drawing/2014/main" id="{CA746005-0E72-413C-B781-BDAE2266CAC5}"/>
+                <a16:creationId xmlns:a16="http://schemas.microsoft.com/office/drawing/2014/main" id="{9635BE5B-7C5F-4F5D-8420-D4DFECE7FC8D}"/>
               </a:ext>
             </a:extLst>
           </p:cNvPr>
@@ -9787,7 +9787,7 @@
           <p:cNvPr id="4" name="">
             <a:extLst xmlns:a="http://schemas.openxmlformats.org/drawingml/2006/main">
               <a:ext uri="{FF2B5EF4-FFF2-40B4-BE49-F238E27FC236}">
-                <a16:creationId xmlns:a16="http://schemas.microsoft.com/office/drawing/2014/main" id="{9ECA4A0A-9ED5-449F-B391-A308052FB442}"/>
+                <a16:creationId xmlns:a16="http://schemas.microsoft.com/office/drawing/2014/main" id="{859B0130-9DE5-4885-A03D-DC9E86D3930C}"/>
               </a:ext>
             </a:extLst>
           </p:cNvPr>
@@ -9819,7 +9819,7 @@
           <p:cNvPr id="5" name="">
             <a:extLst xmlns:a="http://schemas.openxmlformats.org/drawingml/2006/main">
               <a:ext uri="{FF2B5EF4-FFF2-40B4-BE49-F238E27FC236}">
-                <a16:creationId xmlns:a16="http://schemas.microsoft.com/office/drawing/2014/main" id="{A4EAE0BC-0FF6-4605-A830-3FA8FE485E01}"/>
+                <a16:creationId xmlns:a16="http://schemas.microsoft.com/office/drawing/2014/main" id="{401E7449-D789-4297-896F-E29D33F439EA}"/>
               </a:ext>
             </a:extLst>
           </p:cNvPr>
@@ -9882,7 +9882,7 @@
           <p:cNvPr id="6" name="">
             <a:extLst xmlns:a="http://schemas.openxmlformats.org/drawingml/2006/main">
               <a:ext uri="{FF2B5EF4-FFF2-40B4-BE49-F238E27FC236}">
-                <a16:creationId xmlns:a16="http://schemas.microsoft.com/office/drawing/2014/main" id="{0E44FC86-03C0-474D-8D8B-ABF7AD48070F}"/>
+                <a16:creationId xmlns:a16="http://schemas.microsoft.com/office/drawing/2014/main" id="{FAC01BC0-E55E-4FEA-A51F-F7DBF022C036}"/>
               </a:ext>
             </a:extLst>
           </p:cNvPr>
@@ -9945,7 +9945,7 @@
           <p:cNvPr id="7" name="">
             <a:extLst xmlns:a="http://schemas.openxmlformats.org/drawingml/2006/main">
               <a:ext uri="{FF2B5EF4-FFF2-40B4-BE49-F238E27FC236}">
-                <a16:creationId xmlns:a16="http://schemas.microsoft.com/office/drawing/2014/main" id="{8FFB45DC-03F8-4E49-B8C2-C07AEA5EF400}"/>
+                <a16:creationId xmlns:a16="http://schemas.microsoft.com/office/drawing/2014/main" id="{1775B342-FB4D-4346-ACC2-457796C77BF4}"/>
               </a:ext>
             </a:extLst>
           </p:cNvPr>
@@ -9979,7 +9979,7 @@
           <p:cNvPr id="8" name="">
             <a:extLst xmlns:a="http://schemas.openxmlformats.org/drawingml/2006/main">
               <a:ext uri="{FF2B5EF4-FFF2-40B4-BE49-F238E27FC236}">
-                <a16:creationId xmlns:a16="http://schemas.microsoft.com/office/drawing/2014/main" id="{5A395832-40C0-40DC-BBC5-A3D66A6A06B6}"/>
+                <a16:creationId xmlns:a16="http://schemas.microsoft.com/office/drawing/2014/main" id="{A0446C0C-06D7-4D46-89B5-4BE01C235705}"/>
               </a:ext>
             </a:extLst>
           </p:cNvPr>
@@ -10011,7 +10011,7 @@
           <p:cNvPr id="9" name="">
             <a:extLst xmlns:a="http://schemas.openxmlformats.org/drawingml/2006/main">
               <a:ext uri="{FF2B5EF4-FFF2-40B4-BE49-F238E27FC236}">
-                <a16:creationId xmlns:a16="http://schemas.microsoft.com/office/drawing/2014/main" id="{585F3173-CCF1-4586-A2F4-DF33FF6CB579}"/>
+                <a16:creationId xmlns:a16="http://schemas.microsoft.com/office/drawing/2014/main" id="{C8AEB312-20FB-47BD-A1E8-FAE08E5F41D2}"/>
               </a:ext>
             </a:extLst>
           </p:cNvPr>
@@ -10074,7 +10074,7 @@
           <p:cNvPr id="10" name="">
             <a:extLst xmlns:a="http://schemas.openxmlformats.org/drawingml/2006/main">
               <a:ext uri="{FF2B5EF4-FFF2-40B4-BE49-F238E27FC236}">
-                <a16:creationId xmlns:a16="http://schemas.microsoft.com/office/drawing/2014/main" id="{6BF5E804-33FE-4D60-8941-A377BFD00A4D}"/>
+                <a16:creationId xmlns:a16="http://schemas.microsoft.com/office/drawing/2014/main" id="{2208808E-1C4A-4C0F-BFE6-D53E0532DCA5}"/>
               </a:ext>
             </a:extLst>
           </p:cNvPr>
@@ -10137,7 +10137,7 @@
           <p:cNvPr id="11" name="">
             <a:extLst xmlns:a="http://schemas.openxmlformats.org/drawingml/2006/main">
               <a:ext uri="{FF2B5EF4-FFF2-40B4-BE49-F238E27FC236}">
-                <a16:creationId xmlns:a16="http://schemas.microsoft.com/office/drawing/2014/main" id="{4463F9E4-B78E-4501-91B4-19A9B058F0D8}"/>
+                <a16:creationId xmlns:a16="http://schemas.microsoft.com/office/drawing/2014/main" id="{CE889AAB-A682-47C5-97FA-9C04E12BA023}"/>
               </a:ext>
             </a:extLst>
           </p:cNvPr>
@@ -10171,7 +10171,7 @@
           <p:cNvPr id="12" name="">
             <a:extLst xmlns:a="http://schemas.openxmlformats.org/drawingml/2006/main">
               <a:ext uri="{FF2B5EF4-FFF2-40B4-BE49-F238E27FC236}">
-                <a16:creationId xmlns:a16="http://schemas.microsoft.com/office/drawing/2014/main" id="{89D1F161-E8AD-444D-886C-D7069057AA9E}"/>
+                <a16:creationId xmlns:a16="http://schemas.microsoft.com/office/drawing/2014/main" id="{C9E902A1-CF38-426B-88CA-301A70ED33A6}"/>
               </a:ext>
             </a:extLst>
           </p:cNvPr>
@@ -10203,7 +10203,7 @@
           <p:cNvPr id="13" name="">
             <a:extLst xmlns:a="http://schemas.openxmlformats.org/drawingml/2006/main">
               <a:ext uri="{FF2B5EF4-FFF2-40B4-BE49-F238E27FC236}">
-                <a16:creationId xmlns:a16="http://schemas.microsoft.com/office/drawing/2014/main" id="{5BFC2E19-2ADD-44C9-B5F6-9ED4C11F895F}"/>
+                <a16:creationId xmlns:a16="http://schemas.microsoft.com/office/drawing/2014/main" id="{9EEF5C23-1A0D-485F-B771-270064885C23}"/>
               </a:ext>
             </a:extLst>
           </p:cNvPr>
@@ -10266,7 +10266,7 @@
           <p:cNvPr id="14" name="">
             <a:extLst xmlns:a="http://schemas.openxmlformats.org/drawingml/2006/main">
               <a:ext uri="{FF2B5EF4-FFF2-40B4-BE49-F238E27FC236}">
-                <a16:creationId xmlns:a16="http://schemas.microsoft.com/office/drawing/2014/main" id="{89BAF945-CD6C-4A2F-A1B5-D087BDC5DFEC}"/>
+                <a16:creationId xmlns:a16="http://schemas.microsoft.com/office/drawing/2014/main" id="{BE53A71F-40B9-4875-A757-A5E57758EF0B}"/>
               </a:ext>
             </a:extLst>
           </p:cNvPr>
@@ -10329,7 +10329,7 @@
           <p:cNvPr id="15" name="">
             <a:extLst xmlns:a="http://schemas.openxmlformats.org/drawingml/2006/main">
               <a:ext uri="{FF2B5EF4-FFF2-40B4-BE49-F238E27FC236}">
-                <a16:creationId xmlns:a16="http://schemas.microsoft.com/office/drawing/2014/main" id="{2B3DBE6D-5412-4121-AB43-2A280A68EE90}"/>
+                <a16:creationId xmlns:a16="http://schemas.microsoft.com/office/drawing/2014/main" id="{2C4721D0-6C0C-4B5C-9574-CEE9432519CC}"/>
               </a:ext>
             </a:extLst>
           </p:cNvPr>
@@ -10363,7 +10363,7 @@
           <p:cNvPr id="16" name="">
             <a:extLst xmlns:a="http://schemas.openxmlformats.org/drawingml/2006/main">
               <a:ext uri="{FF2B5EF4-FFF2-40B4-BE49-F238E27FC236}">
-                <a16:creationId xmlns:a16="http://schemas.microsoft.com/office/drawing/2014/main" id="{4DDCE97D-816A-4839-B35A-0BEE42832FC8}"/>
+                <a16:creationId xmlns:a16="http://schemas.microsoft.com/office/drawing/2014/main" id="{E6CFD577-CEB7-4FDA-A460-04B16DCEFC2B}"/>
               </a:ext>
             </a:extLst>
           </p:cNvPr>
@@ -10395,7 +10395,7 @@
           <p:cNvPr id="17" name="">
             <a:extLst xmlns:a="http://schemas.openxmlformats.org/drawingml/2006/main">
               <a:ext uri="{FF2B5EF4-FFF2-40B4-BE49-F238E27FC236}">
-                <a16:creationId xmlns:a16="http://schemas.microsoft.com/office/drawing/2014/main" id="{45BF0263-66F6-49BB-AF5C-A887B672B986}"/>
+                <a16:creationId xmlns:a16="http://schemas.microsoft.com/office/drawing/2014/main" id="{3F097DC4-BB34-45BA-A120-24AE1B97FC8C}"/>
               </a:ext>
             </a:extLst>
           </p:cNvPr>
@@ -10458,7 +10458,7 @@
           <p:cNvPr id="18" name="">
             <a:extLst xmlns:a="http://schemas.openxmlformats.org/drawingml/2006/main">
               <a:ext uri="{FF2B5EF4-FFF2-40B4-BE49-F238E27FC236}">
-                <a16:creationId xmlns:a16="http://schemas.microsoft.com/office/drawing/2014/main" id="{9F2D55E7-D54D-4CED-929C-8635906AFC26}"/>
+                <a16:creationId xmlns:a16="http://schemas.microsoft.com/office/drawing/2014/main" id="{E6CDC870-5F6B-43E1-8ECB-776601D135D4}"/>
               </a:ext>
             </a:extLst>
           </p:cNvPr>
@@ -10521,7 +10521,7 @@
           <p:cNvPr id="19" name="">
             <a:extLst xmlns:a="http://schemas.openxmlformats.org/drawingml/2006/main">
               <a:ext uri="{FF2B5EF4-FFF2-40B4-BE49-F238E27FC236}">
-                <a16:creationId xmlns:a16="http://schemas.microsoft.com/office/drawing/2014/main" id="{D76880EA-CDE8-4714-A56A-935777C7B72E}"/>
+                <a16:creationId xmlns:a16="http://schemas.microsoft.com/office/drawing/2014/main" id="{85A28A16-5B6D-4D77-9339-F859EA61B1DD}"/>
               </a:ext>
             </a:extLst>
           </p:cNvPr>
@@ -10555,7 +10555,7 @@
           <p:cNvPr id="20" name="">
             <a:extLst xmlns:a="http://schemas.openxmlformats.org/drawingml/2006/main">
               <a:ext uri="{FF2B5EF4-FFF2-40B4-BE49-F238E27FC236}">
-                <a16:creationId xmlns:a16="http://schemas.microsoft.com/office/drawing/2014/main" id="{0E5270F1-533A-4DF5-81B0-ACC2F7461A4E}"/>
+                <a16:creationId xmlns:a16="http://schemas.microsoft.com/office/drawing/2014/main" id="{AB8F21BE-C7CF-42A1-8129-F22D682CB310}"/>
               </a:ext>
             </a:extLst>
           </p:cNvPr>
@@ -10587,7 +10587,7 @@
           <p:cNvPr id="21" name="">
             <a:extLst xmlns:a="http://schemas.openxmlformats.org/drawingml/2006/main">
               <a:ext uri="{FF2B5EF4-FFF2-40B4-BE49-F238E27FC236}">
-                <a16:creationId xmlns:a16="http://schemas.microsoft.com/office/drawing/2014/main" id="{1BE565EB-E443-4812-945F-CBF933C69304}"/>
+                <a16:creationId xmlns:a16="http://schemas.microsoft.com/office/drawing/2014/main" id="{1411FEAB-606C-40AD-9503-DD64798306D0}"/>
               </a:ext>
             </a:extLst>
           </p:cNvPr>
@@ -10650,7 +10650,7 @@
           <p:cNvPr id="22" name="">
             <a:extLst xmlns:a="http://schemas.openxmlformats.org/drawingml/2006/main">
               <a:ext uri="{FF2B5EF4-FFF2-40B4-BE49-F238E27FC236}">
-                <a16:creationId xmlns:a16="http://schemas.microsoft.com/office/drawing/2014/main" id="{8379827E-B5A5-4F23-8B14-B63C63BBC774}"/>
+                <a16:creationId xmlns:a16="http://schemas.microsoft.com/office/drawing/2014/main" id="{61B44175-8D31-4B41-91AD-9FAFE519E04D}"/>
               </a:ext>
             </a:extLst>
           </p:cNvPr>
@@ -10713,7 +10713,7 @@
           <p:cNvPr id="23" name="">
             <a:extLst xmlns:a="http://schemas.openxmlformats.org/drawingml/2006/main">
               <a:ext uri="{FF2B5EF4-FFF2-40B4-BE49-F238E27FC236}">
-                <a16:creationId xmlns:a16="http://schemas.microsoft.com/office/drawing/2014/main" id="{8A326871-974F-4483-BE3A-871EC5D521C2}"/>
+                <a16:creationId xmlns:a16="http://schemas.microsoft.com/office/drawing/2014/main" id="{572D3681-7323-4A40-9FEE-135FB7BFA891}"/>
               </a:ext>
             </a:extLst>
           </p:cNvPr>
@@ -10747,7 +10747,7 @@
           <p:cNvPr id="24" name="">
             <a:extLst xmlns:a="http://schemas.openxmlformats.org/drawingml/2006/main">
               <a:ext uri="{FF2B5EF4-FFF2-40B4-BE49-F238E27FC236}">
-                <a16:creationId xmlns:a16="http://schemas.microsoft.com/office/drawing/2014/main" id="{C2EB4001-9BB3-4B93-85FF-C77B3F7D75EF}"/>
+                <a16:creationId xmlns:a16="http://schemas.microsoft.com/office/drawing/2014/main" id="{67043DB0-D6D2-417C-9A44-66CEE2E00433}"/>
               </a:ext>
             </a:extLst>
           </p:cNvPr>
@@ -10779,7 +10779,7 @@
           <p:cNvPr id="25" name="">
             <a:extLst xmlns:a="http://schemas.openxmlformats.org/drawingml/2006/main">
               <a:ext uri="{FF2B5EF4-FFF2-40B4-BE49-F238E27FC236}">
-                <a16:creationId xmlns:a16="http://schemas.microsoft.com/office/drawing/2014/main" id="{4551FA2F-6E0C-4573-B2F8-B9AF350BBCF2}"/>
+                <a16:creationId xmlns:a16="http://schemas.microsoft.com/office/drawing/2014/main" id="{7FFA58A0-7E4F-482B-802A-64174D58DE6B}"/>
               </a:ext>
             </a:extLst>
           </p:cNvPr>
@@ -10842,7 +10842,7 @@
           <p:cNvPr id="26" name="">
             <a:extLst xmlns:a="http://schemas.openxmlformats.org/drawingml/2006/main">
               <a:ext uri="{FF2B5EF4-FFF2-40B4-BE49-F238E27FC236}">
-                <a16:creationId xmlns:a16="http://schemas.microsoft.com/office/drawing/2014/main" id="{E7D4C33F-0FFE-4CD0-9B29-C18197C425F9}"/>
+                <a16:creationId xmlns:a16="http://schemas.microsoft.com/office/drawing/2014/main" id="{ADBFB4E1-73C9-4E48-8612-55824874E7BF}"/>
               </a:ext>
             </a:extLst>
           </p:cNvPr>
@@ -10909,7 +10909,7 @@
           <p:cNvPr id="27" name="">
             <a:extLst xmlns:a="http://schemas.openxmlformats.org/drawingml/2006/main">
               <a:ext uri="{FF2B5EF4-FFF2-40B4-BE49-F238E27FC236}">
-                <a16:creationId xmlns:a16="http://schemas.microsoft.com/office/drawing/2014/main" id="{586095BC-403E-4447-AFA0-18B5ECEC2AD6}"/>
+                <a16:creationId xmlns:a16="http://schemas.microsoft.com/office/drawing/2014/main" id="{2BE93250-D8AA-4C14-8B6D-7C6F99C26819}"/>
               </a:ext>
             </a:extLst>
           </p:cNvPr>
@@ -10941,7 +10941,7 @@
           <p:cNvPr id="28" name="">
             <a:extLst xmlns:a="http://schemas.openxmlformats.org/drawingml/2006/main">
               <a:ext uri="{FF2B5EF4-FFF2-40B4-BE49-F238E27FC236}">
-                <a16:creationId xmlns:a16="http://schemas.microsoft.com/office/drawing/2014/main" id="{88A1F11C-7FF1-4729-8373-BD68304038B6}"/>
+                <a16:creationId xmlns:a16="http://schemas.microsoft.com/office/drawing/2014/main" id="{1C9B5923-66BD-4C5A-A03F-460568B5D451}"/>
               </a:ext>
             </a:extLst>
           </p:cNvPr>
@@ -10973,7 +10973,7 @@
           <p:cNvPr id="29" name="">
             <a:extLst xmlns:a="http://schemas.openxmlformats.org/drawingml/2006/main">
               <a:ext uri="{FF2B5EF4-FFF2-40B4-BE49-F238E27FC236}">
-                <a16:creationId xmlns:a16="http://schemas.microsoft.com/office/drawing/2014/main" id="{3554561B-8839-469B-A703-F870E7A212C7}"/>
+                <a16:creationId xmlns:a16="http://schemas.microsoft.com/office/drawing/2014/main" id="{0745FFC0-D812-4B1E-BF4A-409C6020F67A}"/>
               </a:ext>
             </a:extLst>
           </p:cNvPr>
@@ -11036,7 +11036,7 @@
           <p:cNvPr id="30" name="">
             <a:extLst xmlns:a="http://schemas.openxmlformats.org/drawingml/2006/main">
               <a:ext uri="{FF2B5EF4-FFF2-40B4-BE49-F238E27FC236}">
-                <a16:creationId xmlns:a16="http://schemas.microsoft.com/office/drawing/2014/main" id="{344410D7-DE51-4E4C-A55F-3E7473AD9DBA}"/>
+                <a16:creationId xmlns:a16="http://schemas.microsoft.com/office/drawing/2014/main" id="{90ECACF1-2E6A-4351-9035-2534C2ECF6C3}"/>
               </a:ext>
             </a:extLst>
           </p:cNvPr>
@@ -11103,7 +11103,7 @@
           <p:cNvPr id="31" name="">
             <a:extLst xmlns:a="http://schemas.openxmlformats.org/drawingml/2006/main">
               <a:ext uri="{FF2B5EF4-FFF2-40B4-BE49-F238E27FC236}">
-                <a16:creationId xmlns:a16="http://schemas.microsoft.com/office/drawing/2014/main" id="{C1FFAE24-5496-4AAC-8244-833765AAB1B6}"/>
+                <a16:creationId xmlns:a16="http://schemas.microsoft.com/office/drawing/2014/main" id="{B297D8A6-8FD6-48E7-893C-C8071FBC2E09}"/>
               </a:ext>
             </a:extLst>
           </p:cNvPr>
@@ -11135,7 +11135,7 @@
           <p:cNvPr id="32" name="">
             <a:extLst xmlns:a="http://schemas.openxmlformats.org/drawingml/2006/main">
               <a:ext uri="{FF2B5EF4-FFF2-40B4-BE49-F238E27FC236}">
-                <a16:creationId xmlns:a16="http://schemas.microsoft.com/office/drawing/2014/main" id="{896FB773-5C19-4055-9A3E-38730B8D56D3}"/>
+                <a16:creationId xmlns:a16="http://schemas.microsoft.com/office/drawing/2014/main" id="{44040E11-A322-4A5F-964C-971403052BE3}"/>
               </a:ext>
             </a:extLst>
           </p:cNvPr>
@@ -11167,7 +11167,7 @@
           <p:cNvPr id="33" name="">
             <a:extLst xmlns:a="http://schemas.openxmlformats.org/drawingml/2006/main">
               <a:ext uri="{FF2B5EF4-FFF2-40B4-BE49-F238E27FC236}">
-                <a16:creationId xmlns:a16="http://schemas.microsoft.com/office/drawing/2014/main" id="{088119C8-8D8F-4989-8753-688F4C4C2299}"/>
+                <a16:creationId xmlns:a16="http://schemas.microsoft.com/office/drawing/2014/main" id="{1965C8B0-E5BD-46E0-BB9B-2E6643376124}"/>
               </a:ext>
             </a:extLst>
           </p:cNvPr>
@@ -11230,7 +11230,7 @@
           <p:cNvPr id="34" name="">
             <a:extLst xmlns:a="http://schemas.openxmlformats.org/drawingml/2006/main">
               <a:ext uri="{FF2B5EF4-FFF2-40B4-BE49-F238E27FC236}">
-                <a16:creationId xmlns:a16="http://schemas.microsoft.com/office/drawing/2014/main" id="{14D53C25-17B5-453E-B7B7-9E8BA3E96490}"/>
+                <a16:creationId xmlns:a16="http://schemas.microsoft.com/office/drawing/2014/main" id="{12D7B1BE-5D65-4877-A136-5FF6C20F4F1D}"/>
               </a:ext>
             </a:extLst>
           </p:cNvPr>
@@ -11297,7 +11297,7 @@
           <p:cNvPr id="35" name="">
             <a:extLst xmlns:a="http://schemas.openxmlformats.org/drawingml/2006/main">
               <a:ext uri="{FF2B5EF4-FFF2-40B4-BE49-F238E27FC236}">
-                <a16:creationId xmlns:a16="http://schemas.microsoft.com/office/drawing/2014/main" id="{0ACF5CC0-F61B-474A-BE30-8651E8FCA7D2}"/>
+                <a16:creationId xmlns:a16="http://schemas.microsoft.com/office/drawing/2014/main" id="{AFCA9A72-6B12-4E24-855F-D5904CCD29DC}"/>
               </a:ext>
             </a:extLst>
           </p:cNvPr>
@@ -11360,7 +11360,7 @@
           <p:cNvPr id="36" name="">
             <a:extLst xmlns:a="http://schemas.openxmlformats.org/drawingml/2006/main">
               <a:ext uri="{FF2B5EF4-FFF2-40B4-BE49-F238E27FC236}">
-                <a16:creationId xmlns:a16="http://schemas.microsoft.com/office/drawing/2014/main" id="{F3325052-F709-4FEC-BA2E-39019A2E64E1}"/>
+                <a16:creationId xmlns:a16="http://schemas.microsoft.com/office/drawing/2014/main" id="{6DDBE073-EC88-44D8-93E0-F1B616350069}"/>
               </a:ext>
             </a:extLst>
           </p:cNvPr>
@@ -11392,7 +11392,7 @@
           <p:cNvPr id="37" name="">
             <a:extLst xmlns:a="http://schemas.openxmlformats.org/drawingml/2006/main">
               <a:ext uri="{FF2B5EF4-FFF2-40B4-BE49-F238E27FC236}">
-                <a16:creationId xmlns:a16="http://schemas.microsoft.com/office/drawing/2014/main" id="{741C172B-FF07-4B8B-B72A-4E7BEE303646}"/>
+                <a16:creationId xmlns:a16="http://schemas.microsoft.com/office/drawing/2014/main" id="{3C84F99C-88CD-4C72-9892-6D0B4389F564}"/>
               </a:ext>
             </a:extLst>
           </p:cNvPr>
@@ -11455,7 +11455,7 @@
           <p:cNvPr id="38" name="">
             <a:extLst xmlns:a="http://schemas.openxmlformats.org/drawingml/2006/main">
               <a:ext uri="{FF2B5EF4-FFF2-40B4-BE49-F238E27FC236}">
-                <a16:creationId xmlns:a16="http://schemas.microsoft.com/office/drawing/2014/main" id="{5794EA64-D3E6-4154-A9E0-A179BD2B03D2}"/>
+                <a16:creationId xmlns:a16="http://schemas.microsoft.com/office/drawing/2014/main" id="{14875F63-A4E6-42EA-A0ED-C1E41D604D40}"/>
               </a:ext>
             </a:extLst>
           </p:cNvPr>
@@ -11516,7 +11516,7 @@
     </p:spTree>
     <p:extLst>
       <p:ext uri="{BB962C8B-B14F-4D97-AF65-F5344CB8AC3E}">
-        <p14:creationId xmlns:p14="http://schemas.microsoft.com/office/powerpoint/2010/main" val="255013019"/>
+        <p14:creationId xmlns:p14="http://schemas.microsoft.com/office/powerpoint/2010/main" val="298017986"/>
       </p:ext>
     </p:extLst>
   </p:cSld>
@@ -11547,7 +11547,7 @@
           <p:cNvPr id="1" name="">
             <a:extLst xmlns:a="http://schemas.openxmlformats.org/drawingml/2006/main">
               <a:ext uri="{FF2B5EF4-FFF2-40B4-BE49-F238E27FC236}">
-                <a16:creationId xmlns:a16="http://schemas.microsoft.com/office/drawing/2014/main" id="{50722344-B976-40F1-9D4D-4C5A40E9BB1D}"/>
+                <a16:creationId xmlns:a16="http://schemas.microsoft.com/office/drawing/2014/main" id="{19614546-4F3B-4BF2-B02F-9F87EC52F393}"/>
               </a:ext>
             </a:extLst>
           </p:cNvPr>
@@ -11610,7 +11610,7 @@
           <p:cNvPr id="2" name="">
             <a:extLst xmlns:a="http://schemas.openxmlformats.org/drawingml/2006/main">
               <a:ext uri="{FF2B5EF4-FFF2-40B4-BE49-F238E27FC236}">
-                <a16:creationId xmlns:a16="http://schemas.microsoft.com/office/drawing/2014/main" id="{2014EA45-B985-471E-9DE0-BFF0DCE5F0BA}"/>
+                <a16:creationId xmlns:a16="http://schemas.microsoft.com/office/drawing/2014/main" id="{B183AAE4-A1A6-4327-AB78-E6BC83A3DCF3}"/>
               </a:ext>
             </a:extLst>
           </p:cNvPr>
@@ -11677,7 +11677,7 @@
           <p:cNvPr id="3" name="">
             <a:extLst xmlns:a="http://schemas.openxmlformats.org/drawingml/2006/main">
               <a:ext uri="{FF2B5EF4-FFF2-40B4-BE49-F238E27FC236}">
-                <a16:creationId xmlns:a16="http://schemas.microsoft.com/office/drawing/2014/main" id="{A170CFCF-AC38-4FDE-84BD-FF0F8FB49BB2}"/>
+                <a16:creationId xmlns:a16="http://schemas.microsoft.com/office/drawing/2014/main" id="{1D09D536-A700-415F-AEA6-0FFFAD81CFD5}"/>
               </a:ext>
             </a:extLst>
           </p:cNvPr>
@@ -11744,7 +11744,7 @@
           <p:cNvPr id="4" name="">
             <a:extLst xmlns:a="http://schemas.openxmlformats.org/drawingml/2006/main">
               <a:ext uri="{FF2B5EF4-FFF2-40B4-BE49-F238E27FC236}">
-                <a16:creationId xmlns:a16="http://schemas.microsoft.com/office/drawing/2014/main" id="{A0F884B3-5B47-4B3E-9D3F-485F8DD61396}"/>
+                <a16:creationId xmlns:a16="http://schemas.microsoft.com/office/drawing/2014/main" id="{8510C3D8-7638-464F-AB7B-B7CA9BE8E3CB}"/>
               </a:ext>
             </a:extLst>
           </p:cNvPr>
@@ -11776,7 +11776,7 @@
           <p:cNvPr id="5" name="">
             <a:extLst xmlns:a="http://schemas.openxmlformats.org/drawingml/2006/main">
               <a:ext uri="{FF2B5EF4-FFF2-40B4-BE49-F238E27FC236}">
-                <a16:creationId xmlns:a16="http://schemas.microsoft.com/office/drawing/2014/main" id="{3E1DB092-FC4C-422D-A3BA-7C7ED22F7DC1}"/>
+                <a16:creationId xmlns:a16="http://schemas.microsoft.com/office/drawing/2014/main" id="{E0344063-C224-4A28-80AA-B3AFEBF68E84}"/>
               </a:ext>
             </a:extLst>
           </p:cNvPr>
@@ -11839,7 +11839,7 @@
           <p:cNvPr id="6" name="">
             <a:extLst xmlns:a="http://schemas.openxmlformats.org/drawingml/2006/main">
               <a:ext uri="{FF2B5EF4-FFF2-40B4-BE49-F238E27FC236}">
-                <a16:creationId xmlns:a16="http://schemas.microsoft.com/office/drawing/2014/main" id="{5122018C-C274-4E4A-9DBB-F01BA54EDB67}"/>
+                <a16:creationId xmlns:a16="http://schemas.microsoft.com/office/drawing/2014/main" id="{38B9FF4D-A48A-4A77-8083-CC84B18E6AF0}"/>
               </a:ext>
             </a:extLst>
           </p:cNvPr>
@@ -11902,7 +11902,7 @@
           <p:cNvPr id="7" name="">
             <a:extLst xmlns:a="http://schemas.openxmlformats.org/drawingml/2006/main">
               <a:ext uri="{FF2B5EF4-FFF2-40B4-BE49-F238E27FC236}">
-                <a16:creationId xmlns:a16="http://schemas.microsoft.com/office/drawing/2014/main" id="{D949F5B9-0B47-4447-AF7F-73C4FA63E33B}"/>
+                <a16:creationId xmlns:a16="http://schemas.microsoft.com/office/drawing/2014/main" id="{F6ABAE73-BEB1-47CA-BDE0-E0879377CC27}"/>
               </a:ext>
             </a:extLst>
           </p:cNvPr>
@@ -11936,7 +11936,7 @@
           <p:cNvPr id="8" name="">
             <a:extLst xmlns:a="http://schemas.openxmlformats.org/drawingml/2006/main">
               <a:ext uri="{FF2B5EF4-FFF2-40B4-BE49-F238E27FC236}">
-                <a16:creationId xmlns:a16="http://schemas.microsoft.com/office/drawing/2014/main" id="{5B95BD44-B7B9-4AA7-9AEE-12BB98B1BF84}"/>
+                <a16:creationId xmlns:a16="http://schemas.microsoft.com/office/drawing/2014/main" id="{44D7D9F9-1557-48BA-BE8A-3207A67226A1}"/>
               </a:ext>
             </a:extLst>
           </p:cNvPr>
@@ -11968,7 +11968,7 @@
           <p:cNvPr id="9" name="">
             <a:extLst xmlns:a="http://schemas.openxmlformats.org/drawingml/2006/main">
               <a:ext uri="{FF2B5EF4-FFF2-40B4-BE49-F238E27FC236}">
-                <a16:creationId xmlns:a16="http://schemas.microsoft.com/office/drawing/2014/main" id="{B5D17EE7-CEC1-4524-8F80-99988963BDFA}"/>
+                <a16:creationId xmlns:a16="http://schemas.microsoft.com/office/drawing/2014/main" id="{43D1DAD4-15B7-4802-BB62-39228CC5508E}"/>
               </a:ext>
             </a:extLst>
           </p:cNvPr>
@@ -12031,7 +12031,7 @@
           <p:cNvPr id="10" name="">
             <a:extLst xmlns:a="http://schemas.openxmlformats.org/drawingml/2006/main">
               <a:ext uri="{FF2B5EF4-FFF2-40B4-BE49-F238E27FC236}">
-                <a16:creationId xmlns:a16="http://schemas.microsoft.com/office/drawing/2014/main" id="{99430139-18AB-4E78-AC38-32D49EDA8F33}"/>
+                <a16:creationId xmlns:a16="http://schemas.microsoft.com/office/drawing/2014/main" id="{BBABAB80-637A-490B-AAAC-B0775A2ED395}"/>
               </a:ext>
             </a:extLst>
           </p:cNvPr>
@@ -12094,7 +12094,7 @@
           <p:cNvPr id="11" name="">
             <a:extLst xmlns:a="http://schemas.openxmlformats.org/drawingml/2006/main">
               <a:ext uri="{FF2B5EF4-FFF2-40B4-BE49-F238E27FC236}">
-                <a16:creationId xmlns:a16="http://schemas.microsoft.com/office/drawing/2014/main" id="{66631484-7AB8-4BB4-9BE1-A2C3D215AD6E}"/>
+                <a16:creationId xmlns:a16="http://schemas.microsoft.com/office/drawing/2014/main" id="{A81F6EB4-8698-4661-95B2-C59F7D5CE114}"/>
               </a:ext>
             </a:extLst>
           </p:cNvPr>
@@ -12128,7 +12128,7 @@
           <p:cNvPr id="12" name="">
             <a:extLst xmlns:a="http://schemas.openxmlformats.org/drawingml/2006/main">
               <a:ext uri="{FF2B5EF4-FFF2-40B4-BE49-F238E27FC236}">
-                <a16:creationId xmlns:a16="http://schemas.microsoft.com/office/drawing/2014/main" id="{192AF1F0-6FB2-41BF-94BD-C2E387AB319A}"/>
+                <a16:creationId xmlns:a16="http://schemas.microsoft.com/office/drawing/2014/main" id="{37FB4EFE-D4F7-4C4F-A422-924F6601628D}"/>
               </a:ext>
             </a:extLst>
           </p:cNvPr>
@@ -12160,7 +12160,7 @@
           <p:cNvPr id="13" name="">
             <a:extLst xmlns:a="http://schemas.openxmlformats.org/drawingml/2006/main">
               <a:ext uri="{FF2B5EF4-FFF2-40B4-BE49-F238E27FC236}">
-                <a16:creationId xmlns:a16="http://schemas.microsoft.com/office/drawing/2014/main" id="{7FF6DFE2-E233-49BC-A642-5EF3356209F8}"/>
+                <a16:creationId xmlns:a16="http://schemas.microsoft.com/office/drawing/2014/main" id="{FAE7DDB6-34F7-4720-834B-B70DD488ED07}"/>
               </a:ext>
             </a:extLst>
           </p:cNvPr>
@@ -12223,7 +12223,7 @@
           <p:cNvPr id="14" name="">
             <a:extLst xmlns:a="http://schemas.openxmlformats.org/drawingml/2006/main">
               <a:ext uri="{FF2B5EF4-FFF2-40B4-BE49-F238E27FC236}">
-                <a16:creationId xmlns:a16="http://schemas.microsoft.com/office/drawing/2014/main" id="{FAEE2CB3-FB64-4AEC-854C-30D316D5FEF8}"/>
+                <a16:creationId xmlns:a16="http://schemas.microsoft.com/office/drawing/2014/main" id="{7C150046-A2C8-48BA-9F52-FE079999A8AB}"/>
               </a:ext>
             </a:extLst>
           </p:cNvPr>
@@ -12286,7 +12286,7 @@
           <p:cNvPr id="15" name="">
             <a:extLst xmlns:a="http://schemas.openxmlformats.org/drawingml/2006/main">
               <a:ext uri="{FF2B5EF4-FFF2-40B4-BE49-F238E27FC236}">
-                <a16:creationId xmlns:a16="http://schemas.microsoft.com/office/drawing/2014/main" id="{7E78A9B5-DFDA-435D-B477-6A2CC90DDA8E}"/>
+                <a16:creationId xmlns:a16="http://schemas.microsoft.com/office/drawing/2014/main" id="{5FAB9282-9424-418C-99A4-D4D5DFDDB674}"/>
               </a:ext>
             </a:extLst>
           </p:cNvPr>
@@ -12320,7 +12320,7 @@
           <p:cNvPr id="16" name="">
             <a:extLst xmlns:a="http://schemas.openxmlformats.org/drawingml/2006/main">
               <a:ext uri="{FF2B5EF4-FFF2-40B4-BE49-F238E27FC236}">
-                <a16:creationId xmlns:a16="http://schemas.microsoft.com/office/drawing/2014/main" id="{D1743DBC-70A0-4890-B353-F3174AF4D37A}"/>
+                <a16:creationId xmlns:a16="http://schemas.microsoft.com/office/drawing/2014/main" id="{E9BF7090-3C14-4A96-846A-F3A9116E7E40}"/>
               </a:ext>
             </a:extLst>
           </p:cNvPr>
@@ -12352,7 +12352,7 @@
           <p:cNvPr id="17" name="">
             <a:extLst xmlns:a="http://schemas.openxmlformats.org/drawingml/2006/main">
               <a:ext uri="{FF2B5EF4-FFF2-40B4-BE49-F238E27FC236}">
-                <a16:creationId xmlns:a16="http://schemas.microsoft.com/office/drawing/2014/main" id="{9F90DBC5-EBE1-4FC2-8580-3A2A93748D8F}"/>
+                <a16:creationId xmlns:a16="http://schemas.microsoft.com/office/drawing/2014/main" id="{80E90561-C4B9-486F-B744-12DF2BAC670D}"/>
               </a:ext>
             </a:extLst>
           </p:cNvPr>
@@ -12415,7 +12415,7 @@
           <p:cNvPr id="18" name="">
             <a:extLst xmlns:a="http://schemas.openxmlformats.org/drawingml/2006/main">
               <a:ext uri="{FF2B5EF4-FFF2-40B4-BE49-F238E27FC236}">
-                <a16:creationId xmlns:a16="http://schemas.microsoft.com/office/drawing/2014/main" id="{BF568D5F-7C7B-4D28-9E63-96D035A24218}"/>
+                <a16:creationId xmlns:a16="http://schemas.microsoft.com/office/drawing/2014/main" id="{5F9E3D81-56AE-486E-B31A-A1668F56F662}"/>
               </a:ext>
             </a:extLst>
           </p:cNvPr>
@@ -12478,7 +12478,7 @@
           <p:cNvPr id="19" name="">
             <a:extLst xmlns:a="http://schemas.openxmlformats.org/drawingml/2006/main">
               <a:ext uri="{FF2B5EF4-FFF2-40B4-BE49-F238E27FC236}">
-                <a16:creationId xmlns:a16="http://schemas.microsoft.com/office/drawing/2014/main" id="{84C1DB14-66A0-4042-B56C-03990FF35B07}"/>
+                <a16:creationId xmlns:a16="http://schemas.microsoft.com/office/drawing/2014/main" id="{E8A3F500-5776-450A-B8AC-A3927AC6BFE3}"/>
               </a:ext>
             </a:extLst>
           </p:cNvPr>
@@ -12512,7 +12512,7 @@
           <p:cNvPr id="20" name="">
             <a:extLst xmlns:a="http://schemas.openxmlformats.org/drawingml/2006/main">
               <a:ext uri="{FF2B5EF4-FFF2-40B4-BE49-F238E27FC236}">
-                <a16:creationId xmlns:a16="http://schemas.microsoft.com/office/drawing/2014/main" id="{B052C903-63EF-4A57-BCCF-16CDD5B59BF4}"/>
+                <a16:creationId xmlns:a16="http://schemas.microsoft.com/office/drawing/2014/main" id="{BA93DF9F-6857-4F3B-8AA9-027E1F9413AD}"/>
               </a:ext>
             </a:extLst>
           </p:cNvPr>
@@ -12544,7 +12544,7 @@
           <p:cNvPr id="21" name="">
             <a:extLst xmlns:a="http://schemas.openxmlformats.org/drawingml/2006/main">
               <a:ext uri="{FF2B5EF4-FFF2-40B4-BE49-F238E27FC236}">
-                <a16:creationId xmlns:a16="http://schemas.microsoft.com/office/drawing/2014/main" id="{F9E16F44-3001-46EF-8810-15F23C7CA62E}"/>
+                <a16:creationId xmlns:a16="http://schemas.microsoft.com/office/drawing/2014/main" id="{406358CB-8640-4220-B30C-13F7EE7B0A28}"/>
               </a:ext>
             </a:extLst>
           </p:cNvPr>
@@ -12607,7 +12607,7 @@
           <p:cNvPr id="22" name="">
             <a:extLst xmlns:a="http://schemas.openxmlformats.org/drawingml/2006/main">
               <a:ext uri="{FF2B5EF4-FFF2-40B4-BE49-F238E27FC236}">
-                <a16:creationId xmlns:a16="http://schemas.microsoft.com/office/drawing/2014/main" id="{189DDA1F-DFD4-480B-9F53-CA8CCF31B7C8}"/>
+                <a16:creationId xmlns:a16="http://schemas.microsoft.com/office/drawing/2014/main" id="{07551CE2-463C-4554-8ED1-3519E9706198}"/>
               </a:ext>
             </a:extLst>
           </p:cNvPr>
@@ -12639,7 +12639,7 @@
           <p:cNvPr id="23" name="">
             <a:extLst xmlns:a="http://schemas.openxmlformats.org/drawingml/2006/main">
               <a:ext uri="{FF2B5EF4-FFF2-40B4-BE49-F238E27FC236}">
-                <a16:creationId xmlns:a16="http://schemas.microsoft.com/office/drawing/2014/main" id="{DF89474C-1EFC-4962-8A6F-236C3B62FBB6}"/>
+                <a16:creationId xmlns:a16="http://schemas.microsoft.com/office/drawing/2014/main" id="{A113AB92-DEFD-4017-B871-DF2D6960488F}"/>
               </a:ext>
             </a:extLst>
           </p:cNvPr>
@@ -12702,7 +12702,7 @@
           <p:cNvPr id="24" name="">
             <a:extLst xmlns:a="http://schemas.openxmlformats.org/drawingml/2006/main">
               <a:ext uri="{FF2B5EF4-FFF2-40B4-BE49-F238E27FC236}">
-                <a16:creationId xmlns:a16="http://schemas.microsoft.com/office/drawing/2014/main" id="{4790CCD6-2720-4F9A-98DD-D105ED58D3B2}"/>
+                <a16:creationId xmlns:a16="http://schemas.microsoft.com/office/drawing/2014/main" id="{54168736-E707-4FA0-9E1E-93F35FA9EFAE}"/>
               </a:ext>
             </a:extLst>
           </p:cNvPr>
@@ -12714,7 +12714,7 @@
         <p:spPr>
           <a:xfrm xmlns:a="http://schemas.openxmlformats.org/drawingml/2006/main">
             <a:off x="6400800" y="3143250"/>
-            <a:ext cx="2000250" cy="495300"/>
+            <a:ext cx="1524000" cy="457200"/>
           </a:xfrm>
           <a:prstGeom xmlns:a="http://schemas.openxmlformats.org/drawingml/2006/main" prst="rect">
             <a:avLst/>
@@ -12737,7 +12737,7 @@
           <a:lstStyle xmlns:a="http://schemas.openxmlformats.org/drawingml/2006/main"/>
           <a:p xmlns:a="http://schemas.openxmlformats.org/drawingml/2006/main">
             <a:pPr algn="l">
-              <a:defRPr sz="2850" b="1">
+              <a:defRPr sz="2550" b="1">
                 <a:solidFill>
                   <a:srgbClr val="15936B"/>
                 </a:solidFill>
@@ -12747,7 +12747,7 @@
               </a:defRPr>
             </a:pPr>
             <a:r>
-              <a:rPr sz="2850" b="1">
+              <a:rPr sz="2550" b="1">
                 <a:solidFill>
                   <a:srgbClr val="15936B"/>
                 </a:solidFill>
@@ -12765,19 +12765,19 @@
           <p:cNvPr id="25" name="">
             <a:extLst xmlns:a="http://schemas.openxmlformats.org/drawingml/2006/main">
               <a:ext uri="{FF2B5EF4-FFF2-40B4-BE49-F238E27FC236}">
-                <a16:creationId xmlns:a16="http://schemas.microsoft.com/office/drawing/2014/main" id="{886C6898-2D6E-4D46-8456-2F04679B87EA}"/>
-              </a:ext>
-            </a:extLst>
-          </p:cNvPr>
-          <p:cNvSpPr>
-            <a:spLocks xmlns:a="http://schemas.openxmlformats.org/drawingml/2006/main" noGrp="1"/>
-          </p:cNvSpPr>
-          <p:nvPr/>
-        </p:nvSpPr>
-        <p:spPr>
-          <a:xfrm xmlns:a="http://schemas.openxmlformats.org/drawingml/2006/main">
-            <a:off x="6400800" y="3619500"/>
-            <a:ext cx="2000250" cy="419100"/>
+                <a16:creationId xmlns:a16="http://schemas.microsoft.com/office/drawing/2014/main" id="{42C3B3C7-10DE-4F24-92FE-7FFD507607C5}"/>
+              </a:ext>
+            </a:extLst>
+          </p:cNvPr>
+          <p:cNvSpPr>
+            <a:spLocks xmlns:a="http://schemas.openxmlformats.org/drawingml/2006/main" noGrp="1"/>
+          </p:cNvSpPr>
+          <p:nvPr/>
+        </p:nvSpPr>
+        <p:spPr>
+          <a:xfrm xmlns:a="http://schemas.openxmlformats.org/drawingml/2006/main">
+            <a:off x="6400800" y="3676650"/>
+            <a:ext cx="1524000" cy="342900"/>
           </a:xfrm>
           <a:prstGeom xmlns:a="http://schemas.openxmlformats.org/drawingml/2006/main" prst="rect">
             <a:avLst/>
@@ -12832,19 +12832,19 @@
           <p:cNvPr id="26" name="">
             <a:extLst xmlns:a="http://schemas.openxmlformats.org/drawingml/2006/main">
               <a:ext uri="{FF2B5EF4-FFF2-40B4-BE49-F238E27FC236}">
-                <a16:creationId xmlns:a16="http://schemas.microsoft.com/office/drawing/2014/main" id="{F6FA5B67-BE06-4013-9901-F94A59461CE6}"/>
-              </a:ext>
-            </a:extLst>
-          </p:cNvPr>
-          <p:cNvSpPr>
-            <a:spLocks xmlns:a="http://schemas.openxmlformats.org/drawingml/2006/main" noGrp="1"/>
-          </p:cNvSpPr>
-          <p:nvPr/>
-        </p:nvSpPr>
-        <p:spPr>
-          <a:xfrm xmlns:a="http://schemas.openxmlformats.org/drawingml/2006/main">
-            <a:off x="8305800" y="3143250"/>
-            <a:ext cx="2000250" cy="495300"/>
+                <a16:creationId xmlns:a16="http://schemas.microsoft.com/office/drawing/2014/main" id="{559DEE71-0DC8-4590-97C6-286CBD5DE0B8}"/>
+              </a:ext>
+            </a:extLst>
+          </p:cNvPr>
+          <p:cNvSpPr>
+            <a:spLocks xmlns:a="http://schemas.openxmlformats.org/drawingml/2006/main" noGrp="1"/>
+          </p:cNvSpPr>
+          <p:nvPr/>
+        </p:nvSpPr>
+        <p:spPr>
+          <a:xfrm xmlns:a="http://schemas.openxmlformats.org/drawingml/2006/main">
+            <a:off x="8172450" y="3143250"/>
+            <a:ext cx="1257300" cy="457200"/>
           </a:xfrm>
           <a:prstGeom xmlns:a="http://schemas.openxmlformats.org/drawingml/2006/main" prst="rect">
             <a:avLst/>
@@ -12867,7 +12867,7 @@
           <a:lstStyle xmlns:a="http://schemas.openxmlformats.org/drawingml/2006/main"/>
           <a:p xmlns:a="http://schemas.openxmlformats.org/drawingml/2006/main">
             <a:pPr algn="l">
-              <a:defRPr sz="2850" b="1">
+              <a:defRPr sz="2550" b="1">
                 <a:solidFill>
                   <a:srgbClr val="2C7FB8"/>
                 </a:solidFill>
@@ -12877,7 +12877,7 @@
               </a:defRPr>
             </a:pPr>
             <a:r>
-              <a:rPr sz="2850" b="1">
+              <a:rPr sz="2550" b="1">
                 <a:solidFill>
                   <a:srgbClr val="2C7FB8"/>
                 </a:solidFill>
@@ -12895,19 +12895,19 @@
           <p:cNvPr id="27" name="">
             <a:extLst xmlns:a="http://schemas.openxmlformats.org/drawingml/2006/main">
               <a:ext uri="{FF2B5EF4-FFF2-40B4-BE49-F238E27FC236}">
-                <a16:creationId xmlns:a16="http://schemas.microsoft.com/office/drawing/2014/main" id="{54659694-DD2F-48F9-9301-7D4D3D221B43}"/>
-              </a:ext>
-            </a:extLst>
-          </p:cNvPr>
-          <p:cNvSpPr>
-            <a:spLocks xmlns:a="http://schemas.openxmlformats.org/drawingml/2006/main" noGrp="1"/>
-          </p:cNvSpPr>
-          <p:nvPr/>
-        </p:nvSpPr>
-        <p:spPr>
-          <a:xfrm xmlns:a="http://schemas.openxmlformats.org/drawingml/2006/main">
-            <a:off x="8305800" y="3619500"/>
-            <a:ext cx="2000250" cy="419100"/>
+                <a16:creationId xmlns:a16="http://schemas.microsoft.com/office/drawing/2014/main" id="{5872B5DF-F74E-445C-8F16-B785F1A957A5}"/>
+              </a:ext>
+            </a:extLst>
+          </p:cNvPr>
+          <p:cNvSpPr>
+            <a:spLocks xmlns:a="http://schemas.openxmlformats.org/drawingml/2006/main" noGrp="1"/>
+          </p:cNvSpPr>
+          <p:nvPr/>
+        </p:nvSpPr>
+        <p:spPr>
+          <a:xfrm xmlns:a="http://schemas.openxmlformats.org/drawingml/2006/main">
+            <a:off x="8172450" y="3676650"/>
+            <a:ext cx="1257300" cy="342900"/>
           </a:xfrm>
           <a:prstGeom xmlns:a="http://schemas.openxmlformats.org/drawingml/2006/main" prst="rect">
             <a:avLst/>
@@ -12962,19 +12962,19 @@
           <p:cNvPr id="28" name="">
             <a:extLst xmlns:a="http://schemas.openxmlformats.org/drawingml/2006/main">
               <a:ext uri="{FF2B5EF4-FFF2-40B4-BE49-F238E27FC236}">
-                <a16:creationId xmlns:a16="http://schemas.microsoft.com/office/drawing/2014/main" id="{02157B68-36DA-4127-BD29-231977095534}"/>
-              </a:ext>
-            </a:extLst>
-          </p:cNvPr>
-          <p:cNvSpPr>
-            <a:spLocks xmlns:a="http://schemas.openxmlformats.org/drawingml/2006/main" noGrp="1"/>
-          </p:cNvSpPr>
-          <p:nvPr/>
-        </p:nvSpPr>
-        <p:spPr>
-          <a:xfrm xmlns:a="http://schemas.openxmlformats.org/drawingml/2006/main">
-            <a:off x="9829800" y="3143250"/>
-            <a:ext cx="2000250" cy="495300"/>
+                <a16:creationId xmlns:a16="http://schemas.microsoft.com/office/drawing/2014/main" id="{098B4196-38BD-418B-B5C9-1F6B3CBE8BE1}"/>
+              </a:ext>
+            </a:extLst>
+          </p:cNvPr>
+          <p:cNvSpPr>
+            <a:spLocks xmlns:a="http://schemas.openxmlformats.org/drawingml/2006/main" noGrp="1"/>
+          </p:cNvSpPr>
+          <p:nvPr/>
+        </p:nvSpPr>
+        <p:spPr>
+          <a:xfrm xmlns:a="http://schemas.openxmlformats.org/drawingml/2006/main">
+            <a:off x="9620250" y="3143250"/>
+            <a:ext cx="1143000" cy="457200"/>
           </a:xfrm>
           <a:prstGeom xmlns:a="http://schemas.openxmlformats.org/drawingml/2006/main" prst="rect">
             <a:avLst/>
@@ -12997,7 +12997,7 @@
           <a:lstStyle xmlns:a="http://schemas.openxmlformats.org/drawingml/2006/main"/>
           <a:p xmlns:a="http://schemas.openxmlformats.org/drawingml/2006/main">
             <a:pPr algn="l">
-              <a:defRPr sz="2850" b="1">
+              <a:defRPr sz="2550" b="1">
                 <a:solidFill>
                   <a:srgbClr val="D9942C"/>
                 </a:solidFill>
@@ -13007,7 +13007,7 @@
               </a:defRPr>
             </a:pPr>
             <a:r>
-              <a:rPr sz="2850" b="1">
+              <a:rPr sz="2550" b="1">
                 <a:solidFill>
                   <a:srgbClr val="D9942C"/>
                 </a:solidFill>
@@ -13025,19 +13025,19 @@
           <p:cNvPr id="29" name="">
             <a:extLst xmlns:a="http://schemas.openxmlformats.org/drawingml/2006/main">
               <a:ext uri="{FF2B5EF4-FFF2-40B4-BE49-F238E27FC236}">
-                <a16:creationId xmlns:a16="http://schemas.microsoft.com/office/drawing/2014/main" id="{6E577D2D-1F18-4ACC-B0DC-9697A264D48F}"/>
-              </a:ext>
-            </a:extLst>
-          </p:cNvPr>
-          <p:cNvSpPr>
-            <a:spLocks xmlns:a="http://schemas.openxmlformats.org/drawingml/2006/main" noGrp="1"/>
-          </p:cNvSpPr>
-          <p:nvPr/>
-        </p:nvSpPr>
-        <p:spPr>
-          <a:xfrm xmlns:a="http://schemas.openxmlformats.org/drawingml/2006/main">
-            <a:off x="9829800" y="3619500"/>
-            <a:ext cx="2000250" cy="419100"/>
+                <a16:creationId xmlns:a16="http://schemas.microsoft.com/office/drawing/2014/main" id="{4A6876B0-72EE-47EF-8054-D6DB36AC706B}"/>
+              </a:ext>
+            </a:extLst>
+          </p:cNvPr>
+          <p:cNvSpPr>
+            <a:spLocks xmlns:a="http://schemas.openxmlformats.org/drawingml/2006/main" noGrp="1"/>
+          </p:cNvSpPr>
+          <p:nvPr/>
+        </p:nvSpPr>
+        <p:spPr>
+          <a:xfrm xmlns:a="http://schemas.openxmlformats.org/drawingml/2006/main">
+            <a:off x="9620250" y="3676650"/>
+            <a:ext cx="1143000" cy="342900"/>
           </a:xfrm>
           <a:prstGeom xmlns:a="http://schemas.openxmlformats.org/drawingml/2006/main" prst="rect">
             <a:avLst/>
@@ -13092,7 +13092,7 @@
           <p:cNvPr id="30" name="">
             <a:extLst xmlns:a="http://schemas.openxmlformats.org/drawingml/2006/main">
               <a:ext uri="{FF2B5EF4-FFF2-40B4-BE49-F238E27FC236}">
-                <a16:creationId xmlns:a16="http://schemas.microsoft.com/office/drawing/2014/main" id="{1F04A6A1-196A-4485-945E-3D72F43A3673}"/>
+                <a16:creationId xmlns:a16="http://schemas.microsoft.com/office/drawing/2014/main" id="{C87E7585-B6CE-4C4C-9DB0-6F6338AFD209}"/>
               </a:ext>
             </a:extLst>
           </p:cNvPr>
@@ -13124,7 +13124,7 @@
           <p:cNvPr id="31" name="">
             <a:extLst xmlns:a="http://schemas.openxmlformats.org/drawingml/2006/main">
               <a:ext uri="{FF2B5EF4-FFF2-40B4-BE49-F238E27FC236}">
-                <a16:creationId xmlns:a16="http://schemas.microsoft.com/office/drawing/2014/main" id="{85208437-1157-4F6D-85B8-2B149A14F535}"/>
+                <a16:creationId xmlns:a16="http://schemas.microsoft.com/office/drawing/2014/main" id="{C8A5361E-F2EE-43F3-8DAF-51C06984A3BD}"/>
               </a:ext>
             </a:extLst>
           </p:cNvPr>
@@ -13156,7 +13156,7 @@
           <p:cNvPr id="32" name="">
             <a:extLst xmlns:a="http://schemas.openxmlformats.org/drawingml/2006/main">
               <a:ext uri="{FF2B5EF4-FFF2-40B4-BE49-F238E27FC236}">
-                <a16:creationId xmlns:a16="http://schemas.microsoft.com/office/drawing/2014/main" id="{37903784-8161-4EBD-A5AF-CA1B0C55C4B0}"/>
+                <a16:creationId xmlns:a16="http://schemas.microsoft.com/office/drawing/2014/main" id="{B3DA20E2-50AB-4DB4-B712-BC6907457E06}"/>
               </a:ext>
             </a:extLst>
           </p:cNvPr>
@@ -13223,7 +13223,7 @@
           <p:cNvPr id="33" name="">
             <a:extLst xmlns:a="http://schemas.openxmlformats.org/drawingml/2006/main">
               <a:ext uri="{FF2B5EF4-FFF2-40B4-BE49-F238E27FC236}">
-                <a16:creationId xmlns:a16="http://schemas.microsoft.com/office/drawing/2014/main" id="{CAA6E47F-70DD-4D68-9EEF-2ED747454636}"/>
+                <a16:creationId xmlns:a16="http://schemas.microsoft.com/office/drawing/2014/main" id="{832C5DC8-86D9-46CE-B7DB-C2EB7DC46ECA}"/>
               </a:ext>
             </a:extLst>
           </p:cNvPr>
@@ -13286,7 +13286,7 @@
           <p:cNvPr id="34" name="">
             <a:extLst xmlns:a="http://schemas.openxmlformats.org/drawingml/2006/main">
               <a:ext uri="{FF2B5EF4-FFF2-40B4-BE49-F238E27FC236}">
-                <a16:creationId xmlns:a16="http://schemas.microsoft.com/office/drawing/2014/main" id="{361AB778-4619-4B4E-8EE9-1BDF482901DA}"/>
+                <a16:creationId xmlns:a16="http://schemas.microsoft.com/office/drawing/2014/main" id="{2B81E5F4-9F71-43D3-8295-906FD72AC2C8}"/>
               </a:ext>
             </a:extLst>
           </p:cNvPr>
@@ -13318,7 +13318,7 @@
           <p:cNvPr id="35" name="">
             <a:extLst xmlns:a="http://schemas.openxmlformats.org/drawingml/2006/main">
               <a:ext uri="{FF2B5EF4-FFF2-40B4-BE49-F238E27FC236}">
-                <a16:creationId xmlns:a16="http://schemas.microsoft.com/office/drawing/2014/main" id="{984FE5CE-673F-465D-9C2E-4810EAD44205}"/>
+                <a16:creationId xmlns:a16="http://schemas.microsoft.com/office/drawing/2014/main" id="{572EE049-EFE8-4751-9D10-DFAFE4171BE9}"/>
               </a:ext>
             </a:extLst>
           </p:cNvPr>
@@ -13381,7 +13381,7 @@
           <p:cNvPr id="36" name="">
             <a:extLst xmlns:a="http://schemas.openxmlformats.org/drawingml/2006/main">
               <a:ext uri="{FF2B5EF4-FFF2-40B4-BE49-F238E27FC236}">
-                <a16:creationId xmlns:a16="http://schemas.microsoft.com/office/drawing/2014/main" id="{006E0808-9E2C-4AA2-BCB3-FB1262FBF07C}"/>
+                <a16:creationId xmlns:a16="http://schemas.microsoft.com/office/drawing/2014/main" id="{23DAD91E-8312-46B6-A032-ECB294F92A33}"/>
               </a:ext>
             </a:extLst>
           </p:cNvPr>
@@ -13442,7 +13442,7 @@
     </p:spTree>
     <p:extLst>
       <p:ext uri="{BB962C8B-B14F-4D97-AF65-F5344CB8AC3E}">
-        <p14:creationId xmlns:p14="http://schemas.microsoft.com/office/powerpoint/2010/main" val="1226466060"/>
+        <p14:creationId xmlns:p14="http://schemas.microsoft.com/office/powerpoint/2010/main" val="957789122"/>
       </p:ext>
     </p:extLst>
   </p:cSld>
@@ -13473,7 +13473,7 @@
           <p:cNvPr id="1" name="">
             <a:extLst xmlns:a="http://schemas.openxmlformats.org/drawingml/2006/main">
               <a:ext uri="{FF2B5EF4-FFF2-40B4-BE49-F238E27FC236}">
-                <a16:creationId xmlns:a16="http://schemas.microsoft.com/office/drawing/2014/main" id="{30B83682-41B7-4264-8413-372CBE984B4D}"/>
+                <a16:creationId xmlns:a16="http://schemas.microsoft.com/office/drawing/2014/main" id="{93963685-734F-43FE-9251-6945C17E9CB4}"/>
               </a:ext>
             </a:extLst>
           </p:cNvPr>
@@ -13536,7 +13536,7 @@
           <p:cNvPr id="2" name="">
             <a:extLst xmlns:a="http://schemas.openxmlformats.org/drawingml/2006/main">
               <a:ext uri="{FF2B5EF4-FFF2-40B4-BE49-F238E27FC236}">
-                <a16:creationId xmlns:a16="http://schemas.microsoft.com/office/drawing/2014/main" id="{B606A888-26D5-4E33-91C0-BCCAA8638EAD}"/>
+                <a16:creationId xmlns:a16="http://schemas.microsoft.com/office/drawing/2014/main" id="{F808F20D-8E16-49CE-A9FD-FA22D69B4F80}"/>
               </a:ext>
             </a:extLst>
           </p:cNvPr>
@@ -13603,7 +13603,7 @@
           <p:cNvPr id="3" name="">
             <a:extLst xmlns:a="http://schemas.openxmlformats.org/drawingml/2006/main">
               <a:ext uri="{FF2B5EF4-FFF2-40B4-BE49-F238E27FC236}">
-                <a16:creationId xmlns:a16="http://schemas.microsoft.com/office/drawing/2014/main" id="{299AB854-F798-47D1-8258-29EA0428F464}"/>
+                <a16:creationId xmlns:a16="http://schemas.microsoft.com/office/drawing/2014/main" id="{0AFC1B00-66DA-4958-BEBB-15ED077316C5}"/>
               </a:ext>
             </a:extLst>
           </p:cNvPr>
@@ -13670,7 +13670,7 @@
           <p:cNvPr id="4" name="">
             <a:extLst xmlns:a="http://schemas.openxmlformats.org/drawingml/2006/main">
               <a:ext uri="{FF2B5EF4-FFF2-40B4-BE49-F238E27FC236}">
-                <a16:creationId xmlns:a16="http://schemas.microsoft.com/office/drawing/2014/main" id="{4138E417-F73C-43AE-937C-D2BFA532A376}"/>
+                <a16:creationId xmlns:a16="http://schemas.microsoft.com/office/drawing/2014/main" id="{2387AE66-08FF-4511-A4E1-087D35E84CC3}"/>
               </a:ext>
             </a:extLst>
           </p:cNvPr>
@@ -13702,7 +13702,7 @@
           <p:cNvPr id="5" name="">
             <a:extLst xmlns:a="http://schemas.openxmlformats.org/drawingml/2006/main">
               <a:ext uri="{FF2B5EF4-FFF2-40B4-BE49-F238E27FC236}">
-                <a16:creationId xmlns:a16="http://schemas.microsoft.com/office/drawing/2014/main" id="{EE8B5F0F-F8F4-42B5-9627-CD4941C186D9}"/>
+                <a16:creationId xmlns:a16="http://schemas.microsoft.com/office/drawing/2014/main" id="{E66CA215-0836-412F-AA6E-0E200D16036D}"/>
               </a:ext>
             </a:extLst>
           </p:cNvPr>
@@ -13765,7 +13765,7 @@
           <p:cNvPr id="6" name="">
             <a:extLst xmlns:a="http://schemas.openxmlformats.org/drawingml/2006/main">
               <a:ext uri="{FF2B5EF4-FFF2-40B4-BE49-F238E27FC236}">
-                <a16:creationId xmlns:a16="http://schemas.microsoft.com/office/drawing/2014/main" id="{0F772E77-16D5-40F2-9E29-C94B325DB1A2}"/>
+                <a16:creationId xmlns:a16="http://schemas.microsoft.com/office/drawing/2014/main" id="{61CA546A-F8DF-4503-8B04-BB1AF70C126F}"/>
               </a:ext>
             </a:extLst>
           </p:cNvPr>
@@ -13797,7 +13797,7 @@
           <p:cNvPr id="7" name="">
             <a:extLst xmlns:a="http://schemas.openxmlformats.org/drawingml/2006/main">
               <a:ext uri="{FF2B5EF4-FFF2-40B4-BE49-F238E27FC236}">
-                <a16:creationId xmlns:a16="http://schemas.microsoft.com/office/drawing/2014/main" id="{C4CEEA44-A798-410A-8EC7-F6560E24AF28}"/>
+                <a16:creationId xmlns:a16="http://schemas.microsoft.com/office/drawing/2014/main" id="{94D93B69-2DD1-4E02-A6AF-F78298175DF8}"/>
               </a:ext>
             </a:extLst>
           </p:cNvPr>
@@ -13860,7 +13860,7 @@
           <p:cNvPr id="8" name="">
             <a:extLst xmlns:a="http://schemas.openxmlformats.org/drawingml/2006/main">
               <a:ext uri="{FF2B5EF4-FFF2-40B4-BE49-F238E27FC236}">
-                <a16:creationId xmlns:a16="http://schemas.microsoft.com/office/drawing/2014/main" id="{20862B60-4175-4AA4-B8E0-DF537B7D2E87}"/>
+                <a16:creationId xmlns:a16="http://schemas.microsoft.com/office/drawing/2014/main" id="{6171926F-61EA-466F-A505-3A101C0987B7}"/>
               </a:ext>
             </a:extLst>
           </p:cNvPr>
@@ -13923,7 +13923,7 @@
           <p:cNvPr id="9" name="">
             <a:extLst xmlns:a="http://schemas.openxmlformats.org/drawingml/2006/main">
               <a:ext uri="{FF2B5EF4-FFF2-40B4-BE49-F238E27FC236}">
-                <a16:creationId xmlns:a16="http://schemas.microsoft.com/office/drawing/2014/main" id="{9666DDC9-676E-40D3-A2BA-5C2A9D767FA4}"/>
+                <a16:creationId xmlns:a16="http://schemas.microsoft.com/office/drawing/2014/main" id="{AD057D6D-EBB8-44C6-B2B8-AB5B057DFC55}"/>
               </a:ext>
             </a:extLst>
           </p:cNvPr>
@@ -13955,7 +13955,7 @@
           <p:cNvPr id="10" name="">
             <a:extLst xmlns:a="http://schemas.openxmlformats.org/drawingml/2006/main">
               <a:ext uri="{FF2B5EF4-FFF2-40B4-BE49-F238E27FC236}">
-                <a16:creationId xmlns:a16="http://schemas.microsoft.com/office/drawing/2014/main" id="{A8F471FF-00AA-43D8-996E-5CF3B244726A}"/>
+                <a16:creationId xmlns:a16="http://schemas.microsoft.com/office/drawing/2014/main" id="{7F0E3B2B-B218-4230-8EE0-F5BEDA38CEBC}"/>
               </a:ext>
             </a:extLst>
           </p:cNvPr>
@@ -14018,7 +14018,7 @@
           <p:cNvPr id="11" name="">
             <a:extLst xmlns:a="http://schemas.openxmlformats.org/drawingml/2006/main">
               <a:ext uri="{FF2B5EF4-FFF2-40B4-BE49-F238E27FC236}">
-                <a16:creationId xmlns:a16="http://schemas.microsoft.com/office/drawing/2014/main" id="{7569FAEF-BE80-4352-B7FE-319BCFE97160}"/>
+                <a16:creationId xmlns:a16="http://schemas.microsoft.com/office/drawing/2014/main" id="{4A3C4D8D-83A5-4180-8DF6-63ECB55F1366}"/>
               </a:ext>
             </a:extLst>
           </p:cNvPr>
@@ -14081,7 +14081,7 @@
           <p:cNvPr id="12" name="">
             <a:extLst xmlns:a="http://schemas.openxmlformats.org/drawingml/2006/main">
               <a:ext uri="{FF2B5EF4-FFF2-40B4-BE49-F238E27FC236}">
-                <a16:creationId xmlns:a16="http://schemas.microsoft.com/office/drawing/2014/main" id="{B0B749A9-D4DE-4148-98B8-A42A647C6AB3}"/>
+                <a16:creationId xmlns:a16="http://schemas.microsoft.com/office/drawing/2014/main" id="{A22254D4-C0D8-424C-B3AB-8EE034E4B97C}"/>
               </a:ext>
             </a:extLst>
           </p:cNvPr>
@@ -14113,7 +14113,7 @@
           <p:cNvPr id="13" name="">
             <a:extLst xmlns:a="http://schemas.openxmlformats.org/drawingml/2006/main">
               <a:ext uri="{FF2B5EF4-FFF2-40B4-BE49-F238E27FC236}">
-                <a16:creationId xmlns:a16="http://schemas.microsoft.com/office/drawing/2014/main" id="{91E8C93B-3758-4A04-BADE-A1EECBF01EF0}"/>
+                <a16:creationId xmlns:a16="http://schemas.microsoft.com/office/drawing/2014/main" id="{F7872BE5-C925-45DC-9CEF-06BEDD95C409}"/>
               </a:ext>
             </a:extLst>
           </p:cNvPr>
@@ -14176,7 +14176,7 @@
           <p:cNvPr id="14" name="">
             <a:extLst xmlns:a="http://schemas.openxmlformats.org/drawingml/2006/main">
               <a:ext uri="{FF2B5EF4-FFF2-40B4-BE49-F238E27FC236}">
-                <a16:creationId xmlns:a16="http://schemas.microsoft.com/office/drawing/2014/main" id="{E1F8C13F-D037-49E8-A31E-63112C68563B}"/>
+                <a16:creationId xmlns:a16="http://schemas.microsoft.com/office/drawing/2014/main" id="{B08E854E-AE93-4596-8C09-CB3B5181DC57}"/>
               </a:ext>
             </a:extLst>
           </p:cNvPr>
@@ -14239,7 +14239,7 @@
           <p:cNvPr id="15" name="">
             <a:extLst xmlns:a="http://schemas.openxmlformats.org/drawingml/2006/main">
               <a:ext uri="{FF2B5EF4-FFF2-40B4-BE49-F238E27FC236}">
-                <a16:creationId xmlns:a16="http://schemas.microsoft.com/office/drawing/2014/main" id="{AF492165-C9E8-4E53-B046-DCCE0CE408BF}"/>
+                <a16:creationId xmlns:a16="http://schemas.microsoft.com/office/drawing/2014/main" id="{95284E28-0CAC-454B-925B-629E9499D26C}"/>
               </a:ext>
             </a:extLst>
           </p:cNvPr>
@@ -14271,7 +14271,7 @@
           <p:cNvPr id="16" name="">
             <a:extLst xmlns:a="http://schemas.openxmlformats.org/drawingml/2006/main">
               <a:ext uri="{FF2B5EF4-FFF2-40B4-BE49-F238E27FC236}">
-                <a16:creationId xmlns:a16="http://schemas.microsoft.com/office/drawing/2014/main" id="{AABEFB46-F433-416F-8F3A-5C70CECA5171}"/>
+                <a16:creationId xmlns:a16="http://schemas.microsoft.com/office/drawing/2014/main" id="{AD7A5E3E-78DE-49F9-BF15-972D6AD99483}"/>
               </a:ext>
             </a:extLst>
           </p:cNvPr>
@@ -14334,7 +14334,7 @@
           <p:cNvPr id="17" name="">
             <a:extLst xmlns:a="http://schemas.openxmlformats.org/drawingml/2006/main">
               <a:ext uri="{FF2B5EF4-FFF2-40B4-BE49-F238E27FC236}">
-                <a16:creationId xmlns:a16="http://schemas.microsoft.com/office/drawing/2014/main" id="{830E8488-A5D9-4C93-9B33-251707398963}"/>
+                <a16:creationId xmlns:a16="http://schemas.microsoft.com/office/drawing/2014/main" id="{F4F285FB-7F3B-412C-831D-BA10B8B4ADC4}"/>
               </a:ext>
             </a:extLst>
           </p:cNvPr>
@@ -14397,7 +14397,7 @@
           <p:cNvPr id="18" name="">
             <a:extLst xmlns:a="http://schemas.openxmlformats.org/drawingml/2006/main">
               <a:ext uri="{FF2B5EF4-FFF2-40B4-BE49-F238E27FC236}">
-                <a16:creationId xmlns:a16="http://schemas.microsoft.com/office/drawing/2014/main" id="{737AD6A1-A25B-44C6-8E31-1C490CB593E8}"/>
+                <a16:creationId xmlns:a16="http://schemas.microsoft.com/office/drawing/2014/main" id="{7C231352-D1A1-4C99-ADC2-7EE9AB00A01A}"/>
               </a:ext>
             </a:extLst>
           </p:cNvPr>
@@ -14429,7 +14429,7 @@
           <p:cNvPr id="19" name="">
             <a:extLst xmlns:a="http://schemas.openxmlformats.org/drawingml/2006/main">
               <a:ext uri="{FF2B5EF4-FFF2-40B4-BE49-F238E27FC236}">
-                <a16:creationId xmlns:a16="http://schemas.microsoft.com/office/drawing/2014/main" id="{253F16E2-E389-460C-8863-968470B09545}"/>
+                <a16:creationId xmlns:a16="http://schemas.microsoft.com/office/drawing/2014/main" id="{6913EB04-9C0D-4851-A4B1-2FA9440CB7E5}"/>
               </a:ext>
             </a:extLst>
           </p:cNvPr>
@@ -14492,7 +14492,7 @@
           <p:cNvPr id="20" name="">
             <a:extLst xmlns:a="http://schemas.openxmlformats.org/drawingml/2006/main">
               <a:ext uri="{FF2B5EF4-FFF2-40B4-BE49-F238E27FC236}">
-                <a16:creationId xmlns:a16="http://schemas.microsoft.com/office/drawing/2014/main" id="{913A8E35-5AD2-4A0C-8D2B-7AE15B8902CE}"/>
+                <a16:creationId xmlns:a16="http://schemas.microsoft.com/office/drawing/2014/main" id="{E351985B-8522-4308-9E77-CFBFA3567C22}"/>
               </a:ext>
             </a:extLst>
           </p:cNvPr>
@@ -14555,7 +14555,7 @@
           <p:cNvPr id="21" name="">
             <a:extLst xmlns:a="http://schemas.openxmlformats.org/drawingml/2006/main">
               <a:ext uri="{FF2B5EF4-FFF2-40B4-BE49-F238E27FC236}">
-                <a16:creationId xmlns:a16="http://schemas.microsoft.com/office/drawing/2014/main" id="{879BD98A-7B96-43B8-92DE-DBCC52DFAA6F}"/>
+                <a16:creationId xmlns:a16="http://schemas.microsoft.com/office/drawing/2014/main" id="{21AE1A09-2A80-44E2-A59B-C9436581974E}"/>
               </a:ext>
             </a:extLst>
           </p:cNvPr>
@@ -14587,7 +14587,7 @@
           <p:cNvPr id="22" name="">
             <a:extLst xmlns:a="http://schemas.openxmlformats.org/drawingml/2006/main">
               <a:ext uri="{FF2B5EF4-FFF2-40B4-BE49-F238E27FC236}">
-                <a16:creationId xmlns:a16="http://schemas.microsoft.com/office/drawing/2014/main" id="{119826F4-4907-47C1-8902-A5686EA19D87}"/>
+                <a16:creationId xmlns:a16="http://schemas.microsoft.com/office/drawing/2014/main" id="{755DEF49-9167-4724-AF10-B965880FF49E}"/>
               </a:ext>
             </a:extLst>
           </p:cNvPr>
@@ -14650,7 +14650,7 @@
           <p:cNvPr id="23" name="">
             <a:extLst xmlns:a="http://schemas.openxmlformats.org/drawingml/2006/main">
               <a:ext uri="{FF2B5EF4-FFF2-40B4-BE49-F238E27FC236}">
-                <a16:creationId xmlns:a16="http://schemas.microsoft.com/office/drawing/2014/main" id="{039172AE-EE20-4062-8723-3594206A7E08}"/>
+                <a16:creationId xmlns:a16="http://schemas.microsoft.com/office/drawing/2014/main" id="{7AC1A77E-37CF-45F8-8FCA-296C51DC37F5}"/>
               </a:ext>
             </a:extLst>
           </p:cNvPr>
@@ -14713,7 +14713,7 @@
           <p:cNvPr id="24" name="">
             <a:extLst xmlns:a="http://schemas.openxmlformats.org/drawingml/2006/main">
               <a:ext uri="{FF2B5EF4-FFF2-40B4-BE49-F238E27FC236}">
-                <a16:creationId xmlns:a16="http://schemas.microsoft.com/office/drawing/2014/main" id="{ADFF53F3-A797-41B8-96E4-61413892DF36}"/>
+                <a16:creationId xmlns:a16="http://schemas.microsoft.com/office/drawing/2014/main" id="{5B02441A-0689-471F-84A8-0F689A118E30}"/>
               </a:ext>
             </a:extLst>
           </p:cNvPr>
@@ -14745,7 +14745,7 @@
           <p:cNvPr id="25" name="">
             <a:extLst xmlns:a="http://schemas.openxmlformats.org/drawingml/2006/main">
               <a:ext uri="{FF2B5EF4-FFF2-40B4-BE49-F238E27FC236}">
-                <a16:creationId xmlns:a16="http://schemas.microsoft.com/office/drawing/2014/main" id="{127D625D-1266-41F9-8B07-39946E133657}"/>
+                <a16:creationId xmlns:a16="http://schemas.microsoft.com/office/drawing/2014/main" id="{66399B24-202C-4259-B19D-34D25C860C62}"/>
               </a:ext>
             </a:extLst>
           </p:cNvPr>
@@ -14808,7 +14808,7 @@
           <p:cNvPr id="26" name="">
             <a:extLst xmlns:a="http://schemas.openxmlformats.org/drawingml/2006/main">
               <a:ext uri="{FF2B5EF4-FFF2-40B4-BE49-F238E27FC236}">
-                <a16:creationId xmlns:a16="http://schemas.microsoft.com/office/drawing/2014/main" id="{A95CD9BB-737F-4737-9D8B-3CAA969898A4}"/>
+                <a16:creationId xmlns:a16="http://schemas.microsoft.com/office/drawing/2014/main" id="{E0470B3A-80A9-45C7-BC33-34A0F5C31959}"/>
               </a:ext>
             </a:extLst>
           </p:cNvPr>
@@ -14871,7 +14871,7 @@
           <p:cNvPr id="27" name="">
             <a:extLst xmlns:a="http://schemas.openxmlformats.org/drawingml/2006/main">
               <a:ext uri="{FF2B5EF4-FFF2-40B4-BE49-F238E27FC236}">
-                <a16:creationId xmlns:a16="http://schemas.microsoft.com/office/drawing/2014/main" id="{9331D46A-5E8A-4DC0-9939-CB2A95598BEB}"/>
+                <a16:creationId xmlns:a16="http://schemas.microsoft.com/office/drawing/2014/main" id="{726C9418-740E-45AA-9581-663769C10357}"/>
               </a:ext>
             </a:extLst>
           </p:cNvPr>
@@ -14903,7 +14903,7 @@
           <p:cNvPr id="28" name="">
             <a:extLst xmlns:a="http://schemas.openxmlformats.org/drawingml/2006/main">
               <a:ext uri="{FF2B5EF4-FFF2-40B4-BE49-F238E27FC236}">
-                <a16:creationId xmlns:a16="http://schemas.microsoft.com/office/drawing/2014/main" id="{A26F2186-73E2-4C7B-9293-AC22E2FFA7D5}"/>
+                <a16:creationId xmlns:a16="http://schemas.microsoft.com/office/drawing/2014/main" id="{8FCB1F7B-8586-42E5-A9D5-E84131951E49}"/>
               </a:ext>
             </a:extLst>
           </p:cNvPr>
@@ -14966,7 +14966,7 @@
           <p:cNvPr id="29" name="">
             <a:extLst xmlns:a="http://schemas.openxmlformats.org/drawingml/2006/main">
               <a:ext uri="{FF2B5EF4-FFF2-40B4-BE49-F238E27FC236}">
-                <a16:creationId xmlns:a16="http://schemas.microsoft.com/office/drawing/2014/main" id="{3F252646-6106-4568-A8B8-BB062F4C9B8D}"/>
+                <a16:creationId xmlns:a16="http://schemas.microsoft.com/office/drawing/2014/main" id="{0B7B18F5-8E0E-4062-A681-D69E36D8E8C6}"/>
               </a:ext>
             </a:extLst>
           </p:cNvPr>
@@ -15029,7 +15029,7 @@
           <p:cNvPr id="30" name="">
             <a:extLst xmlns:a="http://schemas.openxmlformats.org/drawingml/2006/main">
               <a:ext uri="{FF2B5EF4-FFF2-40B4-BE49-F238E27FC236}">
-                <a16:creationId xmlns:a16="http://schemas.microsoft.com/office/drawing/2014/main" id="{45FFEE00-7D2B-4482-B970-3B9E104286E9}"/>
+                <a16:creationId xmlns:a16="http://schemas.microsoft.com/office/drawing/2014/main" id="{488FE55F-B4B0-4B09-B615-042219A97355}"/>
               </a:ext>
             </a:extLst>
           </p:cNvPr>
@@ -15061,7 +15061,7 @@
           <p:cNvPr id="31" name="">
             <a:extLst xmlns:a="http://schemas.openxmlformats.org/drawingml/2006/main">
               <a:ext uri="{FF2B5EF4-FFF2-40B4-BE49-F238E27FC236}">
-                <a16:creationId xmlns:a16="http://schemas.microsoft.com/office/drawing/2014/main" id="{F83B3AFF-F6C9-4F39-853F-AE034C6FBDD1}"/>
+                <a16:creationId xmlns:a16="http://schemas.microsoft.com/office/drawing/2014/main" id="{F9813B4A-3084-41CE-B2A7-45883F385D36}"/>
               </a:ext>
             </a:extLst>
           </p:cNvPr>
@@ -15124,7 +15124,7 @@
           <p:cNvPr id="32" name="">
             <a:extLst xmlns:a="http://schemas.openxmlformats.org/drawingml/2006/main">
               <a:ext uri="{FF2B5EF4-FFF2-40B4-BE49-F238E27FC236}">
-                <a16:creationId xmlns:a16="http://schemas.microsoft.com/office/drawing/2014/main" id="{78BF5452-471B-4E71-985F-BA6C2CEE8299}"/>
+                <a16:creationId xmlns:a16="http://schemas.microsoft.com/office/drawing/2014/main" id="{0C1A89C5-641C-43FC-A676-9A079961C0D9}"/>
               </a:ext>
             </a:extLst>
           </p:cNvPr>
@@ -15187,7 +15187,7 @@
           <p:cNvPr id="33" name="">
             <a:extLst xmlns:a="http://schemas.openxmlformats.org/drawingml/2006/main">
               <a:ext uri="{FF2B5EF4-FFF2-40B4-BE49-F238E27FC236}">
-                <a16:creationId xmlns:a16="http://schemas.microsoft.com/office/drawing/2014/main" id="{39973831-B340-40DC-AB3D-89E9D0049B24}"/>
+                <a16:creationId xmlns:a16="http://schemas.microsoft.com/office/drawing/2014/main" id="{70F5A050-A999-457C-A9DD-260EDE1C9FBD}"/>
               </a:ext>
             </a:extLst>
           </p:cNvPr>
@@ -15219,7 +15219,7 @@
           <p:cNvPr id="34" name="">
             <a:extLst xmlns:a="http://schemas.openxmlformats.org/drawingml/2006/main">
               <a:ext uri="{FF2B5EF4-FFF2-40B4-BE49-F238E27FC236}">
-                <a16:creationId xmlns:a16="http://schemas.microsoft.com/office/drawing/2014/main" id="{A70152F0-956C-4D94-BED9-F7E7B834A12A}"/>
+                <a16:creationId xmlns:a16="http://schemas.microsoft.com/office/drawing/2014/main" id="{765B12F0-D03A-4515-819A-66FE3EB1FAEB}"/>
               </a:ext>
             </a:extLst>
           </p:cNvPr>
@@ -15282,7 +15282,7 @@
           <p:cNvPr id="35" name="">
             <a:extLst xmlns:a="http://schemas.openxmlformats.org/drawingml/2006/main">
               <a:ext uri="{FF2B5EF4-FFF2-40B4-BE49-F238E27FC236}">
-                <a16:creationId xmlns:a16="http://schemas.microsoft.com/office/drawing/2014/main" id="{B888558F-0923-4C28-B583-0C709B10DB53}"/>
+                <a16:creationId xmlns:a16="http://schemas.microsoft.com/office/drawing/2014/main" id="{DD02329E-F0D4-496D-889A-A6F3E3154AD2}"/>
               </a:ext>
             </a:extLst>
           </p:cNvPr>
@@ -15345,7 +15345,7 @@
           <p:cNvPr id="36" name="">
             <a:extLst xmlns:a="http://schemas.openxmlformats.org/drawingml/2006/main">
               <a:ext uri="{FF2B5EF4-FFF2-40B4-BE49-F238E27FC236}">
-                <a16:creationId xmlns:a16="http://schemas.microsoft.com/office/drawing/2014/main" id="{500F7BDA-954C-48C0-B42E-B35A0E29D9E6}"/>
+                <a16:creationId xmlns:a16="http://schemas.microsoft.com/office/drawing/2014/main" id="{5DF9B888-387E-46E1-A922-F0031201F94A}"/>
               </a:ext>
             </a:extLst>
           </p:cNvPr>
@@ -15377,7 +15377,7 @@
           <p:cNvPr id="37" name="">
             <a:extLst xmlns:a="http://schemas.openxmlformats.org/drawingml/2006/main">
               <a:ext uri="{FF2B5EF4-FFF2-40B4-BE49-F238E27FC236}">
-                <a16:creationId xmlns:a16="http://schemas.microsoft.com/office/drawing/2014/main" id="{9245D438-94F6-45E2-BD0D-F72869556E67}"/>
+                <a16:creationId xmlns:a16="http://schemas.microsoft.com/office/drawing/2014/main" id="{42E6BAD6-DDCB-4EE4-BE73-2ACA04CB72C0}"/>
               </a:ext>
             </a:extLst>
           </p:cNvPr>
@@ -15440,7 +15440,7 @@
           <p:cNvPr id="38" name="">
             <a:extLst xmlns:a="http://schemas.openxmlformats.org/drawingml/2006/main">
               <a:ext uri="{FF2B5EF4-FFF2-40B4-BE49-F238E27FC236}">
-                <a16:creationId xmlns:a16="http://schemas.microsoft.com/office/drawing/2014/main" id="{65F10F63-CB76-4006-A37F-DEBF7221DB6A}"/>
+                <a16:creationId xmlns:a16="http://schemas.microsoft.com/office/drawing/2014/main" id="{AE6E5D17-562A-46BB-9CEE-4F9AA170C4FA}"/>
               </a:ext>
             </a:extLst>
           </p:cNvPr>
@@ -15503,7 +15503,7 @@
           <p:cNvPr id="39" name="">
             <a:extLst xmlns:a="http://schemas.openxmlformats.org/drawingml/2006/main">
               <a:ext uri="{FF2B5EF4-FFF2-40B4-BE49-F238E27FC236}">
-                <a16:creationId xmlns:a16="http://schemas.microsoft.com/office/drawing/2014/main" id="{DF678264-52AA-4666-929A-3156A244A316}"/>
+                <a16:creationId xmlns:a16="http://schemas.microsoft.com/office/drawing/2014/main" id="{2B51A9B3-E1D1-468E-9523-4C7F144FA4D8}"/>
               </a:ext>
             </a:extLst>
           </p:cNvPr>
@@ -15535,7 +15535,7 @@
           <p:cNvPr id="40" name="">
             <a:extLst xmlns:a="http://schemas.openxmlformats.org/drawingml/2006/main">
               <a:ext uri="{FF2B5EF4-FFF2-40B4-BE49-F238E27FC236}">
-                <a16:creationId xmlns:a16="http://schemas.microsoft.com/office/drawing/2014/main" id="{0CFE92B0-5E44-4837-B923-A5FEBB741823}"/>
+                <a16:creationId xmlns:a16="http://schemas.microsoft.com/office/drawing/2014/main" id="{C72D1786-F7E5-44E1-B132-B358DF6FA4D2}"/>
               </a:ext>
             </a:extLst>
           </p:cNvPr>
@@ -15598,7 +15598,7 @@
           <p:cNvPr id="41" name="">
             <a:extLst xmlns:a="http://schemas.openxmlformats.org/drawingml/2006/main">
               <a:ext uri="{FF2B5EF4-FFF2-40B4-BE49-F238E27FC236}">
-                <a16:creationId xmlns:a16="http://schemas.microsoft.com/office/drawing/2014/main" id="{5E7783B2-8358-4BB1-AC64-2BF86C638049}"/>
+                <a16:creationId xmlns:a16="http://schemas.microsoft.com/office/drawing/2014/main" id="{E98F2E16-C8A0-4FEF-9C7A-6B43F5465E1F}"/>
               </a:ext>
             </a:extLst>
           </p:cNvPr>
@@ -15661,7 +15661,7 @@
           <p:cNvPr id="42" name="">
             <a:extLst xmlns:a="http://schemas.openxmlformats.org/drawingml/2006/main">
               <a:ext uri="{FF2B5EF4-FFF2-40B4-BE49-F238E27FC236}">
-                <a16:creationId xmlns:a16="http://schemas.microsoft.com/office/drawing/2014/main" id="{EDE6B86C-943E-4202-97D8-0708324E9B71}"/>
+                <a16:creationId xmlns:a16="http://schemas.microsoft.com/office/drawing/2014/main" id="{DE08A153-5C74-470A-BFEF-C1D1EB35C5DA}"/>
               </a:ext>
             </a:extLst>
           </p:cNvPr>
@@ -15693,7 +15693,7 @@
           <p:cNvPr id="43" name="">
             <a:extLst xmlns:a="http://schemas.openxmlformats.org/drawingml/2006/main">
               <a:ext uri="{FF2B5EF4-FFF2-40B4-BE49-F238E27FC236}">
-                <a16:creationId xmlns:a16="http://schemas.microsoft.com/office/drawing/2014/main" id="{1D9B6D1A-3C3A-4342-8A61-E52C18B59417}"/>
+                <a16:creationId xmlns:a16="http://schemas.microsoft.com/office/drawing/2014/main" id="{CAD19965-E954-4A3E-A5E2-C33B8A50D334}"/>
               </a:ext>
             </a:extLst>
           </p:cNvPr>
@@ -15756,7 +15756,7 @@
           <p:cNvPr id="44" name="">
             <a:extLst xmlns:a="http://schemas.openxmlformats.org/drawingml/2006/main">
               <a:ext uri="{FF2B5EF4-FFF2-40B4-BE49-F238E27FC236}">
-                <a16:creationId xmlns:a16="http://schemas.microsoft.com/office/drawing/2014/main" id="{ADAFD550-A437-4359-B28C-FDDACC1F5A6F}"/>
+                <a16:creationId xmlns:a16="http://schemas.microsoft.com/office/drawing/2014/main" id="{7A91F2BC-3482-41DC-A231-D5BCF87C0598}"/>
               </a:ext>
             </a:extLst>
           </p:cNvPr>
@@ -15819,7 +15819,7 @@
           <p:cNvPr id="45" name="">
             <a:extLst xmlns:a="http://schemas.openxmlformats.org/drawingml/2006/main">
               <a:ext uri="{FF2B5EF4-FFF2-40B4-BE49-F238E27FC236}">
-                <a16:creationId xmlns:a16="http://schemas.microsoft.com/office/drawing/2014/main" id="{2457844C-0313-47ED-B0DD-28EDF6C1854A}"/>
+                <a16:creationId xmlns:a16="http://schemas.microsoft.com/office/drawing/2014/main" id="{BAEC1C80-5EDE-459C-A093-DEBA8CC7A92E}"/>
               </a:ext>
             </a:extLst>
           </p:cNvPr>
@@ -15851,7 +15851,7 @@
           <p:cNvPr id="46" name="">
             <a:extLst xmlns:a="http://schemas.openxmlformats.org/drawingml/2006/main">
               <a:ext uri="{FF2B5EF4-FFF2-40B4-BE49-F238E27FC236}">
-                <a16:creationId xmlns:a16="http://schemas.microsoft.com/office/drawing/2014/main" id="{606C9B9A-772D-4666-8645-2F43F4A4112D}"/>
+                <a16:creationId xmlns:a16="http://schemas.microsoft.com/office/drawing/2014/main" id="{9F7BBCE1-33E5-41F7-9930-65B4541D1A97}"/>
               </a:ext>
             </a:extLst>
           </p:cNvPr>
@@ -15914,7 +15914,7 @@
           <p:cNvPr id="47" name="">
             <a:extLst xmlns:a="http://schemas.openxmlformats.org/drawingml/2006/main">
               <a:ext uri="{FF2B5EF4-FFF2-40B4-BE49-F238E27FC236}">
-                <a16:creationId xmlns:a16="http://schemas.microsoft.com/office/drawing/2014/main" id="{5A960454-B20B-4BFF-A202-A32D457C2AAC}"/>
+                <a16:creationId xmlns:a16="http://schemas.microsoft.com/office/drawing/2014/main" id="{7FE626A1-5513-424F-BDE5-17DA49DCA9FC}"/>
               </a:ext>
             </a:extLst>
           </p:cNvPr>
@@ -15977,7 +15977,7 @@
           <p:cNvPr id="48" name="">
             <a:extLst xmlns:a="http://schemas.openxmlformats.org/drawingml/2006/main">
               <a:ext uri="{FF2B5EF4-FFF2-40B4-BE49-F238E27FC236}">
-                <a16:creationId xmlns:a16="http://schemas.microsoft.com/office/drawing/2014/main" id="{5F2B6C46-EF6E-43A4-BAAE-435FAE74BF0A}"/>
+                <a16:creationId xmlns:a16="http://schemas.microsoft.com/office/drawing/2014/main" id="{E0FAD3A1-25F5-448A-95C8-584160ED3B50}"/>
               </a:ext>
             </a:extLst>
           </p:cNvPr>
@@ -16009,7 +16009,7 @@
           <p:cNvPr id="49" name="">
             <a:extLst xmlns:a="http://schemas.openxmlformats.org/drawingml/2006/main">
               <a:ext uri="{FF2B5EF4-FFF2-40B4-BE49-F238E27FC236}">
-                <a16:creationId xmlns:a16="http://schemas.microsoft.com/office/drawing/2014/main" id="{E927F704-B750-455F-AB51-50CEDF8251CF}"/>
+                <a16:creationId xmlns:a16="http://schemas.microsoft.com/office/drawing/2014/main" id="{D54E7DDB-3B53-496F-BCB9-08A6D7955F37}"/>
               </a:ext>
             </a:extLst>
           </p:cNvPr>
@@ -16072,7 +16072,7 @@
           <p:cNvPr id="50" name="">
             <a:extLst xmlns:a="http://schemas.openxmlformats.org/drawingml/2006/main">
               <a:ext uri="{FF2B5EF4-FFF2-40B4-BE49-F238E27FC236}">
-                <a16:creationId xmlns:a16="http://schemas.microsoft.com/office/drawing/2014/main" id="{64CC5159-93BB-44E5-8BCF-3A1CA83DDC94}"/>
+                <a16:creationId xmlns:a16="http://schemas.microsoft.com/office/drawing/2014/main" id="{52EBD074-0D3C-4043-984E-736BFACC84D5}"/>
               </a:ext>
             </a:extLst>
           </p:cNvPr>
@@ -16135,7 +16135,7 @@
           <p:cNvPr id="51" name="">
             <a:extLst xmlns:a="http://schemas.openxmlformats.org/drawingml/2006/main">
               <a:ext uri="{FF2B5EF4-FFF2-40B4-BE49-F238E27FC236}">
-                <a16:creationId xmlns:a16="http://schemas.microsoft.com/office/drawing/2014/main" id="{4E106983-BD97-4EA3-85DC-0F1633024601}"/>
+                <a16:creationId xmlns:a16="http://schemas.microsoft.com/office/drawing/2014/main" id="{D7639BEA-7470-45FE-B8DA-EF66357DAD15}"/>
               </a:ext>
             </a:extLst>
           </p:cNvPr>
@@ -16167,7 +16167,7 @@
           <p:cNvPr id="52" name="">
             <a:extLst xmlns:a="http://schemas.openxmlformats.org/drawingml/2006/main">
               <a:ext uri="{FF2B5EF4-FFF2-40B4-BE49-F238E27FC236}">
-                <a16:creationId xmlns:a16="http://schemas.microsoft.com/office/drawing/2014/main" id="{A0ECF009-55D4-4A0A-A1E3-E442CE51A735}"/>
+                <a16:creationId xmlns:a16="http://schemas.microsoft.com/office/drawing/2014/main" id="{9C737A4B-195B-4130-865F-27B14FDF5842}"/>
               </a:ext>
             </a:extLst>
           </p:cNvPr>
@@ -16230,7 +16230,7 @@
           <p:cNvPr id="53" name="">
             <a:extLst xmlns:a="http://schemas.openxmlformats.org/drawingml/2006/main">
               <a:ext uri="{FF2B5EF4-FFF2-40B4-BE49-F238E27FC236}">
-                <a16:creationId xmlns:a16="http://schemas.microsoft.com/office/drawing/2014/main" id="{1BE12676-9D1F-45EF-A514-AE74F66A5A01}"/>
+                <a16:creationId xmlns:a16="http://schemas.microsoft.com/office/drawing/2014/main" id="{EC3D0A03-770D-4A82-8AD1-77B4ACEC4D8B}"/>
               </a:ext>
             </a:extLst>
           </p:cNvPr>
@@ -16293,7 +16293,7 @@
           <p:cNvPr id="54" name="">
             <a:extLst xmlns:a="http://schemas.openxmlformats.org/drawingml/2006/main">
               <a:ext uri="{FF2B5EF4-FFF2-40B4-BE49-F238E27FC236}">
-                <a16:creationId xmlns:a16="http://schemas.microsoft.com/office/drawing/2014/main" id="{728303C2-8110-4D4B-8F47-5F7D3FAB8F77}"/>
+                <a16:creationId xmlns:a16="http://schemas.microsoft.com/office/drawing/2014/main" id="{E8E6AC72-0184-4CA8-AF30-5A68AEB1C49B}"/>
               </a:ext>
             </a:extLst>
           </p:cNvPr>
@@ -16325,7 +16325,7 @@
           <p:cNvPr id="55" name="">
             <a:extLst xmlns:a="http://schemas.openxmlformats.org/drawingml/2006/main">
               <a:ext uri="{FF2B5EF4-FFF2-40B4-BE49-F238E27FC236}">
-                <a16:creationId xmlns:a16="http://schemas.microsoft.com/office/drawing/2014/main" id="{519EE5E5-7614-4AF7-A079-B1CE3FE4BEAD}"/>
+                <a16:creationId xmlns:a16="http://schemas.microsoft.com/office/drawing/2014/main" id="{F9DE1E7A-1A87-4AF7-9B17-EA5B33F52174}"/>
               </a:ext>
             </a:extLst>
           </p:cNvPr>
@@ -16388,7 +16388,7 @@
           <p:cNvPr id="56" name="">
             <a:extLst xmlns:a="http://schemas.openxmlformats.org/drawingml/2006/main">
               <a:ext uri="{FF2B5EF4-FFF2-40B4-BE49-F238E27FC236}">
-                <a16:creationId xmlns:a16="http://schemas.microsoft.com/office/drawing/2014/main" id="{4002D0A3-F56C-44DF-A6E6-1D6C0FCE1A6C}"/>
+                <a16:creationId xmlns:a16="http://schemas.microsoft.com/office/drawing/2014/main" id="{19756C36-DF20-4781-9317-39FAB13E2319}"/>
               </a:ext>
             </a:extLst>
           </p:cNvPr>
@@ -16451,7 +16451,7 @@
           <p:cNvPr id="57" name="">
             <a:extLst xmlns:a="http://schemas.openxmlformats.org/drawingml/2006/main">
               <a:ext uri="{FF2B5EF4-FFF2-40B4-BE49-F238E27FC236}">
-                <a16:creationId xmlns:a16="http://schemas.microsoft.com/office/drawing/2014/main" id="{7625CE7E-C751-4F41-A4CB-295DB1BF678C}"/>
+                <a16:creationId xmlns:a16="http://schemas.microsoft.com/office/drawing/2014/main" id="{EA39BD3B-8933-4392-BE8E-4F4DD64E72B0}"/>
               </a:ext>
             </a:extLst>
           </p:cNvPr>
@@ -16483,7 +16483,7 @@
           <p:cNvPr id="58" name="">
             <a:extLst xmlns:a="http://schemas.openxmlformats.org/drawingml/2006/main">
               <a:ext uri="{FF2B5EF4-FFF2-40B4-BE49-F238E27FC236}">
-                <a16:creationId xmlns:a16="http://schemas.microsoft.com/office/drawing/2014/main" id="{E99EE062-60E9-4BB3-BEA0-8A36A7E66E53}"/>
+                <a16:creationId xmlns:a16="http://schemas.microsoft.com/office/drawing/2014/main" id="{EEB63067-1D25-450D-8747-F833ECFBD87F}"/>
               </a:ext>
             </a:extLst>
           </p:cNvPr>
@@ -16546,7 +16546,7 @@
           <p:cNvPr id="59" name="">
             <a:extLst xmlns:a="http://schemas.openxmlformats.org/drawingml/2006/main">
               <a:ext uri="{FF2B5EF4-FFF2-40B4-BE49-F238E27FC236}">
-                <a16:creationId xmlns:a16="http://schemas.microsoft.com/office/drawing/2014/main" id="{09D22FD6-6B54-4370-A9C9-A6F90FE9A2B3}"/>
+                <a16:creationId xmlns:a16="http://schemas.microsoft.com/office/drawing/2014/main" id="{60AFA002-6706-4975-8D27-69AAC2C57CBB}"/>
               </a:ext>
             </a:extLst>
           </p:cNvPr>
@@ -16609,7 +16609,7 @@
           <p:cNvPr id="60" name="">
             <a:extLst xmlns:a="http://schemas.openxmlformats.org/drawingml/2006/main">
               <a:ext uri="{FF2B5EF4-FFF2-40B4-BE49-F238E27FC236}">
-                <a16:creationId xmlns:a16="http://schemas.microsoft.com/office/drawing/2014/main" id="{8799939D-6B26-4920-9CCD-F4088C9C683A}"/>
+                <a16:creationId xmlns:a16="http://schemas.microsoft.com/office/drawing/2014/main" id="{A55E62A7-1CC4-443F-86C7-92421ADB789A}"/>
               </a:ext>
             </a:extLst>
           </p:cNvPr>
@@ -16641,7 +16641,7 @@
           <p:cNvPr id="61" name="">
             <a:extLst xmlns:a="http://schemas.openxmlformats.org/drawingml/2006/main">
               <a:ext uri="{FF2B5EF4-FFF2-40B4-BE49-F238E27FC236}">
-                <a16:creationId xmlns:a16="http://schemas.microsoft.com/office/drawing/2014/main" id="{D594A95A-0BA6-4598-AB67-273DA540E5B7}"/>
+                <a16:creationId xmlns:a16="http://schemas.microsoft.com/office/drawing/2014/main" id="{E0EF8BF8-AD71-469F-A30D-E1D4B75675BA}"/>
               </a:ext>
             </a:extLst>
           </p:cNvPr>
@@ -16704,7 +16704,7 @@
           <p:cNvPr id="62" name="">
             <a:extLst xmlns:a="http://schemas.openxmlformats.org/drawingml/2006/main">
               <a:ext uri="{FF2B5EF4-FFF2-40B4-BE49-F238E27FC236}">
-                <a16:creationId xmlns:a16="http://schemas.microsoft.com/office/drawing/2014/main" id="{B37BC3B8-8F45-49CF-AFCA-8F485BB7A866}"/>
+                <a16:creationId xmlns:a16="http://schemas.microsoft.com/office/drawing/2014/main" id="{45E11598-A4C0-4A8F-BE0F-72CE31A393C1}"/>
               </a:ext>
             </a:extLst>
           </p:cNvPr>
@@ -16767,7 +16767,7 @@
           <p:cNvPr id="63" name="">
             <a:extLst xmlns:a="http://schemas.openxmlformats.org/drawingml/2006/main">
               <a:ext uri="{FF2B5EF4-FFF2-40B4-BE49-F238E27FC236}">
-                <a16:creationId xmlns:a16="http://schemas.microsoft.com/office/drawing/2014/main" id="{C4784276-2815-4C3E-BB66-74271B05E7E6}"/>
+                <a16:creationId xmlns:a16="http://schemas.microsoft.com/office/drawing/2014/main" id="{15A5533B-724C-4D41-8F61-9F899884444B}"/>
               </a:ext>
             </a:extLst>
           </p:cNvPr>
@@ -16799,7 +16799,7 @@
           <p:cNvPr id="64" name="">
             <a:extLst xmlns:a="http://schemas.openxmlformats.org/drawingml/2006/main">
               <a:ext uri="{FF2B5EF4-FFF2-40B4-BE49-F238E27FC236}">
-                <a16:creationId xmlns:a16="http://schemas.microsoft.com/office/drawing/2014/main" id="{8052EE5C-FA71-49D8-9393-FA157E925B2A}"/>
+                <a16:creationId xmlns:a16="http://schemas.microsoft.com/office/drawing/2014/main" id="{E3EA05D4-0536-42C7-A468-E95CD0CB6CB5}"/>
               </a:ext>
             </a:extLst>
           </p:cNvPr>
@@ -16862,19 +16862,19 @@
           <p:cNvPr id="65" name="">
             <a:extLst xmlns:a="http://schemas.openxmlformats.org/drawingml/2006/main">
               <a:ext uri="{FF2B5EF4-FFF2-40B4-BE49-F238E27FC236}">
-                <a16:creationId xmlns:a16="http://schemas.microsoft.com/office/drawing/2014/main" id="{73330BA9-8F30-4A96-BC79-70E40DF418AB}"/>
-              </a:ext>
-            </a:extLst>
-          </p:cNvPr>
-          <p:cNvSpPr>
-            <a:spLocks xmlns:a="http://schemas.openxmlformats.org/drawingml/2006/main" noGrp="1"/>
-          </p:cNvSpPr>
-          <p:nvPr/>
-        </p:nvSpPr>
-        <p:spPr>
-          <a:xfrm xmlns:a="http://schemas.openxmlformats.org/drawingml/2006/main">
-            <a:off x="7658100" y="2800350"/>
-            <a:ext cx="2571750" cy="838200"/>
+                <a16:creationId xmlns:a16="http://schemas.microsoft.com/office/drawing/2014/main" id="{EFB266B1-B5FD-4A1D-86DA-E061BA045D69}"/>
+              </a:ext>
+            </a:extLst>
+          </p:cNvPr>
+          <p:cNvSpPr>
+            <a:spLocks xmlns:a="http://schemas.openxmlformats.org/drawingml/2006/main" noGrp="1"/>
+          </p:cNvSpPr>
+          <p:nvPr/>
+        </p:nvSpPr>
+        <p:spPr>
+          <a:xfrm xmlns:a="http://schemas.openxmlformats.org/drawingml/2006/main">
+            <a:off x="7658100" y="2743200"/>
+            <a:ext cx="2571750" cy="933450"/>
           </a:xfrm>
           <a:prstGeom xmlns:a="http://schemas.openxmlformats.org/drawingml/2006/main" prst="rect">
             <a:avLst/>
@@ -16894,19 +16894,19 @@
           <p:cNvPr id="66" name="">
             <a:extLst xmlns:a="http://schemas.openxmlformats.org/drawingml/2006/main">
               <a:ext uri="{FF2B5EF4-FFF2-40B4-BE49-F238E27FC236}">
-                <a16:creationId xmlns:a16="http://schemas.microsoft.com/office/drawing/2014/main" id="{A55CB807-601E-433F-955A-4BB859CF90B2}"/>
-              </a:ext>
-            </a:extLst>
-          </p:cNvPr>
-          <p:cNvSpPr>
-            <a:spLocks xmlns:a="http://schemas.openxmlformats.org/drawingml/2006/main" noGrp="1"/>
-          </p:cNvSpPr>
-          <p:nvPr/>
-        </p:nvSpPr>
-        <p:spPr>
-          <a:xfrm xmlns:a="http://schemas.openxmlformats.org/drawingml/2006/main">
-            <a:off x="7658100" y="2800350"/>
-            <a:ext cx="47625" cy="838200"/>
+                <a16:creationId xmlns:a16="http://schemas.microsoft.com/office/drawing/2014/main" id="{A83324D1-0F88-4844-81C2-6B42F8676E4D}"/>
+              </a:ext>
+            </a:extLst>
+          </p:cNvPr>
+          <p:cNvSpPr>
+            <a:spLocks xmlns:a="http://schemas.openxmlformats.org/drawingml/2006/main" noGrp="1"/>
+          </p:cNvSpPr>
+          <p:nvPr/>
+        </p:nvSpPr>
+        <p:spPr>
+          <a:xfrm xmlns:a="http://schemas.openxmlformats.org/drawingml/2006/main">
+            <a:off x="7658100" y="2743200"/>
+            <a:ext cx="47625" cy="933450"/>
           </a:xfrm>
           <a:prstGeom xmlns:a="http://schemas.openxmlformats.org/drawingml/2006/main" prst="rect">
             <a:avLst/>
@@ -16926,7 +16926,7 @@
           <p:cNvPr id="67" name="">
             <a:extLst xmlns:a="http://schemas.openxmlformats.org/drawingml/2006/main">
               <a:ext uri="{FF2B5EF4-FFF2-40B4-BE49-F238E27FC236}">
-                <a16:creationId xmlns:a16="http://schemas.microsoft.com/office/drawing/2014/main" id="{4EAB83EC-FB0B-4B81-A4A8-B7801BFA3007}"/>
+                <a16:creationId xmlns:a16="http://schemas.microsoft.com/office/drawing/2014/main" id="{6E972E1B-AA03-4337-8F08-8FA059E227D7}"/>
               </a:ext>
             </a:extLst>
           </p:cNvPr>
@@ -16989,7 +16989,7 @@
           <p:cNvPr id="68" name="">
             <a:extLst xmlns:a="http://schemas.openxmlformats.org/drawingml/2006/main">
               <a:ext uri="{FF2B5EF4-FFF2-40B4-BE49-F238E27FC236}">
-                <a16:creationId xmlns:a16="http://schemas.microsoft.com/office/drawing/2014/main" id="{62F0B85B-2560-442E-9DE9-E355C0A4AEDF}"/>
+                <a16:creationId xmlns:a16="http://schemas.microsoft.com/office/drawing/2014/main" id="{8A5B0ED5-F6B4-470B-99CC-AE66225BCFA6}"/>
               </a:ext>
             </a:extLst>
           </p:cNvPr>
@@ -17056,7 +17056,7 @@
           <p:cNvPr id="69" name="">
             <a:extLst xmlns:a="http://schemas.openxmlformats.org/drawingml/2006/main">
               <a:ext uri="{FF2B5EF4-FFF2-40B4-BE49-F238E27FC236}">
-                <a16:creationId xmlns:a16="http://schemas.microsoft.com/office/drawing/2014/main" id="{43FC03E6-7299-4231-B62A-2099F9BE1A41}"/>
+                <a16:creationId xmlns:a16="http://schemas.microsoft.com/office/drawing/2014/main" id="{43DFFA53-0E48-4962-ACD5-F02EC8C7DC35}"/>
               </a:ext>
             </a:extLst>
           </p:cNvPr>
@@ -17068,7 +17068,7 @@
         <p:spPr>
           <a:xfrm xmlns:a="http://schemas.openxmlformats.org/drawingml/2006/main">
             <a:off x="7658100" y="3905250"/>
-            <a:ext cx="2571750" cy="838200"/>
+            <a:ext cx="2571750" cy="933450"/>
           </a:xfrm>
           <a:prstGeom xmlns:a="http://schemas.openxmlformats.org/drawingml/2006/main" prst="rect">
             <a:avLst/>
@@ -17088,7 +17088,7 @@
           <p:cNvPr id="70" name="">
             <a:extLst xmlns:a="http://schemas.openxmlformats.org/drawingml/2006/main">
               <a:ext uri="{FF2B5EF4-FFF2-40B4-BE49-F238E27FC236}">
-                <a16:creationId xmlns:a16="http://schemas.microsoft.com/office/drawing/2014/main" id="{53CAA86D-0987-40F2-91DF-09ECC8506625}"/>
+                <a16:creationId xmlns:a16="http://schemas.microsoft.com/office/drawing/2014/main" id="{0DEFC833-9D3B-42CA-B3D8-78EBB9CE9EC7}"/>
               </a:ext>
             </a:extLst>
           </p:cNvPr>
@@ -17100,7 +17100,7 @@
         <p:spPr>
           <a:xfrm xmlns:a="http://schemas.openxmlformats.org/drawingml/2006/main">
             <a:off x="7658100" y="3905250"/>
-            <a:ext cx="47625" cy="838200"/>
+            <a:ext cx="47625" cy="933450"/>
           </a:xfrm>
           <a:prstGeom xmlns:a="http://schemas.openxmlformats.org/drawingml/2006/main" prst="rect">
             <a:avLst/>
@@ -17120,7 +17120,7 @@
           <p:cNvPr id="71" name="">
             <a:extLst xmlns:a="http://schemas.openxmlformats.org/drawingml/2006/main">
               <a:ext uri="{FF2B5EF4-FFF2-40B4-BE49-F238E27FC236}">
-                <a16:creationId xmlns:a16="http://schemas.microsoft.com/office/drawing/2014/main" id="{81A57CC2-4491-4019-BD1D-DBB529F8447F}"/>
+                <a16:creationId xmlns:a16="http://schemas.microsoft.com/office/drawing/2014/main" id="{49B61980-9E12-4CB1-ABDD-A6DCE27C723D}"/>
               </a:ext>
             </a:extLst>
           </p:cNvPr>
@@ -17183,7 +17183,7 @@
           <p:cNvPr id="72" name="">
             <a:extLst xmlns:a="http://schemas.openxmlformats.org/drawingml/2006/main">
               <a:ext uri="{FF2B5EF4-FFF2-40B4-BE49-F238E27FC236}">
-                <a16:creationId xmlns:a16="http://schemas.microsoft.com/office/drawing/2014/main" id="{4BA71FEA-FF0A-4D78-A958-C8A28E333F16}"/>
+                <a16:creationId xmlns:a16="http://schemas.microsoft.com/office/drawing/2014/main" id="{B2AC4E01-0DBE-4B74-8482-BBAEFC67A5EE}"/>
               </a:ext>
             </a:extLst>
           </p:cNvPr>
@@ -17250,7 +17250,7 @@
           <p:cNvPr id="73" name="">
             <a:extLst xmlns:a="http://schemas.openxmlformats.org/drawingml/2006/main">
               <a:ext uri="{FF2B5EF4-FFF2-40B4-BE49-F238E27FC236}">
-                <a16:creationId xmlns:a16="http://schemas.microsoft.com/office/drawing/2014/main" id="{94F7EF32-CD38-4DC8-96F4-F51734B61854}"/>
+                <a16:creationId xmlns:a16="http://schemas.microsoft.com/office/drawing/2014/main" id="{8FB627D5-5D18-4A87-B5E0-8AC9BD7CB188}"/>
               </a:ext>
             </a:extLst>
           </p:cNvPr>
@@ -17313,7 +17313,7 @@
           <p:cNvPr id="74" name="">
             <a:extLst xmlns:a="http://schemas.openxmlformats.org/drawingml/2006/main">
               <a:ext uri="{FF2B5EF4-FFF2-40B4-BE49-F238E27FC236}">
-                <a16:creationId xmlns:a16="http://schemas.microsoft.com/office/drawing/2014/main" id="{97108FC0-E548-4BF1-97BB-7CF524E31654}"/>
+                <a16:creationId xmlns:a16="http://schemas.microsoft.com/office/drawing/2014/main" id="{722C8480-23B7-410E-9E9B-B9A0CDF8F0B9}"/>
               </a:ext>
             </a:extLst>
           </p:cNvPr>
@@ -17345,7 +17345,7 @@
           <p:cNvPr id="75" name="">
             <a:extLst xmlns:a="http://schemas.openxmlformats.org/drawingml/2006/main">
               <a:ext uri="{FF2B5EF4-FFF2-40B4-BE49-F238E27FC236}">
-                <a16:creationId xmlns:a16="http://schemas.microsoft.com/office/drawing/2014/main" id="{74031AF1-2087-4FAD-9EAA-BA7F7C662090}"/>
+                <a16:creationId xmlns:a16="http://schemas.microsoft.com/office/drawing/2014/main" id="{FE03839E-0F05-4AEC-99CF-3BCBCB670A4A}"/>
               </a:ext>
             </a:extLst>
           </p:cNvPr>
@@ -17408,7 +17408,7 @@
           <p:cNvPr id="76" name="">
             <a:extLst xmlns:a="http://schemas.openxmlformats.org/drawingml/2006/main">
               <a:ext uri="{FF2B5EF4-FFF2-40B4-BE49-F238E27FC236}">
-                <a16:creationId xmlns:a16="http://schemas.microsoft.com/office/drawing/2014/main" id="{A53C5819-989C-410B-A52B-0342D513E41B}"/>
+                <a16:creationId xmlns:a16="http://schemas.microsoft.com/office/drawing/2014/main" id="{20F9FA45-A85B-4710-BB98-0A11C07CC652}"/>
               </a:ext>
             </a:extLst>
           </p:cNvPr>
@@ -17469,7 +17469,7 @@
     </p:spTree>
     <p:extLst>
       <p:ext uri="{BB962C8B-B14F-4D97-AF65-F5344CB8AC3E}">
-        <p14:creationId xmlns:p14="http://schemas.microsoft.com/office/powerpoint/2010/main" val="995318522"/>
+        <p14:creationId xmlns:p14="http://schemas.microsoft.com/office/powerpoint/2010/main" val="1698211995"/>
       </p:ext>
     </p:extLst>
   </p:cSld>
@@ -17500,7 +17500,7 @@
           <p:cNvPr id="1" name="">
             <a:extLst xmlns:a="http://schemas.openxmlformats.org/drawingml/2006/main">
               <a:ext uri="{FF2B5EF4-FFF2-40B4-BE49-F238E27FC236}">
-                <a16:creationId xmlns:a16="http://schemas.microsoft.com/office/drawing/2014/main" id="{D3D738D4-1C1B-4082-AC5A-62095560D8EC}"/>
+                <a16:creationId xmlns:a16="http://schemas.microsoft.com/office/drawing/2014/main" id="{C8546646-38BA-4C6F-9718-A7F8EDF288A2}"/>
               </a:ext>
             </a:extLst>
           </p:cNvPr>
@@ -17563,7 +17563,7 @@
           <p:cNvPr id="2" name="">
             <a:extLst xmlns:a="http://schemas.openxmlformats.org/drawingml/2006/main">
               <a:ext uri="{FF2B5EF4-FFF2-40B4-BE49-F238E27FC236}">
-                <a16:creationId xmlns:a16="http://schemas.microsoft.com/office/drawing/2014/main" id="{2F352C8E-CBD3-4FE2-8453-FCC42FF7DE8D}"/>
+                <a16:creationId xmlns:a16="http://schemas.microsoft.com/office/drawing/2014/main" id="{B56E821C-0F37-4E8A-98D7-A1314B4D8DA3}"/>
               </a:ext>
             </a:extLst>
           </p:cNvPr>
@@ -17630,7 +17630,7 @@
           <p:cNvPr id="3" name="">
             <a:extLst xmlns:a="http://schemas.openxmlformats.org/drawingml/2006/main">
               <a:ext uri="{FF2B5EF4-FFF2-40B4-BE49-F238E27FC236}">
-                <a16:creationId xmlns:a16="http://schemas.microsoft.com/office/drawing/2014/main" id="{6D73D1EE-AA47-4CA3-AEBD-068693E6CF90}"/>
+                <a16:creationId xmlns:a16="http://schemas.microsoft.com/office/drawing/2014/main" id="{06EF9644-7BD6-41A6-832D-A16B35BAE82C}"/>
               </a:ext>
             </a:extLst>
           </p:cNvPr>
@@ -17697,7 +17697,7 @@
           <p:cNvPr id="4" name="">
             <a:extLst xmlns:a="http://schemas.openxmlformats.org/drawingml/2006/main">
               <a:ext uri="{FF2B5EF4-FFF2-40B4-BE49-F238E27FC236}">
-                <a16:creationId xmlns:a16="http://schemas.microsoft.com/office/drawing/2014/main" id="{8BA441C5-623C-4666-A64C-922834F48843}"/>
+                <a16:creationId xmlns:a16="http://schemas.microsoft.com/office/drawing/2014/main" id="{6227ED15-C768-4129-B741-32C496027B39}"/>
               </a:ext>
             </a:extLst>
           </p:cNvPr>
@@ -17729,7 +17729,7 @@
           <p:cNvPr id="5" name="">
             <a:extLst xmlns:a="http://schemas.openxmlformats.org/drawingml/2006/main">
               <a:ext uri="{FF2B5EF4-FFF2-40B4-BE49-F238E27FC236}">
-                <a16:creationId xmlns:a16="http://schemas.microsoft.com/office/drawing/2014/main" id="{16D72792-960A-495B-B821-AB58FAEE3D9B}"/>
+                <a16:creationId xmlns:a16="http://schemas.microsoft.com/office/drawing/2014/main" id="{7E3CB31C-D7D5-4E48-983A-8AEB36A47893}"/>
               </a:ext>
             </a:extLst>
           </p:cNvPr>
@@ -17761,7 +17761,7 @@
           <p:cNvPr id="6" name="">
             <a:extLst xmlns:a="http://schemas.openxmlformats.org/drawingml/2006/main">
               <a:ext uri="{FF2B5EF4-FFF2-40B4-BE49-F238E27FC236}">
-                <a16:creationId xmlns:a16="http://schemas.microsoft.com/office/drawing/2014/main" id="{B021291A-F8C3-4152-BE7E-F77172BBCC8B}"/>
+                <a16:creationId xmlns:a16="http://schemas.microsoft.com/office/drawing/2014/main" id="{75740F7C-DC5D-4088-ABA5-37896AB69774}"/>
               </a:ext>
             </a:extLst>
           </p:cNvPr>
@@ -17824,7 +17824,7 @@
           <p:cNvPr id="7" name="">
             <a:extLst xmlns:a="http://schemas.openxmlformats.org/drawingml/2006/main">
               <a:ext uri="{FF2B5EF4-FFF2-40B4-BE49-F238E27FC236}">
-                <a16:creationId xmlns:a16="http://schemas.microsoft.com/office/drawing/2014/main" id="{F346C671-7BD5-4157-A630-801FD9876403}"/>
+                <a16:creationId xmlns:a16="http://schemas.microsoft.com/office/drawing/2014/main" id="{4E58CEF2-6093-4B74-A26A-7BFA528F4991}"/>
               </a:ext>
             </a:extLst>
           </p:cNvPr>
@@ -17891,7 +17891,7 @@
           <p:cNvPr id="8" name="">
             <a:extLst xmlns:a="http://schemas.openxmlformats.org/drawingml/2006/main">
               <a:ext uri="{FF2B5EF4-FFF2-40B4-BE49-F238E27FC236}">
-                <a16:creationId xmlns:a16="http://schemas.microsoft.com/office/drawing/2014/main" id="{898DAC09-F184-4427-9D06-59276671AA71}"/>
+                <a16:creationId xmlns:a16="http://schemas.microsoft.com/office/drawing/2014/main" id="{5C1665BC-9F01-4499-9F4C-884EB95D2C48}"/>
               </a:ext>
             </a:extLst>
           </p:cNvPr>
@@ -17925,7 +17925,7 @@
           <p:cNvPr id="9" name="">
             <a:extLst xmlns:a="http://schemas.openxmlformats.org/drawingml/2006/main">
               <a:ext uri="{FF2B5EF4-FFF2-40B4-BE49-F238E27FC236}">
-                <a16:creationId xmlns:a16="http://schemas.microsoft.com/office/drawing/2014/main" id="{F3759540-8EBF-416E-93FF-9A3EB5333D12}"/>
+                <a16:creationId xmlns:a16="http://schemas.microsoft.com/office/drawing/2014/main" id="{08A91D40-E614-407B-AA92-65504E054261}"/>
               </a:ext>
             </a:extLst>
           </p:cNvPr>
@@ -17957,7 +17957,7 @@
           <p:cNvPr id="10" name="">
             <a:extLst xmlns:a="http://schemas.openxmlformats.org/drawingml/2006/main">
               <a:ext uri="{FF2B5EF4-FFF2-40B4-BE49-F238E27FC236}">
-                <a16:creationId xmlns:a16="http://schemas.microsoft.com/office/drawing/2014/main" id="{75B556A7-A7DC-4EA1-828C-25148D1EEC2E}"/>
+                <a16:creationId xmlns:a16="http://schemas.microsoft.com/office/drawing/2014/main" id="{45ADE4C9-4201-419B-8587-77F455DE0A00}"/>
               </a:ext>
             </a:extLst>
           </p:cNvPr>
@@ -17989,7 +17989,7 @@
           <p:cNvPr id="11" name="">
             <a:extLst xmlns:a="http://schemas.openxmlformats.org/drawingml/2006/main">
               <a:ext uri="{FF2B5EF4-FFF2-40B4-BE49-F238E27FC236}">
-                <a16:creationId xmlns:a16="http://schemas.microsoft.com/office/drawing/2014/main" id="{2150C7DE-0BC8-42EB-B8EA-86826D346905}"/>
+                <a16:creationId xmlns:a16="http://schemas.microsoft.com/office/drawing/2014/main" id="{0B660CDC-0585-406B-A68E-712CF07C9A13}"/>
               </a:ext>
             </a:extLst>
           </p:cNvPr>
@@ -18021,7 +18021,7 @@
           <p:cNvPr id="12" name="">
             <a:extLst xmlns:a="http://schemas.openxmlformats.org/drawingml/2006/main">
               <a:ext uri="{FF2B5EF4-FFF2-40B4-BE49-F238E27FC236}">
-                <a16:creationId xmlns:a16="http://schemas.microsoft.com/office/drawing/2014/main" id="{D7EF082A-FD06-49BC-B95C-6B60DF0360DC}"/>
+                <a16:creationId xmlns:a16="http://schemas.microsoft.com/office/drawing/2014/main" id="{19103B88-8419-4D3D-A5BF-2044575AEBB5}"/>
               </a:ext>
             </a:extLst>
           </p:cNvPr>
@@ -18084,7 +18084,7 @@
           <p:cNvPr id="13" name="">
             <a:extLst xmlns:a="http://schemas.openxmlformats.org/drawingml/2006/main">
               <a:ext uri="{FF2B5EF4-FFF2-40B4-BE49-F238E27FC236}">
-                <a16:creationId xmlns:a16="http://schemas.microsoft.com/office/drawing/2014/main" id="{2E4F4BE0-4803-44CC-87AD-BFC8FE080BFF}"/>
+                <a16:creationId xmlns:a16="http://schemas.microsoft.com/office/drawing/2014/main" id="{C77F77F5-6AA1-4203-ADE2-7E28403F667D}"/>
               </a:ext>
             </a:extLst>
           </p:cNvPr>
@@ -18151,7 +18151,7 @@
           <p:cNvPr id="14" name="">
             <a:extLst xmlns:a="http://schemas.openxmlformats.org/drawingml/2006/main">
               <a:ext uri="{FF2B5EF4-FFF2-40B4-BE49-F238E27FC236}">
-                <a16:creationId xmlns:a16="http://schemas.microsoft.com/office/drawing/2014/main" id="{DF6559A3-C4E9-4040-AEF8-BA3E6E49510E}"/>
+                <a16:creationId xmlns:a16="http://schemas.microsoft.com/office/drawing/2014/main" id="{FE299326-ADD8-42FB-AC79-2B6038801C58}"/>
               </a:ext>
             </a:extLst>
           </p:cNvPr>
@@ -18185,7 +18185,7 @@
           <p:cNvPr id="15" name="">
             <a:extLst xmlns:a="http://schemas.openxmlformats.org/drawingml/2006/main">
               <a:ext uri="{FF2B5EF4-FFF2-40B4-BE49-F238E27FC236}">
-                <a16:creationId xmlns:a16="http://schemas.microsoft.com/office/drawing/2014/main" id="{059D16C8-EBC1-4408-A484-0259EC1ACCA2}"/>
+                <a16:creationId xmlns:a16="http://schemas.microsoft.com/office/drawing/2014/main" id="{EA5986AB-4612-43CF-BEAB-B1AB58068F12}"/>
               </a:ext>
             </a:extLst>
           </p:cNvPr>
@@ -18217,7 +18217,7 @@
           <p:cNvPr id="16" name="">
             <a:extLst xmlns:a="http://schemas.openxmlformats.org/drawingml/2006/main">
               <a:ext uri="{FF2B5EF4-FFF2-40B4-BE49-F238E27FC236}">
-                <a16:creationId xmlns:a16="http://schemas.microsoft.com/office/drawing/2014/main" id="{80DE65D0-2661-41F0-A24E-BDDDE706E685}"/>
+                <a16:creationId xmlns:a16="http://schemas.microsoft.com/office/drawing/2014/main" id="{A91796D7-8EF3-4F17-AA90-3A5316B464C1}"/>
               </a:ext>
             </a:extLst>
           </p:cNvPr>
@@ -18249,7 +18249,7 @@
           <p:cNvPr id="17" name="">
             <a:extLst xmlns:a="http://schemas.openxmlformats.org/drawingml/2006/main">
               <a:ext uri="{FF2B5EF4-FFF2-40B4-BE49-F238E27FC236}">
-                <a16:creationId xmlns:a16="http://schemas.microsoft.com/office/drawing/2014/main" id="{6ADB968B-A8B3-44FB-9A7C-6ACBCC6CF7EE}"/>
+                <a16:creationId xmlns:a16="http://schemas.microsoft.com/office/drawing/2014/main" id="{5670B550-C93A-4195-ADFF-BE734F84C32A}"/>
               </a:ext>
             </a:extLst>
           </p:cNvPr>
@@ -18281,7 +18281,7 @@
           <p:cNvPr id="18" name="">
             <a:extLst xmlns:a="http://schemas.openxmlformats.org/drawingml/2006/main">
               <a:ext uri="{FF2B5EF4-FFF2-40B4-BE49-F238E27FC236}">
-                <a16:creationId xmlns:a16="http://schemas.microsoft.com/office/drawing/2014/main" id="{57624637-A074-4A19-BB46-857B58322386}"/>
+                <a16:creationId xmlns:a16="http://schemas.microsoft.com/office/drawing/2014/main" id="{44D74520-9DD8-41DC-9C69-08F7C2C6B318}"/>
               </a:ext>
             </a:extLst>
           </p:cNvPr>
@@ -18344,7 +18344,7 @@
           <p:cNvPr id="19" name="">
             <a:extLst xmlns:a="http://schemas.openxmlformats.org/drawingml/2006/main">
               <a:ext uri="{FF2B5EF4-FFF2-40B4-BE49-F238E27FC236}">
-                <a16:creationId xmlns:a16="http://schemas.microsoft.com/office/drawing/2014/main" id="{3FABCE0B-63BD-4D82-9812-D7687799A626}"/>
+                <a16:creationId xmlns:a16="http://schemas.microsoft.com/office/drawing/2014/main" id="{FB20FF55-0864-4A2B-BE9A-C5E49577E4BF}"/>
               </a:ext>
             </a:extLst>
           </p:cNvPr>
@@ -18411,7 +18411,7 @@
           <p:cNvPr id="20" name="">
             <a:extLst xmlns:a="http://schemas.openxmlformats.org/drawingml/2006/main">
               <a:ext uri="{FF2B5EF4-FFF2-40B4-BE49-F238E27FC236}">
-                <a16:creationId xmlns:a16="http://schemas.microsoft.com/office/drawing/2014/main" id="{1F83C52C-0820-470E-976F-3DA1713B785E}"/>
+                <a16:creationId xmlns:a16="http://schemas.microsoft.com/office/drawing/2014/main" id="{33529C6D-8189-4A4E-A611-1402749A426E}"/>
               </a:ext>
             </a:extLst>
           </p:cNvPr>
@@ -18445,7 +18445,7 @@
           <p:cNvPr id="21" name="">
             <a:extLst xmlns:a="http://schemas.openxmlformats.org/drawingml/2006/main">
               <a:ext uri="{FF2B5EF4-FFF2-40B4-BE49-F238E27FC236}">
-                <a16:creationId xmlns:a16="http://schemas.microsoft.com/office/drawing/2014/main" id="{71811D9F-7FBA-4E56-ADCD-03CAAFB4132B}"/>
+                <a16:creationId xmlns:a16="http://schemas.microsoft.com/office/drawing/2014/main" id="{463697BC-1C48-4FF7-A563-339EFDC2E4DD}"/>
               </a:ext>
             </a:extLst>
           </p:cNvPr>
@@ -18477,7 +18477,7 @@
           <p:cNvPr id="22" name="">
             <a:extLst xmlns:a="http://schemas.openxmlformats.org/drawingml/2006/main">
               <a:ext uri="{FF2B5EF4-FFF2-40B4-BE49-F238E27FC236}">
-                <a16:creationId xmlns:a16="http://schemas.microsoft.com/office/drawing/2014/main" id="{F23D22ED-0D2B-4A70-A048-3CB454AEB1E5}"/>
+                <a16:creationId xmlns:a16="http://schemas.microsoft.com/office/drawing/2014/main" id="{EAF1E5F6-CB4E-4FD1-85BB-3D6CA12E864C}"/>
               </a:ext>
             </a:extLst>
           </p:cNvPr>
@@ -18540,7 +18540,7 @@
           <p:cNvPr id="23" name="">
             <a:extLst xmlns:a="http://schemas.openxmlformats.org/drawingml/2006/main">
               <a:ext uri="{FF2B5EF4-FFF2-40B4-BE49-F238E27FC236}">
-                <a16:creationId xmlns:a16="http://schemas.microsoft.com/office/drawing/2014/main" id="{5703300D-FB9C-48AA-806E-C3F243825827}"/>
+                <a16:creationId xmlns:a16="http://schemas.microsoft.com/office/drawing/2014/main" id="{DE8C5CAE-2E70-4F92-B1EF-0DC60733F13E}"/>
               </a:ext>
             </a:extLst>
           </p:cNvPr>
@@ -18572,7 +18572,7 @@
           <p:cNvPr id="24" name="">
             <a:extLst xmlns:a="http://schemas.openxmlformats.org/drawingml/2006/main">
               <a:ext uri="{FF2B5EF4-FFF2-40B4-BE49-F238E27FC236}">
-                <a16:creationId xmlns:a16="http://schemas.microsoft.com/office/drawing/2014/main" id="{9EB913B9-A6F4-44BE-AFCE-A2D846E8DD60}"/>
+                <a16:creationId xmlns:a16="http://schemas.microsoft.com/office/drawing/2014/main" id="{1C0FCF70-B94F-4E8A-A928-9DCC2F0E3A16}"/>
               </a:ext>
             </a:extLst>
           </p:cNvPr>
@@ -18635,7 +18635,7 @@
           <p:cNvPr id="25" name="">
             <a:extLst xmlns:a="http://schemas.openxmlformats.org/drawingml/2006/main">
               <a:ext uri="{FF2B5EF4-FFF2-40B4-BE49-F238E27FC236}">
-                <a16:creationId xmlns:a16="http://schemas.microsoft.com/office/drawing/2014/main" id="{F725F2E2-E3A8-4331-B632-5F3792ABAB5E}"/>
+                <a16:creationId xmlns:a16="http://schemas.microsoft.com/office/drawing/2014/main" id="{C2A2487B-28E4-4EC2-B760-CFCB010C52B2}"/>
               </a:ext>
             </a:extLst>
           </p:cNvPr>
@@ -18696,7 +18696,7 @@
     </p:spTree>
     <p:extLst>
       <p:ext uri="{BB962C8B-B14F-4D97-AF65-F5344CB8AC3E}">
-        <p14:creationId xmlns:p14="http://schemas.microsoft.com/office/powerpoint/2010/main" val="124041450"/>
+        <p14:creationId xmlns:p14="http://schemas.microsoft.com/office/powerpoint/2010/main" val="1595433733"/>
       </p:ext>
     </p:extLst>
   </p:cSld>
@@ -18727,7 +18727,7 @@
           <p:cNvPr id="1" name="">
             <a:extLst xmlns:a="http://schemas.openxmlformats.org/drawingml/2006/main">
               <a:ext uri="{FF2B5EF4-FFF2-40B4-BE49-F238E27FC236}">
-                <a16:creationId xmlns:a16="http://schemas.microsoft.com/office/drawing/2014/main" id="{93F0FF78-24DA-4C37-B6C2-EC6EC51CC94E}"/>
+                <a16:creationId xmlns:a16="http://schemas.microsoft.com/office/drawing/2014/main" id="{79861933-7FEB-432E-BC63-730E97C7D2A5}"/>
               </a:ext>
             </a:extLst>
           </p:cNvPr>
@@ -18790,7 +18790,7 @@
           <p:cNvPr id="2" name="">
             <a:extLst xmlns:a="http://schemas.openxmlformats.org/drawingml/2006/main">
               <a:ext uri="{FF2B5EF4-FFF2-40B4-BE49-F238E27FC236}">
-                <a16:creationId xmlns:a16="http://schemas.microsoft.com/office/drawing/2014/main" id="{08B76F4B-1534-40A0-A858-3FD910B84AD3}"/>
+                <a16:creationId xmlns:a16="http://schemas.microsoft.com/office/drawing/2014/main" id="{4D779104-B77E-4ABC-BACE-C723E2DF1710}"/>
               </a:ext>
             </a:extLst>
           </p:cNvPr>
@@ -18857,7 +18857,7 @@
           <p:cNvPr id="3" name="">
             <a:extLst xmlns:a="http://schemas.openxmlformats.org/drawingml/2006/main">
               <a:ext uri="{FF2B5EF4-FFF2-40B4-BE49-F238E27FC236}">
-                <a16:creationId xmlns:a16="http://schemas.microsoft.com/office/drawing/2014/main" id="{2D03D82B-D14F-4CEA-9518-DA3BF0AC6E00}"/>
+                <a16:creationId xmlns:a16="http://schemas.microsoft.com/office/drawing/2014/main" id="{52BDEBEB-DE6F-4887-AE6F-15DD5E05EBE3}"/>
               </a:ext>
             </a:extLst>
           </p:cNvPr>
@@ -18924,7 +18924,7 @@
           <p:cNvPr id="4" name="">
             <a:extLst xmlns:a="http://schemas.openxmlformats.org/drawingml/2006/main">
               <a:ext uri="{FF2B5EF4-FFF2-40B4-BE49-F238E27FC236}">
-                <a16:creationId xmlns:a16="http://schemas.microsoft.com/office/drawing/2014/main" id="{EC820CF7-875E-4D85-80A8-FEF648776C99}"/>
+                <a16:creationId xmlns:a16="http://schemas.microsoft.com/office/drawing/2014/main" id="{B7758E0C-836C-46B5-AF47-65C50A175198}"/>
               </a:ext>
             </a:extLst>
           </p:cNvPr>
@@ -18956,7 +18956,7 @@
           <p:cNvPr id="5" name="">
             <a:extLst xmlns:a="http://schemas.openxmlformats.org/drawingml/2006/main">
               <a:ext uri="{FF2B5EF4-FFF2-40B4-BE49-F238E27FC236}">
-                <a16:creationId xmlns:a16="http://schemas.microsoft.com/office/drawing/2014/main" id="{41075DEF-0383-440D-A10B-A7476D349BC9}"/>
+                <a16:creationId xmlns:a16="http://schemas.microsoft.com/office/drawing/2014/main" id="{F8B6F62D-C2D1-494B-A1E9-0F729C6C1E06}"/>
               </a:ext>
             </a:extLst>
           </p:cNvPr>
@@ -18988,7 +18988,7 @@
           <p:cNvPr id="6" name="">
             <a:extLst xmlns:a="http://schemas.openxmlformats.org/drawingml/2006/main">
               <a:ext uri="{FF2B5EF4-FFF2-40B4-BE49-F238E27FC236}">
-                <a16:creationId xmlns:a16="http://schemas.microsoft.com/office/drawing/2014/main" id="{7947BCC5-6C65-4B97-8DEF-EB92349BF045}"/>
+                <a16:creationId xmlns:a16="http://schemas.microsoft.com/office/drawing/2014/main" id="{10653A14-62E9-49F6-9C28-C79F95B9441C}"/>
               </a:ext>
             </a:extLst>
           </p:cNvPr>
@@ -19051,7 +19051,7 @@
           <p:cNvPr id="7" name="">
             <a:extLst xmlns:a="http://schemas.openxmlformats.org/drawingml/2006/main">
               <a:ext uri="{FF2B5EF4-FFF2-40B4-BE49-F238E27FC236}">
-                <a16:creationId xmlns:a16="http://schemas.microsoft.com/office/drawing/2014/main" id="{5399B584-7678-461C-9138-4197FD564BBC}"/>
+                <a16:creationId xmlns:a16="http://schemas.microsoft.com/office/drawing/2014/main" id="{F0574502-F761-4333-8430-2BB0BE4C4D5E}"/>
               </a:ext>
             </a:extLst>
           </p:cNvPr>
@@ -19118,7 +19118,7 @@
           <p:cNvPr id="8" name="">
             <a:extLst xmlns:a="http://schemas.openxmlformats.org/drawingml/2006/main">
               <a:ext uri="{FF2B5EF4-FFF2-40B4-BE49-F238E27FC236}">
-                <a16:creationId xmlns:a16="http://schemas.microsoft.com/office/drawing/2014/main" id="{590B00B2-41C8-463E-886D-35590FE5B291}"/>
+                <a16:creationId xmlns:a16="http://schemas.microsoft.com/office/drawing/2014/main" id="{72E5E16E-567B-4744-AF0A-11BF29368CC4}"/>
               </a:ext>
             </a:extLst>
           </p:cNvPr>
@@ -19150,7 +19150,7 @@
           <p:cNvPr id="9" name="">
             <a:extLst xmlns:a="http://schemas.openxmlformats.org/drawingml/2006/main">
               <a:ext uri="{FF2B5EF4-FFF2-40B4-BE49-F238E27FC236}">
-                <a16:creationId xmlns:a16="http://schemas.microsoft.com/office/drawing/2014/main" id="{3321C56E-11ED-4EC1-95F5-127BFEE52066}"/>
+                <a16:creationId xmlns:a16="http://schemas.microsoft.com/office/drawing/2014/main" id="{80A288B7-1F81-4D82-AAB6-36B14C782067}"/>
               </a:ext>
             </a:extLst>
           </p:cNvPr>
@@ -19182,7 +19182,7 @@
           <p:cNvPr id="10" name="">
             <a:extLst xmlns:a="http://schemas.openxmlformats.org/drawingml/2006/main">
               <a:ext uri="{FF2B5EF4-FFF2-40B4-BE49-F238E27FC236}">
-                <a16:creationId xmlns:a16="http://schemas.microsoft.com/office/drawing/2014/main" id="{09FCE60F-2A48-4000-B347-D7DBF2918C56}"/>
+                <a16:creationId xmlns:a16="http://schemas.microsoft.com/office/drawing/2014/main" id="{A3AFBCF8-47A0-43D4-A127-786448F95D0C}"/>
               </a:ext>
             </a:extLst>
           </p:cNvPr>
@@ -19245,7 +19245,7 @@
           <p:cNvPr id="11" name="">
             <a:extLst xmlns:a="http://schemas.openxmlformats.org/drawingml/2006/main">
               <a:ext uri="{FF2B5EF4-FFF2-40B4-BE49-F238E27FC236}">
-                <a16:creationId xmlns:a16="http://schemas.microsoft.com/office/drawing/2014/main" id="{8651C157-9CA2-41EE-B359-F8CAE511AF3D}"/>
+                <a16:creationId xmlns:a16="http://schemas.microsoft.com/office/drawing/2014/main" id="{90AC5E1D-ABBA-4DE5-98DA-2A9145122D90}"/>
               </a:ext>
             </a:extLst>
           </p:cNvPr>
@@ -19312,7 +19312,7 @@
           <p:cNvPr id="12" name="">
             <a:extLst xmlns:a="http://schemas.openxmlformats.org/drawingml/2006/main">
               <a:ext uri="{FF2B5EF4-FFF2-40B4-BE49-F238E27FC236}">
-                <a16:creationId xmlns:a16="http://schemas.microsoft.com/office/drawing/2014/main" id="{AB0A29D2-2524-4F44-A937-23C0064E0DED}"/>
+                <a16:creationId xmlns:a16="http://schemas.microsoft.com/office/drawing/2014/main" id="{76638BB7-596E-4AA5-8425-CBF801540B5C}"/>
               </a:ext>
             </a:extLst>
           </p:cNvPr>
@@ -19344,7 +19344,7 @@
           <p:cNvPr id="13" name="">
             <a:extLst xmlns:a="http://schemas.openxmlformats.org/drawingml/2006/main">
               <a:ext uri="{FF2B5EF4-FFF2-40B4-BE49-F238E27FC236}">
-                <a16:creationId xmlns:a16="http://schemas.microsoft.com/office/drawing/2014/main" id="{B6618D0A-6F55-469E-B96B-988506752356}"/>
+                <a16:creationId xmlns:a16="http://schemas.microsoft.com/office/drawing/2014/main" id="{A679F6C0-6F1E-435C-BF08-AEEF10A7A953}"/>
               </a:ext>
             </a:extLst>
           </p:cNvPr>
@@ -19376,7 +19376,7 @@
           <p:cNvPr id="14" name="">
             <a:extLst xmlns:a="http://schemas.openxmlformats.org/drawingml/2006/main">
               <a:ext uri="{FF2B5EF4-FFF2-40B4-BE49-F238E27FC236}">
-                <a16:creationId xmlns:a16="http://schemas.microsoft.com/office/drawing/2014/main" id="{13838AF5-63B0-4841-8576-320E216D8DA7}"/>
+                <a16:creationId xmlns:a16="http://schemas.microsoft.com/office/drawing/2014/main" id="{78853DB5-268D-43A9-BDEE-0B3ECC6C95F1}"/>
               </a:ext>
             </a:extLst>
           </p:cNvPr>
@@ -19439,7 +19439,7 @@
           <p:cNvPr id="15" name="">
             <a:extLst xmlns:a="http://schemas.openxmlformats.org/drawingml/2006/main">
               <a:ext uri="{FF2B5EF4-FFF2-40B4-BE49-F238E27FC236}">
-                <a16:creationId xmlns:a16="http://schemas.microsoft.com/office/drawing/2014/main" id="{68B8C6E8-FFA7-4170-8411-F3854ED0F654}"/>
+                <a16:creationId xmlns:a16="http://schemas.microsoft.com/office/drawing/2014/main" id="{2DD5CE14-48D8-4EEE-99DA-505F056EA296}"/>
               </a:ext>
             </a:extLst>
           </p:cNvPr>
@@ -19506,7 +19506,7 @@
           <p:cNvPr id="16" name="">
             <a:extLst xmlns:a="http://schemas.openxmlformats.org/drawingml/2006/main">
               <a:ext uri="{FF2B5EF4-FFF2-40B4-BE49-F238E27FC236}">
-                <a16:creationId xmlns:a16="http://schemas.microsoft.com/office/drawing/2014/main" id="{D89FAECF-596B-4F37-AF20-1D39B9BBDA49}"/>
+                <a16:creationId xmlns:a16="http://schemas.microsoft.com/office/drawing/2014/main" id="{CD86AEC2-97B3-4902-87DA-725117777EF8}"/>
               </a:ext>
             </a:extLst>
           </p:cNvPr>
@@ -19538,7 +19538,7 @@
           <p:cNvPr id="17" name="">
             <a:extLst xmlns:a="http://schemas.openxmlformats.org/drawingml/2006/main">
               <a:ext uri="{FF2B5EF4-FFF2-40B4-BE49-F238E27FC236}">
-                <a16:creationId xmlns:a16="http://schemas.microsoft.com/office/drawing/2014/main" id="{48F961AF-A327-4BB2-B1DC-55A0C4B16BF2}"/>
+                <a16:creationId xmlns:a16="http://schemas.microsoft.com/office/drawing/2014/main" id="{BA9896B8-FAF3-4C7A-8B45-D7D018384586}"/>
               </a:ext>
             </a:extLst>
           </p:cNvPr>
@@ -19570,7 +19570,7 @@
           <p:cNvPr id="18" name="">
             <a:extLst xmlns:a="http://schemas.openxmlformats.org/drawingml/2006/main">
               <a:ext uri="{FF2B5EF4-FFF2-40B4-BE49-F238E27FC236}">
-                <a16:creationId xmlns:a16="http://schemas.microsoft.com/office/drawing/2014/main" id="{B2379B50-FBFC-41A9-9B36-14F9E0CA06F2}"/>
+                <a16:creationId xmlns:a16="http://schemas.microsoft.com/office/drawing/2014/main" id="{CCACFE5E-679E-47CB-AD70-B4425C34EF54}"/>
               </a:ext>
             </a:extLst>
           </p:cNvPr>
@@ -19633,7 +19633,7 @@
           <p:cNvPr id="19" name="">
             <a:extLst xmlns:a="http://schemas.openxmlformats.org/drawingml/2006/main">
               <a:ext uri="{FF2B5EF4-FFF2-40B4-BE49-F238E27FC236}">
-                <a16:creationId xmlns:a16="http://schemas.microsoft.com/office/drawing/2014/main" id="{DD802F91-4AC7-40D7-B3AC-1E11CB6EFFE0}"/>
+                <a16:creationId xmlns:a16="http://schemas.microsoft.com/office/drawing/2014/main" id="{BF5DF09B-CE56-40F8-891D-4CCB7E91B4A1}"/>
               </a:ext>
             </a:extLst>
           </p:cNvPr>
@@ -19700,7 +19700,7 @@
           <p:cNvPr id="20" name="">
             <a:extLst xmlns:a="http://schemas.openxmlformats.org/drawingml/2006/main">
               <a:ext uri="{FF2B5EF4-FFF2-40B4-BE49-F238E27FC236}">
-                <a16:creationId xmlns:a16="http://schemas.microsoft.com/office/drawing/2014/main" id="{7F9C61EF-CC0F-4C08-BB82-0A72B4ADE960}"/>
+                <a16:creationId xmlns:a16="http://schemas.microsoft.com/office/drawing/2014/main" id="{70FE0D39-34F3-4F92-A305-DE99EF88309C}"/>
               </a:ext>
             </a:extLst>
           </p:cNvPr>
@@ -19732,7 +19732,7 @@
           <p:cNvPr id="21" name="">
             <a:extLst xmlns:a="http://schemas.openxmlformats.org/drawingml/2006/main">
               <a:ext uri="{FF2B5EF4-FFF2-40B4-BE49-F238E27FC236}">
-                <a16:creationId xmlns:a16="http://schemas.microsoft.com/office/drawing/2014/main" id="{61AA0AFC-6E77-4911-9B2C-BA74E741EC8C}"/>
+                <a16:creationId xmlns:a16="http://schemas.microsoft.com/office/drawing/2014/main" id="{60D4DFE4-5702-490A-B10D-C21BF4367639}"/>
               </a:ext>
             </a:extLst>
           </p:cNvPr>
@@ -19799,7 +19799,7 @@
           <p:cNvPr id="22" name="">
             <a:extLst xmlns:a="http://schemas.openxmlformats.org/drawingml/2006/main">
               <a:ext uri="{FF2B5EF4-FFF2-40B4-BE49-F238E27FC236}">
-                <a16:creationId xmlns:a16="http://schemas.microsoft.com/office/drawing/2014/main" id="{43F9012A-6C5D-49BE-BFB2-522231792C22}"/>
+                <a16:creationId xmlns:a16="http://schemas.microsoft.com/office/drawing/2014/main" id="{D17A5F4E-DE29-4343-A6D7-19CC43E94EC0}"/>
               </a:ext>
             </a:extLst>
           </p:cNvPr>
@@ -19831,7 +19831,7 @@
           <p:cNvPr id="23" name="">
             <a:extLst xmlns:a="http://schemas.openxmlformats.org/drawingml/2006/main">
               <a:ext uri="{FF2B5EF4-FFF2-40B4-BE49-F238E27FC236}">
-                <a16:creationId xmlns:a16="http://schemas.microsoft.com/office/drawing/2014/main" id="{3B6D71DB-D400-40C0-87F0-C84DAB5307C9}"/>
+                <a16:creationId xmlns:a16="http://schemas.microsoft.com/office/drawing/2014/main" id="{18832697-42B6-4BEB-B25C-609EFA2084B0}"/>
               </a:ext>
             </a:extLst>
           </p:cNvPr>
@@ -19894,7 +19894,7 @@
           <p:cNvPr id="24" name="">
             <a:extLst xmlns:a="http://schemas.openxmlformats.org/drawingml/2006/main">
               <a:ext uri="{FF2B5EF4-FFF2-40B4-BE49-F238E27FC236}">
-                <a16:creationId xmlns:a16="http://schemas.microsoft.com/office/drawing/2014/main" id="{58DAF718-1841-4142-8AD7-B07A4AC19C62}"/>
+                <a16:creationId xmlns:a16="http://schemas.microsoft.com/office/drawing/2014/main" id="{4FE4BF6C-61D7-40BF-8BB4-F3708BBD41D4}"/>
               </a:ext>
             </a:extLst>
           </p:cNvPr>
@@ -19955,7 +19955,7 @@
     </p:spTree>
     <p:extLst>
       <p:ext uri="{BB962C8B-B14F-4D97-AF65-F5344CB8AC3E}">
-        <p14:creationId xmlns:p14="http://schemas.microsoft.com/office/powerpoint/2010/main" val="1216330727"/>
+        <p14:creationId xmlns:p14="http://schemas.microsoft.com/office/powerpoint/2010/main" val="1395982801"/>
       </p:ext>
     </p:extLst>
   </p:cSld>
